--- a/why-llms-love-tailwind-conf.pptx
+++ b/why-llms-love-tailwind-conf.pptx
@@ -5,7 +5,7 @@
     <p:sldMasterId id="2147483648" r:id="rId1"/>
   </p:sldMasterIdLst>
   <p:notesMasterIdLst>
-    <p:notesMasterId r:id="rId31"/>
+    <p:notesMasterId r:id="rId32"/>
   </p:notesMasterIdLst>
   <p:sldIdLst>
     <p:sldId id="256" r:id="rId2"/>
@@ -36,7 +36,8 @@
     <p:sldId id="281" r:id="rId27"/>
     <p:sldId id="282" r:id="rId28"/>
     <p:sldId id="283" r:id="rId29"/>
-    <p:sldId id="313" r:id="rId30"/>
+    <p:sldId id="314" r:id="rId30"/>
+    <p:sldId id="313" r:id="rId31"/>
   </p:sldIdLst>
   <p:sldSz cx="12192000" cy="6858000"/>
   <p:notesSz cx="6858000" cy="12192000"/>
@@ -2505,7 +2506,13 @@
   <p:cSld>
     <p:spTree>
       <p:nvGrpSpPr>
-        <p:cNvPr id="1" name=""/>
+        <p:cNvPr id="1" name="">
+          <a:extLst>
+            <a:ext uri="{FF2B5EF4-FFF2-40B4-BE49-F238E27FC236}">
+              <a16:creationId xmlns:a16="http://schemas.microsoft.com/office/drawing/2014/main" id="{D11FA9EC-F1C4-8475-4C34-982AA7BE60A7}"/>
+            </a:ext>
+          </a:extLst>
+        </p:cNvPr>
         <p:cNvGrpSpPr/>
         <p:nvPr/>
       </p:nvGrpSpPr>
@@ -2519,7 +2526,13 @@
       </p:grpSpPr>
       <p:sp>
         <p:nvSpPr>
-          <p:cNvPr id="2" name="Slide Image Placeholder 1"/>
+          <p:cNvPr id="2" name="Slide Image Placeholder 1">
+            <a:extLst>
+              <a:ext uri="{FF2B5EF4-FFF2-40B4-BE49-F238E27FC236}">
+                <a16:creationId xmlns:a16="http://schemas.microsoft.com/office/drawing/2014/main" id="{9F28C641-A123-4973-51FA-0665B2813653}"/>
+              </a:ext>
+            </a:extLst>
+          </p:cNvPr>
           <p:cNvSpPr>
             <a:spLocks noGrp="1" noRot="1" noChangeAspect="1"/>
           </p:cNvSpPr>
@@ -2531,7 +2544,13 @@
       </p:sp>
       <p:sp>
         <p:nvSpPr>
-          <p:cNvPr id="3" name="Notes Placeholder 2"/>
+          <p:cNvPr id="3" name="Notes Placeholder 2">
+            <a:extLst>
+              <a:ext uri="{FF2B5EF4-FFF2-40B4-BE49-F238E27FC236}">
+                <a16:creationId xmlns:a16="http://schemas.microsoft.com/office/drawing/2014/main" id="{AB824122-D8E6-13A2-EF59-883AC6891774}"/>
+              </a:ext>
+            </a:extLst>
+          </p:cNvPr>
           <p:cNvSpPr>
             <a:spLocks noGrp="1"/>
           </p:cNvSpPr>
@@ -2546,71 +2565,35 @@
           <a:p>
             <a:r>
               <a:rPr lang="en-US" dirty="0"/>
-              <a:t>Thank you.</a:t>
-            </a:r>
-          </a:p>
-          <a:p>
-            <a:r>
+              <a:t>Knowledge atrophy, or cognitive atrophy, is the gradual decline of memory, critical thinking, and problem-solving skills caused by overreliance on AI tools like LLMs for mental work. </a:t>
+            </a:r>
+            <a:br>
               <a:rPr lang="en-US" dirty="0"/>
-              <a:t>The demo repo is github.com slash </a:t>
-            </a:r>
-            <a:r>
-              <a:rPr lang="en-US" dirty="0" err="1"/>
-              <a:t>devlinduldulao</a:t>
-            </a:r>
-            <a:r>
+            </a:br>
+            <a:br>
               <a:rPr lang="en-US" dirty="0"/>
-              <a:t> slash </a:t>
-            </a:r>
-            <a:r>
-              <a:rPr lang="en-US" dirty="0" err="1"/>
-              <a:t>llm</a:t>
-            </a:r>
+            </a:br>
             <a:r>
               <a:rPr lang="en-US" dirty="0"/>
-              <a:t>-loves-tailwind-and-</a:t>
-            </a:r>
-            <a:r>
-              <a:rPr lang="en-US" dirty="0" err="1"/>
-              <a:t>js</a:t>
-            </a:r>
-            <a:r>
-              <a:rPr lang="en-US" dirty="0"/>
-              <a:t>. You can scan the QR code. You can find me at </a:t>
-            </a:r>
-            <a:r>
-              <a:rPr lang="en-US" dirty="0" err="1"/>
-              <a:t>devlinduldulao</a:t>
-            </a:r>
-            <a:r>
-              <a:rPr lang="en-US" dirty="0"/>
-              <a:t> on socials, and on LinkedIn at linkedin.com slash in slash </a:t>
-            </a:r>
-            <a:r>
-              <a:rPr lang="en-US" dirty="0" err="1"/>
-              <a:t>devlinduldulao</a:t>
-            </a:r>
-            <a:r>
-              <a:rPr lang="en-US" dirty="0"/>
-              <a:t>.</a:t>
-            </a:r>
-          </a:p>
-          <a:p>
-            <a:r>
-              <a:rPr lang="en-US" dirty="0"/>
-              <a:t>I would love to hear your Tailwind hot takes. Come find me after. Thank you.</a:t>
-            </a:r>
-          </a:p>
-        </p:txBody>
-      </p:sp>
-      <p:sp>
-        <p:nvSpPr>
-          <p:cNvPr id="4" name="Slide Number Placeholder 3"/>
+              <a:t>Things might change because models improves every after 6 months, but keep attending to conferences and learn things because that’s the only way we can steer AI in developing solutions and save money as a result from doing fewer mistakes. </a:t>
+            </a:r>
+          </a:p>
+        </p:txBody>
+      </p:sp>
+      <p:sp>
+        <p:nvSpPr>
+          <p:cNvPr id="4" name="Slide Number Placeholder 3">
+            <a:extLst>
+              <a:ext uri="{FF2B5EF4-FFF2-40B4-BE49-F238E27FC236}">
+                <a16:creationId xmlns:a16="http://schemas.microsoft.com/office/drawing/2014/main" id="{876E6526-0A27-7059-0E06-088E9428FC92}"/>
+              </a:ext>
+            </a:extLst>
+          </p:cNvPr>
           <p:cNvSpPr>
             <a:spLocks noGrp="1"/>
           </p:cNvSpPr>
           <p:nvPr>
-            <p:ph type="sldNum" sz="quarter" idx="5"/>
+            <p:ph type="sldNum" sz="quarter" idx="10"/>
           </p:nvPr>
         </p:nvSpPr>
         <p:spPr/>
@@ -2618,6 +2601,10 @@
           <a:bodyPr/>
           <a:lstStyle/>
           <a:p>
+            <a:fld id="{F7021451-1387-4CA6-816F-3879F97B5CBC}" type="slidenum">
+              <a:rPr lang="en-US"/>
+              <a:t>29</a:t>
+            </a:fld>
             <a:endParaRPr lang="en-US"/>
           </a:p>
         </p:txBody>
@@ -2625,7 +2612,7 @@
     </p:spTree>
     <p:extLst>
       <p:ext uri="{BB962C8B-B14F-4D97-AF65-F5344CB8AC3E}">
-        <p14:creationId xmlns:p14="http://schemas.microsoft.com/office/powerpoint/2010/main" val="1006813423"/>
+        <p14:creationId xmlns:p14="http://schemas.microsoft.com/office/powerpoint/2010/main" val="3486230722"/>
       </p:ext>
     </p:extLst>
   </p:cSld>
@@ -2725,6 +2712,141 @@
     <p:extLst>
       <p:ext uri="{BB962C8B-B14F-4D97-AF65-F5344CB8AC3E}">
         <p14:creationId xmlns:p14="http://schemas.microsoft.com/office/powerpoint/2010/main" val="1024086991"/>
+      </p:ext>
+    </p:extLst>
+  </p:cSld>
+  <p:clrMapOvr>
+    <a:masterClrMapping/>
+  </p:clrMapOvr>
+</p:notes>
+</file>
+
+<file path=ppt/notesSlides/notesSlide30.xml><?xml version="1.0" encoding="utf-8"?>
+<p:notes xmlns:a="http://schemas.openxmlformats.org/drawingml/2006/main" xmlns:r="http://schemas.openxmlformats.org/officeDocument/2006/relationships" xmlns:p="http://schemas.openxmlformats.org/presentationml/2006/main">
+  <p:cSld>
+    <p:spTree>
+      <p:nvGrpSpPr>
+        <p:cNvPr id="1" name=""/>
+        <p:cNvGrpSpPr/>
+        <p:nvPr/>
+      </p:nvGrpSpPr>
+      <p:grpSpPr>
+        <a:xfrm>
+          <a:off x="0" y="0"/>
+          <a:ext cx="0" cy="0"/>
+          <a:chOff x="0" y="0"/>
+          <a:chExt cx="0" cy="0"/>
+        </a:xfrm>
+      </p:grpSpPr>
+      <p:sp>
+        <p:nvSpPr>
+          <p:cNvPr id="2" name="Slide Image Placeholder 1"/>
+          <p:cNvSpPr>
+            <a:spLocks noGrp="1" noRot="1" noChangeAspect="1"/>
+          </p:cNvSpPr>
+          <p:nvPr>
+            <p:ph type="sldImg"/>
+          </p:nvPr>
+        </p:nvSpPr>
+        <p:spPr/>
+      </p:sp>
+      <p:sp>
+        <p:nvSpPr>
+          <p:cNvPr id="3" name="Notes Placeholder 2"/>
+          <p:cNvSpPr>
+            <a:spLocks noGrp="1"/>
+          </p:cNvSpPr>
+          <p:nvPr>
+            <p:ph type="body" idx="1"/>
+          </p:nvPr>
+        </p:nvSpPr>
+        <p:spPr/>
+        <p:txBody>
+          <a:bodyPr/>
+          <a:lstStyle/>
+          <a:p>
+            <a:r>
+              <a:rPr lang="en-US" dirty="0"/>
+              <a:t>Thank you.</a:t>
+            </a:r>
+          </a:p>
+          <a:p>
+            <a:r>
+              <a:rPr lang="en-US" dirty="0"/>
+              <a:t>The demo repo is github.com slash </a:t>
+            </a:r>
+            <a:r>
+              <a:rPr lang="en-US" dirty="0" err="1"/>
+              <a:t>devlinduldulao</a:t>
+            </a:r>
+            <a:r>
+              <a:rPr lang="en-US" dirty="0"/>
+              <a:t> slash </a:t>
+            </a:r>
+            <a:r>
+              <a:rPr lang="en-US" dirty="0" err="1"/>
+              <a:t>llm</a:t>
+            </a:r>
+            <a:r>
+              <a:rPr lang="en-US" dirty="0"/>
+              <a:t>-loves-tailwind-and-</a:t>
+            </a:r>
+            <a:r>
+              <a:rPr lang="en-US" dirty="0" err="1"/>
+              <a:t>js</a:t>
+            </a:r>
+            <a:r>
+              <a:rPr lang="en-US" dirty="0"/>
+              <a:t>. You can scan the QR code. You can find me at </a:t>
+            </a:r>
+            <a:r>
+              <a:rPr lang="en-US" dirty="0" err="1"/>
+              <a:t>devlinduldulao</a:t>
+            </a:r>
+            <a:r>
+              <a:rPr lang="en-US" dirty="0"/>
+              <a:t> on socials, and on LinkedIn at linkedin.com slash in slash </a:t>
+            </a:r>
+            <a:r>
+              <a:rPr lang="en-US" dirty="0" err="1"/>
+              <a:t>devlinduldulao</a:t>
+            </a:r>
+            <a:r>
+              <a:rPr lang="en-US" dirty="0"/>
+              <a:t>.</a:t>
+            </a:r>
+          </a:p>
+          <a:p>
+            <a:r>
+              <a:rPr lang="en-US" dirty="0"/>
+              <a:t>I would love to hear your Tailwind hot takes. Come find me after. Thank you.</a:t>
+            </a:r>
+          </a:p>
+        </p:txBody>
+      </p:sp>
+      <p:sp>
+        <p:nvSpPr>
+          <p:cNvPr id="4" name="Slide Number Placeholder 3"/>
+          <p:cNvSpPr>
+            <a:spLocks noGrp="1"/>
+          </p:cNvSpPr>
+          <p:nvPr>
+            <p:ph type="sldNum" sz="quarter" idx="5"/>
+          </p:nvPr>
+        </p:nvSpPr>
+        <p:spPr/>
+        <p:txBody>
+          <a:bodyPr/>
+          <a:lstStyle/>
+          <a:p>
+            <a:endParaRPr lang="en-US"/>
+          </a:p>
+        </p:txBody>
+      </p:sp>
+    </p:spTree>
+    <p:extLst>
+      <p:ext uri="{BB962C8B-B14F-4D97-AF65-F5344CB8AC3E}">
+        <p14:creationId xmlns:p14="http://schemas.microsoft.com/office/powerpoint/2010/main" val="1006813423"/>
       </p:ext>
     </p:extLst>
   </p:cSld>
@@ -17716,6 +17838,343 @@
 </file>
 
 <file path=ppt/slides/slide29.xml><?xml version="1.0" encoding="utf-8"?>
+<p:sld xmlns:a="http://schemas.openxmlformats.org/drawingml/2006/main" xmlns:r="http://schemas.openxmlformats.org/officeDocument/2006/relationships" xmlns:p="http://schemas.openxmlformats.org/presentationml/2006/main">
+  <p:cSld>
+    <p:bg>
+      <p:bgPr>
+        <a:solidFill>
+          <a:srgbClr val="222121"/>
+        </a:solidFill>
+        <a:effectLst/>
+      </p:bgPr>
+    </p:bg>
+    <p:spTree>
+      <p:nvGrpSpPr>
+        <p:cNvPr id="1" name="">
+          <a:extLst>
+            <a:ext uri="{FF2B5EF4-FFF2-40B4-BE49-F238E27FC236}">
+              <a16:creationId xmlns:a16="http://schemas.microsoft.com/office/drawing/2014/main" id="{91F1A212-8E57-6816-E45C-C202E54FFB15}"/>
+            </a:ext>
+          </a:extLst>
+        </p:cNvPr>
+        <p:cNvGrpSpPr/>
+        <p:nvPr/>
+      </p:nvGrpSpPr>
+      <p:grpSpPr>
+        <a:xfrm>
+          <a:off x="0" y="0"/>
+          <a:ext cx="0" cy="0"/>
+          <a:chOff x="0" y="0"/>
+          <a:chExt cx="0" cy="0"/>
+        </a:xfrm>
+      </p:grpSpPr>
+      <p:sp>
+        <p:nvSpPr>
+          <p:cNvPr id="6" name="TextBox 5">
+            <a:extLst>
+              <a:ext uri="{FF2B5EF4-FFF2-40B4-BE49-F238E27FC236}">
+                <a16:creationId xmlns:a16="http://schemas.microsoft.com/office/drawing/2014/main" id="{FDFC6324-4D3C-F263-D3FB-B7304428462B}"/>
+              </a:ext>
+            </a:extLst>
+          </p:cNvPr>
+          <p:cNvSpPr txBox="1"/>
+          <p:nvPr/>
+        </p:nvSpPr>
+        <p:spPr>
+          <a:xfrm>
+            <a:off x="1119674" y="2736502"/>
+            <a:ext cx="10030408" cy="1384995"/>
+          </a:xfrm>
+          <a:prstGeom prst="rect">
+            <a:avLst/>
+          </a:prstGeom>
+          <a:noFill/>
+        </p:spPr>
+        <p:txBody>
+          <a:bodyPr wrap="square">
+            <a:spAutoFit/>
+          </a:bodyPr>
+          <a:lstStyle/>
+          <a:p>
+            <a:r>
+              <a:rPr lang="en-GB" sz="2800" dirty="0">
+                <a:solidFill>
+                  <a:schemeClr val="accent4">
+                    <a:lumMod val="20000"/>
+                    <a:lumOff val="80000"/>
+                  </a:schemeClr>
+                </a:solidFill>
+              </a:rPr>
+              <a:t>Knowledge atrophy </a:t>
+            </a:r>
+            <a:r>
+              <a:rPr lang="en-GB" sz="2800" dirty="0">
+                <a:solidFill>
+                  <a:schemeClr val="accent4"/>
+                </a:solidFill>
+              </a:rPr>
+              <a:t>is the gradual weakening of human thinking and problem-solving skills through overreliance on AI to do our mental work.</a:t>
+            </a:r>
+          </a:p>
+        </p:txBody>
+      </p:sp>
+    </p:spTree>
+    <p:extLst>
+      <p:ext uri="{BB962C8B-B14F-4D97-AF65-F5344CB8AC3E}">
+        <p14:creationId xmlns:p14="http://schemas.microsoft.com/office/powerpoint/2010/main" val="1771380820"/>
+      </p:ext>
+    </p:extLst>
+  </p:cSld>
+  <p:clrMapOvr>
+    <a:masterClrMapping/>
+  </p:clrMapOvr>
+</p:sld>
+</file>
+
+<file path=ppt/slides/slide3.xml><?xml version="1.0" encoding="utf-8"?>
+<p:sld xmlns:a="http://schemas.openxmlformats.org/drawingml/2006/main" xmlns:r="http://schemas.openxmlformats.org/officeDocument/2006/relationships" xmlns:p="http://schemas.openxmlformats.org/presentationml/2006/main">
+  <p:cSld name="Slide 3">
+    <p:bg>
+      <p:bgPr>
+        <a:solidFill>
+          <a:srgbClr val="222121"/>
+        </a:solidFill>
+        <a:effectLst/>
+      </p:bgPr>
+    </p:bg>
+    <p:spTree>
+      <p:nvGrpSpPr>
+        <p:cNvPr id="1" name=""/>
+        <p:cNvGrpSpPr/>
+        <p:nvPr/>
+      </p:nvGrpSpPr>
+      <p:grpSpPr>
+        <a:xfrm>
+          <a:off x="0" y="0"/>
+          <a:ext cx="0" cy="0"/>
+          <a:chOff x="0" y="0"/>
+          <a:chExt cx="0" cy="0"/>
+        </a:xfrm>
+      </p:grpSpPr>
+      <p:sp>
+        <p:nvSpPr>
+          <p:cNvPr id="2" name="Text 0"/>
+          <p:cNvSpPr/>
+          <p:nvPr/>
+        </p:nvSpPr>
+        <p:spPr>
+          <a:xfrm>
+            <a:off x="594360" y="1874520"/>
+            <a:ext cx="11002975" cy="2194560"/>
+          </a:xfrm>
+          <a:prstGeom prst="rect">
+            <a:avLst/>
+          </a:prstGeom>
+          <a:noFill/>
+          <a:ln/>
+        </p:spPr>
+        <p:txBody>
+          <a:bodyPr wrap="square" lIns="0" tIns="0" rIns="0" bIns="0" rtlCol="0" anchor="t"/>
+          <a:lstStyle/>
+          <a:p>
+            <a:pPr marL="0" indent="0" algn="l">
+              <a:lnSpc>
+                <a:spcPct val="102000"/>
+              </a:lnSpc>
+              <a:buNone/>
+            </a:pPr>
+            <a:r>
+              <a:rPr lang="en-US" sz="5200" b="1" dirty="0">
+                <a:solidFill>
+                  <a:srgbClr val="FFFFFF"/>
+                </a:solidFill>
+                <a:latin typeface="Arial" pitchFamily="34" charset="0"/>
+                <a:ea typeface="Arial" pitchFamily="34" charset="-122"/>
+                <a:cs typeface="Arial" pitchFamily="34" charset="-120"/>
+              </a:rPr>
+              <a:t>Why LLMs &amp; JS frameworks
+</a:t>
+            </a:r>
+            <a:r>
+              <a:rPr lang="en-US" sz="5200" b="1" dirty="0">
+                <a:solidFill>
+                  <a:srgbClr val="75DFBC"/>
+                </a:solidFill>
+                <a:latin typeface="Arial" pitchFamily="34" charset="0"/>
+                <a:ea typeface="Arial" pitchFamily="34" charset="-122"/>
+                <a:cs typeface="Arial" pitchFamily="34" charset="-120"/>
+              </a:rPr>
+              <a:t>love Tailwind CSS</a:t>
+            </a:r>
+            <a:endParaRPr lang="en-US" sz="5200" dirty="0"/>
+          </a:p>
+        </p:txBody>
+      </p:sp>
+      <p:sp>
+        <p:nvSpPr>
+          <p:cNvPr id="3" name="Text 1"/>
+          <p:cNvSpPr/>
+          <p:nvPr/>
+        </p:nvSpPr>
+        <p:spPr>
+          <a:xfrm>
+            <a:off x="594360" y="3977640"/>
+            <a:ext cx="11002975" cy="548640"/>
+          </a:xfrm>
+          <a:prstGeom prst="rect">
+            <a:avLst/>
+          </a:prstGeom>
+          <a:noFill/>
+          <a:ln/>
+        </p:spPr>
+        <p:txBody>
+          <a:bodyPr wrap="square" lIns="0" tIns="0" rIns="0" bIns="0" rtlCol="0" anchor="ctr"/>
+          <a:lstStyle/>
+          <a:p>
+            <a:pPr marL="0" indent="0" algn="l">
+              <a:buNone/>
+            </a:pPr>
+            <a:r>
+              <a:rPr lang="en-US" sz="2800" i="1" dirty="0">
+                <a:solidFill>
+                  <a:srgbClr val="A6A6A6"/>
+                </a:solidFill>
+                <a:latin typeface="Arial" pitchFamily="34" charset="0"/>
+                <a:ea typeface="Arial" pitchFamily="34" charset="-122"/>
+                <a:cs typeface="Arial" pitchFamily="34" charset="-120"/>
+              </a:rPr>
+              <a:t>…and why you should too</a:t>
+            </a:r>
+            <a:endParaRPr lang="en-US" sz="2800" dirty="0"/>
+          </a:p>
+        </p:txBody>
+      </p:sp>
+      <p:sp>
+        <p:nvSpPr>
+          <p:cNvPr id="4" name="Text 2"/>
+          <p:cNvSpPr/>
+          <p:nvPr/>
+        </p:nvSpPr>
+        <p:spPr>
+          <a:xfrm>
+            <a:off x="594360" y="4892040"/>
+            <a:ext cx="11002975" cy="457200"/>
+          </a:xfrm>
+          <a:prstGeom prst="rect">
+            <a:avLst/>
+          </a:prstGeom>
+          <a:noFill/>
+          <a:ln/>
+        </p:spPr>
+        <p:txBody>
+          <a:bodyPr wrap="square" lIns="0" tIns="0" rIns="0" bIns="0" rtlCol="0" anchor="ctr"/>
+          <a:lstStyle/>
+          <a:p>
+            <a:pPr marL="0" indent="0" algn="l">
+              <a:buNone/>
+            </a:pPr>
+            <a:r>
+              <a:rPr lang="en-US" sz="1600" b="1" dirty="0">
+                <a:solidFill>
+                  <a:srgbClr val="FFFFFF"/>
+                </a:solidFill>
+                <a:latin typeface="Arial" pitchFamily="34" charset="0"/>
+                <a:ea typeface="Arial" pitchFamily="34" charset="-122"/>
+                <a:cs typeface="Arial" pitchFamily="34" charset="-120"/>
+              </a:rPr>
+              <a:t>Devlin Duldulao</a:t>
+            </a:r>
+            <a:endParaRPr lang="en-US" sz="1600" dirty="0"/>
+          </a:p>
+        </p:txBody>
+      </p:sp>
+      <p:sp>
+        <p:nvSpPr>
+          <p:cNvPr id="15" name="Text 13"/>
+          <p:cNvSpPr/>
+          <p:nvPr/>
+        </p:nvSpPr>
+        <p:spPr>
+          <a:xfrm>
+            <a:off x="594360" y="6419088"/>
+            <a:ext cx="8229600" cy="274320"/>
+          </a:xfrm>
+          <a:prstGeom prst="rect">
+            <a:avLst/>
+          </a:prstGeom>
+          <a:noFill/>
+          <a:ln/>
+        </p:spPr>
+        <p:txBody>
+          <a:bodyPr wrap="square" lIns="0" tIns="0" rIns="0" bIns="0" rtlCol="0" anchor="ctr"/>
+          <a:lstStyle/>
+          <a:p>
+            <a:pPr marL="0" indent="0" algn="l">
+              <a:buNone/>
+            </a:pPr>
+            <a:r>
+              <a:rPr lang="en-US" sz="900" dirty="0">
+                <a:solidFill>
+                  <a:srgbClr val="6E6E6E"/>
+                </a:solidFill>
+                <a:latin typeface="Arial" pitchFamily="34" charset="0"/>
+                <a:ea typeface="Arial" pitchFamily="34" charset="-122"/>
+                <a:cs typeface="Arial" pitchFamily="34" charset="-120"/>
+              </a:rPr>
+              <a:t>Why LLMs &amp; JS frameworks love Tailwind CSS</a:t>
+            </a:r>
+            <a:endParaRPr lang="en-US" sz="900" dirty="0"/>
+          </a:p>
+        </p:txBody>
+      </p:sp>
+      <p:sp>
+        <p:nvSpPr>
+          <p:cNvPr id="16" name="Text 14"/>
+          <p:cNvSpPr/>
+          <p:nvPr/>
+        </p:nvSpPr>
+        <p:spPr>
+          <a:xfrm>
+            <a:off x="10134295" y="6419088"/>
+            <a:ext cx="1463040" cy="274320"/>
+          </a:xfrm>
+          <a:prstGeom prst="rect">
+            <a:avLst/>
+          </a:prstGeom>
+          <a:noFill/>
+          <a:ln/>
+        </p:spPr>
+        <p:txBody>
+          <a:bodyPr wrap="square" lIns="0" tIns="0" rIns="0" bIns="0" rtlCol="0" anchor="ctr"/>
+          <a:lstStyle/>
+          <a:p>
+            <a:pPr marL="0" indent="0" algn="r">
+              <a:buNone/>
+            </a:pPr>
+            <a:r>
+              <a:rPr lang="en-US" sz="900" dirty="0">
+                <a:solidFill>
+                  <a:srgbClr val="6E6E6E"/>
+                </a:solidFill>
+                <a:latin typeface="Arial" pitchFamily="34" charset="0"/>
+                <a:ea typeface="Arial" pitchFamily="34" charset="-122"/>
+                <a:cs typeface="Arial" pitchFamily="34" charset="-120"/>
+              </a:rPr>
+              <a:t>3 / 29</a:t>
+            </a:r>
+            <a:endParaRPr lang="en-US" sz="900" dirty="0"/>
+          </a:p>
+        </p:txBody>
+      </p:sp>
+    </p:spTree>
+  </p:cSld>
+  <p:clrMapOvr>
+    <a:masterClrMapping/>
+  </p:clrMapOvr>
+</p:sld>
+</file>
+
+<file path=ppt/slides/slide30.xml><?xml version="1.0" encoding="utf-8"?>
 <p:sld xmlns:a="http://schemas.openxmlformats.org/drawingml/2006/main" xmlns:r="http://schemas.openxmlformats.org/officeDocument/2006/relationships" xmlns:p="http://schemas.openxmlformats.org/presentationml/2006/main">
   <p:cSld>
     <p:spTree>
@@ -18175,249 +18634,6 @@
       </p:par>
     </p:tnLst>
   </p:timing>
-</p:sld>
-</file>
-
-<file path=ppt/slides/slide3.xml><?xml version="1.0" encoding="utf-8"?>
-<p:sld xmlns:a="http://schemas.openxmlformats.org/drawingml/2006/main" xmlns:r="http://schemas.openxmlformats.org/officeDocument/2006/relationships" xmlns:p="http://schemas.openxmlformats.org/presentationml/2006/main">
-  <p:cSld name="Slide 3">
-    <p:bg>
-      <p:bgPr>
-        <a:solidFill>
-          <a:srgbClr val="222121"/>
-        </a:solidFill>
-        <a:effectLst/>
-      </p:bgPr>
-    </p:bg>
-    <p:spTree>
-      <p:nvGrpSpPr>
-        <p:cNvPr id="1" name=""/>
-        <p:cNvGrpSpPr/>
-        <p:nvPr/>
-      </p:nvGrpSpPr>
-      <p:grpSpPr>
-        <a:xfrm>
-          <a:off x="0" y="0"/>
-          <a:ext cx="0" cy="0"/>
-          <a:chOff x="0" y="0"/>
-          <a:chExt cx="0" cy="0"/>
-        </a:xfrm>
-      </p:grpSpPr>
-      <p:sp>
-        <p:nvSpPr>
-          <p:cNvPr id="2" name="Text 0"/>
-          <p:cNvSpPr/>
-          <p:nvPr/>
-        </p:nvSpPr>
-        <p:spPr>
-          <a:xfrm>
-            <a:off x="594360" y="1874520"/>
-            <a:ext cx="11002975" cy="2194560"/>
-          </a:xfrm>
-          <a:prstGeom prst="rect">
-            <a:avLst/>
-          </a:prstGeom>
-          <a:noFill/>
-          <a:ln/>
-        </p:spPr>
-        <p:txBody>
-          <a:bodyPr wrap="square" lIns="0" tIns="0" rIns="0" bIns="0" rtlCol="0" anchor="t"/>
-          <a:lstStyle/>
-          <a:p>
-            <a:pPr marL="0" indent="0" algn="l">
-              <a:lnSpc>
-                <a:spcPct val="102000"/>
-              </a:lnSpc>
-              <a:buNone/>
-            </a:pPr>
-            <a:r>
-              <a:rPr lang="en-US" sz="5200" b="1" dirty="0">
-                <a:solidFill>
-                  <a:srgbClr val="FFFFFF"/>
-                </a:solidFill>
-                <a:latin typeface="Arial" pitchFamily="34" charset="0"/>
-                <a:ea typeface="Arial" pitchFamily="34" charset="-122"/>
-                <a:cs typeface="Arial" pitchFamily="34" charset="-120"/>
-              </a:rPr>
-              <a:t>Why LLMs &amp; JS frameworks
-</a:t>
-            </a:r>
-            <a:r>
-              <a:rPr lang="en-US" sz="5200" b="1" dirty="0">
-                <a:solidFill>
-                  <a:srgbClr val="75DFBC"/>
-                </a:solidFill>
-                <a:latin typeface="Arial" pitchFamily="34" charset="0"/>
-                <a:ea typeface="Arial" pitchFamily="34" charset="-122"/>
-                <a:cs typeface="Arial" pitchFamily="34" charset="-120"/>
-              </a:rPr>
-              <a:t>love Tailwind CSS</a:t>
-            </a:r>
-            <a:endParaRPr lang="en-US" sz="5200" dirty="0"/>
-          </a:p>
-        </p:txBody>
-      </p:sp>
-      <p:sp>
-        <p:nvSpPr>
-          <p:cNvPr id="3" name="Text 1"/>
-          <p:cNvSpPr/>
-          <p:nvPr/>
-        </p:nvSpPr>
-        <p:spPr>
-          <a:xfrm>
-            <a:off x="594360" y="3977640"/>
-            <a:ext cx="11002975" cy="548640"/>
-          </a:xfrm>
-          <a:prstGeom prst="rect">
-            <a:avLst/>
-          </a:prstGeom>
-          <a:noFill/>
-          <a:ln/>
-        </p:spPr>
-        <p:txBody>
-          <a:bodyPr wrap="square" lIns="0" tIns="0" rIns="0" bIns="0" rtlCol="0" anchor="ctr"/>
-          <a:lstStyle/>
-          <a:p>
-            <a:pPr marL="0" indent="0" algn="l">
-              <a:buNone/>
-            </a:pPr>
-            <a:r>
-              <a:rPr lang="en-US" sz="2800" i="1" dirty="0">
-                <a:solidFill>
-                  <a:srgbClr val="A6A6A6"/>
-                </a:solidFill>
-                <a:latin typeface="Arial" pitchFamily="34" charset="0"/>
-                <a:ea typeface="Arial" pitchFamily="34" charset="-122"/>
-                <a:cs typeface="Arial" pitchFamily="34" charset="-120"/>
-              </a:rPr>
-              <a:t>…and why you should too</a:t>
-            </a:r>
-            <a:endParaRPr lang="en-US" sz="2800" dirty="0"/>
-          </a:p>
-        </p:txBody>
-      </p:sp>
-      <p:sp>
-        <p:nvSpPr>
-          <p:cNvPr id="4" name="Text 2"/>
-          <p:cNvSpPr/>
-          <p:nvPr/>
-        </p:nvSpPr>
-        <p:spPr>
-          <a:xfrm>
-            <a:off x="594360" y="4892040"/>
-            <a:ext cx="11002975" cy="457200"/>
-          </a:xfrm>
-          <a:prstGeom prst="rect">
-            <a:avLst/>
-          </a:prstGeom>
-          <a:noFill/>
-          <a:ln/>
-        </p:spPr>
-        <p:txBody>
-          <a:bodyPr wrap="square" lIns="0" tIns="0" rIns="0" bIns="0" rtlCol="0" anchor="ctr"/>
-          <a:lstStyle/>
-          <a:p>
-            <a:pPr marL="0" indent="0" algn="l">
-              <a:buNone/>
-            </a:pPr>
-            <a:r>
-              <a:rPr lang="en-US" sz="1600" b="1" dirty="0">
-                <a:solidFill>
-                  <a:srgbClr val="FFFFFF"/>
-                </a:solidFill>
-                <a:latin typeface="Arial" pitchFamily="34" charset="0"/>
-                <a:ea typeface="Arial" pitchFamily="34" charset="-122"/>
-                <a:cs typeface="Arial" pitchFamily="34" charset="-120"/>
-              </a:rPr>
-              <a:t>Devlin Duldulao</a:t>
-            </a:r>
-            <a:endParaRPr lang="en-US" sz="1600" dirty="0"/>
-          </a:p>
-        </p:txBody>
-      </p:sp>
-      <p:sp>
-        <p:nvSpPr>
-          <p:cNvPr id="15" name="Text 13"/>
-          <p:cNvSpPr/>
-          <p:nvPr/>
-        </p:nvSpPr>
-        <p:spPr>
-          <a:xfrm>
-            <a:off x="594360" y="6419088"/>
-            <a:ext cx="8229600" cy="274320"/>
-          </a:xfrm>
-          <a:prstGeom prst="rect">
-            <a:avLst/>
-          </a:prstGeom>
-          <a:noFill/>
-          <a:ln/>
-        </p:spPr>
-        <p:txBody>
-          <a:bodyPr wrap="square" lIns="0" tIns="0" rIns="0" bIns="0" rtlCol="0" anchor="ctr"/>
-          <a:lstStyle/>
-          <a:p>
-            <a:pPr marL="0" indent="0" algn="l">
-              <a:buNone/>
-            </a:pPr>
-            <a:r>
-              <a:rPr lang="en-US" sz="900" dirty="0">
-                <a:solidFill>
-                  <a:srgbClr val="6E6E6E"/>
-                </a:solidFill>
-                <a:latin typeface="Arial" pitchFamily="34" charset="0"/>
-                <a:ea typeface="Arial" pitchFamily="34" charset="-122"/>
-                <a:cs typeface="Arial" pitchFamily="34" charset="-120"/>
-              </a:rPr>
-              <a:t>Why LLMs &amp; JS frameworks love Tailwind CSS</a:t>
-            </a:r>
-            <a:endParaRPr lang="en-US" sz="900" dirty="0"/>
-          </a:p>
-        </p:txBody>
-      </p:sp>
-      <p:sp>
-        <p:nvSpPr>
-          <p:cNvPr id="16" name="Text 14"/>
-          <p:cNvSpPr/>
-          <p:nvPr/>
-        </p:nvSpPr>
-        <p:spPr>
-          <a:xfrm>
-            <a:off x="10134295" y="6419088"/>
-            <a:ext cx="1463040" cy="274320"/>
-          </a:xfrm>
-          <a:prstGeom prst="rect">
-            <a:avLst/>
-          </a:prstGeom>
-          <a:noFill/>
-          <a:ln/>
-        </p:spPr>
-        <p:txBody>
-          <a:bodyPr wrap="square" lIns="0" tIns="0" rIns="0" bIns="0" rtlCol="0" anchor="ctr"/>
-          <a:lstStyle/>
-          <a:p>
-            <a:pPr marL="0" indent="0" algn="r">
-              <a:buNone/>
-            </a:pPr>
-            <a:r>
-              <a:rPr lang="en-US" sz="900" dirty="0">
-                <a:solidFill>
-                  <a:srgbClr val="6E6E6E"/>
-                </a:solidFill>
-                <a:latin typeface="Arial" pitchFamily="34" charset="0"/>
-                <a:ea typeface="Arial" pitchFamily="34" charset="-122"/>
-                <a:cs typeface="Arial" pitchFamily="34" charset="-120"/>
-              </a:rPr>
-              <a:t>3 / 29</a:t>
-            </a:r>
-            <a:endParaRPr lang="en-US" sz="900" dirty="0"/>
-          </a:p>
-        </p:txBody>
-      </p:sp>
-    </p:spTree>
-  </p:cSld>
-  <p:clrMapOvr>
-    <a:masterClrMapping/>
-  </p:clrMapOvr>
 </p:sld>
 </file>
 

--- a/why-llms-love-tailwind-conf.pptx
+++ b/why-llms-love-tailwind-conf.pptx
@@ -37,7 +37,7 @@
     <p:sldId id="282" r:id="rId28"/>
     <p:sldId id="283" r:id="rId29"/>
     <p:sldId id="314" r:id="rId30"/>
-    <p:sldId id="313" r:id="rId31"/>
+    <p:sldId id="315" r:id="rId31"/>
   </p:sldIdLst>
   <p:sldSz cx="12192000" cy="6858000"/>
   <p:notesSz cx="6858000" cy="12192000"/>
@@ -2726,7 +2726,13 @@
   <p:cSld>
     <p:spTree>
       <p:nvGrpSpPr>
-        <p:cNvPr id="1" name=""/>
+        <p:cNvPr id="1" name="">
+          <a:extLst>
+            <a:ext uri="{FF2B5EF4-FFF2-40B4-BE49-F238E27FC236}">
+              <a16:creationId xmlns:a16="http://schemas.microsoft.com/office/drawing/2014/main" id="{A4A091CD-CE40-DE50-BB6F-73EE86E3E62E}"/>
+            </a:ext>
+          </a:extLst>
+        </p:cNvPr>
         <p:cNvGrpSpPr/>
         <p:nvPr/>
       </p:nvGrpSpPr>
@@ -2740,7 +2746,13 @@
       </p:grpSpPr>
       <p:sp>
         <p:nvSpPr>
-          <p:cNvPr id="2" name="Slide Image Placeholder 1"/>
+          <p:cNvPr id="2" name="Slide Image Placeholder 1">
+            <a:extLst>
+              <a:ext uri="{FF2B5EF4-FFF2-40B4-BE49-F238E27FC236}">
+                <a16:creationId xmlns:a16="http://schemas.microsoft.com/office/drawing/2014/main" id="{93E217A3-0C6D-E0FB-E8D9-26C54CD9533D}"/>
+              </a:ext>
+            </a:extLst>
+          </p:cNvPr>
           <p:cNvSpPr>
             <a:spLocks noGrp="1" noRot="1" noChangeAspect="1"/>
           </p:cNvSpPr>
@@ -2752,7 +2764,13 @@
       </p:sp>
       <p:sp>
         <p:nvSpPr>
-          <p:cNvPr id="3" name="Notes Placeholder 2"/>
+          <p:cNvPr id="3" name="Notes Placeholder 2">
+            <a:extLst>
+              <a:ext uri="{FF2B5EF4-FFF2-40B4-BE49-F238E27FC236}">
+                <a16:creationId xmlns:a16="http://schemas.microsoft.com/office/drawing/2014/main" id="{C2980ABD-7274-B998-04A2-E3FDD704615B}"/>
+              </a:ext>
+            </a:extLst>
+          </p:cNvPr>
           <p:cNvSpPr>
             <a:spLocks noGrp="1"/>
           </p:cNvSpPr>
@@ -2822,16 +2840,25 @@
               <a:t>I would love to hear your Tailwind hot takes. Come find me after. Thank you.</a:t>
             </a:r>
           </a:p>
-        </p:txBody>
-      </p:sp>
-      <p:sp>
-        <p:nvSpPr>
-          <p:cNvPr id="4" name="Slide Number Placeholder 3"/>
+          <a:p>
+            <a:endParaRPr lang="en-US" dirty="0"/>
+          </a:p>
+        </p:txBody>
+      </p:sp>
+      <p:sp>
+        <p:nvSpPr>
+          <p:cNvPr id="4" name="Slide Number Placeholder 3">
+            <a:extLst>
+              <a:ext uri="{FF2B5EF4-FFF2-40B4-BE49-F238E27FC236}">
+                <a16:creationId xmlns:a16="http://schemas.microsoft.com/office/drawing/2014/main" id="{A486FBF8-DAE3-786B-F774-C9033F4FA5D1}"/>
+              </a:ext>
+            </a:extLst>
+          </p:cNvPr>
           <p:cNvSpPr>
             <a:spLocks noGrp="1"/>
           </p:cNvSpPr>
           <p:nvPr>
-            <p:ph type="sldNum" sz="quarter" idx="5"/>
+            <p:ph type="sldNum" sz="quarter" idx="10"/>
           </p:nvPr>
         </p:nvSpPr>
         <p:spPr/>
@@ -2839,6 +2866,10 @@
           <a:bodyPr/>
           <a:lstStyle/>
           <a:p>
+            <a:fld id="{F7021451-1387-4CA6-816F-3879F97B5CBC}" type="slidenum">
+              <a:rPr lang="en-US"/>
+              <a:t>30</a:t>
+            </a:fld>
             <a:endParaRPr lang="en-US"/>
           </a:p>
         </p:txBody>
@@ -2846,7 +2877,7 @@
     </p:spTree>
     <p:extLst>
       <p:ext uri="{BB962C8B-B14F-4D97-AF65-F5344CB8AC3E}">
-        <p14:creationId xmlns:p14="http://schemas.microsoft.com/office/powerpoint/2010/main" val="1006813423"/>
+        <p14:creationId xmlns:p14="http://schemas.microsoft.com/office/powerpoint/2010/main" val="3245651197"/>
       </p:ext>
     </p:extLst>
   </p:cSld>
@@ -3522,36 +3553,6 @@
 </p:sldLayout>
 </file>
 
-<file path=ppt/slideLayouts/slideLayout2.xml><?xml version="1.0" encoding="utf-8"?>
-<p:sldLayout xmlns:a="http://schemas.openxmlformats.org/drawingml/2006/main" xmlns:r="http://schemas.openxmlformats.org/officeDocument/2006/relationships" xmlns:p="http://schemas.openxmlformats.org/presentationml/2006/main" type="title">
-  <p:cSld name="Title Slide">
-    <p:spTree>
-      <p:nvGrpSpPr>
-        <p:cNvPr id="1" name=""/>
-        <p:cNvGrpSpPr/>
-        <p:nvPr/>
-      </p:nvGrpSpPr>
-      <p:grpSpPr>
-        <a:xfrm>
-          <a:off x="0" y="0"/>
-          <a:ext cx="0" cy="0"/>
-          <a:chOff x="0" y="0"/>
-          <a:chExt cx="0" cy="0"/>
-        </a:xfrm>
-      </p:grpSpPr>
-    </p:spTree>
-    <p:extLst>
-      <p:ext uri="{BB962C8B-B14F-4D97-AF65-F5344CB8AC3E}">
-        <p14:creationId xmlns:p14="http://schemas.microsoft.com/office/powerpoint/2010/main" val="2090598145"/>
-      </p:ext>
-    </p:extLst>
-  </p:cSld>
-  <p:clrMapOvr>
-    <a:masterClrMapping/>
-  </p:clrMapOvr>
-</p:sldLayout>
-</file>
-
 <file path=ppt/slideMasters/slideMaster1.xml><?xml version="1.0" encoding="utf-8"?>
 <p:sldMaster xmlns:a="http://schemas.openxmlformats.org/drawingml/2006/main" xmlns:r="http://schemas.openxmlformats.org/officeDocument/2006/relationships" xmlns:p="http://schemas.openxmlformats.org/presentationml/2006/main">
   <p:cSld>
@@ -3627,7 +3628,6 @@
   <p:clrMap bg1="lt1" tx1="dk1" bg2="lt2" tx2="dk2" accent1="accent1" accent2="accent2" accent3="accent3" accent4="accent4" accent5="accent5" accent6="accent6" hlink="hlink" folHlink="folHlink"/>
   <p:sldLayoutIdLst>
     <p:sldLayoutId id="2147483649" r:id="rId1"/>
-    <p:sldLayoutId id="2147483650" r:id="rId2"/>
   </p:sldLayoutIdLst>
   <p:hf sldNum="0" hdr="0" ftr="0" dt="0"/>
   <p:txStyles>
@@ -3910,45 +3910,6 @@
       </p:grpSpPr>
       <p:sp>
         <p:nvSpPr>
-          <p:cNvPr id="2" name="Text 0"/>
-          <p:cNvSpPr/>
-          <p:nvPr/>
-        </p:nvSpPr>
-        <p:spPr>
-          <a:xfrm>
-            <a:off x="1097280" y="1371600"/>
-            <a:ext cx="11002975" cy="274320"/>
-          </a:xfrm>
-          <a:prstGeom prst="rect">
-            <a:avLst/>
-          </a:prstGeom>
-          <a:noFill/>
-          <a:ln/>
-        </p:spPr>
-        <p:txBody>
-          <a:bodyPr wrap="square" lIns="0" tIns="0" rIns="0" bIns="0" rtlCol="0" anchor="ctr"/>
-          <a:lstStyle/>
-          <a:p>
-            <a:pPr marL="0" indent="0" algn="l">
-              <a:buNone/>
-            </a:pPr>
-            <a:r>
-              <a:rPr lang="en-US" sz="1200" b="1" kern="0" spc="300" dirty="0">
-                <a:solidFill>
-                  <a:srgbClr val="75DFBC"/>
-                </a:solidFill>
-                <a:latin typeface="Arial" pitchFamily="34" charset="0"/>
-                <a:ea typeface="Arial" pitchFamily="34" charset="-122"/>
-                <a:cs typeface="Arial" pitchFamily="34" charset="-120"/>
-              </a:rPr>
-              <a:t>WARM-UP</a:t>
-            </a:r>
-            <a:endParaRPr lang="en-US" sz="1200" dirty="0"/>
-          </a:p>
-        </p:txBody>
-      </p:sp>
-      <p:sp>
-        <p:nvSpPr>
           <p:cNvPr id="3" name="Text 1"/>
           <p:cNvSpPr/>
           <p:nvPr/>
@@ -4478,126 +4439,6 @@
           </a:p>
         </p:txBody>
       </p:sp>
-      <p:sp>
-        <p:nvSpPr>
-          <p:cNvPr id="11" name="Text 9"/>
-          <p:cNvSpPr/>
-          <p:nvPr/>
-        </p:nvSpPr>
-        <p:spPr>
-          <a:xfrm>
-            <a:off x="594360" y="5532120"/>
-            <a:ext cx="11002975" cy="731520"/>
-          </a:xfrm>
-          <a:prstGeom prst="rect">
-            <a:avLst/>
-          </a:prstGeom>
-          <a:noFill/>
-          <a:ln/>
-        </p:spPr>
-        <p:txBody>
-          <a:bodyPr wrap="square" lIns="0" tIns="0" rIns="0" bIns="0" rtlCol="0" anchor="ctr"/>
-          <a:lstStyle/>
-          <a:p>
-            <a:pPr marL="0" indent="0" algn="l">
-              <a:lnSpc>
-                <a:spcPct val="105000"/>
-              </a:lnSpc>
-              <a:buNone/>
-            </a:pPr>
-            <a:r>
-              <a:rPr lang="en-US" sz="2000" dirty="0">
-                <a:solidFill>
-                  <a:srgbClr val="A6A6A6"/>
-                </a:solidFill>
-                <a:latin typeface="Arial" pitchFamily="34" charset="0"/>
-                <a:ea typeface="Arial" pitchFamily="34" charset="-122"/>
-                <a:cs typeface="Arial" pitchFamily="34" charset="-120"/>
-              </a:rPr>
-              <a:t>Two files, joined only by a magic string. To understand the component, you must hold both in your head, and so must the model.</a:t>
-            </a:r>
-            <a:endParaRPr lang="en-US" sz="2000" dirty="0"/>
-          </a:p>
-        </p:txBody>
-      </p:sp>
-      <p:sp>
-        <p:nvSpPr>
-          <p:cNvPr id="12" name="Text 10"/>
-          <p:cNvSpPr/>
-          <p:nvPr/>
-        </p:nvSpPr>
-        <p:spPr>
-          <a:xfrm>
-            <a:off x="594360" y="6419088"/>
-            <a:ext cx="8229600" cy="274320"/>
-          </a:xfrm>
-          <a:prstGeom prst="rect">
-            <a:avLst/>
-          </a:prstGeom>
-          <a:noFill/>
-          <a:ln/>
-        </p:spPr>
-        <p:txBody>
-          <a:bodyPr wrap="square" lIns="0" tIns="0" rIns="0" bIns="0" rtlCol="0" anchor="ctr"/>
-          <a:lstStyle/>
-          <a:p>
-            <a:pPr marL="0" indent="0" algn="l">
-              <a:buNone/>
-            </a:pPr>
-            <a:r>
-              <a:rPr lang="en-US" sz="900" dirty="0">
-                <a:solidFill>
-                  <a:srgbClr val="6E6E6E"/>
-                </a:solidFill>
-                <a:latin typeface="Arial" pitchFamily="34" charset="0"/>
-                <a:ea typeface="Arial" pitchFamily="34" charset="-122"/>
-                <a:cs typeface="Arial" pitchFamily="34" charset="-120"/>
-              </a:rPr>
-              <a:t>Why LLMs &amp; JS frameworks love Tailwind CSS</a:t>
-            </a:r>
-            <a:endParaRPr lang="en-US" sz="900" dirty="0"/>
-          </a:p>
-        </p:txBody>
-      </p:sp>
-      <p:sp>
-        <p:nvSpPr>
-          <p:cNvPr id="13" name="Text 11"/>
-          <p:cNvSpPr/>
-          <p:nvPr/>
-        </p:nvSpPr>
-        <p:spPr>
-          <a:xfrm>
-            <a:off x="10134295" y="6419088"/>
-            <a:ext cx="1463040" cy="274320"/>
-          </a:xfrm>
-          <a:prstGeom prst="rect">
-            <a:avLst/>
-          </a:prstGeom>
-          <a:noFill/>
-          <a:ln/>
-        </p:spPr>
-        <p:txBody>
-          <a:bodyPr wrap="square" lIns="0" tIns="0" rIns="0" bIns="0" rtlCol="0" anchor="ctr"/>
-          <a:lstStyle/>
-          <a:p>
-            <a:pPr marL="0" indent="0" algn="r">
-              <a:buNone/>
-            </a:pPr>
-            <a:r>
-              <a:rPr lang="en-US" sz="900" dirty="0">
-                <a:solidFill>
-                  <a:srgbClr val="6E6E6E"/>
-                </a:solidFill>
-                <a:latin typeface="Arial" pitchFamily="34" charset="0"/>
-                <a:ea typeface="Arial" pitchFamily="34" charset="-122"/>
-                <a:cs typeface="Arial" pitchFamily="34" charset="-120"/>
-              </a:rPr>
-              <a:t>10 / 29</a:t>
-            </a:r>
-            <a:endParaRPr lang="en-US" sz="900" dirty="0"/>
-          </a:p>
-        </p:txBody>
-      </p:sp>
     </p:spTree>
   </p:cSld>
   <p:clrMapOvr>
@@ -4633,52 +4474,13 @@
       </p:grpSpPr>
       <p:sp>
         <p:nvSpPr>
-          <p:cNvPr id="2" name="Text 0"/>
-          <p:cNvSpPr/>
-          <p:nvPr/>
-        </p:nvSpPr>
-        <p:spPr>
-          <a:xfrm>
-            <a:off x="594360" y="502920"/>
-            <a:ext cx="11002975" cy="274320"/>
-          </a:xfrm>
-          <a:prstGeom prst="rect">
-            <a:avLst/>
-          </a:prstGeom>
-          <a:noFill/>
-          <a:ln/>
-        </p:spPr>
-        <p:txBody>
-          <a:bodyPr wrap="square" lIns="0" tIns="0" rIns="0" bIns="0" rtlCol="0" anchor="ctr"/>
-          <a:lstStyle/>
-          <a:p>
-            <a:pPr marL="0" indent="0" algn="l">
-              <a:buNone/>
-            </a:pPr>
-            <a:r>
-              <a:rPr lang="en-US" sz="1200" b="1" kern="0" spc="300" dirty="0">
-                <a:solidFill>
-                  <a:srgbClr val="75DFBC"/>
-                </a:solidFill>
-                <a:latin typeface="Arial" pitchFamily="34" charset="0"/>
-                <a:ea typeface="Arial" pitchFamily="34" charset="-122"/>
-                <a:cs typeface="Arial" pitchFamily="34" charset="-120"/>
-              </a:rPr>
-              <a:t>THE FIX</a:t>
-            </a:r>
-            <a:endParaRPr lang="en-US" sz="1200" dirty="0"/>
-          </a:p>
-        </p:txBody>
-      </p:sp>
-      <p:sp>
-        <p:nvSpPr>
           <p:cNvPr id="3" name="Text 1"/>
           <p:cNvSpPr/>
           <p:nvPr/>
         </p:nvSpPr>
         <p:spPr>
           <a:xfrm>
-            <a:off x="594360" y="868680"/>
+            <a:off x="594360" y="432940"/>
             <a:ext cx="11002975" cy="1005840"/>
           </a:xfrm>
           <a:prstGeom prst="rect">
@@ -4720,7 +4522,7 @@
         </p:nvSpPr>
         <p:spPr>
           <a:xfrm>
-            <a:off x="594360" y="1783080"/>
+            <a:off x="594360" y="1347340"/>
             <a:ext cx="11002975" cy="457200"/>
           </a:xfrm>
           <a:prstGeom prst="rect">
@@ -4759,8 +4561,8 @@
         </p:nvSpPr>
         <p:spPr>
           <a:xfrm>
-            <a:off x="594360" y="2468880"/>
-            <a:ext cx="11002975" cy="3307210"/>
+            <a:off x="594360" y="2033140"/>
+            <a:ext cx="11002975" cy="4391920"/>
           </a:xfrm>
           <a:prstGeom prst="roundRect">
             <a:avLst>
@@ -4793,7 +4595,7 @@
         </p:nvSpPr>
         <p:spPr>
           <a:xfrm>
-            <a:off x="813816" y="2651760"/>
+            <a:off x="813816" y="2216020"/>
             <a:ext cx="100584" cy="100584"/>
           </a:xfrm>
           <a:prstGeom prst="ellipse">
@@ -4820,7 +4622,7 @@
         </p:nvSpPr>
         <p:spPr>
           <a:xfrm>
-            <a:off x="1014984" y="2651760"/>
+            <a:off x="1014984" y="2216020"/>
             <a:ext cx="100584" cy="100584"/>
           </a:xfrm>
           <a:prstGeom prst="ellipse">
@@ -4847,7 +4649,7 @@
         </p:nvSpPr>
         <p:spPr>
           <a:xfrm>
-            <a:off x="1216152" y="2651760"/>
+            <a:off x="1216152" y="2216020"/>
             <a:ext cx="100584" cy="100584"/>
           </a:xfrm>
           <a:prstGeom prst="ellipse">
@@ -4874,7 +4676,7 @@
         </p:nvSpPr>
         <p:spPr>
           <a:xfrm>
-            <a:off x="1508760" y="2542032"/>
+            <a:off x="1508760" y="2106292"/>
             <a:ext cx="9905695" cy="292608"/>
           </a:xfrm>
           <a:prstGeom prst="rect">
@@ -4913,8 +4715,8 @@
         </p:nvSpPr>
         <p:spPr>
           <a:xfrm>
-            <a:off x="886968" y="3017519"/>
-            <a:ext cx="10417759" cy="2605067"/>
+            <a:off x="886968" y="2581779"/>
+            <a:ext cx="10417759" cy="3595086"/>
           </a:xfrm>
           <a:prstGeom prst="rect">
             <a:avLst/>
@@ -4933,7 +4735,7 @@
               <a:buNone/>
             </a:pPr>
             <a:r>
-              <a:rPr lang="en-US" dirty="0">
+              <a:rPr lang="en-US" sz="2400" dirty="0">
                 <a:solidFill>
                   <a:srgbClr val="6E6E6E"/>
                 </a:solidFill>
@@ -4943,7 +4745,7 @@
               </a:rPr>
               <a:t>// no CSS file. no class names. no cascade.</a:t>
             </a:r>
-            <a:endParaRPr lang="en-US" dirty="0"/>
+            <a:endParaRPr lang="en-US" sz="2400" dirty="0"/>
           </a:p>
           <a:p>
             <a:pPr marL="0" indent="0" algn="l">
@@ -4952,7 +4754,7 @@
               </a:lnSpc>
               <a:buNone/>
             </a:pPr>
-            <a:endParaRPr lang="en-US" dirty="0"/>
+            <a:endParaRPr lang="en-US" sz="2400" dirty="0"/>
           </a:p>
           <a:p>
             <a:pPr marL="0" indent="0" algn="l">
@@ -4962,7 +4764,7 @@
               <a:buNone/>
             </a:pPr>
             <a:r>
-              <a:rPr lang="en-US" dirty="0">
+              <a:rPr lang="en-US" sz="2400" dirty="0">
                 <a:solidFill>
                   <a:srgbClr val="9CDCFE"/>
                 </a:solidFill>
@@ -4973,7 +4775,7 @@
               <a:t>&lt;button</a:t>
             </a:r>
             <a:r>
-              <a:rPr lang="en-US" dirty="0">
+              <a:rPr lang="en-US" sz="2400" dirty="0">
                 <a:solidFill>
                   <a:srgbClr val="D8D8D8"/>
                 </a:solidFill>
@@ -4984,7 +4786,7 @@
               <a:t> className=</a:t>
             </a:r>
             <a:r>
-              <a:rPr lang="en-US" dirty="0">
+              <a:rPr lang="en-US" sz="2400" dirty="0">
                 <a:solidFill>
                   <a:srgbClr val="75DFBC"/>
                 </a:solidFill>
@@ -4994,7 +4796,7 @@
               </a:rPr>
               <a:t>{cn(</a:t>
             </a:r>
-            <a:endParaRPr lang="en-US" dirty="0"/>
+            <a:endParaRPr lang="en-US" sz="2400" dirty="0"/>
           </a:p>
           <a:p>
             <a:pPr marL="0" indent="0" algn="l">
@@ -5004,7 +4806,7 @@
               <a:buNone/>
             </a:pPr>
             <a:r>
-              <a:rPr lang="en-US" dirty="0">
+              <a:rPr lang="en-US" sz="2400" dirty="0">
                 <a:solidFill>
                   <a:srgbClr val="F1CF25"/>
                 </a:solidFill>
@@ -5015,7 +4817,7 @@
               <a:t>  "rounded-lg px-4 py-3 font-bold"</a:t>
             </a:r>
             <a:r>
-              <a:rPr lang="en-US" dirty="0">
+              <a:rPr lang="en-US" sz="2400" dirty="0">
                 <a:solidFill>
                   <a:srgbClr val="D8D8D8"/>
                 </a:solidFill>
@@ -5025,7 +4827,7 @@
               </a:rPr>
               <a:t>,</a:t>
             </a:r>
-            <a:endParaRPr lang="en-US" dirty="0"/>
+            <a:endParaRPr lang="en-US" sz="2400" dirty="0"/>
           </a:p>
           <a:p>
             <a:pPr marL="0" indent="0" algn="l">
@@ -5035,7 +4837,7 @@
               <a:buNone/>
             </a:pPr>
             <a:r>
-              <a:rPr lang="en-US" dirty="0">
+              <a:rPr lang="en-US" sz="2400" dirty="0">
                 <a:solidFill>
                   <a:srgbClr val="9CDCFE"/>
                 </a:solidFill>
@@ -5046,7 +4848,7 @@
               <a:t>  featured</a:t>
             </a:r>
             <a:r>
-              <a:rPr lang="en-US" dirty="0">
+              <a:rPr lang="en-US" sz="2400" dirty="0">
                 <a:solidFill>
                   <a:srgbClr val="D8D8D8"/>
                 </a:solidFill>
@@ -5057,7 +4859,7 @@
               <a:t> &amp;&amp; </a:t>
             </a:r>
             <a:r>
-              <a:rPr lang="en-US" dirty="0">
+              <a:rPr lang="en-US" sz="2400" dirty="0">
                 <a:solidFill>
                   <a:srgbClr val="F1CF25"/>
                 </a:solidFill>
@@ -5067,7 +4869,7 @@
               </a:rPr>
               <a:t>"bg-mint text-ink hover:bg-mint/80"</a:t>
             </a:r>
-            <a:endParaRPr lang="en-US" dirty="0"/>
+            <a:endParaRPr lang="en-US" sz="2400" dirty="0"/>
           </a:p>
           <a:p>
             <a:pPr marL="0" indent="0" algn="l">
@@ -5077,7 +4879,7 @@
               <a:buNone/>
             </a:pPr>
             <a:r>
-              <a:rPr lang="en-US" dirty="0">
+              <a:rPr lang="en-US" sz="2400" dirty="0">
                 <a:solidFill>
                   <a:srgbClr val="75DFBC"/>
                 </a:solidFill>
@@ -5087,7 +4889,7 @@
               </a:rPr>
               <a:t>)}&gt;</a:t>
             </a:r>
-            <a:endParaRPr lang="en-US" dirty="0"/>
+            <a:endParaRPr lang="en-US" sz="2400" dirty="0"/>
           </a:p>
           <a:p>
             <a:pPr marL="0" indent="0" algn="l">
@@ -5097,7 +4899,7 @@
               <a:buNone/>
             </a:pPr>
             <a:r>
-              <a:rPr lang="en-US" dirty="0">
+              <a:rPr lang="en-US" sz="2400" dirty="0">
                 <a:solidFill>
                   <a:srgbClr val="D8D8D8"/>
                 </a:solidFill>
@@ -5107,7 +4909,7 @@
               </a:rPr>
               <a:t>  Choose plan</a:t>
             </a:r>
-            <a:endParaRPr lang="en-US" dirty="0"/>
+            <a:endParaRPr lang="en-US" sz="2400" dirty="0"/>
           </a:p>
           <a:p>
             <a:pPr marL="0" indent="0" algn="l">
@@ -5117,7 +4919,7 @@
               <a:buNone/>
             </a:pPr>
             <a:r>
-              <a:rPr lang="en-US" dirty="0">
+              <a:rPr lang="en-US" sz="2400" dirty="0">
                 <a:solidFill>
                   <a:srgbClr val="9CDCFE"/>
                 </a:solidFill>
@@ -5127,127 +4929,7 @@
               </a:rPr>
               <a:t>&lt;/button&gt;</a:t>
             </a:r>
-            <a:endParaRPr lang="en-US" dirty="0"/>
-          </a:p>
-        </p:txBody>
-      </p:sp>
-      <p:sp>
-        <p:nvSpPr>
-          <p:cNvPr id="11" name="Text 9"/>
-          <p:cNvSpPr/>
-          <p:nvPr/>
-        </p:nvSpPr>
-        <p:spPr>
-          <a:xfrm>
-            <a:off x="594359" y="5776090"/>
-            <a:ext cx="11002975" cy="640080"/>
-          </a:xfrm>
-          <a:prstGeom prst="rect">
-            <a:avLst/>
-          </a:prstGeom>
-          <a:noFill/>
-          <a:ln/>
-        </p:spPr>
-        <p:txBody>
-          <a:bodyPr wrap="square" lIns="0" tIns="0" rIns="0" bIns="0" rtlCol="0" anchor="ctr"/>
-          <a:lstStyle/>
-          <a:p>
-            <a:pPr marL="0" indent="0" algn="l">
-              <a:lnSpc>
-                <a:spcPct val="105000"/>
-              </a:lnSpc>
-              <a:buNone/>
-            </a:pPr>
-            <a:r>
-              <a:rPr lang="en-US" i="1" dirty="0">
-                <a:solidFill>
-                  <a:srgbClr val="75DFBC"/>
-                </a:solidFill>
-                <a:latin typeface="Arial" pitchFamily="34" charset="0"/>
-                <a:ea typeface="Arial" pitchFamily="34" charset="-122"/>
-                <a:cs typeface="Arial" pitchFamily="34" charset="-120"/>
-              </a:rPr>
-              <a:t>Markup and style live in one place. An LLM sees the entire spec in one span of tokens.</a:t>
-            </a:r>
-            <a:endParaRPr lang="en-US" dirty="0"/>
-          </a:p>
-        </p:txBody>
-      </p:sp>
-      <p:sp>
-        <p:nvSpPr>
-          <p:cNvPr id="12" name="Text 10"/>
-          <p:cNvSpPr/>
-          <p:nvPr/>
-        </p:nvSpPr>
-        <p:spPr>
-          <a:xfrm>
-            <a:off x="594360" y="6419088"/>
-            <a:ext cx="8229600" cy="274320"/>
-          </a:xfrm>
-          <a:prstGeom prst="rect">
-            <a:avLst/>
-          </a:prstGeom>
-          <a:noFill/>
-          <a:ln/>
-        </p:spPr>
-        <p:txBody>
-          <a:bodyPr wrap="square" lIns="0" tIns="0" rIns="0" bIns="0" rtlCol="0" anchor="ctr"/>
-          <a:lstStyle/>
-          <a:p>
-            <a:pPr marL="0" indent="0" algn="l">
-              <a:buNone/>
-            </a:pPr>
-            <a:r>
-              <a:rPr lang="en-US" sz="900" dirty="0">
-                <a:solidFill>
-                  <a:srgbClr val="6E6E6E"/>
-                </a:solidFill>
-                <a:latin typeface="Arial" pitchFamily="34" charset="0"/>
-                <a:ea typeface="Arial" pitchFamily="34" charset="-122"/>
-                <a:cs typeface="Arial" pitchFamily="34" charset="-120"/>
-              </a:rPr>
-              <a:t>Why LLMs &amp; JS frameworks love Tailwind CSS</a:t>
-            </a:r>
-            <a:endParaRPr lang="en-US" sz="900" dirty="0"/>
-          </a:p>
-        </p:txBody>
-      </p:sp>
-      <p:sp>
-        <p:nvSpPr>
-          <p:cNvPr id="13" name="Text 11"/>
-          <p:cNvSpPr/>
-          <p:nvPr/>
-        </p:nvSpPr>
-        <p:spPr>
-          <a:xfrm>
-            <a:off x="10134295" y="6419088"/>
-            <a:ext cx="1463040" cy="274320"/>
-          </a:xfrm>
-          <a:prstGeom prst="rect">
-            <a:avLst/>
-          </a:prstGeom>
-          <a:noFill/>
-          <a:ln/>
-        </p:spPr>
-        <p:txBody>
-          <a:bodyPr wrap="square" lIns="0" tIns="0" rIns="0" bIns="0" rtlCol="0" anchor="ctr"/>
-          <a:lstStyle/>
-          <a:p>
-            <a:pPr marL="0" indent="0" algn="r">
-              <a:buNone/>
-            </a:pPr>
-            <a:r>
-              <a:rPr lang="en-US" sz="900" dirty="0">
-                <a:solidFill>
-                  <a:srgbClr val="6E6E6E"/>
-                </a:solidFill>
-                <a:latin typeface="Arial" pitchFamily="34" charset="0"/>
-                <a:ea typeface="Arial" pitchFamily="34" charset="-122"/>
-                <a:cs typeface="Arial" pitchFamily="34" charset="-120"/>
-              </a:rPr>
-              <a:t>11 / 29</a:t>
-            </a:r>
-            <a:endParaRPr lang="en-US" sz="900" dirty="0"/>
+            <a:endParaRPr lang="en-US" sz="2400" dirty="0"/>
           </a:p>
         </p:txBody>
       </p:sp>
@@ -5601,123 +5283,6 @@
           </a:p>
         </p:txBody>
       </p:sp>
-      <p:sp>
-        <p:nvSpPr>
-          <p:cNvPr id="11" name="Text 9"/>
-          <p:cNvSpPr/>
-          <p:nvPr/>
-        </p:nvSpPr>
-        <p:spPr>
-          <a:xfrm>
-            <a:off x="594359" y="5824728"/>
-            <a:ext cx="11002975" cy="457200"/>
-          </a:xfrm>
-          <a:prstGeom prst="rect">
-            <a:avLst/>
-          </a:prstGeom>
-          <a:noFill/>
-          <a:ln/>
-        </p:spPr>
-        <p:txBody>
-          <a:bodyPr wrap="square" lIns="0" tIns="0" rIns="0" bIns="0" rtlCol="0" anchor="ctr"/>
-          <a:lstStyle/>
-          <a:p>
-            <a:pPr marL="0" indent="0" algn="l">
-              <a:buNone/>
-            </a:pPr>
-            <a:r>
-              <a:rPr lang="en-US" sz="1600" dirty="0">
-                <a:solidFill>
-                  <a:srgbClr val="A6A6A6"/>
-                </a:solidFill>
-                <a:latin typeface="Courier New" pitchFamily="34" charset="0"/>
-                <a:ea typeface="Courier New" pitchFamily="34" charset="-122"/>
-                <a:cs typeface="Courier New" pitchFamily="34" charset="-120"/>
-              </a:rPr>
-              <a:t>→ npm run dev   ·   watch: does it render correctly first try? Is the spacing consistent?</a:t>
-            </a:r>
-            <a:endParaRPr lang="en-US" sz="1600" dirty="0"/>
-          </a:p>
-        </p:txBody>
-      </p:sp>
-      <p:sp>
-        <p:nvSpPr>
-          <p:cNvPr id="12" name="Text 10"/>
-          <p:cNvSpPr/>
-          <p:nvPr/>
-        </p:nvSpPr>
-        <p:spPr>
-          <a:xfrm>
-            <a:off x="594360" y="6419088"/>
-            <a:ext cx="8229600" cy="274320"/>
-          </a:xfrm>
-          <a:prstGeom prst="rect">
-            <a:avLst/>
-          </a:prstGeom>
-          <a:noFill/>
-          <a:ln/>
-        </p:spPr>
-        <p:txBody>
-          <a:bodyPr wrap="square" lIns="0" tIns="0" rIns="0" bIns="0" rtlCol="0" anchor="ctr"/>
-          <a:lstStyle/>
-          <a:p>
-            <a:pPr marL="0" indent="0" algn="l">
-              <a:buNone/>
-            </a:pPr>
-            <a:r>
-              <a:rPr lang="en-US" sz="900" dirty="0">
-                <a:solidFill>
-                  <a:srgbClr val="6E6E6E"/>
-                </a:solidFill>
-                <a:latin typeface="Arial" pitchFamily="34" charset="0"/>
-                <a:ea typeface="Arial" pitchFamily="34" charset="-122"/>
-                <a:cs typeface="Arial" pitchFamily="34" charset="-120"/>
-              </a:rPr>
-              <a:t>Why LLMs &amp; JS frameworks love Tailwind CSS</a:t>
-            </a:r>
-            <a:endParaRPr lang="en-US" sz="900" dirty="0"/>
-          </a:p>
-        </p:txBody>
-      </p:sp>
-      <p:sp>
-        <p:nvSpPr>
-          <p:cNvPr id="13" name="Text 11"/>
-          <p:cNvSpPr/>
-          <p:nvPr/>
-        </p:nvSpPr>
-        <p:spPr>
-          <a:xfrm>
-            <a:off x="10134295" y="6419088"/>
-            <a:ext cx="1463040" cy="274320"/>
-          </a:xfrm>
-          <a:prstGeom prst="rect">
-            <a:avLst/>
-          </a:prstGeom>
-          <a:noFill/>
-          <a:ln/>
-        </p:spPr>
-        <p:txBody>
-          <a:bodyPr wrap="square" lIns="0" tIns="0" rIns="0" bIns="0" rtlCol="0" anchor="ctr"/>
-          <a:lstStyle/>
-          <a:p>
-            <a:pPr marL="0" indent="0" algn="r">
-              <a:buNone/>
-            </a:pPr>
-            <a:r>
-              <a:rPr lang="en-US" sz="900" dirty="0">
-                <a:solidFill>
-                  <a:srgbClr val="6E6E6E"/>
-                </a:solidFill>
-                <a:latin typeface="Arial" pitchFamily="34" charset="0"/>
-                <a:ea typeface="Arial" pitchFamily="34" charset="-122"/>
-                <a:cs typeface="Arial" pitchFamily="34" charset="-120"/>
-              </a:rPr>
-              <a:t>12 / 29</a:t>
-            </a:r>
-            <a:endParaRPr lang="en-US" sz="900" dirty="0"/>
-          </a:p>
-        </p:txBody>
-      </p:sp>
     </p:spTree>
   </p:cSld>
   <p:clrMapOvr>
@@ -7278,84 +6843,6 @@
           </a:p>
         </p:txBody>
       </p:sp>
-      <p:sp>
-        <p:nvSpPr>
-          <p:cNvPr id="21" name="Text 19"/>
-          <p:cNvSpPr/>
-          <p:nvPr/>
-        </p:nvSpPr>
-        <p:spPr>
-          <a:xfrm>
-            <a:off x="594360" y="6419088"/>
-            <a:ext cx="8229600" cy="274320"/>
-          </a:xfrm>
-          <a:prstGeom prst="rect">
-            <a:avLst/>
-          </a:prstGeom>
-          <a:noFill/>
-          <a:ln/>
-        </p:spPr>
-        <p:txBody>
-          <a:bodyPr wrap="square" lIns="0" tIns="0" rIns="0" bIns="0" rtlCol="0" anchor="ctr"/>
-          <a:lstStyle/>
-          <a:p>
-            <a:pPr marL="0" indent="0" algn="l">
-              <a:buNone/>
-            </a:pPr>
-            <a:r>
-              <a:rPr lang="en-US" sz="900" dirty="0">
-                <a:solidFill>
-                  <a:srgbClr val="6E6E6E"/>
-                </a:solidFill>
-                <a:latin typeface="Arial" pitchFamily="34" charset="0"/>
-                <a:ea typeface="Arial" pitchFamily="34" charset="-122"/>
-                <a:cs typeface="Arial" pitchFamily="34" charset="-120"/>
-              </a:rPr>
-              <a:t>Why LLMs &amp; JS frameworks love Tailwind CSS</a:t>
-            </a:r>
-            <a:endParaRPr lang="en-US" sz="900" dirty="0"/>
-          </a:p>
-        </p:txBody>
-      </p:sp>
-      <p:sp>
-        <p:nvSpPr>
-          <p:cNvPr id="22" name="Text 20"/>
-          <p:cNvSpPr/>
-          <p:nvPr/>
-        </p:nvSpPr>
-        <p:spPr>
-          <a:xfrm>
-            <a:off x="10134295" y="6419088"/>
-            <a:ext cx="1463040" cy="274320"/>
-          </a:xfrm>
-          <a:prstGeom prst="rect">
-            <a:avLst/>
-          </a:prstGeom>
-          <a:noFill/>
-          <a:ln/>
-        </p:spPr>
-        <p:txBody>
-          <a:bodyPr wrap="square" lIns="0" tIns="0" rIns="0" bIns="0" rtlCol="0" anchor="ctr"/>
-          <a:lstStyle/>
-          <a:p>
-            <a:pPr marL="0" indent="0" algn="r">
-              <a:buNone/>
-            </a:pPr>
-            <a:r>
-              <a:rPr lang="en-US" sz="900" dirty="0">
-                <a:solidFill>
-                  <a:srgbClr val="6E6E6E"/>
-                </a:solidFill>
-                <a:latin typeface="Arial" pitchFamily="34" charset="0"/>
-                <a:ea typeface="Arial" pitchFamily="34" charset="-122"/>
-                <a:cs typeface="Arial" pitchFamily="34" charset="-120"/>
-              </a:rPr>
-              <a:t>14 / 29</a:t>
-            </a:r>
-            <a:endParaRPr lang="en-US" sz="900" dirty="0"/>
-          </a:p>
-        </p:txBody>
-      </p:sp>
     </p:spTree>
   </p:cSld>
   <p:clrMapOvr>
@@ -8289,84 +7776,6 @@
           </a:p>
         </p:txBody>
       </p:sp>
-      <p:sp>
-        <p:nvSpPr>
-          <p:cNvPr id="27" name="Text 25"/>
-          <p:cNvSpPr/>
-          <p:nvPr/>
-        </p:nvSpPr>
-        <p:spPr>
-          <a:xfrm>
-            <a:off x="594360" y="6419088"/>
-            <a:ext cx="8229600" cy="274320"/>
-          </a:xfrm>
-          <a:prstGeom prst="rect">
-            <a:avLst/>
-          </a:prstGeom>
-          <a:noFill/>
-          <a:ln/>
-        </p:spPr>
-        <p:txBody>
-          <a:bodyPr wrap="square" lIns="0" tIns="0" rIns="0" bIns="0" rtlCol="0" anchor="ctr"/>
-          <a:lstStyle/>
-          <a:p>
-            <a:pPr marL="0" indent="0" algn="l">
-              <a:buNone/>
-            </a:pPr>
-            <a:r>
-              <a:rPr lang="en-US" sz="900" dirty="0">
-                <a:solidFill>
-                  <a:srgbClr val="6E6E6E"/>
-                </a:solidFill>
-                <a:latin typeface="Arial" pitchFamily="34" charset="0"/>
-                <a:ea typeface="Arial" pitchFamily="34" charset="-122"/>
-                <a:cs typeface="Arial" pitchFamily="34" charset="-120"/>
-              </a:rPr>
-              <a:t>Why LLMs &amp; JS frameworks love Tailwind CSS</a:t>
-            </a:r>
-            <a:endParaRPr lang="en-US" sz="900" dirty="0"/>
-          </a:p>
-        </p:txBody>
-      </p:sp>
-      <p:sp>
-        <p:nvSpPr>
-          <p:cNvPr id="28" name="Text 26"/>
-          <p:cNvSpPr/>
-          <p:nvPr/>
-        </p:nvSpPr>
-        <p:spPr>
-          <a:xfrm>
-            <a:off x="10134295" y="6419088"/>
-            <a:ext cx="1463040" cy="274320"/>
-          </a:xfrm>
-          <a:prstGeom prst="rect">
-            <a:avLst/>
-          </a:prstGeom>
-          <a:noFill/>
-          <a:ln/>
-        </p:spPr>
-        <p:txBody>
-          <a:bodyPr wrap="square" lIns="0" tIns="0" rIns="0" bIns="0" rtlCol="0" anchor="ctr"/>
-          <a:lstStyle/>
-          <a:p>
-            <a:pPr marL="0" indent="0" algn="r">
-              <a:buNone/>
-            </a:pPr>
-            <a:r>
-              <a:rPr lang="en-US" sz="900" dirty="0">
-                <a:solidFill>
-                  <a:srgbClr val="6E6E6E"/>
-                </a:solidFill>
-                <a:latin typeface="Arial" pitchFamily="34" charset="0"/>
-                <a:ea typeface="Arial" pitchFamily="34" charset="-122"/>
-                <a:cs typeface="Arial" pitchFamily="34" charset="-120"/>
-              </a:rPr>
-              <a:t>15 / 29</a:t>
-            </a:r>
-            <a:endParaRPr lang="en-US" sz="900" dirty="0"/>
-          </a:p>
-        </p:txBody>
-      </p:sp>
     </p:spTree>
   </p:cSld>
   <p:clrMapOvr>
@@ -10046,84 +9455,6 @@
           </a:p>
         </p:txBody>
       </p:sp>
-      <p:sp>
-        <p:nvSpPr>
-          <p:cNvPr id="24" name="Text 22"/>
-          <p:cNvSpPr/>
-          <p:nvPr/>
-        </p:nvSpPr>
-        <p:spPr>
-          <a:xfrm>
-            <a:off x="594360" y="6419088"/>
-            <a:ext cx="8229600" cy="274320"/>
-          </a:xfrm>
-          <a:prstGeom prst="rect">
-            <a:avLst/>
-          </a:prstGeom>
-          <a:noFill/>
-          <a:ln/>
-        </p:spPr>
-        <p:txBody>
-          <a:bodyPr wrap="square" lIns="0" tIns="0" rIns="0" bIns="0" rtlCol="0" anchor="ctr"/>
-          <a:lstStyle/>
-          <a:p>
-            <a:pPr marL="0" indent="0" algn="l">
-              <a:buNone/>
-            </a:pPr>
-            <a:r>
-              <a:rPr lang="en-US" sz="900" dirty="0">
-                <a:solidFill>
-                  <a:srgbClr val="6E6E6E"/>
-                </a:solidFill>
-                <a:latin typeface="Arial" pitchFamily="34" charset="0"/>
-                <a:ea typeface="Arial" pitchFamily="34" charset="-122"/>
-                <a:cs typeface="Arial" pitchFamily="34" charset="-120"/>
-              </a:rPr>
-              <a:t>Why LLMs &amp; JS frameworks love Tailwind CSS</a:t>
-            </a:r>
-            <a:endParaRPr lang="en-US" sz="900" dirty="0"/>
-          </a:p>
-        </p:txBody>
-      </p:sp>
-      <p:sp>
-        <p:nvSpPr>
-          <p:cNvPr id="25" name="Text 23"/>
-          <p:cNvSpPr/>
-          <p:nvPr/>
-        </p:nvSpPr>
-        <p:spPr>
-          <a:xfrm>
-            <a:off x="10134295" y="6419088"/>
-            <a:ext cx="1463040" cy="274320"/>
-          </a:xfrm>
-          <a:prstGeom prst="rect">
-            <a:avLst/>
-          </a:prstGeom>
-          <a:noFill/>
-          <a:ln/>
-        </p:spPr>
-        <p:txBody>
-          <a:bodyPr wrap="square" lIns="0" tIns="0" rIns="0" bIns="0" rtlCol="0" anchor="ctr"/>
-          <a:lstStyle/>
-          <a:p>
-            <a:pPr marL="0" indent="0" algn="r">
-              <a:buNone/>
-            </a:pPr>
-            <a:r>
-              <a:rPr lang="en-US" sz="900" dirty="0">
-                <a:solidFill>
-                  <a:srgbClr val="6E6E6E"/>
-                </a:solidFill>
-                <a:latin typeface="Arial" pitchFamily="34" charset="0"/>
-                <a:ea typeface="Arial" pitchFamily="34" charset="-122"/>
-                <a:cs typeface="Arial" pitchFamily="34" charset="-120"/>
-              </a:rPr>
-              <a:t>17 / 29</a:t>
-            </a:r>
-            <a:endParaRPr lang="en-US" sz="900" dirty="0"/>
-          </a:p>
-        </p:txBody>
-      </p:sp>
     </p:spTree>
   </p:cSld>
   <p:clrMapOvr>
@@ -10770,84 +10101,6 @@
           </a:p>
         </p:txBody>
       </p:sp>
-      <p:sp>
-        <p:nvSpPr>
-          <p:cNvPr id="18" name="Text 16"/>
-          <p:cNvSpPr/>
-          <p:nvPr/>
-        </p:nvSpPr>
-        <p:spPr>
-          <a:xfrm>
-            <a:off x="594360" y="6419088"/>
-            <a:ext cx="8229600" cy="274320"/>
-          </a:xfrm>
-          <a:prstGeom prst="rect">
-            <a:avLst/>
-          </a:prstGeom>
-          <a:noFill/>
-          <a:ln/>
-        </p:spPr>
-        <p:txBody>
-          <a:bodyPr wrap="square" lIns="0" tIns="0" rIns="0" bIns="0" rtlCol="0" anchor="ctr"/>
-          <a:lstStyle/>
-          <a:p>
-            <a:pPr marL="0" indent="0" algn="l">
-              <a:buNone/>
-            </a:pPr>
-            <a:r>
-              <a:rPr lang="en-US" sz="900" dirty="0">
-                <a:solidFill>
-                  <a:srgbClr val="6E6E6E"/>
-                </a:solidFill>
-                <a:latin typeface="Arial" pitchFamily="34" charset="0"/>
-                <a:ea typeface="Arial" pitchFamily="34" charset="-122"/>
-                <a:cs typeface="Arial" pitchFamily="34" charset="-120"/>
-              </a:rPr>
-              <a:t>Why LLMs &amp; JS frameworks love Tailwind CSS</a:t>
-            </a:r>
-            <a:endParaRPr lang="en-US" sz="900" dirty="0"/>
-          </a:p>
-        </p:txBody>
-      </p:sp>
-      <p:sp>
-        <p:nvSpPr>
-          <p:cNvPr id="19" name="Text 17"/>
-          <p:cNvSpPr/>
-          <p:nvPr/>
-        </p:nvSpPr>
-        <p:spPr>
-          <a:xfrm>
-            <a:off x="10134295" y="6419088"/>
-            <a:ext cx="1463040" cy="274320"/>
-          </a:xfrm>
-          <a:prstGeom prst="rect">
-            <a:avLst/>
-          </a:prstGeom>
-          <a:noFill/>
-          <a:ln/>
-        </p:spPr>
-        <p:txBody>
-          <a:bodyPr wrap="square" lIns="0" tIns="0" rIns="0" bIns="0" rtlCol="0" anchor="ctr"/>
-          <a:lstStyle/>
-          <a:p>
-            <a:pPr marL="0" indent="0" algn="r">
-              <a:buNone/>
-            </a:pPr>
-            <a:r>
-              <a:rPr lang="en-US" sz="900" dirty="0">
-                <a:solidFill>
-                  <a:srgbClr val="6E6E6E"/>
-                </a:solidFill>
-                <a:latin typeface="Arial" pitchFamily="34" charset="0"/>
-                <a:ea typeface="Arial" pitchFamily="34" charset="-122"/>
-                <a:cs typeface="Arial" pitchFamily="34" charset="-120"/>
-              </a:rPr>
-              <a:t>18 / 29</a:t>
-            </a:r>
-            <a:endParaRPr lang="en-US" sz="900" dirty="0"/>
-          </a:p>
-        </p:txBody>
-      </p:sp>
     </p:spTree>
   </p:cSld>
   <p:clrMapOvr>
@@ -10883,45 +10136,6 @@
       </p:grpSpPr>
       <p:sp>
         <p:nvSpPr>
-          <p:cNvPr id="2" name="Text 0"/>
-          <p:cNvSpPr/>
-          <p:nvPr/>
-        </p:nvSpPr>
-        <p:spPr>
-          <a:xfrm>
-            <a:off x="594360" y="502920"/>
-            <a:ext cx="11002975" cy="274320"/>
-          </a:xfrm>
-          <a:prstGeom prst="rect">
-            <a:avLst/>
-          </a:prstGeom>
-          <a:noFill/>
-          <a:ln/>
-        </p:spPr>
-        <p:txBody>
-          <a:bodyPr wrap="square" lIns="0" tIns="0" rIns="0" bIns="0" rtlCol="0" anchor="ctr"/>
-          <a:lstStyle/>
-          <a:p>
-            <a:pPr marL="0" indent="0" algn="l">
-              <a:buNone/>
-            </a:pPr>
-            <a:r>
-              <a:rPr lang="en-US" sz="1200" b="1" kern="0" spc="300" dirty="0">
-                <a:solidFill>
-                  <a:srgbClr val="F1CF25"/>
-                </a:solidFill>
-                <a:latin typeface="Arial" pitchFamily="34" charset="0"/>
-                <a:ea typeface="Arial" pitchFamily="34" charset="-122"/>
-                <a:cs typeface="Arial" pitchFamily="34" charset="-120"/>
-              </a:rPr>
-              <a:t>THE JS FRAMEWORK ANGLE</a:t>
-            </a:r>
-            <a:endParaRPr lang="en-US" sz="1200" dirty="0"/>
-          </a:p>
-        </p:txBody>
-      </p:sp>
-      <p:sp>
-        <p:nvSpPr>
           <p:cNvPr id="3" name="Text 1"/>
           <p:cNvSpPr/>
           <p:nvPr/>
@@ -11309,8 +10523,8 @@
         </p:nvSpPr>
         <p:spPr>
           <a:xfrm>
-            <a:off x="7269480" y="2743200"/>
-            <a:ext cx="4572000" cy="548640"/>
+            <a:off x="7040880" y="2743200"/>
+            <a:ext cx="4800600" cy="548640"/>
           </a:xfrm>
           <a:prstGeom prst="rect">
             <a:avLst/>
@@ -11326,7 +10540,7 @@
               <a:buNone/>
             </a:pPr>
             <a:r>
-              <a:rPr lang="en-US" sz="1600" i="1" dirty="0">
+              <a:rPr lang="en-US" i="1" dirty="0">
                 <a:solidFill>
                   <a:srgbClr val="75DFBC"/>
                 </a:solidFill>
@@ -11336,7 +10550,7 @@
               </a:rPr>
               <a:t>= one component, one file, one mental model</a:t>
             </a:r>
-            <a:endParaRPr lang="en-US" sz="1600" dirty="0"/>
+            <a:endParaRPr lang="en-US" dirty="0"/>
           </a:p>
         </p:txBody>
       </p:sp>
@@ -11729,84 +10943,6 @@
               <a:t>Angular</a:t>
             </a:r>
             <a:endParaRPr lang="en-US" sz="1600" dirty="0"/>
-          </a:p>
-        </p:txBody>
-      </p:sp>
-      <p:sp>
-        <p:nvSpPr>
-          <p:cNvPr id="25" name="Text 23"/>
-          <p:cNvSpPr/>
-          <p:nvPr/>
-        </p:nvSpPr>
-        <p:spPr>
-          <a:xfrm>
-            <a:off x="594360" y="6419088"/>
-            <a:ext cx="8229600" cy="274320"/>
-          </a:xfrm>
-          <a:prstGeom prst="rect">
-            <a:avLst/>
-          </a:prstGeom>
-          <a:noFill/>
-          <a:ln/>
-        </p:spPr>
-        <p:txBody>
-          <a:bodyPr wrap="square" lIns="0" tIns="0" rIns="0" bIns="0" rtlCol="0" anchor="ctr"/>
-          <a:lstStyle/>
-          <a:p>
-            <a:pPr marL="0" indent="0" algn="l">
-              <a:buNone/>
-            </a:pPr>
-            <a:r>
-              <a:rPr lang="en-US" sz="900" dirty="0">
-                <a:solidFill>
-                  <a:srgbClr val="6E6E6E"/>
-                </a:solidFill>
-                <a:latin typeface="Arial" pitchFamily="34" charset="0"/>
-                <a:ea typeface="Arial" pitchFamily="34" charset="-122"/>
-                <a:cs typeface="Arial" pitchFamily="34" charset="-120"/>
-              </a:rPr>
-              <a:t>Why LLMs &amp; JS frameworks love Tailwind CSS</a:t>
-            </a:r>
-            <a:endParaRPr lang="en-US" sz="900" dirty="0"/>
-          </a:p>
-        </p:txBody>
-      </p:sp>
-      <p:sp>
-        <p:nvSpPr>
-          <p:cNvPr id="26" name="Text 24"/>
-          <p:cNvSpPr/>
-          <p:nvPr/>
-        </p:nvSpPr>
-        <p:spPr>
-          <a:xfrm>
-            <a:off x="10134295" y="6419088"/>
-            <a:ext cx="1463040" cy="274320"/>
-          </a:xfrm>
-          <a:prstGeom prst="rect">
-            <a:avLst/>
-          </a:prstGeom>
-          <a:noFill/>
-          <a:ln/>
-        </p:spPr>
-        <p:txBody>
-          <a:bodyPr wrap="square" lIns="0" tIns="0" rIns="0" bIns="0" rtlCol="0" anchor="ctr"/>
-          <a:lstStyle/>
-          <a:p>
-            <a:pPr marL="0" indent="0" algn="r">
-              <a:buNone/>
-            </a:pPr>
-            <a:r>
-              <a:rPr lang="en-US" sz="900" dirty="0">
-                <a:solidFill>
-                  <a:srgbClr val="6E6E6E"/>
-                </a:solidFill>
-                <a:latin typeface="Arial" pitchFamily="34" charset="0"/>
-                <a:ea typeface="Arial" pitchFamily="34" charset="-122"/>
-                <a:cs typeface="Arial" pitchFamily="34" charset="-120"/>
-              </a:rPr>
-              <a:t>19 / 29</a:t>
-            </a:r>
-            <a:endParaRPr lang="en-US" sz="900" dirty="0"/>
           </a:p>
         </p:txBody>
       </p:sp>
@@ -11944,45 +11080,6 @@
           </a:p>
         </p:txBody>
       </p:sp>
-      <p:sp>
-        <p:nvSpPr>
-          <p:cNvPr id="4" name="Text 2"/>
-          <p:cNvSpPr/>
-          <p:nvPr/>
-        </p:nvSpPr>
-        <p:spPr>
-          <a:xfrm>
-            <a:off x="1097280" y="4480560"/>
-            <a:ext cx="9997135" cy="640080"/>
-          </a:xfrm>
-          <a:prstGeom prst="rect">
-            <a:avLst/>
-          </a:prstGeom>
-          <a:noFill/>
-          <a:ln/>
-        </p:spPr>
-        <p:txBody>
-          <a:bodyPr wrap="square" lIns="0" tIns="0" rIns="0" bIns="0" rtlCol="0" anchor="ctr"/>
-          <a:lstStyle/>
-          <a:p>
-            <a:pPr marL="0" indent="0" algn="l">
-              <a:buNone/>
-            </a:pPr>
-            <a:r>
-              <a:rPr lang="en-US" sz="2400" i="1" dirty="0">
-                <a:solidFill>
-                  <a:srgbClr val="A6A6A6"/>
-                </a:solidFill>
-                <a:latin typeface="Arial" pitchFamily="34" charset="0"/>
-                <a:ea typeface="Arial" pitchFamily="34" charset="-122"/>
-                <a:cs typeface="Arial" pitchFamily="34" charset="-120"/>
-              </a:rPr>
-              <a:t>Today: why that joke is the problem for humans and for machines.</a:t>
-            </a:r>
-            <a:endParaRPr lang="en-US" sz="2400" dirty="0"/>
-          </a:p>
-        </p:txBody>
-      </p:sp>
     </p:spTree>
   </p:cSld>
   <p:clrMapOvr>
@@ -12018,52 +11115,13 @@
       </p:grpSpPr>
       <p:sp>
         <p:nvSpPr>
-          <p:cNvPr id="2" name="Text 0"/>
-          <p:cNvSpPr/>
-          <p:nvPr/>
-        </p:nvSpPr>
-        <p:spPr>
-          <a:xfrm>
-            <a:off x="594360" y="502920"/>
-            <a:ext cx="11002975" cy="274320"/>
-          </a:xfrm>
-          <a:prstGeom prst="rect">
-            <a:avLst/>
-          </a:prstGeom>
-          <a:noFill/>
-          <a:ln/>
-        </p:spPr>
-        <p:txBody>
-          <a:bodyPr wrap="square" lIns="0" tIns="0" rIns="0" bIns="0" rtlCol="0" anchor="ctr"/>
-          <a:lstStyle/>
-          <a:p>
-            <a:pPr marL="0" indent="0" algn="l">
-              <a:buNone/>
-            </a:pPr>
-            <a:r>
-              <a:rPr lang="en-US" sz="1200" b="1" kern="0" spc="300" dirty="0">
-                <a:solidFill>
-                  <a:srgbClr val="F1CF25"/>
-                </a:solidFill>
-                <a:latin typeface="Arial" pitchFamily="34" charset="0"/>
-                <a:ea typeface="Arial" pitchFamily="34" charset="-122"/>
-                <a:cs typeface="Arial" pitchFamily="34" charset="-120"/>
-              </a:rPr>
-              <a:t>THE JS FRAMEWORK ANGLE</a:t>
-            </a:r>
-            <a:endParaRPr lang="en-US" sz="1200" dirty="0"/>
-          </a:p>
-        </p:txBody>
-      </p:sp>
-      <p:sp>
-        <p:nvSpPr>
           <p:cNvPr id="3" name="Text 1"/>
           <p:cNvSpPr/>
           <p:nvPr/>
         </p:nvSpPr>
         <p:spPr>
           <a:xfrm>
-            <a:off x="594360" y="868680"/>
+            <a:off x="591617" y="448445"/>
             <a:ext cx="11002975" cy="1005840"/>
           </a:xfrm>
           <a:prstGeom prst="rect">
@@ -12105,7 +11163,7 @@
         </p:nvSpPr>
         <p:spPr>
           <a:xfrm>
-            <a:off x="594360" y="1920240"/>
+            <a:off x="591617" y="1500005"/>
             <a:ext cx="5349240" cy="3857990"/>
           </a:xfrm>
           <a:prstGeom prst="roundRect">
@@ -12139,7 +11197,7 @@
         </p:nvSpPr>
         <p:spPr>
           <a:xfrm>
-            <a:off x="914400" y="2148840"/>
+            <a:off x="911657" y="1728605"/>
             <a:ext cx="4709160" cy="457200"/>
           </a:xfrm>
           <a:prstGeom prst="rect">
@@ -12178,7 +11236,7 @@
         </p:nvSpPr>
         <p:spPr>
           <a:xfrm>
-            <a:off x="914400" y="3108960"/>
+            <a:off x="911657" y="2688725"/>
             <a:ext cx="4709160" cy="1463040"/>
           </a:xfrm>
           <a:prstGeom prst="rect">
@@ -12244,7 +11302,7 @@
         </p:nvSpPr>
         <p:spPr>
           <a:xfrm>
-            <a:off x="914400" y="5023850"/>
+            <a:off x="911657" y="4603615"/>
             <a:ext cx="4709160" cy="548640"/>
           </a:xfrm>
           <a:prstGeom prst="rect">
@@ -12286,7 +11344,7 @@
         </p:nvSpPr>
         <p:spPr>
           <a:xfrm>
-            <a:off x="6263640" y="1920240"/>
+            <a:off x="6260897" y="1500005"/>
             <a:ext cx="5330952" cy="3857990"/>
           </a:xfrm>
           <a:prstGeom prst="roundRect">
@@ -12320,7 +11378,7 @@
         </p:nvSpPr>
         <p:spPr>
           <a:xfrm>
-            <a:off x="6583680" y="2148840"/>
+            <a:off x="6580937" y="1728605"/>
             <a:ext cx="4709160" cy="457200"/>
           </a:xfrm>
           <a:prstGeom prst="rect">
@@ -12359,7 +11417,7 @@
         </p:nvSpPr>
         <p:spPr>
           <a:xfrm>
-            <a:off x="6583680" y="3191256"/>
+            <a:off x="6580937" y="2771021"/>
             <a:ext cx="118872" cy="118872"/>
           </a:xfrm>
           <a:prstGeom prst="rect">
@@ -12386,7 +11444,7 @@
         </p:nvSpPr>
         <p:spPr>
           <a:xfrm>
-            <a:off x="6876288" y="3108960"/>
+            <a:off x="6873545" y="2688725"/>
             <a:ext cx="4553712" cy="457200"/>
           </a:xfrm>
           <a:prstGeom prst="rect">
@@ -12428,7 +11486,7 @@
         </p:nvSpPr>
         <p:spPr>
           <a:xfrm>
-            <a:off x="6583680" y="3739896"/>
+            <a:off x="6580937" y="3319661"/>
             <a:ext cx="118872" cy="118872"/>
           </a:xfrm>
           <a:prstGeom prst="rect">
@@ -12455,7 +11513,7 @@
         </p:nvSpPr>
         <p:spPr>
           <a:xfrm>
-            <a:off x="6876288" y="3657600"/>
+            <a:off x="6873545" y="3237365"/>
             <a:ext cx="4553712" cy="457200"/>
           </a:xfrm>
           <a:prstGeom prst="rect">
@@ -12497,7 +11555,7 @@
         </p:nvSpPr>
         <p:spPr>
           <a:xfrm>
-            <a:off x="6583680" y="4288536"/>
+            <a:off x="6580937" y="3868301"/>
             <a:ext cx="118872" cy="118872"/>
           </a:xfrm>
           <a:prstGeom prst="rect">
@@ -12524,7 +11582,7 @@
         </p:nvSpPr>
         <p:spPr>
           <a:xfrm>
-            <a:off x="6876288" y="4206240"/>
+            <a:off x="6873545" y="3786005"/>
             <a:ext cx="4553712" cy="457200"/>
           </a:xfrm>
           <a:prstGeom prst="rect">
@@ -12566,7 +11624,7 @@
         </p:nvSpPr>
         <p:spPr>
           <a:xfrm>
-            <a:off x="6563641" y="5023850"/>
+            <a:off x="6560898" y="4603615"/>
             <a:ext cx="4709160" cy="548640"/>
           </a:xfrm>
           <a:prstGeom prst="rect">
@@ -12597,84 +11655,6 @@
               <a:t>Tailwind is a build-tool-native idea. It belongs to the JS ecosystem.</a:t>
             </a:r>
             <a:endParaRPr lang="en-US" sz="1600" dirty="0"/>
-          </a:p>
-        </p:txBody>
-      </p:sp>
-      <p:sp>
-        <p:nvSpPr>
-          <p:cNvPr id="17" name="Text 15"/>
-          <p:cNvSpPr/>
-          <p:nvPr/>
-        </p:nvSpPr>
-        <p:spPr>
-          <a:xfrm>
-            <a:off x="594360" y="6419088"/>
-            <a:ext cx="8229600" cy="274320"/>
-          </a:xfrm>
-          <a:prstGeom prst="rect">
-            <a:avLst/>
-          </a:prstGeom>
-          <a:noFill/>
-          <a:ln/>
-        </p:spPr>
-        <p:txBody>
-          <a:bodyPr wrap="square" lIns="0" tIns="0" rIns="0" bIns="0" rtlCol="0" anchor="ctr"/>
-          <a:lstStyle/>
-          <a:p>
-            <a:pPr marL="0" indent="0" algn="l">
-              <a:buNone/>
-            </a:pPr>
-            <a:r>
-              <a:rPr lang="en-US" sz="900" dirty="0">
-                <a:solidFill>
-                  <a:srgbClr val="6E6E6E"/>
-                </a:solidFill>
-                <a:latin typeface="Arial" pitchFamily="34" charset="0"/>
-                <a:ea typeface="Arial" pitchFamily="34" charset="-122"/>
-                <a:cs typeface="Arial" pitchFamily="34" charset="-120"/>
-              </a:rPr>
-              <a:t>Why LLMs &amp; JS frameworks love Tailwind CSS</a:t>
-            </a:r>
-            <a:endParaRPr lang="en-US" sz="900" dirty="0"/>
-          </a:p>
-        </p:txBody>
-      </p:sp>
-      <p:sp>
-        <p:nvSpPr>
-          <p:cNvPr id="18" name="Text 16"/>
-          <p:cNvSpPr/>
-          <p:nvPr/>
-        </p:nvSpPr>
-        <p:spPr>
-          <a:xfrm>
-            <a:off x="10134295" y="6419088"/>
-            <a:ext cx="1463040" cy="274320"/>
-          </a:xfrm>
-          <a:prstGeom prst="rect">
-            <a:avLst/>
-          </a:prstGeom>
-          <a:noFill/>
-          <a:ln/>
-        </p:spPr>
-        <p:txBody>
-          <a:bodyPr wrap="square" lIns="0" tIns="0" rIns="0" bIns="0" rtlCol="0" anchor="ctr"/>
-          <a:lstStyle/>
-          <a:p>
-            <a:pPr marL="0" indent="0" algn="r">
-              <a:buNone/>
-            </a:pPr>
-            <a:r>
-              <a:rPr lang="en-US" sz="900" dirty="0">
-                <a:solidFill>
-                  <a:srgbClr val="6E6E6E"/>
-                </a:solidFill>
-                <a:latin typeface="Arial" pitchFamily="34" charset="0"/>
-                <a:ea typeface="Arial" pitchFamily="34" charset="-122"/>
-                <a:cs typeface="Arial" pitchFamily="34" charset="-120"/>
-              </a:rPr>
-              <a:t>20 / 29</a:t>
-            </a:r>
-            <a:endParaRPr lang="en-US" sz="900" dirty="0"/>
           </a:p>
         </p:txBody>
       </p:sp>
@@ -12713,52 +11693,13 @@
       </p:grpSpPr>
       <p:sp>
         <p:nvSpPr>
-          <p:cNvPr id="2" name="Text 0"/>
-          <p:cNvSpPr/>
-          <p:nvPr/>
-        </p:nvSpPr>
-        <p:spPr>
-          <a:xfrm>
-            <a:off x="594360" y="502920"/>
-            <a:ext cx="11002975" cy="274320"/>
-          </a:xfrm>
-          <a:prstGeom prst="rect">
-            <a:avLst/>
-          </a:prstGeom>
-          <a:noFill/>
-          <a:ln/>
-        </p:spPr>
-        <p:txBody>
-          <a:bodyPr wrap="square" lIns="0" tIns="0" rIns="0" bIns="0" rtlCol="0" anchor="ctr"/>
-          <a:lstStyle/>
-          <a:p>
-            <a:pPr marL="0" indent="0" algn="l">
-              <a:buNone/>
-            </a:pPr>
-            <a:r>
-              <a:rPr lang="en-US" sz="1200" b="1" kern="0" spc="300" dirty="0">
-                <a:solidFill>
-                  <a:srgbClr val="75DFBC"/>
-                </a:solidFill>
-                <a:latin typeface="Arial" pitchFamily="34" charset="0"/>
-                <a:ea typeface="Arial" pitchFamily="34" charset="-122"/>
-                <a:cs typeface="Arial" pitchFamily="34" charset="-120"/>
-              </a:rPr>
-              <a:t>THE TYPESCRIPT ANGLE</a:t>
-            </a:r>
-            <a:endParaRPr lang="en-US" sz="1200" dirty="0"/>
-          </a:p>
-        </p:txBody>
-      </p:sp>
-      <p:sp>
-        <p:nvSpPr>
           <p:cNvPr id="3" name="Text 1"/>
           <p:cNvSpPr/>
           <p:nvPr/>
         </p:nvSpPr>
         <p:spPr>
           <a:xfrm>
-            <a:off x="594360" y="868680"/>
+            <a:off x="594512" y="274320"/>
             <a:ext cx="11002975" cy="1005840"/>
           </a:xfrm>
           <a:prstGeom prst="rect">
@@ -12800,7 +11741,7 @@
         </p:nvSpPr>
         <p:spPr>
           <a:xfrm>
-            <a:off x="594360" y="1783080"/>
+            <a:off x="594512" y="1188720"/>
             <a:ext cx="11002975" cy="457200"/>
           </a:xfrm>
           <a:prstGeom prst="rect">
@@ -12839,8 +11780,8 @@
         </p:nvSpPr>
         <p:spPr>
           <a:xfrm>
-            <a:off x="594360" y="2377440"/>
-            <a:ext cx="11002975" cy="3502152"/>
+            <a:off x="594512" y="1783080"/>
+            <a:ext cx="11002975" cy="4468430"/>
           </a:xfrm>
           <a:prstGeom prst="roundRect">
             <a:avLst>
@@ -12873,7 +11814,7 @@
         </p:nvSpPr>
         <p:spPr>
           <a:xfrm>
-            <a:off x="813816" y="2560320"/>
+            <a:off x="813968" y="1965960"/>
             <a:ext cx="100584" cy="100584"/>
           </a:xfrm>
           <a:prstGeom prst="ellipse">
@@ -12900,7 +11841,7 @@
         </p:nvSpPr>
         <p:spPr>
           <a:xfrm>
-            <a:off x="1014984" y="2560320"/>
+            <a:off x="1015136" y="1965960"/>
             <a:ext cx="100584" cy="100584"/>
           </a:xfrm>
           <a:prstGeom prst="ellipse">
@@ -12927,7 +11868,7 @@
         </p:nvSpPr>
         <p:spPr>
           <a:xfrm>
-            <a:off x="1216152" y="2560320"/>
+            <a:off x="1216304" y="1965960"/>
             <a:ext cx="100584" cy="100584"/>
           </a:xfrm>
           <a:prstGeom prst="ellipse">
@@ -12954,7 +11895,7 @@
         </p:nvSpPr>
         <p:spPr>
           <a:xfrm>
-            <a:off x="1508760" y="2450592"/>
+            <a:off x="1508912" y="1856232"/>
             <a:ext cx="9905695" cy="292608"/>
           </a:xfrm>
           <a:prstGeom prst="rect">
@@ -12993,8 +11934,8 @@
         </p:nvSpPr>
         <p:spPr>
           <a:xfrm>
-            <a:off x="886968" y="2926080"/>
-            <a:ext cx="10417759" cy="2667324"/>
+            <a:off x="887120" y="2331720"/>
+            <a:ext cx="10417759" cy="3649202"/>
           </a:xfrm>
           <a:prstGeom prst="rect">
             <a:avLst/>
@@ -13013,7 +11954,7 @@
               <a:buNone/>
             </a:pPr>
             <a:r>
-              <a:rPr lang="en-US" sz="2000" dirty="0">
+              <a:rPr lang="en-US" sz="2400" dirty="0">
                 <a:solidFill>
                   <a:srgbClr val="D8D8D8"/>
                 </a:solidFill>
@@ -13024,7 +11965,7 @@
               <a:t>const button = </a:t>
             </a:r>
             <a:r>
-              <a:rPr lang="en-US" sz="2000" dirty="0">
+              <a:rPr lang="en-US" sz="2400" dirty="0">
                 <a:solidFill>
                   <a:srgbClr val="75DFBC"/>
                 </a:solidFill>
@@ -13035,7 +11976,7 @@
               <a:t>cva</a:t>
             </a:r>
             <a:r>
-              <a:rPr lang="en-US" sz="2000" dirty="0">
+              <a:rPr lang="en-US" sz="2400" dirty="0">
                 <a:solidFill>
                   <a:srgbClr val="D8D8D8"/>
                 </a:solidFill>
@@ -13045,7 +11986,7 @@
               </a:rPr>
               <a:t>("rounded-lg font-bold", {</a:t>
             </a:r>
-            <a:endParaRPr lang="en-US" sz="2000" dirty="0">
+            <a:endParaRPr lang="en-US" sz="2400" dirty="0">
               <a:latin typeface="Cascadia Code" panose="020B0609020000020004" pitchFamily="49" charset="0"/>
               <a:cs typeface="Cascadia Code" panose="020B0609020000020004" pitchFamily="49" charset="0"/>
             </a:endParaRPr>
@@ -13058,7 +11999,7 @@
               <a:buNone/>
             </a:pPr>
             <a:r>
-              <a:rPr lang="en-US" sz="2000" dirty="0">
+              <a:rPr lang="en-US" sz="2400" dirty="0">
                 <a:solidFill>
                   <a:srgbClr val="9CDCFE"/>
                 </a:solidFill>
@@ -13069,7 +12010,7 @@
               <a:t>  variants</a:t>
             </a:r>
             <a:r>
-              <a:rPr lang="en-US" sz="2000" dirty="0">
+              <a:rPr lang="en-US" sz="2400" dirty="0">
                 <a:solidFill>
                   <a:srgbClr val="D8D8D8"/>
                 </a:solidFill>
@@ -13079,7 +12020,7 @@
               </a:rPr>
               <a:t>: {</a:t>
             </a:r>
-            <a:endParaRPr lang="en-US" sz="2000" dirty="0">
+            <a:endParaRPr lang="en-US" sz="2400" dirty="0">
               <a:latin typeface="Cascadia Code" panose="020B0609020000020004" pitchFamily="49" charset="0"/>
               <a:cs typeface="Cascadia Code" panose="020B0609020000020004" pitchFamily="49" charset="0"/>
             </a:endParaRPr>
@@ -13092,7 +12033,7 @@
               <a:buNone/>
             </a:pPr>
             <a:r>
-              <a:rPr lang="en-US" sz="2000" dirty="0">
+              <a:rPr lang="en-US" sz="2400" dirty="0">
                 <a:solidFill>
                   <a:srgbClr val="9CDCFE"/>
                 </a:solidFill>
@@ -13103,7 +12044,7 @@
               <a:t>    variant</a:t>
             </a:r>
             <a:r>
-              <a:rPr lang="en-US" sz="2000" dirty="0">
+              <a:rPr lang="en-US" sz="2400" dirty="0">
                 <a:solidFill>
                   <a:srgbClr val="D8D8D8"/>
                 </a:solidFill>
@@ -13114,7 +12055,7 @@
               <a:t>: { primary: </a:t>
             </a:r>
             <a:r>
-              <a:rPr lang="en-US" sz="2000" dirty="0">
+              <a:rPr lang="en-US" sz="2400" dirty="0">
                 <a:solidFill>
                   <a:srgbClr val="F1CF25"/>
                 </a:solidFill>
@@ -13125,7 +12066,7 @@
               <a:t>"bg-mint text-ink"</a:t>
             </a:r>
             <a:r>
-              <a:rPr lang="en-US" sz="2000" dirty="0">
+              <a:rPr lang="en-US" sz="2400" dirty="0">
                 <a:solidFill>
                   <a:srgbClr val="D8D8D8"/>
                 </a:solidFill>
@@ -13135,7 +12076,7 @@
               </a:rPr>
               <a:t>,</a:t>
             </a:r>
-            <a:endParaRPr lang="en-US" sz="2000" dirty="0">
+            <a:endParaRPr lang="en-US" sz="2400" dirty="0">
               <a:latin typeface="Cascadia Code" panose="020B0609020000020004" pitchFamily="49" charset="0"/>
               <a:cs typeface="Cascadia Code" panose="020B0609020000020004" pitchFamily="49" charset="0"/>
             </a:endParaRPr>
@@ -13148,7 +12089,7 @@
               <a:buNone/>
             </a:pPr>
             <a:r>
-              <a:rPr lang="en-US" sz="2000" dirty="0">
+              <a:rPr lang="en-US" sz="2400" dirty="0">
                 <a:solidFill>
                   <a:srgbClr val="D8D8D8"/>
                 </a:solidFill>
@@ -13159,7 +12100,7 @@
               <a:t>               destructive: </a:t>
             </a:r>
             <a:r>
-              <a:rPr lang="en-US" sz="2000" dirty="0">
+              <a:rPr lang="en-US" sz="2400" dirty="0">
                 <a:solidFill>
                   <a:srgbClr val="F1CF25"/>
                 </a:solidFill>
@@ -13170,7 +12111,7 @@
               <a:t>"bg-coral text-ink"</a:t>
             </a:r>
             <a:r>
-              <a:rPr lang="en-US" sz="2000" dirty="0">
+              <a:rPr lang="en-US" sz="2400" dirty="0">
                 <a:solidFill>
                   <a:srgbClr val="D8D8D8"/>
                 </a:solidFill>
@@ -13180,7 +12121,7 @@
               </a:rPr>
               <a:t> },</a:t>
             </a:r>
-            <a:endParaRPr lang="en-US" sz="2000" dirty="0">
+            <a:endParaRPr lang="en-US" sz="2400" dirty="0">
               <a:latin typeface="Cascadia Code" panose="020B0609020000020004" pitchFamily="49" charset="0"/>
               <a:cs typeface="Cascadia Code" panose="020B0609020000020004" pitchFamily="49" charset="0"/>
             </a:endParaRPr>
@@ -13193,7 +12134,7 @@
               <a:buNone/>
             </a:pPr>
             <a:r>
-              <a:rPr lang="en-US" sz="2000" dirty="0">
+              <a:rPr lang="en-US" sz="2400" dirty="0">
                 <a:solidFill>
                   <a:srgbClr val="9CDCFE"/>
                 </a:solidFill>
@@ -13204,7 +12145,7 @@
               <a:t>    size</a:t>
             </a:r>
             <a:r>
-              <a:rPr lang="en-US" sz="2000" dirty="0">
+              <a:rPr lang="en-US" sz="2400" dirty="0">
                 <a:solidFill>
                   <a:srgbClr val="D8D8D8"/>
                 </a:solidFill>
@@ -13215,7 +12156,7 @@
               <a:t>: { sm: </a:t>
             </a:r>
             <a:r>
-              <a:rPr lang="en-US" sz="2000" dirty="0">
+              <a:rPr lang="en-US" sz="2400" dirty="0">
                 <a:solidFill>
                   <a:srgbClr val="F1CF25"/>
                 </a:solidFill>
@@ -13226,7 +12167,7 @@
               <a:t>"h-8 px-3"</a:t>
             </a:r>
             <a:r>
-              <a:rPr lang="en-US" sz="2000" dirty="0">
+              <a:rPr lang="en-US" sz="2400" dirty="0">
                 <a:solidFill>
                   <a:srgbClr val="D8D8D8"/>
                 </a:solidFill>
@@ -13237,7 +12178,7 @@
               <a:t>, lg: </a:t>
             </a:r>
             <a:r>
-              <a:rPr lang="en-US" sz="2000" dirty="0">
+              <a:rPr lang="en-US" sz="2400" dirty="0">
                 <a:solidFill>
                   <a:srgbClr val="F1CF25"/>
                 </a:solidFill>
@@ -13248,7 +12189,7 @@
               <a:t>"h-12 px-6"</a:t>
             </a:r>
             <a:r>
-              <a:rPr lang="en-US" sz="2000" dirty="0">
+              <a:rPr lang="en-US" sz="2400" dirty="0">
                 <a:solidFill>
                   <a:srgbClr val="D8D8D8"/>
                 </a:solidFill>
@@ -13258,7 +12199,7 @@
               </a:rPr>
               <a:t> },</a:t>
             </a:r>
-            <a:endParaRPr lang="en-US" sz="2000" dirty="0">
+            <a:endParaRPr lang="en-US" sz="2400" dirty="0">
               <a:latin typeface="Cascadia Code" panose="020B0609020000020004" pitchFamily="49" charset="0"/>
               <a:cs typeface="Cascadia Code" panose="020B0609020000020004" pitchFamily="49" charset="0"/>
             </a:endParaRPr>
@@ -13271,7 +12212,7 @@
               <a:buNone/>
             </a:pPr>
             <a:r>
-              <a:rPr lang="en-US" sz="2000" dirty="0">
+              <a:rPr lang="en-US" sz="2400" dirty="0">
                 <a:solidFill>
                   <a:srgbClr val="D8D8D8"/>
                 </a:solidFill>
@@ -13281,7 +12222,7 @@
               </a:rPr>
               <a:t>  },</a:t>
             </a:r>
-            <a:endParaRPr lang="en-US" sz="2000" dirty="0">
+            <a:endParaRPr lang="en-US" sz="2400" dirty="0">
               <a:latin typeface="Cascadia Code" panose="020B0609020000020004" pitchFamily="49" charset="0"/>
               <a:cs typeface="Cascadia Code" panose="020B0609020000020004" pitchFamily="49" charset="0"/>
             </a:endParaRPr>
@@ -13294,7 +12235,7 @@
               <a:buNone/>
             </a:pPr>
             <a:r>
-              <a:rPr lang="en-US" sz="2000" dirty="0">
+              <a:rPr lang="en-US" sz="2400" dirty="0">
                 <a:solidFill>
                   <a:srgbClr val="D8D8D8"/>
                 </a:solidFill>
@@ -13305,7 +12246,7 @@
               <a:t>})</a:t>
             </a:r>
             <a:r>
-              <a:rPr lang="en-US" sz="2000" dirty="0">
+              <a:rPr lang="en-US" sz="2400" dirty="0">
                 <a:solidFill>
                   <a:srgbClr val="6E6E6E"/>
                 </a:solidFill>
@@ -13315,380 +12256,10 @@
               </a:rPr>
               <a:t>   // ← variants are now type-checked &amp; autocompleted</a:t>
             </a:r>
-            <a:endParaRPr lang="en-US" sz="2000" dirty="0">
+            <a:endParaRPr lang="en-US" sz="2400" dirty="0">
               <a:latin typeface="Cascadia Code" panose="020B0609020000020004" pitchFamily="49" charset="0"/>
               <a:cs typeface="Cascadia Code" panose="020B0609020000020004" pitchFamily="49" charset="0"/>
             </a:endParaRPr>
-          </a:p>
-        </p:txBody>
-      </p:sp>
-      <p:sp>
-        <p:nvSpPr>
-          <p:cNvPr id="11" name="Shape 9"/>
-          <p:cNvSpPr/>
-          <p:nvPr/>
-        </p:nvSpPr>
-        <p:spPr>
-          <a:xfrm>
-            <a:off x="594360" y="5943600"/>
-            <a:ext cx="969264" cy="411480"/>
-          </a:xfrm>
-          <a:prstGeom prst="roundRect">
-            <a:avLst>
-              <a:gd name="adj" fmla="val 50000"/>
-            </a:avLst>
-          </a:prstGeom>
-          <a:solidFill>
-            <a:srgbClr val="2C2B2B"/>
-          </a:solidFill>
-          <a:ln w="12700">
-            <a:solidFill>
-              <a:srgbClr val="75DFBC"/>
-            </a:solidFill>
-            <a:prstDash val="solid"/>
-          </a:ln>
-        </p:spPr>
-        <p:txBody>
-          <a:bodyPr/>
-          <a:lstStyle/>
-          <a:p>
-            <a:endParaRPr lang="en-US"/>
-          </a:p>
-        </p:txBody>
-      </p:sp>
-      <p:sp>
-        <p:nvSpPr>
-          <p:cNvPr id="12" name="Text 10"/>
-          <p:cNvSpPr/>
-          <p:nvPr/>
-        </p:nvSpPr>
-        <p:spPr>
-          <a:xfrm>
-            <a:off x="594360" y="5943600"/>
-            <a:ext cx="969264" cy="411480"/>
-          </a:xfrm>
-          <a:prstGeom prst="rect">
-            <a:avLst/>
-          </a:prstGeom>
-          <a:noFill/>
-          <a:ln/>
-        </p:spPr>
-        <p:txBody>
-          <a:bodyPr wrap="square" lIns="0" tIns="0" rIns="0" bIns="0" rtlCol="0" anchor="ctr"/>
-          <a:lstStyle/>
-          <a:p>
-            <a:pPr marL="0" indent="0" algn="ctr">
-              <a:buNone/>
-            </a:pPr>
-            <a:r>
-              <a:rPr lang="en-US" sz="1300" b="1" dirty="0">
-                <a:solidFill>
-                  <a:srgbClr val="75DFBC"/>
-                </a:solidFill>
-                <a:latin typeface="Arial" pitchFamily="34" charset="0"/>
-                <a:ea typeface="Arial" pitchFamily="34" charset="-122"/>
-                <a:cs typeface="Arial" pitchFamily="34" charset="-120"/>
-              </a:rPr>
-              <a:t>cva</a:t>
-            </a:r>
-            <a:endParaRPr lang="en-US" sz="1300" dirty="0"/>
-          </a:p>
-        </p:txBody>
-      </p:sp>
-      <p:sp>
-        <p:nvSpPr>
-          <p:cNvPr id="13" name="Shape 11"/>
-          <p:cNvSpPr/>
-          <p:nvPr/>
-        </p:nvSpPr>
-        <p:spPr>
-          <a:xfrm>
-            <a:off x="1792224" y="5943600"/>
-            <a:ext cx="2505456" cy="411480"/>
-          </a:xfrm>
-          <a:prstGeom prst="roundRect">
-            <a:avLst>
-              <a:gd name="adj" fmla="val 50000"/>
-            </a:avLst>
-          </a:prstGeom>
-          <a:solidFill>
-            <a:srgbClr val="2C2B2B"/>
-          </a:solidFill>
-          <a:ln w="12700">
-            <a:solidFill>
-              <a:srgbClr val="75DFBC"/>
-            </a:solidFill>
-            <a:prstDash val="solid"/>
-          </a:ln>
-        </p:spPr>
-        <p:txBody>
-          <a:bodyPr/>
-          <a:lstStyle/>
-          <a:p>
-            <a:endParaRPr lang="en-US"/>
-          </a:p>
-        </p:txBody>
-      </p:sp>
-      <p:sp>
-        <p:nvSpPr>
-          <p:cNvPr id="14" name="Text 12"/>
-          <p:cNvSpPr/>
-          <p:nvPr/>
-        </p:nvSpPr>
-        <p:spPr>
-          <a:xfrm>
-            <a:off x="1792224" y="5943600"/>
-            <a:ext cx="2505456" cy="411480"/>
-          </a:xfrm>
-          <a:prstGeom prst="rect">
-            <a:avLst/>
-          </a:prstGeom>
-          <a:noFill/>
-          <a:ln/>
-        </p:spPr>
-        <p:txBody>
-          <a:bodyPr wrap="square" lIns="0" tIns="0" rIns="0" bIns="0" rtlCol="0" anchor="ctr"/>
-          <a:lstStyle/>
-          <a:p>
-            <a:pPr marL="0" indent="0" algn="ctr">
-              <a:buNone/>
-            </a:pPr>
-            <a:r>
-              <a:rPr lang="en-US" sz="1300" b="1" dirty="0">
-                <a:solidFill>
-                  <a:srgbClr val="75DFBC"/>
-                </a:solidFill>
-                <a:latin typeface="Arial" pitchFamily="34" charset="0"/>
-                <a:ea typeface="Arial" pitchFamily="34" charset="-122"/>
-                <a:cs typeface="Arial" pitchFamily="34" charset="-120"/>
-              </a:rPr>
-              <a:t>tailwind-variants</a:t>
-            </a:r>
-            <a:endParaRPr lang="en-US" sz="1300" dirty="0"/>
-          </a:p>
-        </p:txBody>
-      </p:sp>
-      <p:sp>
-        <p:nvSpPr>
-          <p:cNvPr id="15" name="Shape 13"/>
-          <p:cNvSpPr/>
-          <p:nvPr/>
-        </p:nvSpPr>
-        <p:spPr>
-          <a:xfrm>
-            <a:off x="4526280" y="5943600"/>
-            <a:ext cx="2176272" cy="411480"/>
-          </a:xfrm>
-          <a:prstGeom prst="roundRect">
-            <a:avLst>
-              <a:gd name="adj" fmla="val 50000"/>
-            </a:avLst>
-          </a:prstGeom>
-          <a:solidFill>
-            <a:srgbClr val="2C2B2B"/>
-          </a:solidFill>
-          <a:ln w="12700">
-            <a:solidFill>
-              <a:srgbClr val="75DFBC"/>
-            </a:solidFill>
-            <a:prstDash val="solid"/>
-          </a:ln>
-        </p:spPr>
-        <p:txBody>
-          <a:bodyPr/>
-          <a:lstStyle/>
-          <a:p>
-            <a:endParaRPr lang="en-US"/>
-          </a:p>
-        </p:txBody>
-      </p:sp>
-      <p:sp>
-        <p:nvSpPr>
-          <p:cNvPr id="16" name="Text 14"/>
-          <p:cNvSpPr/>
-          <p:nvPr/>
-        </p:nvSpPr>
-        <p:spPr>
-          <a:xfrm>
-            <a:off x="4526280" y="5943600"/>
-            <a:ext cx="2176272" cy="411480"/>
-          </a:xfrm>
-          <a:prstGeom prst="rect">
-            <a:avLst/>
-          </a:prstGeom>
-          <a:noFill/>
-          <a:ln/>
-        </p:spPr>
-        <p:txBody>
-          <a:bodyPr wrap="square" lIns="0" tIns="0" rIns="0" bIns="0" rtlCol="0" anchor="ctr"/>
-          <a:lstStyle/>
-          <a:p>
-            <a:pPr marL="0" indent="0" algn="ctr">
-              <a:buNone/>
-            </a:pPr>
-            <a:r>
-              <a:rPr lang="en-US" sz="1300" b="1" dirty="0">
-                <a:solidFill>
-                  <a:srgbClr val="75DFBC"/>
-                </a:solidFill>
-                <a:latin typeface="Arial" pitchFamily="34" charset="0"/>
-                <a:ea typeface="Arial" pitchFamily="34" charset="-122"/>
-                <a:cs typeface="Arial" pitchFamily="34" charset="-120"/>
-              </a:rPr>
-              <a:t>tailwind-merge</a:t>
-            </a:r>
-            <a:endParaRPr lang="en-US" sz="1300" dirty="0"/>
-          </a:p>
-        </p:txBody>
-      </p:sp>
-      <p:sp>
-        <p:nvSpPr>
-          <p:cNvPr id="17" name="Shape 15"/>
-          <p:cNvSpPr/>
-          <p:nvPr/>
-        </p:nvSpPr>
-        <p:spPr>
-          <a:xfrm>
-            <a:off x="6931152" y="5943600"/>
-            <a:ext cx="1627632" cy="411480"/>
-          </a:xfrm>
-          <a:prstGeom prst="roundRect">
-            <a:avLst>
-              <a:gd name="adj" fmla="val 50000"/>
-            </a:avLst>
-          </a:prstGeom>
-          <a:solidFill>
-            <a:srgbClr val="2C2B2B"/>
-          </a:solidFill>
-          <a:ln w="12700">
-            <a:solidFill>
-              <a:srgbClr val="75DFBC"/>
-            </a:solidFill>
-            <a:prstDash val="solid"/>
-          </a:ln>
-        </p:spPr>
-        <p:txBody>
-          <a:bodyPr/>
-          <a:lstStyle/>
-          <a:p>
-            <a:endParaRPr lang="en-US"/>
-          </a:p>
-        </p:txBody>
-      </p:sp>
-      <p:sp>
-        <p:nvSpPr>
-          <p:cNvPr id="18" name="Text 16"/>
-          <p:cNvSpPr/>
-          <p:nvPr/>
-        </p:nvSpPr>
-        <p:spPr>
-          <a:xfrm>
-            <a:off x="6931152" y="5943600"/>
-            <a:ext cx="1627632" cy="411480"/>
-          </a:xfrm>
-          <a:prstGeom prst="rect">
-            <a:avLst/>
-          </a:prstGeom>
-          <a:noFill/>
-          <a:ln/>
-        </p:spPr>
-        <p:txBody>
-          <a:bodyPr wrap="square" lIns="0" tIns="0" rIns="0" bIns="0" rtlCol="0" anchor="ctr"/>
-          <a:lstStyle/>
-          <a:p>
-            <a:pPr marL="0" indent="0" algn="ctr">
-              <a:buNone/>
-            </a:pPr>
-            <a:r>
-              <a:rPr lang="en-US" sz="1300" b="1" dirty="0">
-                <a:solidFill>
-                  <a:srgbClr val="75DFBC"/>
-                </a:solidFill>
-                <a:latin typeface="Arial" pitchFamily="34" charset="0"/>
-                <a:ea typeface="Arial" pitchFamily="34" charset="-122"/>
-                <a:cs typeface="Arial" pitchFamily="34" charset="-120"/>
-              </a:rPr>
-              <a:t>clsx / cn</a:t>
-            </a:r>
-            <a:endParaRPr lang="en-US" sz="1300" dirty="0"/>
-          </a:p>
-        </p:txBody>
-      </p:sp>
-      <p:sp>
-        <p:nvSpPr>
-          <p:cNvPr id="19" name="Text 17"/>
-          <p:cNvSpPr/>
-          <p:nvPr/>
-        </p:nvSpPr>
-        <p:spPr>
-          <a:xfrm>
-            <a:off x="594360" y="6419088"/>
-            <a:ext cx="8229600" cy="274320"/>
-          </a:xfrm>
-          <a:prstGeom prst="rect">
-            <a:avLst/>
-          </a:prstGeom>
-          <a:noFill/>
-          <a:ln/>
-        </p:spPr>
-        <p:txBody>
-          <a:bodyPr wrap="square" lIns="0" tIns="0" rIns="0" bIns="0" rtlCol="0" anchor="ctr"/>
-          <a:lstStyle/>
-          <a:p>
-            <a:pPr marL="0" indent="0" algn="l">
-              <a:buNone/>
-            </a:pPr>
-            <a:r>
-              <a:rPr lang="en-US" sz="900" dirty="0">
-                <a:solidFill>
-                  <a:srgbClr val="6E6E6E"/>
-                </a:solidFill>
-                <a:latin typeface="Arial" pitchFamily="34" charset="0"/>
-                <a:ea typeface="Arial" pitchFamily="34" charset="-122"/>
-                <a:cs typeface="Arial" pitchFamily="34" charset="-120"/>
-              </a:rPr>
-              <a:t>Why LLMs &amp; JS frameworks love Tailwind CSS</a:t>
-            </a:r>
-            <a:endParaRPr lang="en-US" sz="900" dirty="0"/>
-          </a:p>
-        </p:txBody>
-      </p:sp>
-      <p:sp>
-        <p:nvSpPr>
-          <p:cNvPr id="20" name="Text 18"/>
-          <p:cNvSpPr/>
-          <p:nvPr/>
-        </p:nvSpPr>
-        <p:spPr>
-          <a:xfrm>
-            <a:off x="10134295" y="6419088"/>
-            <a:ext cx="1463040" cy="274320"/>
-          </a:xfrm>
-          <a:prstGeom prst="rect">
-            <a:avLst/>
-          </a:prstGeom>
-          <a:noFill/>
-          <a:ln/>
-        </p:spPr>
-        <p:txBody>
-          <a:bodyPr wrap="square" lIns="0" tIns="0" rIns="0" bIns="0" rtlCol="0" anchor="ctr"/>
-          <a:lstStyle/>
-          <a:p>
-            <a:pPr marL="0" indent="0" algn="r">
-              <a:buNone/>
-            </a:pPr>
-            <a:r>
-              <a:rPr lang="en-US" sz="900" dirty="0">
-                <a:solidFill>
-                  <a:srgbClr val="6E6E6E"/>
-                </a:solidFill>
-                <a:latin typeface="Arial" pitchFamily="34" charset="0"/>
-                <a:ea typeface="Arial" pitchFamily="34" charset="-122"/>
-                <a:cs typeface="Arial" pitchFamily="34" charset="-120"/>
-              </a:rPr>
-              <a:t>21 / 29</a:t>
-            </a:r>
-            <a:endParaRPr lang="en-US" sz="900" dirty="0"/>
           </a:p>
         </p:txBody>
       </p:sp>
@@ -14081,84 +12652,6 @@
           </a:p>
         </p:txBody>
       </p:sp>
-      <p:sp>
-        <p:nvSpPr>
-          <p:cNvPr id="12" name="Text 10"/>
-          <p:cNvSpPr/>
-          <p:nvPr/>
-        </p:nvSpPr>
-        <p:spPr>
-          <a:xfrm>
-            <a:off x="594360" y="6419088"/>
-            <a:ext cx="8229600" cy="274320"/>
-          </a:xfrm>
-          <a:prstGeom prst="rect">
-            <a:avLst/>
-          </a:prstGeom>
-          <a:noFill/>
-          <a:ln/>
-        </p:spPr>
-        <p:txBody>
-          <a:bodyPr wrap="square" lIns="0" tIns="0" rIns="0" bIns="0" rtlCol="0" anchor="ctr"/>
-          <a:lstStyle/>
-          <a:p>
-            <a:pPr marL="0" indent="0" algn="l">
-              <a:buNone/>
-            </a:pPr>
-            <a:r>
-              <a:rPr lang="en-US" sz="900" dirty="0">
-                <a:solidFill>
-                  <a:srgbClr val="6E6E6E"/>
-                </a:solidFill>
-                <a:latin typeface="Arial" pitchFamily="34" charset="0"/>
-                <a:ea typeface="Arial" pitchFamily="34" charset="-122"/>
-                <a:cs typeface="Arial" pitchFamily="34" charset="-120"/>
-              </a:rPr>
-              <a:t>Why LLMs &amp; JS frameworks love Tailwind CSS</a:t>
-            </a:r>
-            <a:endParaRPr lang="en-US" sz="900" dirty="0"/>
-          </a:p>
-        </p:txBody>
-      </p:sp>
-      <p:sp>
-        <p:nvSpPr>
-          <p:cNvPr id="13" name="Text 11"/>
-          <p:cNvSpPr/>
-          <p:nvPr/>
-        </p:nvSpPr>
-        <p:spPr>
-          <a:xfrm>
-            <a:off x="10134295" y="6419088"/>
-            <a:ext cx="1463040" cy="274320"/>
-          </a:xfrm>
-          <a:prstGeom prst="rect">
-            <a:avLst/>
-          </a:prstGeom>
-          <a:noFill/>
-          <a:ln/>
-        </p:spPr>
-        <p:txBody>
-          <a:bodyPr wrap="square" lIns="0" tIns="0" rIns="0" bIns="0" rtlCol="0" anchor="ctr"/>
-          <a:lstStyle/>
-          <a:p>
-            <a:pPr marL="0" indent="0" algn="r">
-              <a:buNone/>
-            </a:pPr>
-            <a:r>
-              <a:rPr lang="en-US" sz="900" dirty="0">
-                <a:solidFill>
-                  <a:srgbClr val="6E6E6E"/>
-                </a:solidFill>
-                <a:latin typeface="Arial" pitchFamily="34" charset="0"/>
-                <a:ea typeface="Arial" pitchFamily="34" charset="-122"/>
-                <a:cs typeface="Arial" pitchFamily="34" charset="-120"/>
-              </a:rPr>
-              <a:t>22 / 29</a:t>
-            </a:r>
-            <a:endParaRPr lang="en-US" sz="900" dirty="0"/>
-          </a:p>
-        </p:txBody>
-      </p:sp>
     </p:spTree>
   </p:cSld>
   <p:clrMapOvr>
@@ -14548,84 +13041,6 @@
           </a:p>
         </p:txBody>
       </p:sp>
-      <p:sp>
-        <p:nvSpPr>
-          <p:cNvPr id="12" name="Text 10"/>
-          <p:cNvSpPr/>
-          <p:nvPr/>
-        </p:nvSpPr>
-        <p:spPr>
-          <a:xfrm>
-            <a:off x="594360" y="6419088"/>
-            <a:ext cx="8229600" cy="274320"/>
-          </a:xfrm>
-          <a:prstGeom prst="rect">
-            <a:avLst/>
-          </a:prstGeom>
-          <a:noFill/>
-          <a:ln/>
-        </p:spPr>
-        <p:txBody>
-          <a:bodyPr wrap="square" lIns="0" tIns="0" rIns="0" bIns="0" rtlCol="0" anchor="ctr"/>
-          <a:lstStyle/>
-          <a:p>
-            <a:pPr marL="0" indent="0" algn="l">
-              <a:buNone/>
-            </a:pPr>
-            <a:r>
-              <a:rPr lang="en-US" sz="900" dirty="0">
-                <a:solidFill>
-                  <a:srgbClr val="6E6E6E"/>
-                </a:solidFill>
-                <a:latin typeface="Arial" pitchFamily="34" charset="0"/>
-                <a:ea typeface="Arial" pitchFamily="34" charset="-122"/>
-                <a:cs typeface="Arial" pitchFamily="34" charset="-120"/>
-              </a:rPr>
-              <a:t>Why LLMs &amp; JS frameworks love Tailwind CSS</a:t>
-            </a:r>
-            <a:endParaRPr lang="en-US" sz="900" dirty="0"/>
-          </a:p>
-        </p:txBody>
-      </p:sp>
-      <p:sp>
-        <p:nvSpPr>
-          <p:cNvPr id="13" name="Text 11"/>
-          <p:cNvSpPr/>
-          <p:nvPr/>
-        </p:nvSpPr>
-        <p:spPr>
-          <a:xfrm>
-            <a:off x="10134295" y="6419088"/>
-            <a:ext cx="1463040" cy="274320"/>
-          </a:xfrm>
-          <a:prstGeom prst="rect">
-            <a:avLst/>
-          </a:prstGeom>
-          <a:noFill/>
-          <a:ln/>
-        </p:spPr>
-        <p:txBody>
-          <a:bodyPr wrap="square" lIns="0" tIns="0" rIns="0" bIns="0" rtlCol="0" anchor="ctr"/>
-          <a:lstStyle/>
-          <a:p>
-            <a:pPr marL="0" indent="0" algn="r">
-              <a:buNone/>
-            </a:pPr>
-            <a:r>
-              <a:rPr lang="en-US" sz="900" dirty="0">
-                <a:solidFill>
-                  <a:srgbClr val="6E6E6E"/>
-                </a:solidFill>
-                <a:latin typeface="Arial" pitchFamily="34" charset="0"/>
-                <a:ea typeface="Arial" pitchFamily="34" charset="-122"/>
-                <a:cs typeface="Arial" pitchFamily="34" charset="-120"/>
-              </a:rPr>
-              <a:t>23 / 29</a:t>
-            </a:r>
-            <a:endParaRPr lang="en-US" sz="900" dirty="0"/>
-          </a:p>
-        </p:txBody>
-      </p:sp>
     </p:spTree>
   </p:cSld>
   <p:clrMapOvr>
@@ -14661,45 +13076,6 @@
       </p:grpSpPr>
       <p:sp>
         <p:nvSpPr>
-          <p:cNvPr id="2" name="Text 0"/>
-          <p:cNvSpPr/>
-          <p:nvPr/>
-        </p:nvSpPr>
-        <p:spPr>
-          <a:xfrm>
-            <a:off x="594360" y="502920"/>
-            <a:ext cx="11002975" cy="274320"/>
-          </a:xfrm>
-          <a:prstGeom prst="rect">
-            <a:avLst/>
-          </a:prstGeom>
-          <a:noFill/>
-          <a:ln/>
-        </p:spPr>
-        <p:txBody>
-          <a:bodyPr wrap="square" lIns="0" tIns="0" rIns="0" bIns="0" rtlCol="0" anchor="ctr"/>
-          <a:lstStyle/>
-          <a:p>
-            <a:pPr marL="0" indent="0" algn="l">
-              <a:buNone/>
-            </a:pPr>
-            <a:r>
-              <a:rPr lang="en-US" sz="1200" b="1" kern="0" spc="300" dirty="0">
-                <a:solidFill>
-                  <a:srgbClr val="F1CF25"/>
-                </a:solidFill>
-                <a:latin typeface="Arial" pitchFamily="34" charset="0"/>
-                <a:ea typeface="Arial" pitchFamily="34" charset="-122"/>
-                <a:cs typeface="Arial" pitchFamily="34" charset="-120"/>
-              </a:rPr>
-              <a:t>THE PROOF</a:t>
-            </a:r>
-            <a:endParaRPr lang="en-US" sz="1200" dirty="0"/>
-          </a:p>
-        </p:txBody>
-      </p:sp>
-      <p:sp>
-        <p:nvSpPr>
           <p:cNvPr id="3" name="Text 1"/>
           <p:cNvSpPr/>
           <p:nvPr/>
@@ -15039,84 +13415,6 @@
               <a:t>.</a:t>
             </a:r>
             <a:endParaRPr lang="en-US" sz="2600" dirty="0"/>
-          </a:p>
-        </p:txBody>
-      </p:sp>
-      <p:sp>
-        <p:nvSpPr>
-          <p:cNvPr id="12" name="Text 10"/>
-          <p:cNvSpPr/>
-          <p:nvPr/>
-        </p:nvSpPr>
-        <p:spPr>
-          <a:xfrm>
-            <a:off x="594360" y="6419088"/>
-            <a:ext cx="8229600" cy="274320"/>
-          </a:xfrm>
-          <a:prstGeom prst="rect">
-            <a:avLst/>
-          </a:prstGeom>
-          <a:noFill/>
-          <a:ln/>
-        </p:spPr>
-        <p:txBody>
-          <a:bodyPr wrap="square" lIns="0" tIns="0" rIns="0" bIns="0" rtlCol="0" anchor="ctr"/>
-          <a:lstStyle/>
-          <a:p>
-            <a:pPr marL="0" indent="0" algn="l">
-              <a:buNone/>
-            </a:pPr>
-            <a:r>
-              <a:rPr lang="en-US" sz="900" dirty="0">
-                <a:solidFill>
-                  <a:srgbClr val="6E6E6E"/>
-                </a:solidFill>
-                <a:latin typeface="Arial" pitchFamily="34" charset="0"/>
-                <a:ea typeface="Arial" pitchFamily="34" charset="-122"/>
-                <a:cs typeface="Arial" pitchFamily="34" charset="-120"/>
-              </a:rPr>
-              <a:t>Why LLMs &amp; JS frameworks love Tailwind CSS</a:t>
-            </a:r>
-            <a:endParaRPr lang="en-US" sz="900" dirty="0"/>
-          </a:p>
-        </p:txBody>
-      </p:sp>
-      <p:sp>
-        <p:nvSpPr>
-          <p:cNvPr id="13" name="Text 11"/>
-          <p:cNvSpPr/>
-          <p:nvPr/>
-        </p:nvSpPr>
-        <p:spPr>
-          <a:xfrm>
-            <a:off x="10134295" y="6419088"/>
-            <a:ext cx="1463040" cy="274320"/>
-          </a:xfrm>
-          <a:prstGeom prst="rect">
-            <a:avLst/>
-          </a:prstGeom>
-          <a:noFill/>
-          <a:ln/>
-        </p:spPr>
-        <p:txBody>
-          <a:bodyPr wrap="square" lIns="0" tIns="0" rIns="0" bIns="0" rtlCol="0" anchor="ctr"/>
-          <a:lstStyle/>
-          <a:p>
-            <a:pPr marL="0" indent="0" algn="r">
-              <a:buNone/>
-            </a:pPr>
-            <a:r>
-              <a:rPr lang="en-US" sz="900" dirty="0">
-                <a:solidFill>
-                  <a:srgbClr val="6E6E6E"/>
-                </a:solidFill>
-                <a:latin typeface="Arial" pitchFamily="34" charset="0"/>
-                <a:ea typeface="Arial" pitchFamily="34" charset="-122"/>
-                <a:cs typeface="Arial" pitchFamily="34" charset="-120"/>
-              </a:rPr>
-              <a:t>24 / 29</a:t>
-            </a:r>
-            <a:endParaRPr lang="en-US" sz="900" dirty="0"/>
           </a:p>
         </p:txBody>
       </p:sp>
@@ -15155,45 +13453,6 @@
       </p:grpSpPr>
       <p:sp>
         <p:nvSpPr>
-          <p:cNvPr id="2" name="Text 0"/>
-          <p:cNvSpPr/>
-          <p:nvPr/>
-        </p:nvSpPr>
-        <p:spPr>
-          <a:xfrm>
-            <a:off x="594360" y="502920"/>
-            <a:ext cx="11002975" cy="274320"/>
-          </a:xfrm>
-          <a:prstGeom prst="rect">
-            <a:avLst/>
-          </a:prstGeom>
-          <a:noFill/>
-          <a:ln/>
-        </p:spPr>
-        <p:txBody>
-          <a:bodyPr wrap="square" lIns="0" tIns="0" rIns="0" bIns="0" rtlCol="0" anchor="ctr"/>
-          <a:lstStyle/>
-          <a:p>
-            <a:pPr marL="0" indent="0" algn="l">
-              <a:buNone/>
-            </a:pPr>
-            <a:r>
-              <a:rPr lang="en-US" sz="1200" b="1" kern="0" spc="300" dirty="0">
-                <a:solidFill>
-                  <a:srgbClr val="FF6A4C"/>
-                </a:solidFill>
-                <a:latin typeface="Arial" pitchFamily="34" charset="0"/>
-                <a:ea typeface="Arial" pitchFamily="34" charset="-122"/>
-                <a:cs typeface="Arial" pitchFamily="34" charset="-120"/>
-              </a:rPr>
-              <a:t>OBJECTIONS</a:t>
-            </a:r>
-            <a:endParaRPr lang="en-US" sz="1200" dirty="0"/>
-          </a:p>
-        </p:txBody>
-      </p:sp>
-      <p:sp>
-        <p:nvSpPr>
           <p:cNvPr id="3" name="Text 1"/>
           <p:cNvSpPr/>
           <p:nvPr/>
@@ -15585,84 +13844,6 @@
               <a:t>No: design tokens + hover: / md: / dark: variants + purge. Inline styles can't do any of that.</a:t>
             </a:r>
             <a:endParaRPr lang="en-US" dirty="0"/>
-          </a:p>
-        </p:txBody>
-      </p:sp>
-      <p:sp>
-        <p:nvSpPr>
-          <p:cNvPr id="13" name="Text 11"/>
-          <p:cNvSpPr/>
-          <p:nvPr/>
-        </p:nvSpPr>
-        <p:spPr>
-          <a:xfrm>
-            <a:off x="594360" y="6419088"/>
-            <a:ext cx="8229600" cy="274320"/>
-          </a:xfrm>
-          <a:prstGeom prst="rect">
-            <a:avLst/>
-          </a:prstGeom>
-          <a:noFill/>
-          <a:ln/>
-        </p:spPr>
-        <p:txBody>
-          <a:bodyPr wrap="square" lIns="0" tIns="0" rIns="0" bIns="0" rtlCol="0" anchor="ctr"/>
-          <a:lstStyle/>
-          <a:p>
-            <a:pPr marL="0" indent="0" algn="l">
-              <a:buNone/>
-            </a:pPr>
-            <a:r>
-              <a:rPr lang="en-US" sz="900" dirty="0">
-                <a:solidFill>
-                  <a:srgbClr val="6E6E6E"/>
-                </a:solidFill>
-                <a:latin typeface="Arial" pitchFamily="34" charset="0"/>
-                <a:ea typeface="Arial" pitchFamily="34" charset="-122"/>
-                <a:cs typeface="Arial" pitchFamily="34" charset="-120"/>
-              </a:rPr>
-              <a:t>Why LLMs &amp; JS frameworks love Tailwind CSS</a:t>
-            </a:r>
-            <a:endParaRPr lang="en-US" sz="900" dirty="0"/>
-          </a:p>
-        </p:txBody>
-      </p:sp>
-      <p:sp>
-        <p:nvSpPr>
-          <p:cNvPr id="14" name="Text 12"/>
-          <p:cNvSpPr/>
-          <p:nvPr/>
-        </p:nvSpPr>
-        <p:spPr>
-          <a:xfrm>
-            <a:off x="10134295" y="6419088"/>
-            <a:ext cx="1463040" cy="274320"/>
-          </a:xfrm>
-          <a:prstGeom prst="rect">
-            <a:avLst/>
-          </a:prstGeom>
-          <a:noFill/>
-          <a:ln/>
-        </p:spPr>
-        <p:txBody>
-          <a:bodyPr wrap="square" lIns="0" tIns="0" rIns="0" bIns="0" rtlCol="0" anchor="ctr"/>
-          <a:lstStyle/>
-          <a:p>
-            <a:pPr marL="0" indent="0" algn="r">
-              <a:buNone/>
-            </a:pPr>
-            <a:r>
-              <a:rPr lang="en-US" sz="900" dirty="0">
-                <a:solidFill>
-                  <a:srgbClr val="6E6E6E"/>
-                </a:solidFill>
-                <a:latin typeface="Arial" pitchFamily="34" charset="0"/>
-                <a:ea typeface="Arial" pitchFamily="34" charset="-122"/>
-                <a:cs typeface="Arial" pitchFamily="34" charset="-120"/>
-              </a:rPr>
-              <a:t>25 / 29</a:t>
-            </a:r>
-            <a:endParaRPr lang="en-US" sz="900" dirty="0"/>
           </a:p>
         </p:txBody>
       </p:sp>
@@ -15701,45 +13882,6 @@
       </p:grpSpPr>
       <p:sp>
         <p:nvSpPr>
-          <p:cNvPr id="2" name="Text 0"/>
-          <p:cNvSpPr/>
-          <p:nvPr/>
-        </p:nvSpPr>
-        <p:spPr>
-          <a:xfrm>
-            <a:off x="594360" y="502920"/>
-            <a:ext cx="11002975" cy="274320"/>
-          </a:xfrm>
-          <a:prstGeom prst="rect">
-            <a:avLst/>
-          </a:prstGeom>
-          <a:noFill/>
-          <a:ln/>
-        </p:spPr>
-        <p:txBody>
-          <a:bodyPr wrap="square" lIns="0" tIns="0" rIns="0" bIns="0" rtlCol="0" anchor="ctr"/>
-          <a:lstStyle/>
-          <a:p>
-            <a:pPr marL="0" indent="0" algn="l">
-              <a:buNone/>
-            </a:pPr>
-            <a:r>
-              <a:rPr lang="en-US" sz="1200" b="1" kern="0" spc="300" dirty="0">
-                <a:solidFill>
-                  <a:srgbClr val="75DFBC"/>
-                </a:solidFill>
-                <a:latin typeface="Arial" pitchFamily="34" charset="0"/>
-                <a:ea typeface="Arial" pitchFamily="34" charset="-122"/>
-                <a:cs typeface="Arial" pitchFamily="34" charset="-120"/>
-              </a:rPr>
-              <a:t>MONDAY MORNING</a:t>
-            </a:r>
-            <a:endParaRPr lang="en-US" sz="1200" dirty="0"/>
-          </a:p>
-        </p:txBody>
-      </p:sp>
-      <p:sp>
-        <p:nvSpPr>
           <p:cNvPr id="3" name="Text 1"/>
           <p:cNvSpPr/>
           <p:nvPr/>
@@ -16302,84 +14444,6 @@
               <a:t>Let the LLM speed compound. Measure PR velocity.</a:t>
             </a:r>
             <a:endParaRPr lang="en-US" sz="1800" dirty="0"/>
-          </a:p>
-        </p:txBody>
-      </p:sp>
-      <p:sp>
-        <p:nvSpPr>
-          <p:cNvPr id="19" name="Text 17"/>
-          <p:cNvSpPr/>
-          <p:nvPr/>
-        </p:nvSpPr>
-        <p:spPr>
-          <a:xfrm>
-            <a:off x="594360" y="6419088"/>
-            <a:ext cx="8229600" cy="274320"/>
-          </a:xfrm>
-          <a:prstGeom prst="rect">
-            <a:avLst/>
-          </a:prstGeom>
-          <a:noFill/>
-          <a:ln/>
-        </p:spPr>
-        <p:txBody>
-          <a:bodyPr wrap="square" lIns="0" tIns="0" rIns="0" bIns="0" rtlCol="0" anchor="ctr"/>
-          <a:lstStyle/>
-          <a:p>
-            <a:pPr marL="0" indent="0" algn="l">
-              <a:buNone/>
-            </a:pPr>
-            <a:r>
-              <a:rPr lang="en-US" sz="900" dirty="0">
-                <a:solidFill>
-                  <a:srgbClr val="6E6E6E"/>
-                </a:solidFill>
-                <a:latin typeface="Arial" pitchFamily="34" charset="0"/>
-                <a:ea typeface="Arial" pitchFamily="34" charset="-122"/>
-                <a:cs typeface="Arial" pitchFamily="34" charset="-120"/>
-              </a:rPr>
-              <a:t>Why LLMs &amp; JS frameworks love Tailwind CSS</a:t>
-            </a:r>
-            <a:endParaRPr lang="en-US" sz="900" dirty="0"/>
-          </a:p>
-        </p:txBody>
-      </p:sp>
-      <p:sp>
-        <p:nvSpPr>
-          <p:cNvPr id="20" name="Text 18"/>
-          <p:cNvSpPr/>
-          <p:nvPr/>
-        </p:nvSpPr>
-        <p:spPr>
-          <a:xfrm>
-            <a:off x="10134295" y="6419088"/>
-            <a:ext cx="1463040" cy="274320"/>
-          </a:xfrm>
-          <a:prstGeom prst="rect">
-            <a:avLst/>
-          </a:prstGeom>
-          <a:noFill/>
-          <a:ln/>
-        </p:spPr>
-        <p:txBody>
-          <a:bodyPr wrap="square" lIns="0" tIns="0" rIns="0" bIns="0" rtlCol="0" anchor="ctr"/>
-          <a:lstStyle/>
-          <a:p>
-            <a:pPr marL="0" indent="0" algn="r">
-              <a:buNone/>
-            </a:pPr>
-            <a:r>
-              <a:rPr lang="en-US" sz="900" dirty="0">
-                <a:solidFill>
-                  <a:srgbClr val="6E6E6E"/>
-                </a:solidFill>
-                <a:latin typeface="Arial" pitchFamily="34" charset="0"/>
-                <a:ea typeface="Arial" pitchFamily="34" charset="-122"/>
-                <a:cs typeface="Arial" pitchFamily="34" charset="-120"/>
-              </a:rPr>
-              <a:t>26 / 29</a:t>
-            </a:r>
-            <a:endParaRPr lang="en-US" sz="900" dirty="0"/>
           </a:p>
         </p:txBody>
       </p:sp>
@@ -16457,106 +14521,64 @@
       </p:sp>
       <p:sp>
         <p:nvSpPr>
-          <p:cNvPr id="3" name="Text 1"/>
-          <p:cNvSpPr/>
-          <p:nvPr/>
-        </p:nvSpPr>
-        <p:spPr>
-          <a:xfrm>
-            <a:off x="594360" y="868680"/>
-            <a:ext cx="11002975" cy="1005840"/>
-          </a:xfrm>
-          <a:prstGeom prst="rect">
-            <a:avLst/>
-          </a:prstGeom>
-          <a:noFill/>
-          <a:ln/>
-        </p:spPr>
-        <p:txBody>
-          <a:bodyPr wrap="square" lIns="0" tIns="0" rIns="0" bIns="0" rtlCol="0" anchor="t"/>
-          <a:lstStyle/>
-          <a:p>
-            <a:pPr marL="0" indent="0" algn="l">
-              <a:lnSpc>
-                <a:spcPct val="102000"/>
-              </a:lnSpc>
-              <a:buNone/>
-            </a:pPr>
-            <a:r>
-              <a:rPr lang="en-US" sz="3400" b="1" dirty="0">
-                <a:solidFill>
-                  <a:srgbClr val="FFFFFF"/>
+          <p:cNvPr id="4" name="Shape 2"/>
+          <p:cNvSpPr/>
+          <p:nvPr/>
+        </p:nvSpPr>
+        <p:spPr>
+          <a:xfrm>
+            <a:off x="594360" y="2011680"/>
+            <a:ext cx="603504" cy="603504"/>
+          </a:xfrm>
+          <a:prstGeom prst="ellipse">
+            <a:avLst/>
+          </a:prstGeom>
+          <a:solidFill>
+            <a:srgbClr val="75DFBC"/>
+          </a:solidFill>
+          <a:ln/>
+        </p:spPr>
+        <p:txBody>
+          <a:bodyPr/>
+          <a:lstStyle/>
+          <a:p>
+            <a:endParaRPr lang="en-US"/>
+          </a:p>
+        </p:txBody>
+      </p:sp>
+      <p:sp>
+        <p:nvSpPr>
+          <p:cNvPr id="5" name="Text 3"/>
+          <p:cNvSpPr/>
+          <p:nvPr/>
+        </p:nvSpPr>
+        <p:spPr>
+          <a:xfrm>
+            <a:off x="594360" y="2011680"/>
+            <a:ext cx="603504" cy="603504"/>
+          </a:xfrm>
+          <a:prstGeom prst="rect">
+            <a:avLst/>
+          </a:prstGeom>
+          <a:noFill/>
+          <a:ln/>
+        </p:spPr>
+        <p:txBody>
+          <a:bodyPr wrap="square" lIns="0" tIns="0" rIns="0" bIns="0" rtlCol="0" anchor="ctr"/>
+          <a:lstStyle/>
+          <a:p>
+            <a:pPr marL="0" indent="0" algn="ctr">
+              <a:buNone/>
+            </a:pPr>
+            <a:r>
+              <a:rPr lang="en-US" sz="2600" b="1" dirty="0">
+                <a:solidFill>
+                  <a:srgbClr val="222121"/>
                 </a:solidFill>
                 <a:latin typeface="Arial" pitchFamily="34" charset="0"/>
                 <a:ea typeface="Arial" pitchFamily="34" charset="-122"/>
                 <a:cs typeface="Arial" pitchFamily="34" charset="-120"/>
               </a:rPr>
-              <a:t>What to remember</a:t>
-            </a:r>
-            <a:endParaRPr lang="en-US" sz="3400" dirty="0"/>
-          </a:p>
-        </p:txBody>
-      </p:sp>
-      <p:sp>
-        <p:nvSpPr>
-          <p:cNvPr id="4" name="Shape 2"/>
-          <p:cNvSpPr/>
-          <p:nvPr/>
-        </p:nvSpPr>
-        <p:spPr>
-          <a:xfrm>
-            <a:off x="594360" y="2011680"/>
-            <a:ext cx="603504" cy="603504"/>
-          </a:xfrm>
-          <a:prstGeom prst="ellipse">
-            <a:avLst/>
-          </a:prstGeom>
-          <a:solidFill>
-            <a:srgbClr val="75DFBC"/>
-          </a:solidFill>
-          <a:ln/>
-        </p:spPr>
-        <p:txBody>
-          <a:bodyPr/>
-          <a:lstStyle/>
-          <a:p>
-            <a:endParaRPr lang="en-US"/>
-          </a:p>
-        </p:txBody>
-      </p:sp>
-      <p:sp>
-        <p:nvSpPr>
-          <p:cNvPr id="5" name="Text 3"/>
-          <p:cNvSpPr/>
-          <p:nvPr/>
-        </p:nvSpPr>
-        <p:spPr>
-          <a:xfrm>
-            <a:off x="594360" y="2011680"/>
-            <a:ext cx="603504" cy="603504"/>
-          </a:xfrm>
-          <a:prstGeom prst="rect">
-            <a:avLst/>
-          </a:prstGeom>
-          <a:noFill/>
-          <a:ln/>
-        </p:spPr>
-        <p:txBody>
-          <a:bodyPr wrap="square" lIns="0" tIns="0" rIns="0" bIns="0" rtlCol="0" anchor="ctr"/>
-          <a:lstStyle/>
-          <a:p>
-            <a:pPr marL="0" indent="0" algn="ctr">
-              <a:buNone/>
-            </a:pPr>
-            <a:r>
-              <a:rPr lang="en-US" sz="2600" b="1" dirty="0">
-                <a:solidFill>
-                  <a:srgbClr val="222121"/>
-                </a:solidFill>
-                <a:latin typeface="Arial" pitchFamily="34" charset="0"/>
-                <a:ea typeface="Arial" pitchFamily="34" charset="-122"/>
-                <a:cs typeface="Arial" pitchFamily="34" charset="-120"/>
-              </a:rPr>
               <a:t>1</a:t>
             </a:r>
             <a:endParaRPr lang="en-US" sz="2600" dirty="0"/>
@@ -16571,7 +14593,7 @@
         </p:nvSpPr>
         <p:spPr>
           <a:xfrm>
-            <a:off x="1508760" y="2011680"/>
+            <a:off x="1508760" y="1897380"/>
             <a:ext cx="10088575" cy="822960"/>
           </a:xfrm>
           <a:prstGeom prst="rect">
@@ -16679,7 +14701,7 @@
         </p:nvSpPr>
         <p:spPr>
           <a:xfrm>
-            <a:off x="1508760" y="2926080"/>
+            <a:off x="1508760" y="2811780"/>
             <a:ext cx="10088575" cy="822960"/>
           </a:xfrm>
           <a:prstGeom prst="rect">
@@ -16787,7 +14809,7 @@
         </p:nvSpPr>
         <p:spPr>
           <a:xfrm>
-            <a:off x="1508760" y="3840480"/>
+            <a:off x="1508760" y="3726180"/>
             <a:ext cx="10088575" cy="822960"/>
           </a:xfrm>
           <a:prstGeom prst="rect">
@@ -16895,7 +14917,7 @@
         </p:nvSpPr>
         <p:spPr>
           <a:xfrm>
-            <a:off x="1508760" y="4754880"/>
+            <a:off x="1508760" y="4645152"/>
             <a:ext cx="10088575" cy="822960"/>
           </a:xfrm>
           <a:prstGeom prst="rect">
@@ -16926,84 +14948,6 @@
               <a:t>The machines already voted. Now you have the ammunition.</a:t>
             </a:r>
             <a:endParaRPr lang="en-US" sz="1900" dirty="0"/>
-          </a:p>
-        </p:txBody>
-      </p:sp>
-      <p:sp>
-        <p:nvSpPr>
-          <p:cNvPr id="16" name="Text 14"/>
-          <p:cNvSpPr/>
-          <p:nvPr/>
-        </p:nvSpPr>
-        <p:spPr>
-          <a:xfrm>
-            <a:off x="594360" y="6419088"/>
-            <a:ext cx="8229600" cy="274320"/>
-          </a:xfrm>
-          <a:prstGeom prst="rect">
-            <a:avLst/>
-          </a:prstGeom>
-          <a:noFill/>
-          <a:ln/>
-        </p:spPr>
-        <p:txBody>
-          <a:bodyPr wrap="square" lIns="0" tIns="0" rIns="0" bIns="0" rtlCol="0" anchor="ctr"/>
-          <a:lstStyle/>
-          <a:p>
-            <a:pPr marL="0" indent="0" algn="l">
-              <a:buNone/>
-            </a:pPr>
-            <a:r>
-              <a:rPr lang="en-US" sz="900" dirty="0">
-                <a:solidFill>
-                  <a:srgbClr val="6E6E6E"/>
-                </a:solidFill>
-                <a:latin typeface="Arial" pitchFamily="34" charset="0"/>
-                <a:ea typeface="Arial" pitchFamily="34" charset="-122"/>
-                <a:cs typeface="Arial" pitchFamily="34" charset="-120"/>
-              </a:rPr>
-              <a:t>Why LLMs &amp; JS frameworks love Tailwind CSS</a:t>
-            </a:r>
-            <a:endParaRPr lang="en-US" sz="900" dirty="0"/>
-          </a:p>
-        </p:txBody>
-      </p:sp>
-      <p:sp>
-        <p:nvSpPr>
-          <p:cNvPr id="17" name="Text 15"/>
-          <p:cNvSpPr/>
-          <p:nvPr/>
-        </p:nvSpPr>
-        <p:spPr>
-          <a:xfrm>
-            <a:off x="10134295" y="6419088"/>
-            <a:ext cx="1463040" cy="274320"/>
-          </a:xfrm>
-          <a:prstGeom prst="rect">
-            <a:avLst/>
-          </a:prstGeom>
-          <a:noFill/>
-          <a:ln/>
-        </p:spPr>
-        <p:txBody>
-          <a:bodyPr wrap="square" lIns="0" tIns="0" rIns="0" bIns="0" rtlCol="0" anchor="ctr"/>
-          <a:lstStyle/>
-          <a:p>
-            <a:pPr marL="0" indent="0" algn="r">
-              <a:buNone/>
-            </a:pPr>
-            <a:r>
-              <a:rPr lang="en-US" sz="900" dirty="0">
-                <a:solidFill>
-                  <a:srgbClr val="6E6E6E"/>
-                </a:solidFill>
-                <a:latin typeface="Arial" pitchFamily="34" charset="0"/>
-                <a:ea typeface="Arial" pitchFamily="34" charset="-122"/>
-                <a:cs typeface="Arial" pitchFamily="34" charset="-120"/>
-              </a:rPr>
-              <a:t>27 / 29</a:t>
-            </a:r>
-            <a:endParaRPr lang="en-US" sz="900" dirty="0"/>
           </a:p>
         </p:txBody>
       </p:sp>
@@ -17042,45 +14986,6 @@
       </p:grpSpPr>
       <p:sp>
         <p:nvSpPr>
-          <p:cNvPr id="2" name="Text 0"/>
-          <p:cNvSpPr/>
-          <p:nvPr/>
-        </p:nvSpPr>
-        <p:spPr>
-          <a:xfrm>
-            <a:off x="594360" y="502920"/>
-            <a:ext cx="11002975" cy="274320"/>
-          </a:xfrm>
-          <a:prstGeom prst="rect">
-            <a:avLst/>
-          </a:prstGeom>
-          <a:noFill/>
-          <a:ln/>
-        </p:spPr>
-        <p:txBody>
-          <a:bodyPr wrap="square" lIns="0" tIns="0" rIns="0" bIns="0" rtlCol="0" anchor="ctr"/>
-          <a:lstStyle/>
-          <a:p>
-            <a:pPr marL="0" indent="0" algn="l">
-              <a:buNone/>
-            </a:pPr>
-            <a:r>
-              <a:rPr lang="en-US" sz="1200" b="1" kern="0" spc="300" dirty="0">
-                <a:solidFill>
-                  <a:srgbClr val="75DFBC"/>
-                </a:solidFill>
-                <a:latin typeface="Arial" pitchFamily="34" charset="0"/>
-                <a:ea typeface="Arial" pitchFamily="34" charset="-122"/>
-                <a:cs typeface="Arial" pitchFamily="34" charset="-120"/>
-              </a:rPr>
-              <a:t>GO DEEPER</a:t>
-            </a:r>
-            <a:endParaRPr lang="en-US" sz="1200" dirty="0"/>
-          </a:p>
-        </p:txBody>
-      </p:sp>
-      <p:sp>
-        <p:nvSpPr>
           <p:cNvPr id="3" name="Text 1"/>
           <p:cNvSpPr/>
           <p:nvPr/>
@@ -17748,84 +15653,6 @@
               <a:t>see the machines vote, live</a:t>
             </a:r>
             <a:endParaRPr lang="en-US" dirty="0"/>
-          </a:p>
-        </p:txBody>
-      </p:sp>
-      <p:sp>
-        <p:nvSpPr>
-          <p:cNvPr id="22" name="Text 20"/>
-          <p:cNvSpPr/>
-          <p:nvPr/>
-        </p:nvSpPr>
-        <p:spPr>
-          <a:xfrm>
-            <a:off x="594360" y="6419088"/>
-            <a:ext cx="8229600" cy="274320"/>
-          </a:xfrm>
-          <a:prstGeom prst="rect">
-            <a:avLst/>
-          </a:prstGeom>
-          <a:noFill/>
-          <a:ln/>
-        </p:spPr>
-        <p:txBody>
-          <a:bodyPr wrap="square" lIns="0" tIns="0" rIns="0" bIns="0" rtlCol="0" anchor="ctr"/>
-          <a:lstStyle/>
-          <a:p>
-            <a:pPr marL="0" indent="0" algn="l">
-              <a:buNone/>
-            </a:pPr>
-            <a:r>
-              <a:rPr lang="en-US" sz="900" dirty="0">
-                <a:solidFill>
-                  <a:srgbClr val="6E6E6E"/>
-                </a:solidFill>
-                <a:latin typeface="Arial" pitchFamily="34" charset="0"/>
-                <a:ea typeface="Arial" pitchFamily="34" charset="-122"/>
-                <a:cs typeface="Arial" pitchFamily="34" charset="-120"/>
-              </a:rPr>
-              <a:t>Why LLMs &amp; JS frameworks love Tailwind CSS</a:t>
-            </a:r>
-            <a:endParaRPr lang="en-US" sz="900" dirty="0"/>
-          </a:p>
-        </p:txBody>
-      </p:sp>
-      <p:sp>
-        <p:nvSpPr>
-          <p:cNvPr id="23" name="Text 21"/>
-          <p:cNvSpPr/>
-          <p:nvPr/>
-        </p:nvSpPr>
-        <p:spPr>
-          <a:xfrm>
-            <a:off x="10134295" y="6419088"/>
-            <a:ext cx="1463040" cy="274320"/>
-          </a:xfrm>
-          <a:prstGeom prst="rect">
-            <a:avLst/>
-          </a:prstGeom>
-          <a:noFill/>
-          <a:ln/>
-        </p:spPr>
-        <p:txBody>
-          <a:bodyPr wrap="square" lIns="0" tIns="0" rIns="0" bIns="0" rtlCol="0" anchor="ctr"/>
-          <a:lstStyle/>
-          <a:p>
-            <a:pPr marL="0" indent="0" algn="r">
-              <a:buNone/>
-            </a:pPr>
-            <a:r>
-              <a:rPr lang="en-US" sz="900" dirty="0">
-                <a:solidFill>
-                  <a:srgbClr val="6E6E6E"/>
-                </a:solidFill>
-                <a:latin typeface="Arial" pitchFamily="34" charset="0"/>
-                <a:ea typeface="Arial" pitchFamily="34" charset="-122"/>
-                <a:cs typeface="Arial" pitchFamily="34" charset="-120"/>
-              </a:rPr>
-              <a:t>28 / 29</a:t>
-            </a:r>
-            <a:endParaRPr lang="en-US" sz="900" dirty="0"/>
           </a:p>
         </p:txBody>
       </p:sp>
@@ -18088,84 +15915,6 @@
           </a:p>
         </p:txBody>
       </p:sp>
-      <p:sp>
-        <p:nvSpPr>
-          <p:cNvPr id="15" name="Text 13"/>
-          <p:cNvSpPr/>
-          <p:nvPr/>
-        </p:nvSpPr>
-        <p:spPr>
-          <a:xfrm>
-            <a:off x="594360" y="6419088"/>
-            <a:ext cx="8229600" cy="274320"/>
-          </a:xfrm>
-          <a:prstGeom prst="rect">
-            <a:avLst/>
-          </a:prstGeom>
-          <a:noFill/>
-          <a:ln/>
-        </p:spPr>
-        <p:txBody>
-          <a:bodyPr wrap="square" lIns="0" tIns="0" rIns="0" bIns="0" rtlCol="0" anchor="ctr"/>
-          <a:lstStyle/>
-          <a:p>
-            <a:pPr marL="0" indent="0" algn="l">
-              <a:buNone/>
-            </a:pPr>
-            <a:r>
-              <a:rPr lang="en-US" sz="900" dirty="0">
-                <a:solidFill>
-                  <a:srgbClr val="6E6E6E"/>
-                </a:solidFill>
-                <a:latin typeface="Arial" pitchFamily="34" charset="0"/>
-                <a:ea typeface="Arial" pitchFamily="34" charset="-122"/>
-                <a:cs typeface="Arial" pitchFamily="34" charset="-120"/>
-              </a:rPr>
-              <a:t>Why LLMs &amp; JS frameworks love Tailwind CSS</a:t>
-            </a:r>
-            <a:endParaRPr lang="en-US" sz="900" dirty="0"/>
-          </a:p>
-        </p:txBody>
-      </p:sp>
-      <p:sp>
-        <p:nvSpPr>
-          <p:cNvPr id="16" name="Text 14"/>
-          <p:cNvSpPr/>
-          <p:nvPr/>
-        </p:nvSpPr>
-        <p:spPr>
-          <a:xfrm>
-            <a:off x="10134295" y="6419088"/>
-            <a:ext cx="1463040" cy="274320"/>
-          </a:xfrm>
-          <a:prstGeom prst="rect">
-            <a:avLst/>
-          </a:prstGeom>
-          <a:noFill/>
-          <a:ln/>
-        </p:spPr>
-        <p:txBody>
-          <a:bodyPr wrap="square" lIns="0" tIns="0" rIns="0" bIns="0" rtlCol="0" anchor="ctr"/>
-          <a:lstStyle/>
-          <a:p>
-            <a:pPr marL="0" indent="0" algn="r">
-              <a:buNone/>
-            </a:pPr>
-            <a:r>
-              <a:rPr lang="en-US" sz="900" dirty="0">
-                <a:solidFill>
-                  <a:srgbClr val="6E6E6E"/>
-                </a:solidFill>
-                <a:latin typeface="Arial" pitchFamily="34" charset="0"/>
-                <a:ea typeface="Arial" pitchFamily="34" charset="-122"/>
-                <a:cs typeface="Arial" pitchFamily="34" charset="-120"/>
-              </a:rPr>
-              <a:t>3 / 29</a:t>
-            </a:r>
-            <a:endParaRPr lang="en-US" sz="900" dirty="0"/>
-          </a:p>
-        </p:txBody>
-      </p:sp>
     </p:spTree>
   </p:cSld>
   <p:clrMapOvr>
@@ -18177,9 +15926,23 @@
 <file path=ppt/slides/slide30.xml><?xml version="1.0" encoding="utf-8"?>
 <p:sld xmlns:a="http://schemas.openxmlformats.org/drawingml/2006/main" xmlns:r="http://schemas.openxmlformats.org/officeDocument/2006/relationships" xmlns:p="http://schemas.openxmlformats.org/presentationml/2006/main">
   <p:cSld>
+    <p:bg>
+      <p:bgPr>
+        <a:solidFill>
+          <a:srgbClr val="222121"/>
+        </a:solidFill>
+        <a:effectLst/>
+      </p:bgPr>
+    </p:bg>
     <p:spTree>
       <p:nvGrpSpPr>
-        <p:cNvPr id="1" name=""/>
+        <p:cNvPr id="1" name="">
+          <a:extLst>
+            <a:ext uri="{FF2B5EF4-FFF2-40B4-BE49-F238E27FC236}">
+              <a16:creationId xmlns:a16="http://schemas.microsoft.com/office/drawing/2014/main" id="{E4854D12-4E9A-71CB-5C67-19EDAFF6C74F}"/>
+            </a:ext>
+          </a:extLst>
+        </p:cNvPr>
         <p:cNvGrpSpPr/>
         <p:nvPr/>
       </p:nvGrpSpPr>
@@ -18193,10 +15956,10 @@
       </p:grpSpPr>
       <p:sp>
         <p:nvSpPr>
-          <p:cNvPr id="3" name="TextBox 2">
+          <p:cNvPr id="2" name="TextBox 1">
             <a:extLst>
               <a:ext uri="{FF2B5EF4-FFF2-40B4-BE49-F238E27FC236}">
-                <a16:creationId xmlns:a16="http://schemas.microsoft.com/office/drawing/2014/main" id="{56B4D6A6-A061-9EE8-289A-08D42F3815C3}"/>
+                <a16:creationId xmlns:a16="http://schemas.microsoft.com/office/drawing/2014/main" id="{E7E8910F-9301-47EA-017F-9BDA2A325682}"/>
               </a:ext>
             </a:extLst>
           </p:cNvPr>
@@ -18223,9 +15986,8 @@
             <a:r>
               <a:rPr lang="en-US" sz="4000" dirty="0">
                 <a:solidFill>
-                  <a:schemeClr val="tx2">
-                    <a:lumMod val="90000"/>
-                    <a:lumOff val="10000"/>
+                  <a:schemeClr val="bg1">
+                    <a:lumMod val="95000"/>
                   </a:schemeClr>
                 </a:solidFill>
               </a:rPr>
@@ -18236,9 +15998,8 @@
             <a:pPr algn="ctr"/>
             <a:endParaRPr lang="en-US" sz="4000" dirty="0">
               <a:solidFill>
-                <a:schemeClr val="tx2">
-                  <a:lumMod val="90000"/>
-                  <a:lumOff val="10000"/>
+                <a:schemeClr val="bg1">
+                  <a:lumMod val="95000"/>
                 </a:schemeClr>
               </a:solidFill>
             </a:endParaRPr>
@@ -18248,9 +16009,8 @@
             <a:r>
               <a:rPr lang="en-US" sz="4000" dirty="0">
                 <a:solidFill>
-                  <a:schemeClr val="tx2">
-                    <a:lumMod val="90000"/>
-                    <a:lumOff val="10000"/>
+                  <a:schemeClr val="bg1">
+                    <a:lumMod val="95000"/>
                   </a:schemeClr>
                 </a:solidFill>
               </a:rPr>
@@ -18261,10 +16021,10 @@
       </p:sp>
       <p:sp>
         <p:nvSpPr>
-          <p:cNvPr id="4" name="TextBox 3">
+          <p:cNvPr id="3" name="TextBox 2">
             <a:extLst>
               <a:ext uri="{FF2B5EF4-FFF2-40B4-BE49-F238E27FC236}">
-                <a16:creationId xmlns:a16="http://schemas.microsoft.com/office/drawing/2014/main" id="{5904F4B3-E994-6BEE-60A6-D12023533FAF}"/>
+                <a16:creationId xmlns:a16="http://schemas.microsoft.com/office/drawing/2014/main" id="{3A45CE5F-A1C0-EBE2-5D6A-C4DF7A99D10F}"/>
               </a:ext>
             </a:extLst>
           </p:cNvPr>
@@ -18291,11 +16051,11 @@
             <a:r>
               <a:rPr lang="en-US" dirty="0">
                 <a:solidFill>
-                  <a:schemeClr val="tx2">
-                    <a:lumMod val="90000"/>
-                    <a:lumOff val="10000"/>
+                  <a:schemeClr val="bg1">
+                    <a:lumMod val="95000"/>
                   </a:schemeClr>
                 </a:solidFill>
+                <a:latin typeface="Brush Script MT" panose="03060802040406070304" pitchFamily="66" charset="0"/>
               </a:rPr>
               <a:t>Social Links</a:t>
             </a:r>
@@ -18304,10 +16064,10 @@
       </p:sp>
       <p:pic>
         <p:nvPicPr>
-          <p:cNvPr id="6" name="Picture 5">
+          <p:cNvPr id="4" name="Picture 3">
             <a:extLst>
               <a:ext uri="{FF2B5EF4-FFF2-40B4-BE49-F238E27FC236}">
-                <a16:creationId xmlns:a16="http://schemas.microsoft.com/office/drawing/2014/main" id="{39B6EB2D-569B-CB31-99FE-EFA1309A3407}"/>
+                <a16:creationId xmlns:a16="http://schemas.microsoft.com/office/drawing/2014/main" id="{61B6DF07-7C49-CE6F-718A-1E7FE35848EA}"/>
               </a:ext>
             </a:extLst>
           </p:cNvPr>
@@ -18341,7 +16101,7 @@
     </p:spTree>
     <p:extLst>
       <p:ext uri="{BB962C8B-B14F-4D97-AF65-F5344CB8AC3E}">
-        <p14:creationId xmlns:p14="http://schemas.microsoft.com/office/powerpoint/2010/main" val="2188755814"/>
+        <p14:creationId xmlns:p14="http://schemas.microsoft.com/office/powerpoint/2010/main" val="3939952633"/>
       </p:ext>
     </p:extLst>
   </p:cSld>
@@ -18385,7 +16145,7 @@
                                           </p:stCondLst>
                                         </p:cTn>
                                         <p:tgtEl>
-                                          <p:spTgt spid="3">
+                                          <p:spTgt spid="2">
                                             <p:txEl>
                                               <p:pRg st="0" end="0"/>
                                             </p:txEl>
@@ -18407,7 +16167,7 @@
                                           </p:stCondLst>
                                         </p:cTn>
                                         <p:tgtEl>
-                                          <p:spTgt spid="3">
+                                          <p:spTgt spid="2">
                                             <p:txEl>
                                               <p:pRg st="0" end="0"/>
                                             </p:txEl>
@@ -18426,7 +16186,7 @@
                                           </p:stCondLst>
                                         </p:cTn>
                                         <p:tgtEl>
-                                          <p:spTgt spid="3">
+                                          <p:spTgt spid="2">
                                             <p:txEl>
                                               <p:pRg st="0" end="0"/>
                                             </p:txEl>
@@ -18445,7 +16205,7 @@
                                           </p:stCondLst>
                                         </p:cTn>
                                         <p:tgtEl>
-                                          <p:spTgt spid="3">
+                                          <p:spTgt spid="2">
                                             <p:txEl>
                                               <p:pRg st="0" end="0"/>
                                             </p:txEl>
@@ -18464,7 +16224,7 @@
                                           </p:stCondLst>
                                         </p:cTn>
                                         <p:tgtEl>
-                                          <p:spTgt spid="3">
+                                          <p:spTgt spid="2">
                                             <p:txEl>
                                               <p:pRg st="0" end="0"/>
                                             </p:txEl>
@@ -18513,7 +16273,7 @@
                                           </p:stCondLst>
                                         </p:cTn>
                                         <p:tgtEl>
-                                          <p:spTgt spid="3">
+                                          <p:spTgt spid="2">
                                             <p:txEl>
                                               <p:pRg st="2" end="2"/>
                                             </p:txEl>
@@ -18535,7 +16295,7 @@
                                           </p:stCondLst>
                                         </p:cTn>
                                         <p:tgtEl>
-                                          <p:spTgt spid="3">
+                                          <p:spTgt spid="2">
                                             <p:txEl>
                                               <p:pRg st="2" end="2"/>
                                             </p:txEl>
@@ -18554,7 +16314,7 @@
                                           </p:stCondLst>
                                         </p:cTn>
                                         <p:tgtEl>
-                                          <p:spTgt spid="3">
+                                          <p:spTgt spid="2">
                                             <p:txEl>
                                               <p:pRg st="2" end="2"/>
                                             </p:txEl>
@@ -18573,7 +16333,7 @@
                                           </p:stCondLst>
                                         </p:cTn>
                                         <p:tgtEl>
-                                          <p:spTgt spid="3">
+                                          <p:spTgt spid="2">
                                             <p:txEl>
                                               <p:pRg st="2" end="2"/>
                                             </p:txEl>
@@ -18592,7 +16352,7 @@
                                           </p:stCondLst>
                                         </p:cTn>
                                         <p:tgtEl>
-                                          <p:spTgt spid="3">
+                                          <p:spTgt spid="2">
                                             <p:txEl>
                                               <p:pRg st="2" end="2"/>
                                             </p:txEl>
@@ -18922,84 +16682,6 @@
           </a:p>
         </p:txBody>
       </p:sp>
-      <p:sp>
-        <p:nvSpPr>
-          <p:cNvPr id="15" name="Text 13"/>
-          <p:cNvSpPr/>
-          <p:nvPr/>
-        </p:nvSpPr>
-        <p:spPr>
-          <a:xfrm>
-            <a:off x="594360" y="6419088"/>
-            <a:ext cx="8229600" cy="274320"/>
-          </a:xfrm>
-          <a:prstGeom prst="rect">
-            <a:avLst/>
-          </a:prstGeom>
-          <a:noFill/>
-          <a:ln/>
-        </p:spPr>
-        <p:txBody>
-          <a:bodyPr wrap="square" lIns="0" tIns="0" rIns="0" bIns="0" rtlCol="0" anchor="ctr"/>
-          <a:lstStyle/>
-          <a:p>
-            <a:pPr marL="0" indent="0" algn="l">
-              <a:buNone/>
-            </a:pPr>
-            <a:r>
-              <a:rPr lang="en-US" sz="900" dirty="0">
-                <a:solidFill>
-                  <a:srgbClr val="6E6E6E"/>
-                </a:solidFill>
-                <a:latin typeface="Arial" pitchFamily="34" charset="0"/>
-                <a:ea typeface="Arial" pitchFamily="34" charset="-122"/>
-                <a:cs typeface="Arial" pitchFamily="34" charset="-120"/>
-              </a:rPr>
-              <a:t>Why LLMs &amp; JS frameworks love Tailwind CSS</a:t>
-            </a:r>
-            <a:endParaRPr lang="en-US" sz="900" dirty="0"/>
-          </a:p>
-        </p:txBody>
-      </p:sp>
-      <p:sp>
-        <p:nvSpPr>
-          <p:cNvPr id="16" name="Text 14"/>
-          <p:cNvSpPr/>
-          <p:nvPr/>
-        </p:nvSpPr>
-        <p:spPr>
-          <a:xfrm>
-            <a:off x="10134295" y="6419088"/>
-            <a:ext cx="1463040" cy="274320"/>
-          </a:xfrm>
-          <a:prstGeom prst="rect">
-            <a:avLst/>
-          </a:prstGeom>
-          <a:noFill/>
-          <a:ln/>
-        </p:spPr>
-        <p:txBody>
-          <a:bodyPr wrap="square" lIns="0" tIns="0" rIns="0" bIns="0" rtlCol="0" anchor="ctr"/>
-          <a:lstStyle/>
-          <a:p>
-            <a:pPr marL="0" indent="0" algn="r">
-              <a:buNone/>
-            </a:pPr>
-            <a:r>
-              <a:rPr lang="en-US" sz="900" dirty="0">
-                <a:solidFill>
-                  <a:srgbClr val="6E6E6E"/>
-                </a:solidFill>
-                <a:latin typeface="Arial" pitchFamily="34" charset="0"/>
-                <a:ea typeface="Arial" pitchFamily="34" charset="-122"/>
-                <a:cs typeface="Arial" pitchFamily="34" charset="-120"/>
-              </a:rPr>
-              <a:t>4 / 29</a:t>
-            </a:r>
-            <a:endParaRPr lang="en-US" sz="900" dirty="0"/>
-          </a:p>
-        </p:txBody>
-      </p:sp>
     </p:spTree>
   </p:cSld>
   <p:clrMapOvr>
@@ -19035,45 +16717,6 @@
       </p:grpSpPr>
       <p:sp>
         <p:nvSpPr>
-          <p:cNvPr id="2" name="Text 0"/>
-          <p:cNvSpPr/>
-          <p:nvPr/>
-        </p:nvSpPr>
-        <p:spPr>
-          <a:xfrm>
-            <a:off x="594360" y="502920"/>
-            <a:ext cx="11002975" cy="274320"/>
-          </a:xfrm>
-          <a:prstGeom prst="rect">
-            <a:avLst/>
-          </a:prstGeom>
-          <a:noFill/>
-          <a:ln/>
-        </p:spPr>
-        <p:txBody>
-          <a:bodyPr wrap="square" lIns="0" tIns="0" rIns="0" bIns="0" rtlCol="0" anchor="ctr"/>
-          <a:lstStyle/>
-          <a:p>
-            <a:pPr marL="0" indent="0" algn="l">
-              <a:buNone/>
-            </a:pPr>
-            <a:r>
-              <a:rPr lang="en-US" sz="1200" b="1" kern="0" spc="300" dirty="0">
-                <a:solidFill>
-                  <a:srgbClr val="75DFBC"/>
-                </a:solidFill>
-                <a:latin typeface="Arial" pitchFamily="34" charset="0"/>
-                <a:ea typeface="Arial" pitchFamily="34" charset="-122"/>
-                <a:cs typeface="Arial" pitchFamily="34" charset="-120"/>
-              </a:rPr>
-              <a:t>THE SETUP</a:t>
-            </a:r>
-            <a:endParaRPr lang="en-US" sz="1200" dirty="0"/>
-          </a:p>
-        </p:txBody>
-      </p:sp>
-      <p:sp>
-        <p:nvSpPr>
           <p:cNvPr id="3" name="Text 1"/>
           <p:cNvSpPr/>
           <p:nvPr/>
@@ -20007,126 +17650,6 @@
               <a:t>2017→</a:t>
             </a:r>
             <a:endParaRPr lang="en-US" sz="1600" dirty="0"/>
-          </a:p>
-        </p:txBody>
-      </p:sp>
-      <p:sp>
-        <p:nvSpPr>
-          <p:cNvPr id="28" name="Text 26"/>
-          <p:cNvSpPr/>
-          <p:nvPr/>
-        </p:nvSpPr>
-        <p:spPr>
-          <a:xfrm>
-            <a:off x="595333" y="5120640"/>
-            <a:ext cx="11002975" cy="640080"/>
-          </a:xfrm>
-          <a:prstGeom prst="rect">
-            <a:avLst/>
-          </a:prstGeom>
-          <a:noFill/>
-          <a:ln/>
-        </p:spPr>
-        <p:txBody>
-          <a:bodyPr wrap="square" lIns="0" tIns="0" rIns="0" bIns="0" rtlCol="0" anchor="ctr"/>
-          <a:lstStyle/>
-          <a:p>
-            <a:pPr marL="0" indent="0" algn="l">
-              <a:lnSpc>
-                <a:spcPct val="105000"/>
-              </a:lnSpc>
-              <a:buNone/>
-            </a:pPr>
-            <a:r>
-              <a:rPr lang="en-US" sz="2000" dirty="0">
-                <a:solidFill>
-                  <a:srgbClr val="A6A6A6"/>
-                </a:solidFill>
-                <a:latin typeface="Arial" pitchFamily="34" charset="0"/>
-                <a:ea typeface="Arial" pitchFamily="34" charset="-122"/>
-                <a:cs typeface="Arial" pitchFamily="34" charset="-120"/>
-              </a:rPr>
-              <a:t>Every one of these tried to answer the same two questions: where do styles live, and what do we name them?</a:t>
-            </a:r>
-            <a:endParaRPr lang="en-US" sz="2000" dirty="0"/>
-          </a:p>
-        </p:txBody>
-      </p:sp>
-      <p:sp>
-        <p:nvSpPr>
-          <p:cNvPr id="29" name="Text 27"/>
-          <p:cNvSpPr/>
-          <p:nvPr/>
-        </p:nvSpPr>
-        <p:spPr>
-          <a:xfrm>
-            <a:off x="594360" y="6419088"/>
-            <a:ext cx="8229600" cy="274320"/>
-          </a:xfrm>
-          <a:prstGeom prst="rect">
-            <a:avLst/>
-          </a:prstGeom>
-          <a:noFill/>
-          <a:ln/>
-        </p:spPr>
-        <p:txBody>
-          <a:bodyPr wrap="square" lIns="0" tIns="0" rIns="0" bIns="0" rtlCol="0" anchor="ctr"/>
-          <a:lstStyle/>
-          <a:p>
-            <a:pPr marL="0" indent="0" algn="l">
-              <a:buNone/>
-            </a:pPr>
-            <a:r>
-              <a:rPr lang="en-US" sz="900" dirty="0">
-                <a:solidFill>
-                  <a:srgbClr val="6E6E6E"/>
-                </a:solidFill>
-                <a:latin typeface="Arial" pitchFamily="34" charset="0"/>
-                <a:ea typeface="Arial" pitchFamily="34" charset="-122"/>
-                <a:cs typeface="Arial" pitchFamily="34" charset="-120"/>
-              </a:rPr>
-              <a:t>Why LLMs &amp; JS frameworks love Tailwind CSS</a:t>
-            </a:r>
-            <a:endParaRPr lang="en-US" sz="900" dirty="0"/>
-          </a:p>
-        </p:txBody>
-      </p:sp>
-      <p:sp>
-        <p:nvSpPr>
-          <p:cNvPr id="30" name="Text 28"/>
-          <p:cNvSpPr/>
-          <p:nvPr/>
-        </p:nvSpPr>
-        <p:spPr>
-          <a:xfrm>
-            <a:off x="10134295" y="6419088"/>
-            <a:ext cx="1463040" cy="274320"/>
-          </a:xfrm>
-          <a:prstGeom prst="rect">
-            <a:avLst/>
-          </a:prstGeom>
-          <a:noFill/>
-          <a:ln/>
-        </p:spPr>
-        <p:txBody>
-          <a:bodyPr wrap="square" lIns="0" tIns="0" rIns="0" bIns="0" rtlCol="0" anchor="ctr"/>
-          <a:lstStyle/>
-          <a:p>
-            <a:pPr marL="0" indent="0" algn="r">
-              <a:buNone/>
-            </a:pPr>
-            <a:r>
-              <a:rPr lang="en-US" sz="900" dirty="0">
-                <a:solidFill>
-                  <a:srgbClr val="6E6E6E"/>
-                </a:solidFill>
-                <a:latin typeface="Arial" pitchFamily="34" charset="0"/>
-                <a:ea typeface="Arial" pitchFamily="34" charset="-122"/>
-                <a:cs typeface="Arial" pitchFamily="34" charset="-120"/>
-              </a:rPr>
-              <a:t>5 / 29</a:t>
-            </a:r>
-            <a:endParaRPr lang="en-US" sz="900" dirty="0"/>
           </a:p>
         </p:txBody>
       </p:sp>
@@ -20165,45 +17688,6 @@
       </p:grpSpPr>
       <p:sp>
         <p:nvSpPr>
-          <p:cNvPr id="2" name="Text 0"/>
-          <p:cNvSpPr/>
-          <p:nvPr/>
-        </p:nvSpPr>
-        <p:spPr>
-          <a:xfrm>
-            <a:off x="594360" y="502920"/>
-            <a:ext cx="11002975" cy="274320"/>
-          </a:xfrm>
-          <a:prstGeom prst="rect">
-            <a:avLst/>
-          </a:prstGeom>
-          <a:noFill/>
-          <a:ln/>
-        </p:spPr>
-        <p:txBody>
-          <a:bodyPr wrap="square" lIns="0" tIns="0" rIns="0" bIns="0" rtlCol="0" anchor="ctr"/>
-          <a:lstStyle/>
-          <a:p>
-            <a:pPr marL="0" indent="0" algn="l">
-              <a:buNone/>
-            </a:pPr>
-            <a:r>
-              <a:rPr lang="en-US" sz="1200" b="1" kern="0" spc="300" dirty="0">
-                <a:solidFill>
-                  <a:srgbClr val="F1CF25"/>
-                </a:solidFill>
-                <a:latin typeface="Arial" pitchFamily="34" charset="0"/>
-                <a:ea typeface="Arial" pitchFamily="34" charset="-122"/>
-                <a:cs typeface="Arial" pitchFamily="34" charset="-120"/>
-              </a:rPr>
-              <a:t>THE THESIS</a:t>
-            </a:r>
-            <a:endParaRPr lang="en-US" sz="1200" dirty="0"/>
-          </a:p>
-        </p:txBody>
-      </p:sp>
-      <p:sp>
-        <p:nvSpPr>
           <p:cNvPr id="3" name="Text 1"/>
           <p:cNvSpPr/>
           <p:nvPr/>
@@ -20913,123 +18397,6 @@
               <a:t>lean Tailwind</a:t>
             </a:r>
             <a:endParaRPr lang="en-US" sz="1600" dirty="0"/>
-          </a:p>
-        </p:txBody>
-      </p:sp>
-      <p:sp>
-        <p:nvSpPr>
-          <p:cNvPr id="22" name="Text 20"/>
-          <p:cNvSpPr/>
-          <p:nvPr/>
-        </p:nvSpPr>
-        <p:spPr>
-          <a:xfrm>
-            <a:off x="594360" y="5715000"/>
-            <a:ext cx="11002975" cy="548640"/>
-          </a:xfrm>
-          <a:prstGeom prst="rect">
-            <a:avLst/>
-          </a:prstGeom>
-          <a:noFill/>
-          <a:ln/>
-        </p:spPr>
-        <p:txBody>
-          <a:bodyPr wrap="square" lIns="0" tIns="0" rIns="0" bIns="0" rtlCol="0" anchor="ctr"/>
-          <a:lstStyle/>
-          <a:p>
-            <a:pPr marL="0" indent="0" algn="l">
-              <a:buNone/>
-            </a:pPr>
-            <a:r>
-              <a:rPr lang="en-US" i="1" dirty="0">
-                <a:solidFill>
-                  <a:srgbClr val="FFFFFF"/>
-                </a:solidFill>
-                <a:latin typeface="Arial" pitchFamily="34" charset="0"/>
-                <a:ea typeface="Arial" pitchFamily="34" charset="-122"/>
-                <a:cs typeface="Arial" pitchFamily="34" charset="-120"/>
-              </a:rPr>
-              <a:t>Every major AI UI generator defaults to Tailwind. That's revealed preference.</a:t>
-            </a:r>
-            <a:endParaRPr lang="en-US" dirty="0"/>
-          </a:p>
-        </p:txBody>
-      </p:sp>
-      <p:sp>
-        <p:nvSpPr>
-          <p:cNvPr id="23" name="Text 21"/>
-          <p:cNvSpPr/>
-          <p:nvPr/>
-        </p:nvSpPr>
-        <p:spPr>
-          <a:xfrm>
-            <a:off x="594360" y="6419088"/>
-            <a:ext cx="8229600" cy="274320"/>
-          </a:xfrm>
-          <a:prstGeom prst="rect">
-            <a:avLst/>
-          </a:prstGeom>
-          <a:noFill/>
-          <a:ln/>
-        </p:spPr>
-        <p:txBody>
-          <a:bodyPr wrap="square" lIns="0" tIns="0" rIns="0" bIns="0" rtlCol="0" anchor="ctr"/>
-          <a:lstStyle/>
-          <a:p>
-            <a:pPr marL="0" indent="0" algn="l">
-              <a:buNone/>
-            </a:pPr>
-            <a:r>
-              <a:rPr lang="en-US" sz="900" dirty="0">
-                <a:solidFill>
-                  <a:srgbClr val="6E6E6E"/>
-                </a:solidFill>
-                <a:latin typeface="Arial" pitchFamily="34" charset="0"/>
-                <a:ea typeface="Arial" pitchFamily="34" charset="-122"/>
-                <a:cs typeface="Arial" pitchFamily="34" charset="-120"/>
-              </a:rPr>
-              <a:t>Why LLMs &amp; JS frameworks love Tailwind CSS</a:t>
-            </a:r>
-            <a:endParaRPr lang="en-US" sz="900" dirty="0"/>
-          </a:p>
-        </p:txBody>
-      </p:sp>
-      <p:sp>
-        <p:nvSpPr>
-          <p:cNvPr id="24" name="Text 22"/>
-          <p:cNvSpPr/>
-          <p:nvPr/>
-        </p:nvSpPr>
-        <p:spPr>
-          <a:xfrm>
-            <a:off x="10134295" y="6419088"/>
-            <a:ext cx="1463040" cy="274320"/>
-          </a:xfrm>
-          <a:prstGeom prst="rect">
-            <a:avLst/>
-          </a:prstGeom>
-          <a:noFill/>
-          <a:ln/>
-        </p:spPr>
-        <p:txBody>
-          <a:bodyPr wrap="square" lIns="0" tIns="0" rIns="0" bIns="0" rtlCol="0" anchor="ctr"/>
-          <a:lstStyle/>
-          <a:p>
-            <a:pPr marL="0" indent="0" algn="r">
-              <a:buNone/>
-            </a:pPr>
-            <a:r>
-              <a:rPr lang="en-US" sz="900" dirty="0">
-                <a:solidFill>
-                  <a:srgbClr val="6E6E6E"/>
-                </a:solidFill>
-                <a:latin typeface="Arial" pitchFamily="34" charset="0"/>
-                <a:ea typeface="Arial" pitchFamily="34" charset="-122"/>
-                <a:cs typeface="Arial" pitchFamily="34" charset="-120"/>
-              </a:rPr>
-              <a:t>6 / 29</a:t>
-            </a:r>
-            <a:endParaRPr lang="en-US" sz="900" dirty="0"/>
           </a:p>
         </p:txBody>
       </p:sp>
@@ -21068,45 +18435,6 @@
       </p:grpSpPr>
       <p:sp>
         <p:nvSpPr>
-          <p:cNvPr id="2" name="Text 0"/>
-          <p:cNvSpPr/>
-          <p:nvPr/>
-        </p:nvSpPr>
-        <p:spPr>
-          <a:xfrm>
-            <a:off x="594360" y="502920"/>
-            <a:ext cx="11002975" cy="274320"/>
-          </a:xfrm>
-          <a:prstGeom prst="rect">
-            <a:avLst/>
-          </a:prstGeom>
-          <a:noFill/>
-          <a:ln/>
-        </p:spPr>
-        <p:txBody>
-          <a:bodyPr wrap="square" lIns="0" tIns="0" rIns="0" bIns="0" rtlCol="0" anchor="ctr"/>
-          <a:lstStyle/>
-          <a:p>
-            <a:pPr marL="0" indent="0" algn="l">
-              <a:buNone/>
-            </a:pPr>
-            <a:r>
-              <a:rPr lang="en-US" sz="1200" b="1" kern="0" spc="300" dirty="0">
-                <a:solidFill>
-                  <a:srgbClr val="75DFBC"/>
-                </a:solidFill>
-                <a:latin typeface="Arial" pitchFamily="34" charset="0"/>
-                <a:ea typeface="Arial" pitchFamily="34" charset="-122"/>
-                <a:cs typeface="Arial" pitchFamily="34" charset="-120"/>
-              </a:rPr>
-              <a:t>REFRAME</a:t>
-            </a:r>
-            <a:endParaRPr lang="en-US" sz="1200" dirty="0"/>
-          </a:p>
-        </p:txBody>
-      </p:sp>
-      <p:sp>
-        <p:nvSpPr>
           <p:cNvPr id="3" name="Text 1"/>
           <p:cNvSpPr/>
           <p:nvPr/>
@@ -21247,157 +18575,6 @@
               <a:t> and by a next-token predictor.</a:t>
             </a:r>
             <a:endParaRPr lang="en-US" sz="3000" dirty="0"/>
-          </a:p>
-        </p:txBody>
-      </p:sp>
-      <p:sp>
-        <p:nvSpPr>
-          <p:cNvPr id="5" name="Shape 3"/>
-          <p:cNvSpPr/>
-          <p:nvPr/>
-        </p:nvSpPr>
-        <p:spPr>
-          <a:xfrm>
-            <a:off x="594360" y="4663440"/>
-            <a:ext cx="6035040" cy="548640"/>
-          </a:xfrm>
-          <a:prstGeom prst="roundRect">
-            <a:avLst>
-              <a:gd name="adj" fmla="val 50000"/>
-            </a:avLst>
-          </a:prstGeom>
-          <a:solidFill>
-            <a:srgbClr val="2C2B2B"/>
-          </a:solidFill>
-          <a:ln w="12700">
-            <a:solidFill>
-              <a:srgbClr val="75DFBC"/>
-            </a:solidFill>
-            <a:prstDash val="solid"/>
-          </a:ln>
-        </p:spPr>
-        <p:txBody>
-          <a:bodyPr/>
-          <a:lstStyle/>
-          <a:p>
-            <a:endParaRPr lang="en-US"/>
-          </a:p>
-        </p:txBody>
-      </p:sp>
-      <p:sp>
-        <p:nvSpPr>
-          <p:cNvPr id="6" name="Text 4"/>
-          <p:cNvSpPr/>
-          <p:nvPr/>
-        </p:nvSpPr>
-        <p:spPr>
-          <a:xfrm>
-            <a:off x="594360" y="4663440"/>
-            <a:ext cx="6035040" cy="548640"/>
-          </a:xfrm>
-          <a:prstGeom prst="rect">
-            <a:avLst/>
-          </a:prstGeom>
-          <a:noFill/>
-          <a:ln/>
-        </p:spPr>
-        <p:txBody>
-          <a:bodyPr wrap="square" lIns="0" tIns="0" rIns="0" bIns="0" rtlCol="0" anchor="ctr"/>
-          <a:lstStyle/>
-          <a:p>
-            <a:pPr marL="0" indent="0" algn="ctr">
-              <a:buNone/>
-            </a:pPr>
-            <a:r>
-              <a:rPr lang="en-US" sz="1800" b="1" dirty="0">
-                <a:solidFill>
-                  <a:srgbClr val="75DFBC"/>
-                </a:solidFill>
-                <a:latin typeface="Arial" pitchFamily="34" charset="0"/>
-                <a:ea typeface="Arial" pitchFamily="34" charset="-122"/>
-                <a:cs typeface="Arial" pitchFamily="34" charset="-120"/>
-              </a:rPr>
-              <a:t>Same friction, same fix: locality.</a:t>
-            </a:r>
-            <a:endParaRPr lang="en-US" sz="1800" dirty="0"/>
-          </a:p>
-        </p:txBody>
-      </p:sp>
-      <p:sp>
-        <p:nvSpPr>
-          <p:cNvPr id="7" name="Text 5"/>
-          <p:cNvSpPr/>
-          <p:nvPr/>
-        </p:nvSpPr>
-        <p:spPr>
-          <a:xfrm>
-            <a:off x="594360" y="6419088"/>
-            <a:ext cx="8229600" cy="274320"/>
-          </a:xfrm>
-          <a:prstGeom prst="rect">
-            <a:avLst/>
-          </a:prstGeom>
-          <a:noFill/>
-          <a:ln/>
-        </p:spPr>
-        <p:txBody>
-          <a:bodyPr wrap="square" lIns="0" tIns="0" rIns="0" bIns="0" rtlCol="0" anchor="ctr"/>
-          <a:lstStyle/>
-          <a:p>
-            <a:pPr marL="0" indent="0" algn="l">
-              <a:buNone/>
-            </a:pPr>
-            <a:r>
-              <a:rPr lang="en-US" sz="900" dirty="0">
-                <a:solidFill>
-                  <a:srgbClr val="6E6E6E"/>
-                </a:solidFill>
-                <a:latin typeface="Arial" pitchFamily="34" charset="0"/>
-                <a:ea typeface="Arial" pitchFamily="34" charset="-122"/>
-                <a:cs typeface="Arial" pitchFamily="34" charset="-120"/>
-              </a:rPr>
-              <a:t>Why LLMs &amp; JS frameworks love Tailwind CSS</a:t>
-            </a:r>
-            <a:endParaRPr lang="en-US" sz="900" dirty="0"/>
-          </a:p>
-        </p:txBody>
-      </p:sp>
-      <p:sp>
-        <p:nvSpPr>
-          <p:cNvPr id="8" name="Text 6"/>
-          <p:cNvSpPr/>
-          <p:nvPr/>
-        </p:nvSpPr>
-        <p:spPr>
-          <a:xfrm>
-            <a:off x="10134295" y="6419088"/>
-            <a:ext cx="1463040" cy="274320"/>
-          </a:xfrm>
-          <a:prstGeom prst="rect">
-            <a:avLst/>
-          </a:prstGeom>
-          <a:noFill/>
-          <a:ln/>
-        </p:spPr>
-        <p:txBody>
-          <a:bodyPr wrap="square" lIns="0" tIns="0" rIns="0" bIns="0" rtlCol="0" anchor="ctr"/>
-          <a:lstStyle/>
-          <a:p>
-            <a:pPr marL="0" indent="0" algn="r">
-              <a:buNone/>
-            </a:pPr>
-            <a:r>
-              <a:rPr lang="en-US" sz="900" dirty="0">
-                <a:solidFill>
-                  <a:srgbClr val="6E6E6E"/>
-                </a:solidFill>
-                <a:latin typeface="Arial" pitchFamily="34" charset="0"/>
-                <a:ea typeface="Arial" pitchFamily="34" charset="-122"/>
-                <a:cs typeface="Arial" pitchFamily="34" charset="-120"/>
-              </a:rPr>
-              <a:t>7 / 29</a:t>
-            </a:r>
-            <a:endParaRPr lang="en-US" sz="900" dirty="0"/>
           </a:p>
         </p:txBody>
       </p:sp>
@@ -21524,7 +18701,7 @@
         <p:spPr>
           <a:xfrm>
             <a:off x="594360" y="1828800"/>
-            <a:ext cx="5760720" cy="1280160"/>
+            <a:ext cx="4438574" cy="1280160"/>
           </a:xfrm>
           <a:prstGeom prst="rect">
             <a:avLst/>
@@ -21593,7 +18770,7 @@
         <p:spPr>
           <a:xfrm>
             <a:off x="886967" y="3383280"/>
-            <a:ext cx="5760719" cy="457200"/>
+            <a:ext cx="3526413" cy="457200"/>
           </a:xfrm>
           <a:prstGeom prst="rect">
             <a:avLst/>
@@ -21662,7 +18839,7 @@
         <p:spPr>
           <a:xfrm>
             <a:off x="886968" y="4270248"/>
-            <a:ext cx="5468112" cy="457200"/>
+            <a:ext cx="3622144" cy="457200"/>
           </a:xfrm>
           <a:prstGeom prst="rect">
             <a:avLst/>
@@ -21731,7 +18908,7 @@
         <p:spPr>
           <a:xfrm>
             <a:off x="886968" y="5187177"/>
-            <a:ext cx="5468112" cy="457200"/>
+            <a:ext cx="4483612" cy="457200"/>
           </a:xfrm>
           <a:prstGeom prst="rect">
             <a:avLst/>
@@ -21772,8 +18949,8 @@
         </p:nvSpPr>
         <p:spPr>
           <a:xfrm>
-            <a:off x="6821421" y="1828800"/>
-            <a:ext cx="4773170" cy="4270248"/>
+            <a:off x="5696841" y="1754155"/>
+            <a:ext cx="6181027" cy="4344893"/>
           </a:xfrm>
           <a:prstGeom prst="roundRect">
             <a:avLst>
@@ -21806,8 +18983,8 @@
         </p:nvSpPr>
         <p:spPr>
           <a:xfrm>
-            <a:off x="6986016" y="2011680"/>
-            <a:ext cx="100584" cy="100584"/>
+            <a:off x="5877670" y="2011680"/>
+            <a:ext cx="108966" cy="100584"/>
           </a:xfrm>
           <a:prstGeom prst="ellipse">
             <a:avLst/>
@@ -21833,8 +19010,8 @@
         </p:nvSpPr>
         <p:spPr>
           <a:xfrm>
-            <a:off x="7187184" y="2011680"/>
-            <a:ext cx="100584" cy="100584"/>
+            <a:off x="6078838" y="2011680"/>
+            <a:ext cx="108966" cy="100584"/>
           </a:xfrm>
           <a:prstGeom prst="ellipse">
             <a:avLst/>
@@ -21860,8 +19037,8 @@
         </p:nvSpPr>
         <p:spPr>
           <a:xfrm>
-            <a:off x="7388352" y="2011680"/>
-            <a:ext cx="100584" cy="100584"/>
+            <a:off x="6280006" y="2011680"/>
+            <a:ext cx="108966" cy="100584"/>
           </a:xfrm>
           <a:prstGeom prst="ellipse">
             <a:avLst/>
@@ -21887,7 +19064,7 @@
         </p:nvSpPr>
         <p:spPr>
           <a:xfrm>
-            <a:off x="7680960" y="1901952"/>
+            <a:off x="6481174" y="1901952"/>
             <a:ext cx="3730752" cy="292608"/>
           </a:xfrm>
           <a:prstGeom prst="rect">
@@ -21926,8 +19103,8 @@
         </p:nvSpPr>
         <p:spPr>
           <a:xfrm>
-            <a:off x="7187184" y="2377440"/>
-            <a:ext cx="4114800" cy="3332696"/>
+            <a:off x="5927962" y="2377440"/>
+            <a:ext cx="5721810" cy="3332696"/>
           </a:xfrm>
           <a:prstGeom prst="rect">
             <a:avLst/>
@@ -21946,7 +19123,7 @@
               <a:buNone/>
             </a:pPr>
             <a:r>
-              <a:rPr lang="en-US" dirty="0">
+              <a:rPr lang="en-US" sz="2000" dirty="0">
                 <a:solidFill>
                   <a:srgbClr val="6E6E6E"/>
                 </a:solidFill>
@@ -21956,7 +19133,7 @@
               </a:rPr>
               <a:t>/* what does 'featured' even mean? */</a:t>
             </a:r>
-            <a:endParaRPr lang="en-US" dirty="0"/>
+            <a:endParaRPr lang="en-US" sz="2000" dirty="0"/>
           </a:p>
           <a:p>
             <a:pPr marL="0" indent="0" algn="l">
@@ -21966,7 +19143,7 @@
               <a:buNone/>
             </a:pPr>
             <a:r>
-              <a:rPr lang="en-US" dirty="0">
+              <a:rPr lang="en-US" sz="2000" dirty="0">
                 <a:solidFill>
                   <a:srgbClr val="75DFBC"/>
                 </a:solidFill>
@@ -21977,7 +19154,7 @@
               <a:t>.card</a:t>
             </a:r>
             <a:r>
-              <a:rPr lang="en-US" dirty="0">
+              <a:rPr lang="en-US" sz="2000" dirty="0">
                 <a:solidFill>
                   <a:srgbClr val="F1CF25"/>
                 </a:solidFill>
@@ -21988,7 +19165,7 @@
               <a:t>__header</a:t>
             </a:r>
             <a:r>
-              <a:rPr lang="en-US" dirty="0">
+              <a:rPr lang="en-US" sz="2000" dirty="0">
                 <a:solidFill>
                   <a:srgbClr val="FF6A4C"/>
                 </a:solidFill>
@@ -21999,7 +19176,7 @@
               <a:t>--featured</a:t>
             </a:r>
             <a:r>
-              <a:rPr lang="en-US" dirty="0">
+              <a:rPr lang="en-US" sz="2000" dirty="0">
                 <a:solidFill>
                   <a:srgbClr val="D8D8D8"/>
                 </a:solidFill>
@@ -22009,7 +19186,7 @@
               </a:rPr>
               <a:t> {</a:t>
             </a:r>
-            <a:endParaRPr lang="en-US" dirty="0"/>
+            <a:endParaRPr lang="en-US" sz="2000" dirty="0"/>
           </a:p>
           <a:p>
             <a:pPr marL="0" indent="0" algn="l">
@@ -22019,7 +19196,7 @@
               <a:buNone/>
             </a:pPr>
             <a:r>
-              <a:rPr lang="en-US" dirty="0">
+              <a:rPr lang="en-US" sz="2000" dirty="0">
                 <a:solidFill>
                   <a:srgbClr val="9CDCFE"/>
                 </a:solidFill>
@@ -22030,7 +19207,7 @@
               <a:t>  border-color</a:t>
             </a:r>
             <a:r>
-              <a:rPr lang="en-US" dirty="0">
+              <a:rPr lang="en-US" sz="2000" dirty="0">
                 <a:solidFill>
                   <a:srgbClr val="D8D8D8"/>
                 </a:solidFill>
@@ -22041,7 +19218,7 @@
               <a:t>: </a:t>
             </a:r>
             <a:r>
-              <a:rPr lang="en-US" dirty="0">
+              <a:rPr lang="en-US" sz="2000" dirty="0">
                 <a:solidFill>
                   <a:srgbClr val="F1CF25"/>
                 </a:solidFill>
@@ -22051,7 +19228,7 @@
               </a:rPr>
               <a:t>#75dfbc;</a:t>
             </a:r>
-            <a:endParaRPr lang="en-US" dirty="0"/>
+            <a:endParaRPr lang="en-US" sz="2000" dirty="0"/>
           </a:p>
           <a:p>
             <a:pPr marL="0" indent="0" algn="l">
@@ -22061,7 +19238,7 @@
               <a:buNone/>
             </a:pPr>
             <a:r>
-              <a:rPr lang="en-US" dirty="0">
+              <a:rPr lang="en-US" sz="2000" dirty="0">
                 <a:solidFill>
                   <a:srgbClr val="D8D8D8"/>
                 </a:solidFill>
@@ -22071,7 +19248,7 @@
               </a:rPr>
               <a:t>}</a:t>
             </a:r>
-            <a:endParaRPr lang="en-US" dirty="0"/>
+            <a:endParaRPr lang="en-US" sz="2000" dirty="0"/>
           </a:p>
           <a:p>
             <a:pPr marL="0" indent="0" algn="l">
@@ -22080,7 +19257,7 @@
               </a:lnSpc>
               <a:buNone/>
             </a:pPr>
-            <a:endParaRPr lang="en-US" dirty="0"/>
+            <a:endParaRPr lang="en-US" sz="2000" dirty="0"/>
           </a:p>
           <a:p>
             <a:pPr marL="0" indent="0" algn="l">
@@ -22090,7 +19267,7 @@
               <a:buNone/>
             </a:pPr>
             <a:r>
-              <a:rPr lang="en-US" dirty="0">
+              <a:rPr lang="en-US" sz="2000" dirty="0">
                 <a:solidFill>
                   <a:srgbClr val="75DFBC"/>
                 </a:solidFill>
@@ -22101,7 +19278,7 @@
               <a:t>.card</a:t>
             </a:r>
             <a:r>
-              <a:rPr lang="en-US" dirty="0">
+              <a:rPr lang="en-US" sz="2000" dirty="0">
                 <a:solidFill>
                   <a:srgbClr val="F1CF25"/>
                 </a:solidFill>
@@ -22112,7 +19289,7 @@
               <a:t>__cta</a:t>
             </a:r>
             <a:r>
-              <a:rPr lang="en-US" dirty="0">
+              <a:rPr lang="en-US" sz="2000" dirty="0">
                 <a:solidFill>
                   <a:srgbClr val="D8D8D8"/>
                 </a:solidFill>
@@ -22122,7 +19299,7 @@
               </a:rPr>
               <a:t> { … }</a:t>
             </a:r>
-            <a:endParaRPr lang="en-US" dirty="0"/>
+            <a:endParaRPr lang="en-US" sz="2000" dirty="0"/>
           </a:p>
           <a:p>
             <a:pPr marL="0" indent="0" algn="l">
@@ -22132,7 +19309,7 @@
               <a:buNone/>
             </a:pPr>
             <a:r>
-              <a:rPr lang="en-US" dirty="0">
+              <a:rPr lang="en-US" sz="2000" dirty="0">
                 <a:solidFill>
                   <a:srgbClr val="75DFBC"/>
                 </a:solidFill>
@@ -22143,7 +19320,7 @@
               <a:t>.card</a:t>
             </a:r>
             <a:r>
-              <a:rPr lang="en-US" dirty="0">
+              <a:rPr lang="en-US" sz="2000" dirty="0">
                 <a:solidFill>
                   <a:srgbClr val="F1CF25"/>
                 </a:solidFill>
@@ -22154,7 +19331,7 @@
               <a:t>__badge</a:t>
             </a:r>
             <a:r>
-              <a:rPr lang="en-US" dirty="0">
+              <a:rPr lang="en-US" sz="2000" dirty="0">
                 <a:solidFill>
                   <a:srgbClr val="D8D8D8"/>
                 </a:solidFill>
@@ -22164,85 +19341,7 @@
               </a:rPr>
               <a:t> { … }</a:t>
             </a:r>
-            <a:endParaRPr lang="en-US" dirty="0"/>
-          </a:p>
-        </p:txBody>
-      </p:sp>
-      <p:sp>
-        <p:nvSpPr>
-          <p:cNvPr id="17" name="Text 15"/>
-          <p:cNvSpPr/>
-          <p:nvPr/>
-        </p:nvSpPr>
-        <p:spPr>
-          <a:xfrm>
-            <a:off x="594360" y="6419088"/>
-            <a:ext cx="8229600" cy="274320"/>
-          </a:xfrm>
-          <a:prstGeom prst="rect">
-            <a:avLst/>
-          </a:prstGeom>
-          <a:noFill/>
-          <a:ln/>
-        </p:spPr>
-        <p:txBody>
-          <a:bodyPr wrap="square" lIns="0" tIns="0" rIns="0" bIns="0" rtlCol="0" anchor="ctr"/>
-          <a:lstStyle/>
-          <a:p>
-            <a:pPr marL="0" indent="0" algn="l">
-              <a:buNone/>
-            </a:pPr>
-            <a:r>
-              <a:rPr lang="en-US" sz="900" dirty="0">
-                <a:solidFill>
-                  <a:srgbClr val="6E6E6E"/>
-                </a:solidFill>
-                <a:latin typeface="Arial" pitchFamily="34" charset="0"/>
-                <a:ea typeface="Arial" pitchFamily="34" charset="-122"/>
-                <a:cs typeface="Arial" pitchFamily="34" charset="-120"/>
-              </a:rPr>
-              <a:t>Why LLMs &amp; JS frameworks love Tailwind CSS</a:t>
-            </a:r>
-            <a:endParaRPr lang="en-US" sz="900" dirty="0"/>
-          </a:p>
-        </p:txBody>
-      </p:sp>
-      <p:sp>
-        <p:nvSpPr>
-          <p:cNvPr id="18" name="Text 16"/>
-          <p:cNvSpPr/>
-          <p:nvPr/>
-        </p:nvSpPr>
-        <p:spPr>
-          <a:xfrm>
-            <a:off x="10134295" y="6419088"/>
-            <a:ext cx="1463040" cy="274320"/>
-          </a:xfrm>
-          <a:prstGeom prst="rect">
-            <a:avLst/>
-          </a:prstGeom>
-          <a:noFill/>
-          <a:ln/>
-        </p:spPr>
-        <p:txBody>
-          <a:bodyPr wrap="square" lIns="0" tIns="0" rIns="0" bIns="0" rtlCol="0" anchor="ctr"/>
-          <a:lstStyle/>
-          <a:p>
-            <a:pPr marL="0" indent="0" algn="r">
-              <a:buNone/>
-            </a:pPr>
-            <a:r>
-              <a:rPr lang="en-US" sz="900" dirty="0">
-                <a:solidFill>
-                  <a:srgbClr val="6E6E6E"/>
-                </a:solidFill>
-                <a:latin typeface="Arial" pitchFamily="34" charset="0"/>
-                <a:ea typeface="Arial" pitchFamily="34" charset="-122"/>
-                <a:cs typeface="Arial" pitchFamily="34" charset="-120"/>
-              </a:rPr>
-              <a:t>8 / 29</a:t>
-            </a:r>
-            <a:endParaRPr lang="en-US" sz="900" dirty="0"/>
+            <a:endParaRPr lang="en-US" sz="2000" dirty="0"/>
           </a:p>
         </p:txBody>
       </p:sp>
@@ -22841,126 +19940,6 @@
               <a:t>…relies on both 👆</a:t>
             </a:r>
             <a:endParaRPr lang="en-US" dirty="0"/>
-          </a:p>
-        </p:txBody>
-      </p:sp>
-      <p:sp>
-        <p:nvSpPr>
-          <p:cNvPr id="16" name="Text 14"/>
-          <p:cNvSpPr/>
-          <p:nvPr/>
-        </p:nvSpPr>
-        <p:spPr>
-          <a:xfrm>
-            <a:off x="594512" y="5047488"/>
-            <a:ext cx="11002975" cy="731520"/>
-          </a:xfrm>
-          <a:prstGeom prst="rect">
-            <a:avLst/>
-          </a:prstGeom>
-          <a:noFill/>
-          <a:ln/>
-        </p:spPr>
-        <p:txBody>
-          <a:bodyPr wrap="square" lIns="0" tIns="0" rIns="0" bIns="0" rtlCol="0" anchor="ctr"/>
-          <a:lstStyle/>
-          <a:p>
-            <a:pPr marL="0" indent="0" algn="l">
-              <a:lnSpc>
-                <a:spcPct val="105000"/>
-              </a:lnSpc>
-              <a:buNone/>
-            </a:pPr>
-            <a:r>
-              <a:rPr lang="en-US" sz="1700" dirty="0">
-                <a:solidFill>
-                  <a:srgbClr val="A6A6A6"/>
-                </a:solidFill>
-                <a:latin typeface="Arial" pitchFamily="34" charset="0"/>
-                <a:ea typeface="Arial" pitchFamily="34" charset="-122"/>
-                <a:cs typeface="Arial" pitchFamily="34" charset="-120"/>
-              </a:rPr>
-              <a:t>Edit one rule here → break a component three files away. Non-local effects are the worst case for a bounded context window.</a:t>
-            </a:r>
-            <a:endParaRPr lang="en-US" sz="1700" dirty="0"/>
-          </a:p>
-        </p:txBody>
-      </p:sp>
-      <p:sp>
-        <p:nvSpPr>
-          <p:cNvPr id="17" name="Text 15"/>
-          <p:cNvSpPr/>
-          <p:nvPr/>
-        </p:nvSpPr>
-        <p:spPr>
-          <a:xfrm>
-            <a:off x="594360" y="6419088"/>
-            <a:ext cx="8229600" cy="274320"/>
-          </a:xfrm>
-          <a:prstGeom prst="rect">
-            <a:avLst/>
-          </a:prstGeom>
-          <a:noFill/>
-          <a:ln/>
-        </p:spPr>
-        <p:txBody>
-          <a:bodyPr wrap="square" lIns="0" tIns="0" rIns="0" bIns="0" rtlCol="0" anchor="ctr"/>
-          <a:lstStyle/>
-          <a:p>
-            <a:pPr marL="0" indent="0" algn="l">
-              <a:buNone/>
-            </a:pPr>
-            <a:r>
-              <a:rPr lang="en-US" sz="900" dirty="0">
-                <a:solidFill>
-                  <a:srgbClr val="6E6E6E"/>
-                </a:solidFill>
-                <a:latin typeface="Arial" pitchFamily="34" charset="0"/>
-                <a:ea typeface="Arial" pitchFamily="34" charset="-122"/>
-                <a:cs typeface="Arial" pitchFamily="34" charset="-120"/>
-              </a:rPr>
-              <a:t>Why LLMs &amp; JS frameworks love Tailwind CSS</a:t>
-            </a:r>
-            <a:endParaRPr lang="en-US" sz="900" dirty="0"/>
-          </a:p>
-        </p:txBody>
-      </p:sp>
-      <p:sp>
-        <p:nvSpPr>
-          <p:cNvPr id="18" name="Text 16"/>
-          <p:cNvSpPr/>
-          <p:nvPr/>
-        </p:nvSpPr>
-        <p:spPr>
-          <a:xfrm>
-            <a:off x="10134295" y="6419088"/>
-            <a:ext cx="1463040" cy="274320"/>
-          </a:xfrm>
-          <a:prstGeom prst="rect">
-            <a:avLst/>
-          </a:prstGeom>
-          <a:noFill/>
-          <a:ln/>
-        </p:spPr>
-        <p:txBody>
-          <a:bodyPr wrap="square" lIns="0" tIns="0" rIns="0" bIns="0" rtlCol="0" anchor="ctr"/>
-          <a:lstStyle/>
-          <a:p>
-            <a:pPr marL="0" indent="0" algn="r">
-              <a:buNone/>
-            </a:pPr>
-            <a:r>
-              <a:rPr lang="en-US" sz="900" dirty="0">
-                <a:solidFill>
-                  <a:srgbClr val="6E6E6E"/>
-                </a:solidFill>
-                <a:latin typeface="Arial" pitchFamily="34" charset="0"/>
-                <a:ea typeface="Arial" pitchFamily="34" charset="-122"/>
-                <a:cs typeface="Arial" pitchFamily="34" charset="-120"/>
-              </a:rPr>
-              <a:t>9 / 29</a:t>
-            </a:r>
-            <a:endParaRPr lang="en-US" sz="900" dirty="0"/>
           </a:p>
         </p:txBody>
       </p:sp>

--- a/why-llms-love-tailwind-conf.pptx
+++ b/why-llms-love-tailwind-conf.pptx
@@ -5,39 +5,41 @@
     <p:sldMasterId id="2147483648" r:id="rId1"/>
   </p:sldMasterIdLst>
   <p:notesMasterIdLst>
-    <p:notesMasterId r:id="rId32"/>
+    <p:notesMasterId r:id="rId34"/>
   </p:notesMasterIdLst>
   <p:sldIdLst>
     <p:sldId id="256" r:id="rId2"/>
     <p:sldId id="257" r:id="rId3"/>
     <p:sldId id="258" r:id="rId4"/>
-    <p:sldId id="259" r:id="rId5"/>
-    <p:sldId id="260" r:id="rId6"/>
-    <p:sldId id="261" r:id="rId7"/>
-    <p:sldId id="262" r:id="rId8"/>
-    <p:sldId id="263" r:id="rId9"/>
-    <p:sldId id="264" r:id="rId10"/>
-    <p:sldId id="265" r:id="rId11"/>
-    <p:sldId id="266" r:id="rId12"/>
-    <p:sldId id="267" r:id="rId13"/>
-    <p:sldId id="268" r:id="rId14"/>
-    <p:sldId id="269" r:id="rId15"/>
-    <p:sldId id="270" r:id="rId16"/>
-    <p:sldId id="271" r:id="rId17"/>
-    <p:sldId id="272" r:id="rId18"/>
-    <p:sldId id="273" r:id="rId19"/>
-    <p:sldId id="274" r:id="rId20"/>
-    <p:sldId id="275" r:id="rId21"/>
-    <p:sldId id="276" r:id="rId22"/>
-    <p:sldId id="277" r:id="rId23"/>
-    <p:sldId id="278" r:id="rId24"/>
-    <p:sldId id="279" r:id="rId25"/>
-    <p:sldId id="280" r:id="rId26"/>
-    <p:sldId id="281" r:id="rId27"/>
-    <p:sldId id="282" r:id="rId28"/>
-    <p:sldId id="283" r:id="rId29"/>
-    <p:sldId id="314" r:id="rId30"/>
-    <p:sldId id="315" r:id="rId31"/>
+    <p:sldId id="301" r:id="rId5"/>
+    <p:sldId id="300" r:id="rId6"/>
+    <p:sldId id="260" r:id="rId7"/>
+    <p:sldId id="261" r:id="rId8"/>
+    <p:sldId id="262" r:id="rId9"/>
+    <p:sldId id="263" r:id="rId10"/>
+    <p:sldId id="264" r:id="rId11"/>
+    <p:sldId id="265" r:id="rId12"/>
+    <p:sldId id="266" r:id="rId13"/>
+    <p:sldId id="267" r:id="rId14"/>
+    <p:sldId id="268" r:id="rId15"/>
+    <p:sldId id="269" r:id="rId16"/>
+    <p:sldId id="270" r:id="rId17"/>
+    <p:sldId id="271" r:id="rId18"/>
+    <p:sldId id="272" r:id="rId19"/>
+    <p:sldId id="273" r:id="rId20"/>
+    <p:sldId id="274" r:id="rId21"/>
+    <p:sldId id="275" r:id="rId22"/>
+    <p:sldId id="276" r:id="rId23"/>
+    <p:sldId id="277" r:id="rId24"/>
+    <p:sldId id="278" r:id="rId25"/>
+    <p:sldId id="279" r:id="rId26"/>
+    <p:sldId id="280" r:id="rId27"/>
+    <p:sldId id="281" r:id="rId28"/>
+    <p:sldId id="282" r:id="rId29"/>
+    <p:sldId id="283" r:id="rId30"/>
+    <p:sldId id="314" r:id="rId31"/>
+    <p:sldId id="310" r:id="rId32"/>
+    <p:sldId id="315" r:id="rId33"/>
   </p:sldIdLst>
   <p:sldSz cx="12192000" cy="6858000"/>
   <p:notesSz cx="6858000" cy="12192000"/>
@@ -405,25 +407,31 @@
           <a:p>
             <a:r>
               <a:rPr lang="en-US" dirty="0"/>
-              <a:t>Friction number three. Separation of concerns became separation of context.</a:t>
+              <a:t>Friction number two. The cascade.</a:t>
             </a:r>
           </a:p>
           <a:p>
             <a:r>
               <a:rPr lang="en-US" dirty="0"/>
-              <a:t>We were taught to keep markup in one file and styles in another. That sounded clean. In practice, the component file has a class name, the stylesheet has the rule, and they are joined only by a magic string. card featured on one side. The same string on the other. A pointer. Not a spec.</a:t>
+              <a:t>The C in CSS is global, and it is order-dependent. That is not a bug in your project. That is the language.</a:t>
             </a:r>
           </a:p>
           <a:p>
             <a:r>
               <a:rPr lang="en-US" dirty="0"/>
-              <a:t>To understand this component, you must hold both files in your head. And so must the model. If the CSS file is not in the context window, the model is guessing what card featured means. It will guess. It will guess wrong often enough to waste your afternoon.</a:t>
+              <a:t>Look at the chain. Reset sets margin to zero. Buttons sets padding to eight pixels. The card file relies on both. The card does not own its look. It borrows it, in order, from files it does not control.</a:t>
             </a:r>
           </a:p>
           <a:p>
             <a:r>
               <a:rPr lang="en-US" dirty="0"/>
-              <a:t>The class name is not documentation. It is a pointer into another file. Carson Gross wrote about this as locality of behaviour. I will share that essay at the end. For now, the point is simple. Two files for one look is two contexts for one thought.</a:t>
+              <a:t>You edit one rule here, and you break a component three files away. That is the lightbulb joke in production form. You did not change the card. You changed something around it, and you hoped it cascaded correctly.</a:t>
+            </a:r>
+          </a:p>
+          <a:p>
+            <a:r>
+              <a:rPr lang="en-US" dirty="0"/>
+              <a:t>Non-local effects are the worst case for a human. They are also the worst case for a model with a bounded context window, because the cause of the bug is not in the file it is looking at. The model cannot fix what it cannot see.</a:t>
             </a:r>
           </a:p>
         </p:txBody>
@@ -510,25 +518,25 @@
           <a:p>
             <a:r>
               <a:rPr lang="en-US" dirty="0"/>
-              <a:t>The fix is co-location. Tailwind puts markup and style in one place.</a:t>
+              <a:t>Friction number three. Separation of concerns became separation of context.</a:t>
             </a:r>
           </a:p>
           <a:p>
             <a:r>
               <a:rPr lang="en-US" dirty="0"/>
-              <a:t>Look at this button. There is no CSS file. There are no invented class names. There is no cascade to reason about. rounded-lg, px-4, py-3, font-bold. And if it is featured, a background, a text color, and a hover state. Everything about how this button looks is sitting on the button.</a:t>
+              <a:t>We were taught to keep markup in one file and styles in another. That sounded clean. In practice, the component file has a class name, the stylesheet has the rule, and they are joined only by a magic string. card featured on one side. The same string on the other. A pointer. Not a spec.</a:t>
             </a:r>
           </a:p>
           <a:p>
             <a:r>
               <a:rPr lang="en-US" dirty="0"/>
-              <a:t>An LLM sees the entire spec in one span of tokens. A teammate sees the same thing. You do not open a second tab. You do not search for a class name. You read the component and you are done.</a:t>
+              <a:t>To understand this component, you must hold both files in your head. And so must the model. If the CSS file is not in the context window, the model is guessing what card featured means. It will guess. It will guess wrong often enough to waste your afternoon.</a:t>
             </a:r>
           </a:p>
           <a:p>
             <a:r>
               <a:rPr lang="en-US" dirty="0"/>
-              <a:t>That is the whole trick. Markup and style live in one place. Now I want to show it to you live, with the same card, two ways.</a:t>
+              <a:t>The class name is not documentation. It is a pointer into another file. Carson Gross wrote about this as locality of behaviour. I will share that essay at the end. For now, the point is simple. Two files for one look is two contexts for one thought.</a:t>
             </a:r>
           </a:p>
         </p:txBody>
@@ -615,43 +623,25 @@
           <a:p>
             <a:r>
               <a:rPr lang="en-US" dirty="0"/>
-              <a:t>I am switching to the demo. Same pricing card, two ways. The prompt is the one on the slide. Build a pricing card with a featured tier.</a:t>
+              <a:t>The fix is co-location. Tailwind puts markup and style in one place.</a:t>
             </a:r>
           </a:p>
           <a:p>
             <a:r>
               <a:rPr lang="en-US" dirty="0"/>
-              <a:t>Look at these two cards. They are pixel identical. Left is semantic CSS. Two files, invented names, the cascade. Right is Tailwind. One file, zero names, zero config. The only difference is how many files you, or a model, have to open to understand the look.</a:t>
+              <a:t>Look at this button. There is no CSS file. There are no invented class names. There is no cascade to reason about. rounded-lg, px-4, py-3, font-bold. And if it is featured, a background, a text color, and a hover state. Everything about how this button looks is sitting on the button.</a:t>
             </a:r>
           </a:p>
           <a:p>
             <a:r>
               <a:rPr lang="en-US" dirty="0"/>
-              <a:t>I am going to click Compare source files.</a:t>
+              <a:t>An LLM sees the entire spec in one span of tokens. A teammate sees the same thing. You do not open a second tab. You do not search for a class name. You read the component and you are done.</a:t>
             </a:r>
           </a:p>
           <a:p>
             <a:r>
               <a:rPr lang="en-US" dirty="0"/>
-              <a:t>On the left, two files. A TSX file full of invented names, and a CSS file with a cascade. pricing-card. pricing-card featured. badge, name, price, price suffix, features, feature, check, CTA. About ten invented names, plus cascade overrides so the featured card's button is dark instead of grey. Spacing is ad-hoc. Fourteen pixels here, sixteen there. Twenty-eight pixels of padding with no shared scale. To change the look, you join those two files in your head through string class names.</a:t>
-            </a:r>
-          </a:p>
-          <a:p>
-            <a:r>
-              <a:rPr lang="en-US" dirty="0"/>
-              <a:t>On the right, one file. That is the whole component. No invented names. No second file. Values come from the token scale. The featured state is a condition in the same function, not a modifier class in another document.</a:t>
-            </a:r>
-          </a:p>
-          <a:p>
-            <a:r>
-              <a:rPr lang="en-US" dirty="0"/>
-              <a:t>This is what the model has to hold in its head. One of these fits in a single glance. The other one does not. Same pixels. Completely different cost of change.</a:t>
-            </a:r>
-          </a:p>
-          <a:p>
-            <a:r>
-              <a:rPr lang="en-US" dirty="0"/>
-              <a:t>I am going back to the slides. Next I want to walk six reasons this is not an accident.</a:t>
+              <a:t>That is the whole trick. Markup and style live in one place. Now I want to show it to you live, with the same card, two ways.</a:t>
             </a:r>
           </a:p>
         </p:txBody>
@@ -738,25 +728,43 @@
           <a:p>
             <a:r>
               <a:rPr lang="en-US" dirty="0"/>
-              <a:t>Why it works. Reason one. Co-location is context locality.</a:t>
+              <a:t>I am switching to the demo. Same pricing card, two ways. The prompt is the one on the slide. Build a pricing card with a featured tier.</a:t>
             </a:r>
           </a:p>
           <a:p>
             <a:r>
               <a:rPr lang="en-US" dirty="0"/>
-              <a:t>LLMs have a bounded context and no project memory. The answer has to be in front of the model, or the model will invent it. That is not a criticism of the model. That is how a next-token predictor works. It completes from what it can see.</a:t>
+              <a:t>Look at these two cards. They are pixel identical. Left is semantic CSS. Two files, invented names, the cascade. Right is Tailwind. One file, zero names, zero config. The only difference is how many files you, or a model, have to open to understand the look.</a:t>
             </a:r>
           </a:p>
           <a:p>
             <a:r>
               <a:rPr lang="en-US" dirty="0"/>
-              <a:t>Co-located styling means the whole spec is in one token span. Semantic CSS means a second file it may never have read. If that file is not in the prompt, the model is generating a hero class and hoping a hero rule exists somewhere. Sometimes it invents the rule. Sometimes it invents a different name than the one in your stylesheet. Both are expensive.</a:t>
+              <a:t>I am going to click Compare source files.</a:t>
             </a:r>
           </a:p>
           <a:p>
             <a:r>
               <a:rPr lang="en-US" dirty="0"/>
-              <a:t>Look at the contrast on the slide. A hero class that points at forty lines somewhere else, versus a div that says grid, gap-6, p-8. With Tailwind, it is all right here. The model does not need project memory, because the project put the answer in the span.</a:t>
+              <a:t>On the left, two files. A TSX file full of invented names, and a CSS file with a cascade. pricing-card. pricing-card featured. badge, name, price, price suffix, features, feature, check, CTA. About ten invented names, plus cascade overrides so the featured card's button is dark instead of grey. Spacing is ad-hoc. Fourteen pixels here, sixteen there. Twenty-eight pixels of padding with no shared scale. To change the look, you join those two files in your head through string class names.</a:t>
+            </a:r>
+          </a:p>
+          <a:p>
+            <a:r>
+              <a:rPr lang="en-US" dirty="0"/>
+              <a:t>On the right, one file. That is the whole component. No invented names. No second file. Values come from the token scale. The featured state is a condition in the same function, not a modifier class in another document.</a:t>
+            </a:r>
+          </a:p>
+          <a:p>
+            <a:r>
+              <a:rPr lang="en-US" dirty="0"/>
+              <a:t>This is what the model has to hold in its head. One of these fits in a single glance. The other one does not. Same pixels. Completely different cost of change.</a:t>
+            </a:r>
+          </a:p>
+          <a:p>
+            <a:r>
+              <a:rPr lang="en-US" dirty="0"/>
+              <a:t>I am going back to the slides. Next I want to walk six reasons this is not an accident.</a:t>
             </a:r>
           </a:p>
         </p:txBody>
@@ -843,25 +851,25 @@
           <a:p>
             <a:r>
               <a:rPr lang="en-US" dirty="0"/>
-              <a:t>Reason two. A closed vocabulary is predictability.</a:t>
+              <a:t>Why it works. Reason one. Co-location is context locality.</a:t>
             </a:r>
           </a:p>
           <a:p>
             <a:r>
               <a:rPr lang="en-US" dirty="0"/>
-              <a:t>An LLM is a next-token predictor. flex items-center justify-between is a fixed phrase. The model has seen it millions of times, in that order, in public repos, in docs, in Stack Overflow, in shadcn. Low perplexity, high accuracy. Low perplexity means the model is not surprised. The next token is easy, so the next token is right.</a:t>
+              <a:t>LLMs have a bounded context and no project memory. The answer has to be in front of the model, or the model will invent it. That is not a criticism of the model. That is how a next-token predictor works. It completes from what it can see.</a:t>
             </a:r>
           </a:p>
           <a:p>
             <a:r>
               <a:rPr lang="en-US" dirty="0"/>
-              <a:t>Arbitrary CSS is infinite names, infinite orders, infinite units. That is drift. You can write display flex a hundred different ways. You can name a centered row a hundred different things. The model has to invent, not complete.</a:t>
+              <a:t>Co-located styling means the whole spec is in one token span. Semantic CSS means a second file it may never have read. If that file is not in the prompt, the model is generating a hero class and hoping a hero rule exists somewhere. Sometimes it invents the rule. Sometimes it invents a different name than the one in your stylesheet. Both are expensive.</a:t>
             </a:r>
           </a:p>
           <a:p>
             <a:r>
               <a:rPr lang="en-US" dirty="0"/>
-              <a:t>Look at the contrast. Tailwind says flex items-center. Semantic CSS says hero-banner-x. One of those is a phrase the model has finished a million times. The other is a coin flip. The model is completing a phrase it already knows. It is not inventing a name for your project.</a:t>
+              <a:t>Look at the contrast on the slide. A hero class that points at forty lines somewhere else, versus a div that says grid, gap-6, p-8. With Tailwind, it is all right here. The model does not need project memory, because the project put the answer in the span.</a:t>
             </a:r>
           </a:p>
         </p:txBody>
@@ -948,25 +956,25 @@
           <a:p>
             <a:r>
               <a:rPr lang="en-US" dirty="0"/>
-              <a:t>Reason three. Design tokens are constrained values.</a:t>
+              <a:t>Reason two. A closed vocabulary is predictability.</a:t>
             </a:r>
           </a:p>
           <a:p>
             <a:r>
               <a:rPr lang="en-US" dirty="0"/>
-              <a:t>Spacing, color, and radius all come from a fixed scale. p-1, p-2, p-3, p-4, p-6, p-8. A small, safe menu. The model picks p-4 from that menu, instead of hallucinating padding thirteen pixels.</a:t>
+              <a:t>An LLM is a next-token predictor. flex items-center justify-between is a fixed phrase. The model has seen it millions of times, in that order, in public repos, in docs, in Stack Overflow, in shadcn. Low perplexity, high accuracy. Low perplexity means the model is not surprised. The next token is easy, so the next token is right.</a:t>
             </a:r>
           </a:p>
           <a:p>
             <a:r>
               <a:rPr lang="en-US" dirty="0"/>
-              <a:t>Freeform CSS drifts. Thirteen pixels here, fourteen pixels there, twenty-eight on the next card. A human will spend a review pass cleaning that up. A model will keep drifting, because nothing in the language told it the legal values.</a:t>
+              <a:t>Arbitrary CSS is infinite names, infinite orders, infinite units. That is drift. You can write display flex a hundred different ways. You can name a centered row a hundred different things. The model has to invent, not complete.</a:t>
             </a:r>
           </a:p>
           <a:p>
             <a:r>
               <a:rPr lang="en-US" dirty="0"/>
-              <a:t>The token scale keeps generations consistent without that cleanup pass. Constraints do not make the model dumber. Constraints guide the model. A small, safe menu beats an infinite one every time, for humans and for machines.</a:t>
+              <a:t>Look at the contrast. Tailwind says flex items-center. Semantic CSS says hero-banner-x. One of those is a phrase the model has finished a million times. The other is a coin flip. The model is completing a phrase it already knows. It is not inventing a name for your project.</a:t>
             </a:r>
           </a:p>
         </p:txBody>
@@ -1053,25 +1061,25 @@
           <a:p>
             <a:r>
               <a:rPr lang="en-US" dirty="0"/>
-              <a:t>Reason four. A deterministic, global mapping.</a:t>
+              <a:t>Reason three. Design tokens are constrained values.</a:t>
             </a:r>
           </a:p>
           <a:p>
             <a:r>
               <a:rPr lang="en-US" dirty="0"/>
-              <a:t>mt-4 means margin-top one rem in every repo on earth. flex means display flex. gap-6 means gap one and a half rem. That mapping does not change when you change jobs. It does not change when you open a new repository. It does not change when the model was trained.</a:t>
+              <a:t>Spacing, color, and radius all come from a fixed scale. p-1, p-2, p-3, p-4, p-6, p-8. A small, safe menu. The model picks p-4 from that menu, instead of hallucinating padding thirteen pixels.</a:t>
             </a:r>
           </a:p>
           <a:p>
             <a:r>
               <a:rPr lang="en-US" dirty="0"/>
-              <a:t>There is no, what does spacer mean in this project. Spacer means nothing until you read this repo. It might be a margin. It might be a flex gap. It might be an empty div with a height. The name does not carry the meaning. The utility does.</a:t>
+              <a:t>Freeform CSS drifts. Thirteen pixels here, fourteen pixels there, twenty-eight on the next card. A human will spend a review pass cleaning that up. A model will keep drifting, because nothing in the language told it the legal values.</a:t>
             </a:r>
           </a:p>
           <a:p>
             <a:r>
               <a:rPr lang="en-US" dirty="0"/>
-              <a:t>Training generalizes across the entire corpus because the mapping is stable. Bespoke class names are project-local. They do not transfer. Utilities do. That is why a model that has never seen your codebase can still style a button correctly on the first try.</a:t>
+              <a:t>The token scale keeps generations consistent without that cleanup pass. Constraints do not make the model dumber. Constraints guide the model. A small, safe menu beats an infinite one every time, for humans and for machines.</a:t>
             </a:r>
           </a:p>
         </p:txBody>
@@ -1158,25 +1166,25 @@
           <a:p>
             <a:r>
               <a:rPr lang="en-US" dirty="0"/>
-              <a:t>Reason five. The training-data flywheel.</a:t>
+              <a:t>Reason four. A deterministic, global mapping.</a:t>
             </a:r>
           </a:p>
           <a:p>
             <a:r>
               <a:rPr lang="en-US" dirty="0"/>
-              <a:t>Tailwind saturates modern training data. Next.js apps. shadcn components. Millions of public repositories. Docs that read like a dictionary of the same tokens. The model has been to this neighborhood.</a:t>
+              <a:t>mt-4 means margin-top one rem in every repo on earth. flex means display flex. gap-6 means gap one and a half rem. That mapping does not change when you change jobs. It does not change when you open a new repository. It does not change when the model was trained.</a:t>
             </a:r>
           </a:p>
           <a:p>
             <a:r>
               <a:rPr lang="en-US" dirty="0"/>
-              <a:t>Utilities generalize across the corpus. Project names do not. Every time someone publishes another Tailwind component, the next model gets better at Tailwind. Every time someone publishes another BEM block named card wrapper featured, the next model learns a name it will never see again.</a:t>
+              <a:t>There is no, what does spacer mean in this project. Spacer means nothing until you read this repo. It might be a margin. It might be a flex gap. It might be an empty div with a height. The name does not carry the meaning. The utility does.</a:t>
             </a:r>
           </a:p>
           <a:p>
             <a:r>
               <a:rPr lang="en-US" dirty="0"/>
-              <a:t>More usage produces more data. More data produces better generation. Better generation produces more trust, and more usage. That loop is already running. The gap widens over time. This is not a temporary fashion. It is a compounding advantage. That is the flywheel on the slide.</a:t>
+              <a:t>Training generalizes across the entire corpus because the mapping is stable. Bespoke class names are project-local. They do not transfer. Utilities do. That is why a model that has never seen your codebase can still style a button correctly on the first try.</a:t>
             </a:r>
           </a:p>
         </p:txBody>
@@ -1263,25 +1271,25 @@
           <a:p>
             <a:r>
               <a:rPr lang="en-US" dirty="0"/>
-              <a:t>Reason six. Self-documenting means verifiable.</a:t>
+              <a:t>Reason five. The training-data flywheel.</a:t>
             </a:r>
           </a:p>
           <a:p>
             <a:r>
               <a:rPr lang="en-US" dirty="0"/>
-              <a:t>The class list is the spec. Read bg-coral, hover bg-coral at eighty percent, px-4 py-2, rounded-lg, and you know exactly what it does without running it. A coral button. It darkens on hover. Comfortable padding. Soft corners. You did not have to open a browser. You did not have to open a stylesheet. You read it.</a:t>
+              <a:t>Tailwind saturates modern training data. Next.js apps. shadcn components. Millions of public repositories. Docs that read like a dictionary of the same tokens. The model has been to this neighborhood.</a:t>
             </a:r>
           </a:p>
           <a:p>
             <a:r>
               <a:rPr lang="en-US" dirty="0"/>
-              <a:t>You verify by reading, not by spinning up the app. That makes review faster, and faster review means a tighter loop between the human and the AI. You accept the generation, or you edit one class, in place, in the same span.</a:t>
+              <a:t>Utilities generalize across the corpus. Project names do not. Every time someone publishes another Tailwind component, the next model gets better at Tailwind. Every time someone publishes another BEM block named card wrapper featured, the next model learns a name it will never see again.</a:t>
             </a:r>
           </a:p>
           <a:p>
             <a:r>
               <a:rPr lang="en-US" dirty="0"/>
-              <a:t>That is six reasons. Co-location. Closed vocabulary. Tokens. Deterministic mapping. The flywheel. And a spec you can read. Now I want to talk about why JavaScript frameworks were already halfway there.</a:t>
+              <a:t>More usage produces more data. More data produces better generation. Better generation produces more trust, and more usage. That loop is already running. The gap widens over time. This is not a temporary fashion. It is a compounding advantage. That is the flywheel on the slide.</a:t>
             </a:r>
           </a:p>
         </p:txBody>
@@ -1368,25 +1376,25 @@
           <a:p>
             <a:r>
               <a:rPr lang="en-US" dirty="0"/>
-              <a:t>Modern JavaScript frameworks already work this way for template and logic.</a:t>
+              <a:t>Reason six. Self-documenting means verifiable.</a:t>
             </a:r>
           </a:p>
           <a:p>
             <a:r>
               <a:rPr lang="en-US" dirty="0"/>
-              <a:t>React, Vue, Svelte, Solid, Angular. A component is one unit. The markup and the behavior live together. You do not open a template file and a controller file to understand a button. That war is over, and components won.</a:t>
+              <a:t>The class list is the spec. Read bg-coral, hover bg-coral at eighty percent, px-4 py-2, rounded-lg, and you know exactly what it does without running it. A coral button. It darkens on hover. Comfortable padding. Soft corners. You did not have to open a browser. You did not have to open a stylesheet. You read it.</a:t>
             </a:r>
           </a:p>
           <a:p>
             <a:r>
               <a:rPr lang="en-US" dirty="0"/>
-              <a:t>Tailwind adds style to that same unit. Template plus logic plus style. One component. One file. One mental model. The look is not the exception that still lives in a global stylesheet. The look joins the rest of the component.</a:t>
+              <a:t>You verify by reading, not by spinning up the app. That makes review faster, and faster review means a tighter loop between the human and the AI. You accept the generation, or you edit one class, in place, in the same span.</a:t>
             </a:r>
           </a:p>
           <a:p>
             <a:r>
               <a:rPr lang="en-US" dirty="0"/>
-              <a:t>Component encapsulation and utility-first both apply locality, at different layers. Frameworks localized the markup and the behavior. Tailwind localizes the look. Once you see it that way, the JS-framework love story is not a coincidence. It is the same idea, applied one more time.</a:t>
+              <a:t>That is six reasons. Co-location. Closed vocabulary. Tokens. Deterministic mapping. The flywheel. And a spec you can read. Now I want to talk about why JavaScript frameworks were already halfway there.</a:t>
             </a:r>
           </a:p>
         </p:txBody>
@@ -1572,25 +1580,25 @@
           <a:p>
             <a:r>
               <a:rPr lang="en-US" dirty="0"/>
-              <a:t>And Tailwind was built for the JavaScript toolchain. Two reasons.</a:t>
+              <a:t>Modern JavaScript frameworks already work this way for template and logic.</a:t>
             </a:r>
           </a:p>
           <a:p>
             <a:r>
               <a:rPr lang="en-US" dirty="0"/>
-              <a:t>First, dynamic composition is trivial. In React, className equals cn of base, and if active, bg-mint. In Vue, a class binding with opacity fifty when loading. In Svelte, class selected equals isSelected. JSX and template bindings make class composition a one-liner. You already write conditions in the component. Tailwind lets the look use those same conditions.</a:t>
+              <a:t>React, Vue, Svelte, Solid, Angular. A component is one unit. The markup and the behavior live together. You do not open a template file and a controller file to understand a button. That war is over, and components won.</a:t>
             </a:r>
           </a:p>
           <a:p>
             <a:r>
               <a:rPr lang="en-US" dirty="0"/>
-              <a:t>Second, the build step is already there. Vite, PostCSS, bundlers. That is Tailwind's native home. A just-in-time compiler. Content scanning, so it knows which utilities you actually used. Tree-shaking, so you ship only those utilities.</a:t>
+              <a:t>Tailwind adds style to that same unit. Template plus logic plus style. One component. One file. One mental model. The look is not the exception that still lives in a global stylesheet. The look joins the rest of the component.</a:t>
             </a:r>
           </a:p>
           <a:p>
             <a:r>
               <a:rPr lang="en-US" dirty="0"/>
-              <a:t>Tailwind is a build-tool-native idea. It belongs to the JavaScript ecosystem. That is why the fit is so tight. It is not a CSS framework that happens to work in React. It is a styling system that assumes you already have a bundler, and you already have components.</a:t>
+              <a:t>Component encapsulation and utility-first both apply locality, at different layers. Frameworks localized the markup and the behavior. Tailwind localizes the look. Once you see it that way, the JS-framework love story is not a coincidence. It is the same idea, applied one more time.</a:t>
             </a:r>
           </a:p>
         </p:txBody>
@@ -1677,25 +1685,25 @@
           <a:p>
             <a:r>
               <a:rPr lang="en-US" dirty="0"/>
-              <a:t>Now the TypeScript angle. TypeScript loves Tailwind because they are the same philosophy. A constrained, named vocabulary that catches mistakes early.</a:t>
+              <a:t>And Tailwind was built for the JavaScript toolchain. Two reasons.</a:t>
             </a:r>
           </a:p>
           <a:p>
             <a:r>
               <a:rPr lang="en-US" dirty="0"/>
-              <a:t>Look at this button. CVA, class-variance-authority, turns utilities into a typed contract. A base of rounded-lg and font-bold. Then variants. Primary is bg-mint text-ink. Destructive is bg-coral text-ink. Size small is h-8 px-3. Size large is h-12 px-6. Those variants are now type-checked and autocompleted.</a:t>
+              <a:t>First, dynamic composition is trivial. In React, className equals cn of base, and if active, bg-mint. In Vue, a class binding with opacity fifty when loading. In Svelte, class selected equals isSelected. JSX and template bindings make class composition a one-liner. You already write conditions in the component. Tailwind lets the look use those same conditions.</a:t>
             </a:r>
           </a:p>
           <a:p>
             <a:r>
               <a:rPr lang="en-US" dirty="0"/>
-              <a:t>If you pass a variant that does not exist, TypeScript fails at compile time. You do not discover it in production. You do not discover it when a model invents a name. The contract is sitting in the file.</a:t>
+              <a:t>Second, the build step is already there. Vite, PostCSS, bundlers. That is Tailwind's native home. A just-in-time compiler. Content scanning, so it knows which utilities you actually used. Tree-shaking, so you ship only those utilities.</a:t>
             </a:r>
           </a:p>
           <a:p>
             <a:r>
               <a:rPr lang="en-US" dirty="0"/>
-              <a:t>The tools on this slide are the whole stack. CVA. tailwind-variants. tailwind-merge. clsx, or the cn helper. TypeScript constrains the values. Tailwind constrains the styles. Same idea, two layers. I want to show you that live.</a:t>
+              <a:t>Tailwind is a build-tool-native idea. It belongs to the JavaScript ecosystem. That is why the fit is so tight. It is not a CSS framework that happens to work in React. It is a styling system that assumes you already have a bundler, and you already have components.</a:t>
             </a:r>
           </a:p>
         </p:txBody>
@@ -1782,31 +1790,25 @@
           <a:p>
             <a:r>
               <a:rPr lang="en-US" dirty="0"/>
-              <a:t>I am switching back to the demo. Demo two. Typed variants, live.</a:t>
+              <a:t>Now the TypeScript angle. TypeScript loves Tailwind because they are the same philosophy. A constrained, named vocabulary that catches mistakes early.</a:t>
             </a:r>
           </a:p>
           <a:p>
             <a:r>
               <a:rPr lang="en-US" dirty="0"/>
-              <a:t>This is a real shadcn button, official base-maia, sitting on Base UI. I am going to toggle variant and size.</a:t>
+              <a:t>Look at this button. CVA, class-variance-authority, turns utilities into a typed contract. A base of rounded-lg and font-bold. Then variants. Primary is bg-mint text-ink. Destructive is bg-coral text-ink. Size small is h-8 px-3. Size large is h-12 px-6. Those variants are now type-checked and autocompleted.</a:t>
             </a:r>
           </a:p>
           <a:p>
             <a:r>
               <a:rPr lang="en-US" dirty="0"/>
-              <a:t>Watch the class string under the button. It updates from one typed contract. Default, secondary, outline, ghost, destructive. Small, default, large. That string is not guessed. It is generated from a closed set. CVA is doing the mapping you just saw on the last slide.</a:t>
+              <a:t>If you pass a variant that does not exist, TypeScript fails at compile time. You do not discover it in production. You do not discover it when a model invents a name. The contract is sitting in the file.</a:t>
             </a:r>
           </a:p>
           <a:p>
             <a:r>
               <a:rPr lang="en-US" dirty="0"/>
-              <a:t>If I type Button variant equals, in the editor, IntelliSense lists the set. A wrong variant is a red squiggle at compile time, not a two a.m. incident. The model sees the same contract. When you ask it to add a success variant, it has one place to edit, and TypeScript will check the result.</a:t>
-            </a:r>
-          </a:p>
-          <a:p>
-            <a:r>
-              <a:rPr lang="en-US" dirty="0"/>
-              <a:t>TypeScript constrains the values. Tailwind constrains the styles. One constrained, checkable vocabulary. Stay in the demo. Demo three is the payoff.</a:t>
+              <a:t>The tools on this slide are the whole stack. CVA. tailwind-variants. tailwind-merge. clsx, or the cn helper. TypeScript constrains the values. Tailwind constrains the styles. Same idea, two layers. I want to show you that live.</a:t>
             </a:r>
           </a:p>
         </p:txBody>
@@ -1893,43 +1895,31 @@
           <a:p>
             <a:r>
               <a:rPr lang="en-US" dirty="0"/>
-              <a:t>This is the payoff. I am scrolling down to Demo three. Watch it edit one file.</a:t>
+              <a:t>I am switching back to the demo. Demo two. Typed variants, live.</a:t>
             </a:r>
           </a:p>
           <a:p>
             <a:r>
               <a:rPr lang="en-US" dirty="0"/>
-              <a:t>The prompt on the slide is add a success variant, then a loading state with a spinner. I am going to send three prompts against this button, one at a time, and I want you to watch two things. The live component on the left, and the diff on the right. The diff is always the same file. button.tsx.</a:t>
+              <a:t>This is a real shadcn button, official base-maia, sitting on Base UI. I am going to toggle variant and size.</a:t>
             </a:r>
           </a:p>
           <a:p>
             <a:r>
               <a:rPr lang="en-US" dirty="0"/>
-              <a:t>First prompt. Add a success variant, green. A green Saved button appears. The diff lands in button.tsx. One line. success, bg-emerald-600.</a:t>
+              <a:t>Watch the class string under the button. It updates from one typed contract. Default, secondary, outline, ghost, destructive. Small, default, large. That string is not guessed. It is generated from a closed set. CVA is doing the mapping you just saw on the last slide.</a:t>
             </a:r>
           </a:p>
           <a:p>
             <a:r>
               <a:rPr lang="en-US" dirty="0"/>
-              <a:t>Second prompt. Add a loading state with a spinner. A Saving button appears with a spinner. The diff still lands in the same file. A loading prop. Disabled while loading. A spinner in the markup.</a:t>
+              <a:t>If I type Button variant equals, in the editor, IntelliSense lists the set. A wrong variant is a red squiggle at compile time, not a two a.m. incident. The model sees the same contract. When you ask it to add a success variant, it has one place to edit, and TypeScript will check the result.</a:t>
             </a:r>
           </a:p>
           <a:p>
             <a:r>
               <a:rPr lang="en-US" dirty="0"/>
-              <a:t>Third prompt. Add a fullWidth prop. A full-width CTA appears. One more line. fullWidth, true, w-full.</a:t>
-            </a:r>
-          </a:p>
-          <a:p>
-            <a:r>
-              <a:rPr lang="en-US" dirty="0"/>
-              <a:t>Three prompts. Five lines. Zero other files touched. No cascade to chase. No stylesheet to hunt down.</a:t>
-            </a:r>
-          </a:p>
-          <a:p>
-            <a:r>
-              <a:rPr lang="en-US" dirty="0"/>
-              <a:t>Because the component is co-located, the model's edit is local. And a local edit is a safe edit. That is the entire talk in one demo. That is the payoff of everything before it. I am going back to the slides.</a:t>
+              <a:t>TypeScript constrains the values. Tailwind constrains the styles. One constrained, checkable vocabulary. Stay in the demo. Demo three is the payoff.</a:t>
             </a:r>
           </a:p>
         </p:txBody>
@@ -2016,25 +2006,43 @@
           <a:p>
             <a:r>
               <a:rPr lang="en-US" dirty="0"/>
-              <a:t>Here is the proof, shipped as a product. shadcn is the thesis.</a:t>
+              <a:t>This is the payoff. I am scrolling down to Demo three. Watch it edit one file.</a:t>
             </a:r>
           </a:p>
           <a:p>
             <a:r>
               <a:rPr lang="en-US" dirty="0"/>
-              <a:t>Copy-paste components. Tailwind plus TypeScript plus CVA. You do not install a black box. You paste the source into your repo, and you own it. It exists because developers and LLMs both read it and modify it trivially. That is the product, and that is the talk.</a:t>
+              <a:t>The prompt on the slide is add a success variant, then a loading state with a spinner. I am going to send three prompts against this button, one at a time, and I want you to watch two things. The live component on the left, and the diff on the right. The diff is always the same file. button.tsx.</a:t>
             </a:r>
           </a:p>
           <a:p>
             <a:r>
               <a:rPr lang="en-US" dirty="0"/>
-              <a:t>v0, bolt, Lovable, Cursor, Artifacts all target it by default. The tools did not pick shadcn by accident. They picked the stack a model can read in one span and edit in one file. Copy, paste, prompt, ship.</a:t>
+              <a:t>First prompt. Add a success variant, green. A green Saved button appears. The diff lands in button.tsx. One line. success, bg-emerald-600.</a:t>
             </a:r>
           </a:p>
           <a:p>
             <a:r>
               <a:rPr lang="en-US" dirty="0"/>
-              <a:t>One stack. Tailwind plus TypeScript. If you have been waiting for a canonical answer, this is it. The ecosystem already shipped it.</a:t>
+              <a:t>Second prompt. Add a loading state with a spinner. A Saving button appears with a spinner. The diff still lands in the same file. A loading prop. Disabled while loading. A spinner in the markup.</a:t>
+            </a:r>
+          </a:p>
+          <a:p>
+            <a:r>
+              <a:rPr lang="en-US" dirty="0"/>
+              <a:t>Third prompt. Add a fullWidth prop. A full-width CTA appears. One more line. fullWidth, true, w-full.</a:t>
+            </a:r>
+          </a:p>
+          <a:p>
+            <a:r>
+              <a:rPr lang="en-US" dirty="0"/>
+              <a:t>Three prompts. Five lines. Zero other files touched. No cascade to chase. No stylesheet to hunt down.</a:t>
+            </a:r>
+          </a:p>
+          <a:p>
+            <a:r>
+              <a:rPr lang="en-US" dirty="0"/>
+              <a:t>Because the component is co-located, the model's edit is local. And a local edit is a safe edit. That is the entire talk in one demo. That is the payoff of everything before it. I am going back to the slides.</a:t>
             </a:r>
           </a:p>
         </p:txBody>
@@ -2121,25 +2129,25 @@
           <a:p>
             <a:r>
               <a:rPr lang="en-US" dirty="0"/>
-              <a:t>I want to take the three objections I hear every time.</a:t>
+              <a:t>Here is the proof, shipped as a product. shadcn is the thesis.</a:t>
             </a:r>
           </a:p>
           <a:p>
             <a:r>
               <a:rPr lang="en-US" dirty="0"/>
-              <a:t>Ugly class soup. Extract a component in your framework. Do not reach for at-apply. The soup lives in one place, and you rarely re-read it, because the component name is now the API. You do not read rounded-lg px-4 py-3 every morning. You read Button. The classes are an implementation detail of one file.</a:t>
+              <a:t>Copy-paste components. Tailwind plus TypeScript plus CVA. You do not install a black box. You paste the source into your repo, and you own it. It exists because developers and LLMs both read it and modify it trivially. That is the product, and that is the talk.</a:t>
             </a:r>
           </a:p>
           <a:p>
             <a:r>
               <a:rPr lang="en-US" dirty="0"/>
-              <a:t>A steep learning curve. It is a closed set plus IntelliSense. You learn it once, and it transfers to every project and every model. You are not learning a new naming scheme per codebase. You are learning one vocabulary.</a:t>
+              <a:t>v0, bolt, Lovable, Cursor, Artifacts all target it by default. The tools did not pick shadcn by accident. They picked the stack a model can read in one span and edit in one file. Copy, paste, prompt, ship.</a:t>
             </a:r>
           </a:p>
           <a:p>
             <a:r>
               <a:rPr lang="en-US" dirty="0"/>
-              <a:t>Just inline styles. No. Design tokens. Hover, md, and dark variants. And purge, so unused utilities never ship. Inline styles cannot do any of that. They have no scale, no variants, no purge, and no shared vocabulary for a model to complete. That third objection is the most common pushback, and it is the weakest.</a:t>
+              <a:t>One stack. Tailwind plus TypeScript. If you have been waiting for a canonical answer, this is it. The ecosystem already shipped it.</a:t>
             </a:r>
           </a:p>
         </p:txBody>
@@ -2226,25 +2234,25 @@
           <a:p>
             <a:r>
               <a:rPr lang="en-US" dirty="0"/>
-              <a:t>Monday morning. How to adopt this, and how to convince the team.</a:t>
+              <a:t>I want to take the three objections I hear every time.</a:t>
             </a:r>
           </a:p>
           <a:p>
             <a:r>
               <a:rPr lang="en-US" dirty="0"/>
-              <a:t>One. Start in new components. No big-bang rewrite. You do not convert the whole app. You start where new work happens, and you let the old styles die of attrition.</a:t>
+              <a:t>Ugly class soup. Extract a component in your framework. Do not reach for at-apply. The soup lives in one place, and you rarely re-read it, because the component name is now the API. You do not read rounded-lg px-4 py-3 every morning. You read Button. The classes are an implementation detail of one file.</a:t>
             </a:r>
           </a:p>
           <a:p>
             <a:r>
               <a:rPr lang="en-US" dirty="0"/>
-              <a:t>Two. Add the Tailwind IntelliSense plugin and the Prettier class-sorter plugin. The first one makes the vocabulary visible. The second one makes the class lists readable in review.</a:t>
+              <a:t>A steep learning curve. It is a closed set plus IntelliSense. You learn it once, and it transfers to every project and every model. You are not learning a new naming scheme per codebase. You are learning one vocabulary.</a:t>
             </a:r>
           </a:p>
           <a:p>
             <a:r>
               <a:rPr lang="en-US" dirty="0"/>
-              <a:t>Three. Adopt cn and CVA for anything with variants. That is the TypeScript contract from earlier. Four. Steal shamelessly from shadcn. Do not invent a design system on Friday afternoon. Five. Let the LLM speed compound. Measure pull-request velocity. Velocity is the receipt for the skeptics. When the team sees the same card land in one file, first try, the argument is over.</a:t>
+              <a:t>Just inline styles. No. Design tokens. Hover, md, and dark variants. And purge, so unused utilities never ship. Inline styles cannot do any of that. They have no scale, no variants, no purge, and no shared vocabulary for a model to complete. That third objection is the most common pushback, and it is the weakest.</a:t>
             </a:r>
           </a:p>
         </p:txBody>
@@ -2331,31 +2339,25 @@
           <a:p>
             <a:r>
               <a:rPr lang="en-US" dirty="0"/>
-              <a:t>Four things to remember.</a:t>
+              <a:t>Monday morning. How to adopt this, and how to convince the team.</a:t>
             </a:r>
           </a:p>
           <a:p>
             <a:r>
               <a:rPr lang="en-US" dirty="0"/>
-              <a:t>One. The friction was locality. Not taste. Not class soup. Locality. Naming, the cascade, and two-file context are all locality failures.</a:t>
+              <a:t>One. Start in new components. No big-bang rewrite. You do not convert the whole app. You start where new work happens, and you let the old styles die of attrition.</a:t>
             </a:r>
           </a:p>
           <a:p>
             <a:r>
               <a:rPr lang="en-US" dirty="0"/>
-              <a:t>Two. LLMs love Tailwind because it is co-located, closed-vocabulary, deterministic, and everywhere in training data. Those are reasons one through five. They would still be true even if the training-data flywheel did not exist. The flywheel just makes the gap wider.</a:t>
+              <a:t>Two. Add the Tailwind IntelliSense plugin and the Prettier class-sorter plugin. The first one makes the vocabulary visible. The second one makes the class lists readable in review.</a:t>
             </a:r>
           </a:p>
           <a:p>
             <a:r>
               <a:rPr lang="en-US" dirty="0"/>
-              <a:t>Three. Components, utilities, and TypeScript types. Locality at three layers. Frameworks, Tailwind, and CVA are the same idea applied three times.</a:t>
-            </a:r>
-          </a:p>
-          <a:p>
-            <a:r>
-              <a:rPr lang="en-US" dirty="0"/>
-              <a:t>Four. The machines already voted. Now you have the ammunition. If you keep one word, keep locality.</a:t>
+              <a:t>Three. Adopt cn and CVA for anything with variants. That is the TypeScript contract from earlier. Four. Steal shamelessly from shadcn. Do not invent a design system on Friday afternoon. Five. Let the LLM speed compound. Measure pull-request velocity. Velocity is the receipt for the skeptics. When the team sees the same card land in one file, first try, the argument is over.</a:t>
             </a:r>
           </a:p>
         </p:txBody>
@@ -2442,25 +2444,31 @@
           <a:p>
             <a:r>
               <a:rPr lang="en-US" dirty="0"/>
-              <a:t>If you want to go deeper, the links are on the slide.</a:t>
+              <a:t>Four things to remember.</a:t>
             </a:r>
           </a:p>
           <a:p>
             <a:r>
               <a:rPr lang="en-US" dirty="0"/>
-              <a:t>tailwindcss.com is the docs and the engine. ui.shadcn.com is the copy-paste component standard. cva.style is class-variance-authority. github.com slash dcastil slash tailwind-merge is conflict-safe class merging, which is what the cn helper sits on.</a:t>
+              <a:t>One. The friction was locality. Not taste. Not class soup. Locality. Naming, the cascade, and two-file context are all locality failures.</a:t>
             </a:r>
           </a:p>
           <a:p>
             <a:r>
               <a:rPr lang="en-US" dirty="0"/>
-              <a:t>I want to call out two in particular. The Locality of Behaviour essay by Carson Gross, on the htmx site. That is the idea this whole talk is built on. And v0.dev. If you want to watch the machines vote live, go generate a UI and see what comes out.</a:t>
+              <a:t>Two. LLMs love Tailwind because it is co-located, closed-vocabulary, deterministic, and everywhere in training data. Those are reasons one through five. They would still be true even if the training-data flywheel did not exist. The flywheel just makes the gap wider.</a:t>
             </a:r>
           </a:p>
           <a:p>
             <a:r>
               <a:rPr lang="en-US" dirty="0"/>
-              <a:t>The demo repo is on the next slide.</a:t>
+              <a:t>Three. Components, utilities, and TypeScript types. Locality at three layers. Frameworks, Tailwind, and CVA are the same idea applied three times.</a:t>
+            </a:r>
+          </a:p>
+          <a:p>
+            <a:r>
+              <a:rPr lang="en-US" dirty="0"/>
+              <a:t>Four. The machines already voted. Now you have the ammunition. If you keep one word, keep locality.</a:t>
             </a:r>
           </a:p>
         </p:txBody>
@@ -2506,13 +2514,7 @@
   <p:cSld>
     <p:spTree>
       <p:nvGrpSpPr>
-        <p:cNvPr id="1" name="">
-          <a:extLst>
-            <a:ext uri="{FF2B5EF4-FFF2-40B4-BE49-F238E27FC236}">
-              <a16:creationId xmlns:a16="http://schemas.microsoft.com/office/drawing/2014/main" id="{D11FA9EC-F1C4-8475-4C34-982AA7BE60A7}"/>
-            </a:ext>
-          </a:extLst>
-        </p:cNvPr>
+        <p:cNvPr id="1" name=""/>
         <p:cNvGrpSpPr/>
         <p:nvPr/>
       </p:nvGrpSpPr>
@@ -2526,13 +2528,7 @@
       </p:grpSpPr>
       <p:sp>
         <p:nvSpPr>
-          <p:cNvPr id="2" name="Slide Image Placeholder 1">
-            <a:extLst>
-              <a:ext uri="{FF2B5EF4-FFF2-40B4-BE49-F238E27FC236}">
-                <a16:creationId xmlns:a16="http://schemas.microsoft.com/office/drawing/2014/main" id="{9F28C641-A123-4973-51FA-0665B2813653}"/>
-              </a:ext>
-            </a:extLst>
-          </p:cNvPr>
+          <p:cNvPr id="2" name="Slide Image Placeholder 1"/>
           <p:cNvSpPr>
             <a:spLocks noGrp="1" noRot="1" noChangeAspect="1"/>
           </p:cNvSpPr>
@@ -2544,13 +2540,7 @@
       </p:sp>
       <p:sp>
         <p:nvSpPr>
-          <p:cNvPr id="3" name="Notes Placeholder 2">
-            <a:extLst>
-              <a:ext uri="{FF2B5EF4-FFF2-40B4-BE49-F238E27FC236}">
-                <a16:creationId xmlns:a16="http://schemas.microsoft.com/office/drawing/2014/main" id="{AB824122-D8E6-13A2-EF59-883AC6891774}"/>
-              </a:ext>
-            </a:extLst>
-          </p:cNvPr>
+          <p:cNvPr id="3" name="Notes Placeholder 2"/>
           <p:cNvSpPr>
             <a:spLocks noGrp="1"/>
           </p:cNvSpPr>
@@ -2565,30 +2555,32 @@
           <a:p>
             <a:r>
               <a:rPr lang="en-US" dirty="0"/>
-              <a:t>Knowledge atrophy, or cognitive atrophy, is the gradual decline of memory, critical thinking, and problem-solving skills caused by overreliance on AI tools like LLMs for mental work. </a:t>
-            </a:r>
-            <a:br>
+              <a:t>If you want to go deeper, the links are on the slide.</a:t>
+            </a:r>
+          </a:p>
+          <a:p>
+            <a:r>
               <a:rPr lang="en-US" dirty="0"/>
-            </a:br>
-            <a:br>
+              <a:t>tailwindcss.com is the docs and the engine. ui.shadcn.com is the copy-paste component standard. cva.style is class-variance-authority. github.com slash dcastil slash tailwind-merge is conflict-safe class merging, which is what the cn helper sits on.</a:t>
+            </a:r>
+          </a:p>
+          <a:p>
+            <a:r>
               <a:rPr lang="en-US" dirty="0"/>
-            </a:br>
+              <a:t>I want to call out two in particular. The Locality of Behaviour essay by Carson Gross, on the htmx site. That is the idea this whole talk is built on. And v0.dev. If you want to watch the machines vote live, go generate a UI and see what comes out.</a:t>
+            </a:r>
+          </a:p>
+          <a:p>
             <a:r>
               <a:rPr lang="en-US" dirty="0"/>
-              <a:t>Things might change because models improves every after 6 months, but keep attending to conferences and learn things because that’s the only way we can steer AI in developing solutions and save money as a result from doing fewer mistakes. </a:t>
-            </a:r>
-          </a:p>
-        </p:txBody>
-      </p:sp>
-      <p:sp>
-        <p:nvSpPr>
-          <p:cNvPr id="4" name="Slide Number Placeholder 3">
-            <a:extLst>
-              <a:ext uri="{FF2B5EF4-FFF2-40B4-BE49-F238E27FC236}">
-                <a16:creationId xmlns:a16="http://schemas.microsoft.com/office/drawing/2014/main" id="{876E6526-0A27-7059-0E06-088E9428FC92}"/>
-              </a:ext>
-            </a:extLst>
-          </p:cNvPr>
+              <a:t>The demo repo is on the next slide.</a:t>
+            </a:r>
+          </a:p>
+        </p:txBody>
+      </p:sp>
+      <p:sp>
+        <p:nvSpPr>
+          <p:cNvPr id="4" name="Slide Number Placeholder 3"/>
           <p:cNvSpPr>
             <a:spLocks noGrp="1"/>
           </p:cNvSpPr>
@@ -2612,7 +2604,7 @@
     </p:spTree>
     <p:extLst>
       <p:ext uri="{BB962C8B-B14F-4D97-AF65-F5344CB8AC3E}">
-        <p14:creationId xmlns:p14="http://schemas.microsoft.com/office/powerpoint/2010/main" val="3486230722"/>
+        <p14:creationId xmlns:p14="http://schemas.microsoft.com/office/powerpoint/2010/main" val="1024086991"/>
       </p:ext>
     </p:extLst>
   </p:cSld>
@@ -2729,6 +2721,210 @@
         <p:cNvPr id="1" name="">
           <a:extLst>
             <a:ext uri="{FF2B5EF4-FFF2-40B4-BE49-F238E27FC236}">
+              <a16:creationId xmlns:a16="http://schemas.microsoft.com/office/drawing/2014/main" id="{D11FA9EC-F1C4-8475-4C34-982AA7BE60A7}"/>
+            </a:ext>
+          </a:extLst>
+        </p:cNvPr>
+        <p:cNvGrpSpPr/>
+        <p:nvPr/>
+      </p:nvGrpSpPr>
+      <p:grpSpPr>
+        <a:xfrm>
+          <a:off x="0" y="0"/>
+          <a:ext cx="0" cy="0"/>
+          <a:chOff x="0" y="0"/>
+          <a:chExt cx="0" cy="0"/>
+        </a:xfrm>
+      </p:grpSpPr>
+      <p:sp>
+        <p:nvSpPr>
+          <p:cNvPr id="2" name="Slide Image Placeholder 1">
+            <a:extLst>
+              <a:ext uri="{FF2B5EF4-FFF2-40B4-BE49-F238E27FC236}">
+                <a16:creationId xmlns:a16="http://schemas.microsoft.com/office/drawing/2014/main" id="{9F28C641-A123-4973-51FA-0665B2813653}"/>
+              </a:ext>
+            </a:extLst>
+          </p:cNvPr>
+          <p:cNvSpPr>
+            <a:spLocks noGrp="1" noRot="1" noChangeAspect="1"/>
+          </p:cNvSpPr>
+          <p:nvPr>
+            <p:ph type="sldImg"/>
+          </p:nvPr>
+        </p:nvSpPr>
+        <p:spPr/>
+      </p:sp>
+      <p:sp>
+        <p:nvSpPr>
+          <p:cNvPr id="3" name="Notes Placeholder 2">
+            <a:extLst>
+              <a:ext uri="{FF2B5EF4-FFF2-40B4-BE49-F238E27FC236}">
+                <a16:creationId xmlns:a16="http://schemas.microsoft.com/office/drawing/2014/main" id="{AB824122-D8E6-13A2-EF59-883AC6891774}"/>
+              </a:ext>
+            </a:extLst>
+          </p:cNvPr>
+          <p:cNvSpPr>
+            <a:spLocks noGrp="1"/>
+          </p:cNvSpPr>
+          <p:nvPr>
+            <p:ph type="body" idx="1"/>
+          </p:nvPr>
+        </p:nvSpPr>
+        <p:spPr/>
+        <p:txBody>
+          <a:bodyPr/>
+          <a:lstStyle/>
+          <a:p>
+            <a:r>
+              <a:rPr lang="en-US" dirty="0"/>
+              <a:t>Knowledge atrophy, or cognitive atrophy, is the gradual decline of memory, critical thinking, and problem-solving skills caused by overreliance on AI tools like LLMs for mental work. </a:t>
+            </a:r>
+            <a:br>
+              <a:rPr lang="en-US" dirty="0"/>
+            </a:br>
+            <a:br>
+              <a:rPr lang="en-US" dirty="0"/>
+            </a:br>
+            <a:r>
+              <a:rPr lang="en-US" dirty="0"/>
+              <a:t>Things might change because models improves every after 6 months, but keep attending to conferences and learn things because that’s the only way we can steer AI in developing solutions and save money as a result from doing fewer mistakes. </a:t>
+            </a:r>
+          </a:p>
+        </p:txBody>
+      </p:sp>
+      <p:sp>
+        <p:nvSpPr>
+          <p:cNvPr id="4" name="Slide Number Placeholder 3">
+            <a:extLst>
+              <a:ext uri="{FF2B5EF4-FFF2-40B4-BE49-F238E27FC236}">
+                <a16:creationId xmlns:a16="http://schemas.microsoft.com/office/drawing/2014/main" id="{876E6526-0A27-7059-0E06-088E9428FC92}"/>
+              </a:ext>
+            </a:extLst>
+          </p:cNvPr>
+          <p:cNvSpPr>
+            <a:spLocks noGrp="1"/>
+          </p:cNvSpPr>
+          <p:nvPr>
+            <p:ph type="sldNum" sz="quarter" idx="10"/>
+          </p:nvPr>
+        </p:nvSpPr>
+        <p:spPr/>
+        <p:txBody>
+          <a:bodyPr/>
+          <a:lstStyle/>
+          <a:p>
+            <a:fld id="{F7021451-1387-4CA6-816F-3879F97B5CBC}" type="slidenum">
+              <a:rPr lang="en-US"/>
+              <a:t>30</a:t>
+            </a:fld>
+            <a:endParaRPr lang="en-US"/>
+          </a:p>
+        </p:txBody>
+      </p:sp>
+    </p:spTree>
+    <p:extLst>
+      <p:ext uri="{BB962C8B-B14F-4D97-AF65-F5344CB8AC3E}">
+        <p14:creationId xmlns:p14="http://schemas.microsoft.com/office/powerpoint/2010/main" val="3486230722"/>
+      </p:ext>
+    </p:extLst>
+  </p:cSld>
+  <p:clrMapOvr>
+    <a:masterClrMapping/>
+  </p:clrMapOvr>
+</p:notes>
+</file>
+
+<file path=ppt/notesSlides/notesSlide31.xml><?xml version="1.0" encoding="utf-8"?>
+<p:notes xmlns:a="http://schemas.openxmlformats.org/drawingml/2006/main" xmlns:r="http://schemas.openxmlformats.org/officeDocument/2006/relationships" xmlns:p="http://schemas.openxmlformats.org/presentationml/2006/main">
+  <p:cSld>
+    <p:spTree>
+      <p:nvGrpSpPr>
+        <p:cNvPr id="1" name=""/>
+        <p:cNvGrpSpPr/>
+        <p:nvPr/>
+      </p:nvGrpSpPr>
+      <p:grpSpPr>
+        <a:xfrm>
+          <a:off x="0" y="0"/>
+          <a:ext cx="0" cy="0"/>
+          <a:chOff x="0" y="0"/>
+          <a:chExt cx="0" cy="0"/>
+        </a:xfrm>
+      </p:grpSpPr>
+      <p:sp>
+        <p:nvSpPr>
+          <p:cNvPr id="2" name="Slide Image Placeholder 1"/>
+          <p:cNvSpPr>
+            <a:spLocks noGrp="1" noRot="1" noChangeAspect="1"/>
+          </p:cNvSpPr>
+          <p:nvPr>
+            <p:ph type="sldImg"/>
+          </p:nvPr>
+        </p:nvSpPr>
+        <p:spPr>
+          <a:xfrm>
+            <a:off x="685800" y="1143000"/>
+            <a:ext cx="5486400" cy="3086100"/>
+          </a:xfrm>
+          <a:prstGeom prst="rect">
+            <a:avLst/>
+          </a:prstGeom>
+          <a:noFill/>
+          <a:ln w="12700">
+            <a:solidFill>
+              <a:prstClr val="black"/>
+            </a:solidFill>
+          </a:ln>
+        </p:spPr>
+      </p:sp>
+      <p:sp>
+        <p:nvSpPr>
+          <p:cNvPr id="3" name="Notes Placeholder 2"/>
+          <p:cNvSpPr>
+            <a:spLocks noGrp="1"/>
+          </p:cNvSpPr>
+          <p:nvPr>
+            <p:ph type="body" idx="1"/>
+          </p:nvPr>
+        </p:nvSpPr>
+        <p:spPr>
+          <a:xfrm>
+            <a:off x="685800" y="4400550"/>
+            <a:ext cx="5486400" cy="3600450"/>
+          </a:xfrm>
+          <a:prstGeom prst="rect">
+            <a:avLst/>
+          </a:prstGeom>
+        </p:spPr>
+        <p:txBody>
+          <a:bodyPr/>
+          <a:lstStyle/>
+          <a:p>
+            <a:endParaRPr lang="en-GB" dirty="0"/>
+          </a:p>
+        </p:txBody>
+      </p:sp>
+    </p:spTree>
+    <p:extLst>
+      <p:ext uri="{BB962C8B-B14F-4D97-AF65-F5344CB8AC3E}">
+        <p14:creationId xmlns:p14="http://schemas.microsoft.com/office/powerpoint/2010/main" val="922607855"/>
+      </p:ext>
+    </p:extLst>
+  </p:cSld>
+  <p:clrMapOvr>
+    <a:masterClrMapping/>
+  </p:clrMapOvr>
+</p:notes>
+</file>
+
+<file path=ppt/notesSlides/notesSlide32.xml><?xml version="1.0" encoding="utf-8"?>
+<p:notes xmlns:a="http://schemas.openxmlformats.org/drawingml/2006/main" xmlns:r="http://schemas.openxmlformats.org/officeDocument/2006/relationships" xmlns:p="http://schemas.openxmlformats.org/presentationml/2006/main">
+  <p:cSld>
+    <p:spTree>
+      <p:nvGrpSpPr>
+        <p:cNvPr id="1" name="">
+          <a:extLst>
+            <a:ext uri="{FF2B5EF4-FFF2-40B4-BE49-F238E27FC236}">
               <a16:creationId xmlns:a16="http://schemas.microsoft.com/office/drawing/2014/main" id="{A4A091CD-CE40-DE50-BB6F-73EE86E3E62E}"/>
             </a:ext>
           </a:extLst>
@@ -2868,7 +3064,7 @@
           <a:p>
             <a:fld id="{F7021451-1387-4CA6-816F-3879F97B5CBC}" type="slidenum">
               <a:rPr lang="en-US"/>
-              <a:t>30</a:t>
+              <a:t>32</a:t>
             </a:fld>
             <a:endParaRPr lang="en-US"/>
           </a:p>
@@ -2914,7 +3110,21 @@
             <p:ph type="sldImg"/>
           </p:nvPr>
         </p:nvSpPr>
-        <p:spPr/>
+        <p:spPr>
+          <a:xfrm>
+            <a:off x="-225425" y="1524000"/>
+            <a:ext cx="7308850" cy="4113213"/>
+          </a:xfrm>
+          <a:prstGeom prst="rect">
+            <a:avLst/>
+          </a:prstGeom>
+          <a:noFill/>
+          <a:ln w="12700">
+            <a:solidFill>
+              <a:prstClr val="black"/>
+            </a:solidFill>
+          </a:ln>
+        </p:spPr>
       </p:sp>
       <p:sp>
         <p:nvSpPr>
@@ -2926,51 +3136,27 @@
             <p:ph type="body" idx="1"/>
           </p:nvPr>
         </p:nvSpPr>
-        <p:spPr/>
+        <p:spPr>
+          <a:xfrm>
+            <a:off x="685800" y="5865813"/>
+            <a:ext cx="5486400" cy="4799012"/>
+          </a:xfrm>
+          <a:prstGeom prst="rect">
+            <a:avLst/>
+          </a:prstGeom>
+        </p:spPr>
         <p:txBody>
           <a:bodyPr/>
           <a:lstStyle/>
           <a:p>
-            <a:r>
-              <a:rPr lang="en-US" dirty="0"/>
-              <a:t>A few seconds about me. I am a full-stack developer from Oslo, Norway. I work across the stack, and I created DaloyJS.</a:t>
-            </a:r>
-          </a:p>
-          <a:p>
-            <a:r>
-              <a:rPr lang="en-US" dirty="0"/>
-              <a:t>I have spent a lot of years arguing about CSS with other humans. Lately I have been arguing about it with models. They have an opinion. That is enough about me. Let's talk about CSS.</a:t>
-            </a:r>
-          </a:p>
-        </p:txBody>
-      </p:sp>
-      <p:sp>
-        <p:nvSpPr>
-          <p:cNvPr id="4" name="Slide Number Placeholder 3"/>
-          <p:cNvSpPr>
-            <a:spLocks noGrp="1"/>
-          </p:cNvSpPr>
-          <p:nvPr>
-            <p:ph type="sldNum" sz="quarter" idx="10"/>
-          </p:nvPr>
-        </p:nvSpPr>
-        <p:spPr/>
-        <p:txBody>
-          <a:bodyPr/>
-          <a:lstStyle/>
-          <a:p>
-            <a:fld id="{F7021451-1387-4CA6-816F-3879F97B5CBC}" type="slidenum">
-              <a:rPr lang="en-US"/>
-              <a:t>4</a:t>
-            </a:fld>
-            <a:endParaRPr lang="en-US"/>
+            <a:endParaRPr lang="en-GB" dirty="0"/>
           </a:p>
         </p:txBody>
       </p:sp>
     </p:spTree>
     <p:extLst>
       <p:ext uri="{BB962C8B-B14F-4D97-AF65-F5344CB8AC3E}">
-        <p14:creationId xmlns:p14="http://schemas.microsoft.com/office/powerpoint/2010/main" val="1024086991"/>
+        <p14:creationId xmlns:p14="http://schemas.microsoft.com/office/powerpoint/2010/main" val="2968103838"/>
       </p:ext>
     </p:extLst>
   </p:cSld>
@@ -3007,7 +3193,21 @@
             <p:ph type="sldImg"/>
           </p:nvPr>
         </p:nvSpPr>
-        <p:spPr/>
+        <p:spPr>
+          <a:xfrm>
+            <a:off x="-225425" y="1524000"/>
+            <a:ext cx="7308850" cy="4113213"/>
+          </a:xfrm>
+          <a:prstGeom prst="rect">
+            <a:avLst/>
+          </a:prstGeom>
+          <a:noFill/>
+          <a:ln w="12700">
+            <a:solidFill>
+              <a:prstClr val="black"/>
+            </a:solidFill>
+          </a:ln>
+        </p:spPr>
       </p:sp>
       <p:sp>
         <p:nvSpPr>
@@ -3019,63 +3219,27 @@
             <p:ph type="body" idx="1"/>
           </p:nvPr>
         </p:nvSpPr>
-        <p:spPr/>
+        <p:spPr>
+          <a:xfrm>
+            <a:off x="685800" y="5865813"/>
+            <a:ext cx="5486400" cy="4799012"/>
+          </a:xfrm>
+          <a:prstGeom prst="rect">
+            <a:avLst/>
+          </a:prstGeom>
+        </p:spPr>
         <p:txBody>
           <a:bodyPr/>
           <a:lstStyle/>
           <a:p>
-            <a:r>
-              <a:rPr lang="en-US" dirty="0"/>
-              <a:t>For fifteen years, frontend developers fought methodology wars.</a:t>
-            </a:r>
-          </a:p>
-          <a:p>
-            <a:r>
-              <a:rPr lang="en-US" dirty="0"/>
-              <a:t>Vanilla CSS in 2005. Then OOCSS in 2009, object-oriented CSS, which said reuse objects, not pages. BEM in 2010, block element modifier, which tried to make naming systematic. SMACSS in 2011, scalable and modular architecture. Atomic CSS in 2013. CSS Modules in 2015, which scoped names to a file. CSS in JS in 2016, which put styles back into JavaScript. Then Tailwind, from 2017 on.</a:t>
-            </a:r>
-          </a:p>
-          <a:p>
-            <a:r>
-              <a:rPr lang="en-US" dirty="0"/>
-              <a:t>Every one of these tried to answer the same two questions. Where do styles live? And what do we name them? That is the whole war. Location, and naming.</a:t>
-            </a:r>
-          </a:p>
-          <a:p>
-            <a:r>
-              <a:rPr lang="en-US" dirty="0"/>
-              <a:t>Most of these methodologies answered those questions with more rules. More naming conventions. More files. More process. Tailwind is interesting because it mostly deletes those questions instead of answering them better. You stop inventing names. You stop splitting the look into another file. And that is why the rest of this talk exists.</a:t>
-            </a:r>
-          </a:p>
-        </p:txBody>
-      </p:sp>
-      <p:sp>
-        <p:nvSpPr>
-          <p:cNvPr id="4" name="Slide Number Placeholder 3"/>
-          <p:cNvSpPr>
-            <a:spLocks noGrp="1"/>
-          </p:cNvSpPr>
-          <p:nvPr>
-            <p:ph type="sldNum" sz="quarter" idx="10"/>
-          </p:nvPr>
-        </p:nvSpPr>
-        <p:spPr/>
-        <p:txBody>
-          <a:bodyPr/>
-          <a:lstStyle/>
-          <a:p>
-            <a:fld id="{F7021451-1387-4CA6-816F-3879F97B5CBC}" type="slidenum">
-              <a:rPr lang="en-US"/>
-              <a:t>5</a:t>
-            </a:fld>
-            <a:endParaRPr lang="en-US"/>
+            <a:endParaRPr lang="en-GB" dirty="0"/>
           </a:p>
         </p:txBody>
       </p:sp>
     </p:spTree>
     <p:extLst>
       <p:ext uri="{BB962C8B-B14F-4D97-AF65-F5344CB8AC3E}">
-        <p14:creationId xmlns:p14="http://schemas.microsoft.com/office/powerpoint/2010/main" val="1024086991"/>
+        <p14:creationId xmlns:p14="http://schemas.microsoft.com/office/powerpoint/2010/main" val="3842075076"/>
       </p:ext>
     </p:extLst>
   </p:cSld>
@@ -3131,25 +3295,25 @@
           <a:p>
             <a:r>
               <a:rPr lang="en-US" dirty="0"/>
-              <a:t>Here is the thesis. The machines have voted.</a:t>
+              <a:t>For fifteen years, frontend developers fought methodology wars.</a:t>
             </a:r>
           </a:p>
           <a:p>
             <a:r>
               <a:rPr lang="en-US" dirty="0"/>
-              <a:t>v0 from Vercel generates UI in Tailwind. bolt.new from StackBlitz does the same. Lovable generates full apps in Tailwind. Claude Artifacts from Anthropic. shadcn is the default component system the AI tools reach for. Cursor and Copilot lean Tailwind every time you ask for a component.</a:t>
+              <a:t>Vanilla CSS in 2005. Then OOCSS in 2009, object-oriented CSS, which said reuse objects, not pages. BEM in 2010, block element modifier, which tried to make naming systematic. SMACSS in 2011, scalable and modular architecture. Atomic CSS in 2013. CSS Modules in 2015, which scoped names to a file. CSS in JS in 2016, which put styles back into JavaScript. Then Tailwind, from 2017 on.</a:t>
             </a:r>
           </a:p>
           <a:p>
             <a:r>
               <a:rPr lang="en-US" dirty="0"/>
-              <a:t>Every major AI UI generator defaults to Tailwind. That is not a Twitter argument. That is revealed preference. Economists use that phrase when they stop listening to what people say they want, and start watching what they actually choose.</a:t>
+              <a:t>Every one of these tried to answer the same two questions. Where do styles live? And what do we name them? That is the whole war. Location, and naming.</a:t>
             </a:r>
           </a:p>
           <a:p>
             <a:r>
               <a:rPr lang="en-US" dirty="0"/>
-              <a:t>When every tool that has to generate UI picks the same styling system, that is a signal. The rest of this talk is the why. Not because Tailwind won a popularity contest with humans. Because the way Tailwind is shaped matches the way a language model, and a teammate, actually understand code.</a:t>
+              <a:t>Most of these methodologies answered those questions with more rules. More naming conventions. More files. More process. Tailwind is interesting because it mostly deletes those questions instead of answering them better. You stop inventing names. You stop splitting the look into another file. And that is why the rest of this talk exists.</a:t>
             </a:r>
           </a:p>
         </p:txBody>
@@ -3236,31 +3400,25 @@
           <a:p>
             <a:r>
               <a:rPr lang="en-US" dirty="0"/>
-              <a:t>I want to reframe this, because this is not a Tailwind versus CSS fight, and it is not a taste fight.</a:t>
+              <a:t>Here is the thesis. The machines have voted.</a:t>
             </a:r>
           </a:p>
           <a:p>
             <a:r>
               <a:rPr lang="en-US" dirty="0"/>
-              <a:t>This is about how code is understood. By a teammate. And by a next-token predictor.</a:t>
+              <a:t>v0 from Vercel generates UI in Tailwind. bolt.new from StackBlitz does the same. Lovable generates full apps in Tailwind. Claude Artifacts from Anthropic. shadcn is the default component system the AI tools reach for. Cursor and Copilot lean Tailwind every time you ask for a component.</a:t>
             </a:r>
           </a:p>
           <a:p>
             <a:r>
               <a:rPr lang="en-US" dirty="0"/>
-              <a:t>A language model is not magic. It is a next-token predictor with a bounded context window. It can only see so much at once, and it does not remember your whole repository. Your teammate is the same. They can only hold so much in their head, and they have not memorized every stylesheet.</a:t>
+              <a:t>Every major AI UI generator defaults to Tailwind. That is not a Twitter argument. That is revealed preference. Economists use that phrase when they stop listening to what people say they want, and start watching what they actually choose.</a:t>
             </a:r>
           </a:p>
           <a:p>
             <a:r>
               <a:rPr lang="en-US" dirty="0"/>
-              <a:t>When the information you need is in another file, both of them fail. Same friction. Same fix. Locality.</a:t>
-            </a:r>
-          </a:p>
-          <a:p>
-            <a:r>
-              <a:rPr lang="en-US" dirty="0"/>
-              <a:t>If you remember one word from this talk, make it locality. Everything after this slide is a variation on that word.</a:t>
+              <a:t>When every tool that has to generate UI picks the same styling system, that is a signal. The rest of this talk is the why. Not because Tailwind won a popularity contest with humans. Because the way Tailwind is shaped matches the way a language model, and a teammate, actually understand code.</a:t>
             </a:r>
           </a:p>
         </p:txBody>
@@ -3347,31 +3505,31 @@
           <a:p>
             <a:r>
               <a:rPr lang="en-US" dirty="0"/>
-              <a:t>Friction number one. Naming things.</a:t>
+              <a:t>I want to reframe this, because this is not a Tailwind versus CSS fight, and it is not a taste fight.</a:t>
             </a:r>
           </a:p>
           <a:p>
             <a:r>
               <a:rPr lang="en-US" dirty="0"/>
-              <a:t>There are only two hard things in computer science: cache invalidation and naming things. That quote is on the slide because it is still true, and CSS makes you do the second one for every heading, every badge, every button.</a:t>
+              <a:t>This is about how code is understood. By a teammate. And by a next-token predictor.</a:t>
             </a:r>
           </a:p>
           <a:p>
             <a:r>
               <a:rPr lang="en-US" dirty="0"/>
-              <a:t>Semantic CSS makes you invent a name for every element, and those names are project-specific. Then they drift. card. Card. cardWrapper. card-box. Four names for the same idea, invented by four people, or by one person on four different days.</a:t>
+              <a:t>A language model is not magic. It is a next-token predictor with a bounded context window. It can only see so much at once, and it does not remember your whole repository. Your teammate is the same. They can only hold so much in their head, and they have not memorized every stylesheet.</a:t>
             </a:r>
           </a:p>
           <a:p>
             <a:r>
               <a:rPr lang="en-US" dirty="0"/>
-              <a:t>Humans invent inconsistently. Models invent inconsistently. Look at this rule. card header featured. What does featured even mean in this file? Is it a thicker border? A badge? A different button color? You cannot know until you read the CSS.</a:t>
+              <a:t>When the information you need is in another file, both of them fail. Same friction. Same fix. Locality.</a:t>
             </a:r>
           </a:p>
           <a:p>
             <a:r>
               <a:rPr lang="en-US" dirty="0"/>
-              <a:t>Tailwind deletes the naming decision. You do not name the thing. You describe the look with a closed vocabulary. That is the first friction gone.</a:t>
+              <a:t>If you remember one word from this talk, make it locality. Everything after this slide is a variation on that word.</a:t>
             </a:r>
           </a:p>
         </p:txBody>
@@ -3458,31 +3616,31 @@
           <a:p>
             <a:r>
               <a:rPr lang="en-US" dirty="0"/>
-              <a:t>Friction number two. The cascade.</a:t>
+              <a:t>Friction number one. Naming things.</a:t>
             </a:r>
           </a:p>
           <a:p>
             <a:r>
               <a:rPr lang="en-US" dirty="0"/>
-              <a:t>The C in CSS is global, and it is order-dependent. That is not a bug in your project. That is the language.</a:t>
+              <a:t>There are only two hard things in computer science: cache invalidation and naming things. That quote is on the slide because it is still true, and CSS makes you do the second one for every heading, every badge, every button.</a:t>
             </a:r>
           </a:p>
           <a:p>
             <a:r>
               <a:rPr lang="en-US" dirty="0"/>
-              <a:t>Look at the chain. Reset sets margin to zero. Buttons sets padding to eight pixels. The card file relies on both. The card does not own its look. It borrows it, in order, from files it does not control.</a:t>
+              <a:t>Semantic CSS makes you invent a name for every element, and those names are project-specific. Then they drift. card. Card. cardWrapper. card-box. Four names for the same idea, invented by four people, or by one person on four different days.</a:t>
             </a:r>
           </a:p>
           <a:p>
             <a:r>
               <a:rPr lang="en-US" dirty="0"/>
-              <a:t>You edit one rule here, and you break a component three files away. That is the lightbulb joke in production form. You did not change the card. You changed something around it, and you hoped it cascaded correctly.</a:t>
+              <a:t>Humans invent inconsistently. Models invent inconsistently. Look at this rule. card header featured. What does featured even mean in this file? Is it a thicker border? A badge? A different button color? You cannot know until you read the CSS.</a:t>
             </a:r>
           </a:p>
           <a:p>
             <a:r>
               <a:rPr lang="en-US" dirty="0"/>
-              <a:t>Non-local effects are the worst case for a human. They are also the worst case for a model with a bounded context window, because the cause of the bug is not in the file it is looking at. The model cannot fix what it cannot see.</a:t>
+              <a:t>Tailwind deletes the naming decision. You do not name the thing. You describe the look with a closed vocabulary. That is the first friction gone.</a:t>
             </a:r>
           </a:p>
         </p:txBody>
@@ -3553,6 +3711,101 @@
 </p:sldLayout>
 </file>
 
+<file path=ppt/slideLayouts/slideLayout2.xml><?xml version="1.0" encoding="utf-8"?>
+<p:sldLayout xmlns:a="http://schemas.openxmlformats.org/drawingml/2006/main" xmlns:r="http://schemas.openxmlformats.org/officeDocument/2006/relationships" xmlns:p="http://schemas.openxmlformats.org/presentationml/2006/main" type="blank">
+  <p:cSld name="Blank">
+    <p:spTree>
+      <p:nvGrpSpPr>
+        <p:cNvPr id="1" name=""/>
+        <p:cNvGrpSpPr/>
+        <p:nvPr/>
+      </p:nvGrpSpPr>
+      <p:grpSpPr>
+        <a:xfrm>
+          <a:off x="0" y="0"/>
+          <a:ext cx="0" cy="0"/>
+          <a:chOff x="0" y="0"/>
+          <a:chExt cx="0" cy="0"/>
+        </a:xfrm>
+      </p:grpSpPr>
+      <p:sp>
+        <p:nvSpPr>
+          <p:cNvPr id="2" name="Date Placeholder 1"/>
+          <p:cNvSpPr>
+            <a:spLocks noGrp="1"/>
+          </p:cNvSpPr>
+          <p:nvPr>
+            <p:ph type="dt" sz="half" idx="10"/>
+          </p:nvPr>
+        </p:nvSpPr>
+        <p:spPr/>
+        <p:txBody>
+          <a:bodyPr/>
+          <a:lstStyle/>
+          <a:p>
+            <a:fld id="{5BCAD085-E8A6-8845-BD4E-CB4CCA059FC4}" type="datetimeFigureOut">
+              <a:rPr lang="en-US" smtClean="0"/>
+              <a:t>8/29/2026</a:t>
+            </a:fld>
+            <a:endParaRPr lang="en-US"/>
+          </a:p>
+        </p:txBody>
+      </p:sp>
+      <p:sp>
+        <p:nvSpPr>
+          <p:cNvPr id="3" name="Footer Placeholder 2"/>
+          <p:cNvSpPr>
+            <a:spLocks noGrp="1"/>
+          </p:cNvSpPr>
+          <p:nvPr>
+            <p:ph type="ftr" sz="quarter" idx="11"/>
+          </p:nvPr>
+        </p:nvSpPr>
+        <p:spPr/>
+        <p:txBody>
+          <a:bodyPr/>
+          <a:lstStyle/>
+          <a:p>
+            <a:endParaRPr lang="en-US"/>
+          </a:p>
+        </p:txBody>
+      </p:sp>
+      <p:sp>
+        <p:nvSpPr>
+          <p:cNvPr id="4" name="Slide Number Placeholder 3"/>
+          <p:cNvSpPr>
+            <a:spLocks noGrp="1"/>
+          </p:cNvSpPr>
+          <p:nvPr>
+            <p:ph type="sldNum" sz="quarter" idx="12"/>
+          </p:nvPr>
+        </p:nvSpPr>
+        <p:spPr/>
+        <p:txBody>
+          <a:bodyPr/>
+          <a:lstStyle/>
+          <a:p>
+            <a:fld id="{C1FF6DA9-008F-8B48-92A6-B652298478BF}" type="slidenum">
+              <a:rPr lang="en-US" smtClean="0"/>
+              <a:t>‹#›</a:t>
+            </a:fld>
+            <a:endParaRPr lang="en-US"/>
+          </a:p>
+        </p:txBody>
+      </p:sp>
+    </p:spTree>
+    <p:extLst>
+      <p:ext uri="{BB962C8B-B14F-4D97-AF65-F5344CB8AC3E}">
+        <p14:creationId xmlns:p14="http://schemas.microsoft.com/office/powerpoint/2010/main" val="886800819"/>
+      </p:ext>
+    </p:extLst>
+  </p:cSld>
+  <p:clrMapOvr>
+    <a:masterClrMapping/>
+  </p:clrMapOvr>
+</p:sldLayout>
+</file>
+
 <file path=ppt/slideMasters/slideMaster1.xml><?xml version="1.0" encoding="utf-8"?>
 <p:sldMaster xmlns:a="http://schemas.openxmlformats.org/drawingml/2006/main" xmlns:r="http://schemas.openxmlformats.org/officeDocument/2006/relationships" xmlns:p="http://schemas.openxmlformats.org/presentationml/2006/main">
   <p:cSld>
@@ -3628,6 +3881,7 @@
   <p:clrMap bg1="lt1" tx1="dk1" bg2="lt2" tx2="dk2" accent1="accent1" accent2="accent2" accent3="accent3" accent4="accent4" accent5="accent5" accent6="accent6" hlink="hlink" folHlink="folHlink"/>
   <p:sldLayoutIdLst>
     <p:sldLayoutId id="2147483649" r:id="rId1"/>
+    <p:sldLayoutId id="2147483650" r:id="rId2"/>
   </p:sldLayoutIdLst>
   <p:hf sldNum="0" hdr="0" ftr="0" dt="0"/>
   <p:txStyles>
@@ -4019,6 +4273,604 @@
 
 <file path=ppt/slides/slide10.xml><?xml version="1.0" encoding="utf-8"?>
 <p:sld xmlns:a="http://schemas.openxmlformats.org/drawingml/2006/main" xmlns:r="http://schemas.openxmlformats.org/officeDocument/2006/relationships" xmlns:p="http://schemas.openxmlformats.org/presentationml/2006/main">
+  <p:cSld name="Slide 9">
+    <p:bg>
+      <p:bgPr>
+        <a:solidFill>
+          <a:srgbClr val="222121"/>
+        </a:solidFill>
+        <a:effectLst/>
+      </p:bgPr>
+    </p:bg>
+    <p:spTree>
+      <p:nvGrpSpPr>
+        <p:cNvPr id="1" name=""/>
+        <p:cNvGrpSpPr/>
+        <p:nvPr/>
+      </p:nvGrpSpPr>
+      <p:grpSpPr>
+        <a:xfrm>
+          <a:off x="0" y="0"/>
+          <a:ext cx="0" cy="0"/>
+          <a:chOff x="0" y="0"/>
+          <a:chExt cx="0" cy="0"/>
+        </a:xfrm>
+      </p:grpSpPr>
+      <p:sp>
+        <p:nvSpPr>
+          <p:cNvPr id="2" name="Text 0"/>
+          <p:cNvSpPr/>
+          <p:nvPr/>
+        </p:nvSpPr>
+        <p:spPr>
+          <a:xfrm>
+            <a:off x="594360" y="502920"/>
+            <a:ext cx="11002975" cy="274320"/>
+          </a:xfrm>
+          <a:prstGeom prst="rect">
+            <a:avLst/>
+          </a:prstGeom>
+          <a:noFill/>
+          <a:ln/>
+        </p:spPr>
+        <p:txBody>
+          <a:bodyPr wrap="square" lIns="0" tIns="0" rIns="0" bIns="0" rtlCol="0" anchor="ctr"/>
+          <a:lstStyle/>
+          <a:p>
+            <a:pPr marL="0" indent="0" algn="l">
+              <a:buNone/>
+            </a:pPr>
+            <a:r>
+              <a:rPr lang="en-US" sz="1200" b="1" kern="0" spc="300" dirty="0">
+                <a:solidFill>
+                  <a:srgbClr val="FF6A4C"/>
+                </a:solidFill>
+                <a:latin typeface="Arial" pitchFamily="34" charset="0"/>
+                <a:ea typeface="Arial" pitchFamily="34" charset="-122"/>
+                <a:cs typeface="Arial" pitchFamily="34" charset="-120"/>
+              </a:rPr>
+              <a:t>FRICTION #2</a:t>
+            </a:r>
+            <a:endParaRPr lang="en-US" sz="1200" dirty="0"/>
+          </a:p>
+        </p:txBody>
+      </p:sp>
+      <p:sp>
+        <p:nvSpPr>
+          <p:cNvPr id="3" name="Text 1"/>
+          <p:cNvSpPr/>
+          <p:nvPr/>
+        </p:nvSpPr>
+        <p:spPr>
+          <a:xfrm>
+            <a:off x="594360" y="868680"/>
+            <a:ext cx="11002975" cy="1005840"/>
+          </a:xfrm>
+          <a:prstGeom prst="rect">
+            <a:avLst/>
+          </a:prstGeom>
+          <a:noFill/>
+          <a:ln/>
+        </p:spPr>
+        <p:txBody>
+          <a:bodyPr wrap="square" lIns="0" tIns="0" rIns="0" bIns="0" rtlCol="0" anchor="t"/>
+          <a:lstStyle/>
+          <a:p>
+            <a:pPr marL="0" indent="0" algn="l">
+              <a:lnSpc>
+                <a:spcPct val="102000"/>
+              </a:lnSpc>
+              <a:buNone/>
+            </a:pPr>
+            <a:r>
+              <a:rPr lang="en-US" sz="3400" b="1" dirty="0">
+                <a:solidFill>
+                  <a:srgbClr val="FFFFFF"/>
+                </a:solidFill>
+                <a:latin typeface="Arial" pitchFamily="34" charset="0"/>
+                <a:ea typeface="Arial" pitchFamily="34" charset="-122"/>
+                <a:cs typeface="Arial" pitchFamily="34" charset="-120"/>
+              </a:rPr>
+              <a:t>The cascade</a:t>
+            </a:r>
+            <a:endParaRPr lang="en-US" sz="3400" dirty="0"/>
+          </a:p>
+        </p:txBody>
+      </p:sp>
+      <p:sp>
+        <p:nvSpPr>
+          <p:cNvPr id="4" name="Text 2"/>
+          <p:cNvSpPr/>
+          <p:nvPr/>
+        </p:nvSpPr>
+        <p:spPr>
+          <a:xfrm>
+            <a:off x="594360" y="1783080"/>
+            <a:ext cx="11002975" cy="548640"/>
+          </a:xfrm>
+          <a:prstGeom prst="rect">
+            <a:avLst/>
+          </a:prstGeom>
+          <a:noFill/>
+          <a:ln/>
+        </p:spPr>
+        <p:txBody>
+          <a:bodyPr wrap="square" lIns="0" tIns="0" rIns="0" bIns="0" rtlCol="0" anchor="ctr"/>
+          <a:lstStyle/>
+          <a:p>
+            <a:pPr marL="0" indent="0" algn="l">
+              <a:buNone/>
+            </a:pPr>
+            <a:r>
+              <a:rPr lang="en-US" sz="2200" b="1" dirty="0">
+                <a:solidFill>
+                  <a:srgbClr val="FFFFFF"/>
+                </a:solidFill>
+                <a:latin typeface="Arial" pitchFamily="34" charset="0"/>
+                <a:ea typeface="Arial" pitchFamily="34" charset="-122"/>
+                <a:cs typeface="Arial" pitchFamily="34" charset="-120"/>
+              </a:rPr>
+              <a:t>The </a:t>
+            </a:r>
+            <a:r>
+              <a:rPr lang="en-US" sz="2200" b="1" dirty="0">
+                <a:solidFill>
+                  <a:srgbClr val="FF6A4C"/>
+                </a:solidFill>
+                <a:latin typeface="Arial" pitchFamily="34" charset="0"/>
+                <a:ea typeface="Arial" pitchFamily="34" charset="-122"/>
+                <a:cs typeface="Arial" pitchFamily="34" charset="-120"/>
+              </a:rPr>
+              <a:t>C</a:t>
+            </a:r>
+            <a:r>
+              <a:rPr lang="en-US" sz="2200" b="1" dirty="0">
+                <a:solidFill>
+                  <a:srgbClr val="FFFFFF"/>
+                </a:solidFill>
+                <a:latin typeface="Arial" pitchFamily="34" charset="0"/>
+                <a:ea typeface="Arial" pitchFamily="34" charset="-122"/>
+                <a:cs typeface="Arial" pitchFamily="34" charset="-120"/>
+              </a:rPr>
+              <a:t> in CSS is global and order-dependent.</a:t>
+            </a:r>
+            <a:endParaRPr lang="en-US" sz="2200" dirty="0"/>
+          </a:p>
+        </p:txBody>
+      </p:sp>
+      <p:sp>
+        <p:nvSpPr>
+          <p:cNvPr id="5" name="Shape 3"/>
+          <p:cNvSpPr/>
+          <p:nvPr/>
+        </p:nvSpPr>
+        <p:spPr>
+          <a:xfrm>
+            <a:off x="594360" y="2867714"/>
+            <a:ext cx="3200400" cy="1554480"/>
+          </a:xfrm>
+          <a:prstGeom prst="roundRect">
+            <a:avLst>
+              <a:gd name="adj" fmla="val 7059"/>
+            </a:avLst>
+          </a:prstGeom>
+          <a:solidFill>
+            <a:srgbClr val="2C2B2B"/>
+          </a:solidFill>
+          <a:ln w="12700">
+            <a:solidFill>
+              <a:srgbClr val="75DFBC"/>
+            </a:solidFill>
+            <a:prstDash val="solid"/>
+          </a:ln>
+        </p:spPr>
+        <p:txBody>
+          <a:bodyPr/>
+          <a:lstStyle/>
+          <a:p>
+            <a:endParaRPr lang="en-US" sz="2800"/>
+          </a:p>
+        </p:txBody>
+      </p:sp>
+      <p:sp>
+        <p:nvSpPr>
+          <p:cNvPr id="6" name="Text 4"/>
+          <p:cNvSpPr/>
+          <p:nvPr/>
+        </p:nvSpPr>
+        <p:spPr>
+          <a:xfrm>
+            <a:off x="822960" y="3050594"/>
+            <a:ext cx="2743200" cy="365760"/>
+          </a:xfrm>
+          <a:prstGeom prst="rect">
+            <a:avLst/>
+          </a:prstGeom>
+          <a:noFill/>
+          <a:ln/>
+        </p:spPr>
+        <p:txBody>
+          <a:bodyPr wrap="square" lIns="0" tIns="0" rIns="0" bIns="0" rtlCol="0" anchor="ctr"/>
+          <a:lstStyle/>
+          <a:p>
+            <a:pPr marL="0" indent="0" algn="l">
+              <a:buNone/>
+            </a:pPr>
+            <a:r>
+              <a:rPr lang="en-US" b="1" dirty="0">
+                <a:solidFill>
+                  <a:srgbClr val="75DFBC"/>
+                </a:solidFill>
+                <a:latin typeface="Courier New" pitchFamily="34" charset="0"/>
+                <a:ea typeface="Courier New" pitchFamily="34" charset="-122"/>
+                <a:cs typeface="Courier New" pitchFamily="34" charset="-120"/>
+              </a:rPr>
+              <a:t>reset.css</a:t>
+            </a:r>
+            <a:endParaRPr lang="en-US" dirty="0"/>
+          </a:p>
+        </p:txBody>
+      </p:sp>
+      <p:sp>
+        <p:nvSpPr>
+          <p:cNvPr id="7" name="Text 5"/>
+          <p:cNvSpPr/>
+          <p:nvPr/>
+        </p:nvSpPr>
+        <p:spPr>
+          <a:xfrm>
+            <a:off x="822960" y="3553514"/>
+            <a:ext cx="2743200" cy="731520"/>
+          </a:xfrm>
+          <a:prstGeom prst="rect">
+            <a:avLst/>
+          </a:prstGeom>
+          <a:noFill/>
+          <a:ln/>
+        </p:spPr>
+        <p:txBody>
+          <a:bodyPr wrap="square" lIns="0" tIns="0" rIns="0" bIns="0" rtlCol="0" anchor="t"/>
+          <a:lstStyle/>
+          <a:p>
+            <a:pPr marL="0" indent="0" algn="l">
+              <a:lnSpc>
+                <a:spcPct val="110000"/>
+              </a:lnSpc>
+              <a:buNone/>
+            </a:pPr>
+            <a:r>
+              <a:rPr lang="en-US" dirty="0">
+                <a:solidFill>
+                  <a:srgbClr val="A6A6A6"/>
+                </a:solidFill>
+                <a:latin typeface="Courier New" pitchFamily="34" charset="0"/>
+                <a:ea typeface="Courier New" pitchFamily="34" charset="-122"/>
+                <a:cs typeface="Courier New" pitchFamily="34" charset="-120"/>
+              </a:rPr>
+              <a:t>* { margin: 0 }</a:t>
+            </a:r>
+            <a:endParaRPr lang="en-US" dirty="0"/>
+          </a:p>
+        </p:txBody>
+      </p:sp>
+      <p:sp>
+        <p:nvSpPr>
+          <p:cNvPr id="8" name="Text 6"/>
+          <p:cNvSpPr/>
+          <p:nvPr/>
+        </p:nvSpPr>
+        <p:spPr>
+          <a:xfrm>
+            <a:off x="3813048" y="3370634"/>
+            <a:ext cx="420624" cy="457200"/>
+          </a:xfrm>
+          <a:prstGeom prst="rect">
+            <a:avLst/>
+          </a:prstGeom>
+          <a:noFill/>
+          <a:ln/>
+        </p:spPr>
+        <p:txBody>
+          <a:bodyPr wrap="square" lIns="0" tIns="0" rIns="0" bIns="0" rtlCol="0" anchor="ctr"/>
+          <a:lstStyle/>
+          <a:p>
+            <a:pPr marL="0" indent="0" algn="ctr">
+              <a:buNone/>
+            </a:pPr>
+            <a:r>
+              <a:rPr lang="en-US" sz="3600" b="1" dirty="0">
+                <a:solidFill>
+                  <a:srgbClr val="6E6E6E"/>
+                </a:solidFill>
+                <a:latin typeface="Arial" pitchFamily="34" charset="0"/>
+                <a:ea typeface="Arial" pitchFamily="34" charset="-122"/>
+                <a:cs typeface="Arial" pitchFamily="34" charset="-120"/>
+              </a:rPr>
+              <a:t>→</a:t>
+            </a:r>
+            <a:endParaRPr lang="en-US" sz="3600" dirty="0"/>
+          </a:p>
+        </p:txBody>
+      </p:sp>
+      <p:sp>
+        <p:nvSpPr>
+          <p:cNvPr id="9" name="Shape 7"/>
+          <p:cNvSpPr/>
+          <p:nvPr/>
+        </p:nvSpPr>
+        <p:spPr>
+          <a:xfrm>
+            <a:off x="4251960" y="2867714"/>
+            <a:ext cx="3200400" cy="1554480"/>
+          </a:xfrm>
+          <a:prstGeom prst="roundRect">
+            <a:avLst>
+              <a:gd name="adj" fmla="val 7059"/>
+            </a:avLst>
+          </a:prstGeom>
+          <a:solidFill>
+            <a:srgbClr val="2C2B2B"/>
+          </a:solidFill>
+          <a:ln w="12700">
+            <a:solidFill>
+              <a:srgbClr val="F1CF25"/>
+            </a:solidFill>
+            <a:prstDash val="solid"/>
+          </a:ln>
+        </p:spPr>
+        <p:txBody>
+          <a:bodyPr/>
+          <a:lstStyle/>
+          <a:p>
+            <a:endParaRPr lang="en-US" sz="2800"/>
+          </a:p>
+        </p:txBody>
+      </p:sp>
+      <p:sp>
+        <p:nvSpPr>
+          <p:cNvPr id="10" name="Text 8"/>
+          <p:cNvSpPr/>
+          <p:nvPr/>
+        </p:nvSpPr>
+        <p:spPr>
+          <a:xfrm>
+            <a:off x="4480560" y="3050594"/>
+            <a:ext cx="2743200" cy="365760"/>
+          </a:xfrm>
+          <a:prstGeom prst="rect">
+            <a:avLst/>
+          </a:prstGeom>
+          <a:noFill/>
+          <a:ln/>
+        </p:spPr>
+        <p:txBody>
+          <a:bodyPr wrap="square" lIns="0" tIns="0" rIns="0" bIns="0" rtlCol="0" anchor="ctr"/>
+          <a:lstStyle/>
+          <a:p>
+            <a:pPr marL="0" indent="0" algn="l">
+              <a:buNone/>
+            </a:pPr>
+            <a:r>
+              <a:rPr lang="en-US" b="1" dirty="0">
+                <a:solidFill>
+                  <a:srgbClr val="F1CF25"/>
+                </a:solidFill>
+                <a:latin typeface="Courier New" pitchFamily="34" charset="0"/>
+                <a:ea typeface="Courier New" pitchFamily="34" charset="-122"/>
+                <a:cs typeface="Courier New" pitchFamily="34" charset="-120"/>
+              </a:rPr>
+              <a:t>buttons.css</a:t>
+            </a:r>
+            <a:endParaRPr lang="en-US" dirty="0"/>
+          </a:p>
+        </p:txBody>
+      </p:sp>
+      <p:sp>
+        <p:nvSpPr>
+          <p:cNvPr id="11" name="Text 9"/>
+          <p:cNvSpPr/>
+          <p:nvPr/>
+        </p:nvSpPr>
+        <p:spPr>
+          <a:xfrm>
+            <a:off x="4480560" y="3553514"/>
+            <a:ext cx="2743200" cy="731520"/>
+          </a:xfrm>
+          <a:prstGeom prst="rect">
+            <a:avLst/>
+          </a:prstGeom>
+          <a:noFill/>
+          <a:ln/>
+        </p:spPr>
+        <p:txBody>
+          <a:bodyPr wrap="square" lIns="0" tIns="0" rIns="0" bIns="0" rtlCol="0" anchor="t"/>
+          <a:lstStyle/>
+          <a:p>
+            <a:pPr marL="0" indent="0" algn="l">
+              <a:lnSpc>
+                <a:spcPct val="110000"/>
+              </a:lnSpc>
+              <a:buNone/>
+            </a:pPr>
+            <a:r>
+              <a:rPr lang="en-US" dirty="0">
+                <a:solidFill>
+                  <a:srgbClr val="A6A6A6"/>
+                </a:solidFill>
+                <a:latin typeface="Courier New" pitchFamily="34" charset="0"/>
+                <a:ea typeface="Courier New" pitchFamily="34" charset="-122"/>
+                <a:cs typeface="Courier New" pitchFamily="34" charset="-120"/>
+              </a:rPr>
+              <a:t>button { padding: 8px }</a:t>
+            </a:r>
+            <a:endParaRPr lang="en-US" dirty="0"/>
+          </a:p>
+        </p:txBody>
+      </p:sp>
+      <p:sp>
+        <p:nvSpPr>
+          <p:cNvPr id="12" name="Text 10"/>
+          <p:cNvSpPr/>
+          <p:nvPr/>
+        </p:nvSpPr>
+        <p:spPr>
+          <a:xfrm>
+            <a:off x="7470648" y="3370634"/>
+            <a:ext cx="420624" cy="457200"/>
+          </a:xfrm>
+          <a:prstGeom prst="rect">
+            <a:avLst/>
+          </a:prstGeom>
+          <a:noFill/>
+          <a:ln/>
+        </p:spPr>
+        <p:txBody>
+          <a:bodyPr wrap="square" lIns="0" tIns="0" rIns="0" bIns="0" rtlCol="0" anchor="ctr"/>
+          <a:lstStyle/>
+          <a:p>
+            <a:pPr marL="0" indent="0" algn="ctr">
+              <a:buNone/>
+            </a:pPr>
+            <a:r>
+              <a:rPr lang="en-US" sz="3600" b="1" dirty="0">
+                <a:solidFill>
+                  <a:srgbClr val="6E6E6E"/>
+                </a:solidFill>
+                <a:latin typeface="Arial" pitchFamily="34" charset="0"/>
+                <a:ea typeface="Arial" pitchFamily="34" charset="-122"/>
+                <a:cs typeface="Arial" pitchFamily="34" charset="-120"/>
+              </a:rPr>
+              <a:t>→</a:t>
+            </a:r>
+            <a:endParaRPr lang="en-US" sz="3600" dirty="0"/>
+          </a:p>
+        </p:txBody>
+      </p:sp>
+      <p:sp>
+        <p:nvSpPr>
+          <p:cNvPr id="13" name="Shape 11"/>
+          <p:cNvSpPr/>
+          <p:nvPr/>
+        </p:nvSpPr>
+        <p:spPr>
+          <a:xfrm>
+            <a:off x="7909560" y="2867714"/>
+            <a:ext cx="3200400" cy="1554480"/>
+          </a:xfrm>
+          <a:prstGeom prst="roundRect">
+            <a:avLst>
+              <a:gd name="adj" fmla="val 7059"/>
+            </a:avLst>
+          </a:prstGeom>
+          <a:solidFill>
+            <a:srgbClr val="2C2B2B"/>
+          </a:solidFill>
+          <a:ln w="12700">
+            <a:solidFill>
+              <a:srgbClr val="FF6A4C"/>
+            </a:solidFill>
+            <a:prstDash val="solid"/>
+          </a:ln>
+        </p:spPr>
+        <p:txBody>
+          <a:bodyPr/>
+          <a:lstStyle/>
+          <a:p>
+            <a:endParaRPr lang="en-US" sz="2800"/>
+          </a:p>
+        </p:txBody>
+      </p:sp>
+      <p:sp>
+        <p:nvSpPr>
+          <p:cNvPr id="14" name="Text 12"/>
+          <p:cNvSpPr/>
+          <p:nvPr/>
+        </p:nvSpPr>
+        <p:spPr>
+          <a:xfrm>
+            <a:off x="8138160" y="3050594"/>
+            <a:ext cx="2743200" cy="365760"/>
+          </a:xfrm>
+          <a:prstGeom prst="rect">
+            <a:avLst/>
+          </a:prstGeom>
+          <a:noFill/>
+          <a:ln/>
+        </p:spPr>
+        <p:txBody>
+          <a:bodyPr wrap="square" lIns="0" tIns="0" rIns="0" bIns="0" rtlCol="0" anchor="ctr"/>
+          <a:lstStyle/>
+          <a:p>
+            <a:pPr marL="0" indent="0" algn="l">
+              <a:buNone/>
+            </a:pPr>
+            <a:r>
+              <a:rPr lang="en-US" b="1" dirty="0">
+                <a:solidFill>
+                  <a:srgbClr val="FF6A4C"/>
+                </a:solidFill>
+                <a:latin typeface="Courier New" pitchFamily="34" charset="0"/>
+                <a:ea typeface="Courier New" pitchFamily="34" charset="-122"/>
+                <a:cs typeface="Courier New" pitchFamily="34" charset="-120"/>
+              </a:rPr>
+              <a:t>card.css</a:t>
+            </a:r>
+            <a:endParaRPr lang="en-US" dirty="0"/>
+          </a:p>
+        </p:txBody>
+      </p:sp>
+      <p:sp>
+        <p:nvSpPr>
+          <p:cNvPr id="15" name="Text 13"/>
+          <p:cNvSpPr/>
+          <p:nvPr/>
+        </p:nvSpPr>
+        <p:spPr>
+          <a:xfrm>
+            <a:off x="8138160" y="3553514"/>
+            <a:ext cx="2743200" cy="731520"/>
+          </a:xfrm>
+          <a:prstGeom prst="rect">
+            <a:avLst/>
+          </a:prstGeom>
+          <a:noFill/>
+          <a:ln/>
+        </p:spPr>
+        <p:txBody>
+          <a:bodyPr wrap="square" lIns="0" tIns="0" rIns="0" bIns="0" rtlCol="0" anchor="t"/>
+          <a:lstStyle/>
+          <a:p>
+            <a:pPr marL="0" indent="0" algn="l">
+              <a:lnSpc>
+                <a:spcPct val="110000"/>
+              </a:lnSpc>
+              <a:buNone/>
+            </a:pPr>
+            <a:r>
+              <a:rPr lang="en-US" dirty="0">
+                <a:solidFill>
+                  <a:srgbClr val="A6A6A6"/>
+                </a:solidFill>
+                <a:latin typeface="Courier New" pitchFamily="34" charset="0"/>
+                <a:ea typeface="Courier New" pitchFamily="34" charset="-122"/>
+                <a:cs typeface="Courier New" pitchFamily="34" charset="-120"/>
+              </a:rPr>
+              <a:t>…relies on both 👆</a:t>
+            </a:r>
+            <a:endParaRPr lang="en-US" dirty="0"/>
+          </a:p>
+        </p:txBody>
+      </p:sp>
+    </p:spTree>
+  </p:cSld>
+  <p:clrMapOvr>
+    <a:masterClrMapping/>
+  </p:clrMapOvr>
+</p:sld>
+</file>
+
+<file path=ppt/slides/slide11.xml><?xml version="1.0" encoding="utf-8"?>
+<p:sld xmlns:a="http://schemas.openxmlformats.org/drawingml/2006/main" xmlns:r="http://schemas.openxmlformats.org/officeDocument/2006/relationships" xmlns:p="http://schemas.openxmlformats.org/presentationml/2006/main">
   <p:cSld name="Slide 10">
     <p:bg>
       <p:bgPr>
@@ -4447,7 +5299,7 @@
 </p:sld>
 </file>
 
-<file path=ppt/slides/slide11.xml><?xml version="1.0" encoding="utf-8"?>
+<file path=ppt/slides/slide12.xml><?xml version="1.0" encoding="utf-8"?>
 <p:sld xmlns:a="http://schemas.openxmlformats.org/drawingml/2006/main" xmlns:r="http://schemas.openxmlformats.org/officeDocument/2006/relationships" xmlns:p="http://schemas.openxmlformats.org/presentationml/2006/main">
   <p:cSld name="Slide 11">
     <p:bg>
@@ -4941,7 +5793,7 @@
 </p:sld>
 </file>
 
-<file path=ppt/slides/slide12.xml><?xml version="1.0" encoding="utf-8"?>
+<file path=ppt/slides/slide13.xml><?xml version="1.0" encoding="utf-8"?>
 <p:sld xmlns:a="http://schemas.openxmlformats.org/drawingml/2006/main" xmlns:r="http://schemas.openxmlformats.org/officeDocument/2006/relationships" xmlns:p="http://schemas.openxmlformats.org/presentationml/2006/main">
   <p:cSld name="Slide 12">
     <p:bg>
@@ -5291,7 +6143,7 @@
 </p:sld>
 </file>
 
-<file path=ppt/slides/slide13.xml><?xml version="1.0" encoding="utf-8"?>
+<file path=ppt/slides/slide14.xml><?xml version="1.0" encoding="utf-8"?>
 <p:sld xmlns:a="http://schemas.openxmlformats.org/drawingml/2006/main" xmlns:r="http://schemas.openxmlformats.org/officeDocument/2006/relationships" xmlns:p="http://schemas.openxmlformats.org/presentationml/2006/main">
   <p:cSld name="Slide 13">
     <p:bg>
@@ -6125,7 +6977,7 @@
 </p:sld>
 </file>
 
-<file path=ppt/slides/slide14.xml><?xml version="1.0" encoding="utf-8"?>
+<file path=ppt/slides/slide15.xml><?xml version="1.0" encoding="utf-8"?>
 <p:sld xmlns:a="http://schemas.openxmlformats.org/drawingml/2006/main" xmlns:r="http://schemas.openxmlformats.org/officeDocument/2006/relationships" xmlns:p="http://schemas.openxmlformats.org/presentationml/2006/main">
   <p:cSld name="Slide 14">
     <p:bg>
@@ -6851,7 +7703,7 @@
 </p:sld>
 </file>
 
-<file path=ppt/slides/slide15.xml><?xml version="1.0" encoding="utf-8"?>
+<file path=ppt/slides/slide16.xml><?xml version="1.0" encoding="utf-8"?>
 <p:sld xmlns:a="http://schemas.openxmlformats.org/drawingml/2006/main" xmlns:r="http://schemas.openxmlformats.org/officeDocument/2006/relationships" xmlns:p="http://schemas.openxmlformats.org/presentationml/2006/main">
   <p:cSld name="Slide 15">
     <p:bg>
@@ -7784,7 +8636,7 @@
 </p:sld>
 </file>
 
-<file path=ppt/slides/slide16.xml><?xml version="1.0" encoding="utf-8"?>
+<file path=ppt/slides/slide17.xml><?xml version="1.0" encoding="utf-8"?>
 <p:sld xmlns:a="http://schemas.openxmlformats.org/drawingml/2006/main" xmlns:r="http://schemas.openxmlformats.org/officeDocument/2006/relationships" xmlns:p="http://schemas.openxmlformats.org/presentationml/2006/main">
   <p:cSld name="Slide 16">
     <p:bg>
@@ -8647,7 +9499,7 @@
 </p:sld>
 </file>
 
-<file path=ppt/slides/slide17.xml><?xml version="1.0" encoding="utf-8"?>
+<file path=ppt/slides/slide18.xml><?xml version="1.0" encoding="utf-8"?>
 <p:sld xmlns:a="http://schemas.openxmlformats.org/drawingml/2006/main" xmlns:r="http://schemas.openxmlformats.org/officeDocument/2006/relationships" xmlns:p="http://schemas.openxmlformats.org/presentationml/2006/main">
   <p:cSld name="Slide 17">
     <p:bg>
@@ -9463,7 +10315,7 @@
 </p:sld>
 </file>
 
-<file path=ppt/slides/slide18.xml><?xml version="1.0" encoding="utf-8"?>
+<file path=ppt/slides/slide19.xml><?xml version="1.0" encoding="utf-8"?>
 <p:sld xmlns:a="http://schemas.openxmlformats.org/drawingml/2006/main" xmlns:r="http://schemas.openxmlformats.org/officeDocument/2006/relationships" xmlns:p="http://schemas.openxmlformats.org/presentationml/2006/main">
   <p:cSld name="Slide 18">
     <p:bg>
@@ -10098,851 +10950,6 @@
               <a:t>→ coral button, darkens on hover, comfy padding, soft corners.</a:t>
             </a:r>
             <a:endParaRPr lang="en-US" dirty="0"/>
-          </a:p>
-        </p:txBody>
-      </p:sp>
-    </p:spTree>
-  </p:cSld>
-  <p:clrMapOvr>
-    <a:masterClrMapping/>
-  </p:clrMapOvr>
-</p:sld>
-</file>
-
-<file path=ppt/slides/slide19.xml><?xml version="1.0" encoding="utf-8"?>
-<p:sld xmlns:a="http://schemas.openxmlformats.org/drawingml/2006/main" xmlns:r="http://schemas.openxmlformats.org/officeDocument/2006/relationships" xmlns:p="http://schemas.openxmlformats.org/presentationml/2006/main">
-  <p:cSld name="Slide 19">
-    <p:bg>
-      <p:bgPr>
-        <a:solidFill>
-          <a:srgbClr val="222121"/>
-        </a:solidFill>
-        <a:effectLst/>
-      </p:bgPr>
-    </p:bg>
-    <p:spTree>
-      <p:nvGrpSpPr>
-        <p:cNvPr id="1" name=""/>
-        <p:cNvGrpSpPr/>
-        <p:nvPr/>
-      </p:nvGrpSpPr>
-      <p:grpSpPr>
-        <a:xfrm>
-          <a:off x="0" y="0"/>
-          <a:ext cx="0" cy="0"/>
-          <a:chOff x="0" y="0"/>
-          <a:chExt cx="0" cy="0"/>
-        </a:xfrm>
-      </p:grpSpPr>
-      <p:sp>
-        <p:nvSpPr>
-          <p:cNvPr id="3" name="Text 1"/>
-          <p:cNvSpPr/>
-          <p:nvPr/>
-        </p:nvSpPr>
-        <p:spPr>
-          <a:xfrm>
-            <a:off x="594360" y="868680"/>
-            <a:ext cx="11002975" cy="1005840"/>
-          </a:xfrm>
-          <a:prstGeom prst="rect">
-            <a:avLst/>
-          </a:prstGeom>
-          <a:noFill/>
-          <a:ln/>
-        </p:spPr>
-        <p:txBody>
-          <a:bodyPr wrap="square" lIns="0" tIns="0" rIns="0" bIns="0" rtlCol="0" anchor="t"/>
-          <a:lstStyle/>
-          <a:p>
-            <a:pPr marL="0" indent="0" algn="l">
-              <a:lnSpc>
-                <a:spcPct val="102000"/>
-              </a:lnSpc>
-              <a:buNone/>
-            </a:pPr>
-            <a:r>
-              <a:rPr lang="en-US" sz="3400" b="1" dirty="0">
-                <a:solidFill>
-                  <a:srgbClr val="FFFFFF"/>
-                </a:solidFill>
-                <a:latin typeface="Arial" pitchFamily="34" charset="0"/>
-                <a:ea typeface="Arial" pitchFamily="34" charset="-122"/>
-                <a:cs typeface="Arial" pitchFamily="34" charset="-120"/>
-              </a:rPr>
-              <a:t>Components already do this</a:t>
-            </a:r>
-            <a:endParaRPr lang="en-US" sz="3400" dirty="0"/>
-          </a:p>
-        </p:txBody>
-      </p:sp>
-      <p:sp>
-        <p:nvSpPr>
-          <p:cNvPr id="4" name="Text 2"/>
-          <p:cNvSpPr/>
-          <p:nvPr/>
-        </p:nvSpPr>
-        <p:spPr>
-          <a:xfrm>
-            <a:off x="594360" y="1783080"/>
-            <a:ext cx="11002975" cy="822960"/>
-          </a:xfrm>
-          <a:prstGeom prst="rect">
-            <a:avLst/>
-          </a:prstGeom>
-          <a:noFill/>
-          <a:ln/>
-        </p:spPr>
-        <p:txBody>
-          <a:bodyPr wrap="square" lIns="0" tIns="0" rIns="0" bIns="0" rtlCol="0" anchor="ctr"/>
-          <a:lstStyle/>
-          <a:p>
-            <a:pPr marL="0" indent="0" algn="l">
-              <a:lnSpc>
-                <a:spcPct val="105000"/>
-              </a:lnSpc>
-              <a:buNone/>
-            </a:pPr>
-            <a:r>
-              <a:rPr lang="en-US" sz="1800" dirty="0">
-                <a:solidFill>
-                  <a:srgbClr val="A6A6A6"/>
-                </a:solidFill>
-                <a:latin typeface="Arial" pitchFamily="34" charset="0"/>
-                <a:ea typeface="Arial" pitchFamily="34" charset="-122"/>
-                <a:cs typeface="Arial" pitchFamily="34" charset="-120"/>
-              </a:rPr>
-              <a:t>Modern frameworks co-locate template + logic in one unit. Tailwind adds style to the same unit.</a:t>
-            </a:r>
-            <a:endParaRPr lang="en-US" sz="1800" dirty="0"/>
-          </a:p>
-        </p:txBody>
-      </p:sp>
-      <p:sp>
-        <p:nvSpPr>
-          <p:cNvPr id="5" name="Shape 3"/>
-          <p:cNvSpPr/>
-          <p:nvPr/>
-        </p:nvSpPr>
-        <p:spPr>
-          <a:xfrm>
-            <a:off x="594360" y="2743200"/>
-            <a:ext cx="1920240" cy="548640"/>
-          </a:xfrm>
-          <a:prstGeom prst="roundRect">
-            <a:avLst>
-              <a:gd name="adj" fmla="val 50000"/>
-            </a:avLst>
-          </a:prstGeom>
-          <a:solidFill>
-            <a:srgbClr val="2C2B2B"/>
-          </a:solidFill>
-          <a:ln w="12700">
-            <a:solidFill>
-              <a:srgbClr val="75DFBC"/>
-            </a:solidFill>
-            <a:prstDash val="solid"/>
-          </a:ln>
-        </p:spPr>
-        <p:txBody>
-          <a:bodyPr/>
-          <a:lstStyle/>
-          <a:p>
-            <a:endParaRPr lang="en-US"/>
-          </a:p>
-        </p:txBody>
-      </p:sp>
-      <p:sp>
-        <p:nvSpPr>
-          <p:cNvPr id="6" name="Text 4"/>
-          <p:cNvSpPr/>
-          <p:nvPr/>
-        </p:nvSpPr>
-        <p:spPr>
-          <a:xfrm>
-            <a:off x="594360" y="2743200"/>
-            <a:ext cx="1920240" cy="548640"/>
-          </a:xfrm>
-          <a:prstGeom prst="rect">
-            <a:avLst/>
-          </a:prstGeom>
-          <a:noFill/>
-          <a:ln/>
-        </p:spPr>
-        <p:txBody>
-          <a:bodyPr wrap="square" lIns="0" tIns="0" rIns="0" bIns="0" rtlCol="0" anchor="ctr"/>
-          <a:lstStyle/>
-          <a:p>
-            <a:pPr marL="0" indent="0" algn="ctr">
-              <a:buNone/>
-            </a:pPr>
-            <a:r>
-              <a:rPr lang="en-US" sz="1600" b="1" dirty="0">
-                <a:solidFill>
-                  <a:srgbClr val="75DFBC"/>
-                </a:solidFill>
-                <a:latin typeface="Arial" pitchFamily="34" charset="0"/>
-                <a:ea typeface="Arial" pitchFamily="34" charset="-122"/>
-                <a:cs typeface="Arial" pitchFamily="34" charset="-120"/>
-              </a:rPr>
-              <a:t>Template</a:t>
-            </a:r>
-            <a:endParaRPr lang="en-US" sz="1600" dirty="0"/>
-          </a:p>
-        </p:txBody>
-      </p:sp>
-      <p:sp>
-        <p:nvSpPr>
-          <p:cNvPr id="7" name="Text 5"/>
-          <p:cNvSpPr/>
-          <p:nvPr/>
-        </p:nvSpPr>
-        <p:spPr>
-          <a:xfrm>
-            <a:off x="2514600" y="2743200"/>
-            <a:ext cx="228600" cy="548640"/>
-          </a:xfrm>
-          <a:prstGeom prst="rect">
-            <a:avLst/>
-          </a:prstGeom>
-          <a:noFill/>
-          <a:ln/>
-        </p:spPr>
-        <p:txBody>
-          <a:bodyPr wrap="square" lIns="0" tIns="0" rIns="0" bIns="0" rtlCol="0" anchor="ctr"/>
-          <a:lstStyle/>
-          <a:p>
-            <a:pPr marL="0" indent="0" algn="ctr">
-              <a:buNone/>
-            </a:pPr>
-            <a:r>
-              <a:rPr lang="en-US" sz="2200" b="1" dirty="0">
-                <a:solidFill>
-                  <a:srgbClr val="FFFFFF"/>
-                </a:solidFill>
-                <a:latin typeface="Arial" pitchFamily="34" charset="0"/>
-                <a:ea typeface="Arial" pitchFamily="34" charset="-122"/>
-                <a:cs typeface="Arial" pitchFamily="34" charset="-120"/>
-              </a:rPr>
-              <a:t>+</a:t>
-            </a:r>
-            <a:endParaRPr lang="en-US" sz="2200" dirty="0"/>
-          </a:p>
-        </p:txBody>
-      </p:sp>
-      <p:sp>
-        <p:nvSpPr>
-          <p:cNvPr id="8" name="Shape 6"/>
-          <p:cNvSpPr/>
-          <p:nvPr/>
-        </p:nvSpPr>
-        <p:spPr>
-          <a:xfrm>
-            <a:off x="2743200" y="2743200"/>
-            <a:ext cx="1920240" cy="548640"/>
-          </a:xfrm>
-          <a:prstGeom prst="roundRect">
-            <a:avLst>
-              <a:gd name="adj" fmla="val 50000"/>
-            </a:avLst>
-          </a:prstGeom>
-          <a:solidFill>
-            <a:srgbClr val="2C2B2B"/>
-          </a:solidFill>
-          <a:ln w="12700">
-            <a:solidFill>
-              <a:srgbClr val="F1CF25"/>
-            </a:solidFill>
-            <a:prstDash val="solid"/>
-          </a:ln>
-        </p:spPr>
-        <p:txBody>
-          <a:bodyPr/>
-          <a:lstStyle/>
-          <a:p>
-            <a:endParaRPr lang="en-US"/>
-          </a:p>
-        </p:txBody>
-      </p:sp>
-      <p:sp>
-        <p:nvSpPr>
-          <p:cNvPr id="9" name="Text 7"/>
-          <p:cNvSpPr/>
-          <p:nvPr/>
-        </p:nvSpPr>
-        <p:spPr>
-          <a:xfrm>
-            <a:off x="2743200" y="2743200"/>
-            <a:ext cx="1920240" cy="548640"/>
-          </a:xfrm>
-          <a:prstGeom prst="rect">
-            <a:avLst/>
-          </a:prstGeom>
-          <a:noFill/>
-          <a:ln/>
-        </p:spPr>
-        <p:txBody>
-          <a:bodyPr wrap="square" lIns="0" tIns="0" rIns="0" bIns="0" rtlCol="0" anchor="ctr"/>
-          <a:lstStyle/>
-          <a:p>
-            <a:pPr marL="0" indent="0" algn="ctr">
-              <a:buNone/>
-            </a:pPr>
-            <a:r>
-              <a:rPr lang="en-US" sz="1600" b="1" dirty="0">
-                <a:solidFill>
-                  <a:srgbClr val="F1CF25"/>
-                </a:solidFill>
-                <a:latin typeface="Arial" pitchFamily="34" charset="0"/>
-                <a:ea typeface="Arial" pitchFamily="34" charset="-122"/>
-                <a:cs typeface="Arial" pitchFamily="34" charset="-120"/>
-              </a:rPr>
-              <a:t>Logic</a:t>
-            </a:r>
-            <a:endParaRPr lang="en-US" sz="1600" dirty="0"/>
-          </a:p>
-        </p:txBody>
-      </p:sp>
-      <p:sp>
-        <p:nvSpPr>
-          <p:cNvPr id="10" name="Text 8"/>
-          <p:cNvSpPr/>
-          <p:nvPr/>
-        </p:nvSpPr>
-        <p:spPr>
-          <a:xfrm>
-            <a:off x="4663440" y="2743200"/>
-            <a:ext cx="228600" cy="548640"/>
-          </a:xfrm>
-          <a:prstGeom prst="rect">
-            <a:avLst/>
-          </a:prstGeom>
-          <a:noFill/>
-          <a:ln/>
-        </p:spPr>
-        <p:txBody>
-          <a:bodyPr wrap="square" lIns="0" tIns="0" rIns="0" bIns="0" rtlCol="0" anchor="ctr"/>
-          <a:lstStyle/>
-          <a:p>
-            <a:pPr marL="0" indent="0" algn="ctr">
-              <a:buNone/>
-            </a:pPr>
-            <a:r>
-              <a:rPr lang="en-US" sz="2200" b="1" dirty="0">
-                <a:solidFill>
-                  <a:srgbClr val="FFFFFF"/>
-                </a:solidFill>
-                <a:latin typeface="Arial" pitchFamily="34" charset="0"/>
-                <a:ea typeface="Arial" pitchFamily="34" charset="-122"/>
-                <a:cs typeface="Arial" pitchFamily="34" charset="-120"/>
-              </a:rPr>
-              <a:t>+</a:t>
-            </a:r>
-            <a:endParaRPr lang="en-US" sz="2200" dirty="0"/>
-          </a:p>
-        </p:txBody>
-      </p:sp>
-      <p:sp>
-        <p:nvSpPr>
-          <p:cNvPr id="11" name="Shape 9"/>
-          <p:cNvSpPr/>
-          <p:nvPr/>
-        </p:nvSpPr>
-        <p:spPr>
-          <a:xfrm>
-            <a:off x="4892040" y="2743200"/>
-            <a:ext cx="1920240" cy="548640"/>
-          </a:xfrm>
-          <a:prstGeom prst="roundRect">
-            <a:avLst>
-              <a:gd name="adj" fmla="val 50000"/>
-            </a:avLst>
-          </a:prstGeom>
-          <a:solidFill>
-            <a:srgbClr val="2C2B2B"/>
-          </a:solidFill>
-          <a:ln w="12700">
-            <a:solidFill>
-              <a:srgbClr val="FF6A4C"/>
-            </a:solidFill>
-            <a:prstDash val="solid"/>
-          </a:ln>
-        </p:spPr>
-        <p:txBody>
-          <a:bodyPr/>
-          <a:lstStyle/>
-          <a:p>
-            <a:endParaRPr lang="en-US"/>
-          </a:p>
-        </p:txBody>
-      </p:sp>
-      <p:sp>
-        <p:nvSpPr>
-          <p:cNvPr id="12" name="Text 10"/>
-          <p:cNvSpPr/>
-          <p:nvPr/>
-        </p:nvSpPr>
-        <p:spPr>
-          <a:xfrm>
-            <a:off x="4892040" y="2743200"/>
-            <a:ext cx="1920240" cy="548640"/>
-          </a:xfrm>
-          <a:prstGeom prst="rect">
-            <a:avLst/>
-          </a:prstGeom>
-          <a:noFill/>
-          <a:ln/>
-        </p:spPr>
-        <p:txBody>
-          <a:bodyPr wrap="square" lIns="0" tIns="0" rIns="0" bIns="0" rtlCol="0" anchor="ctr"/>
-          <a:lstStyle/>
-          <a:p>
-            <a:pPr marL="0" indent="0" algn="ctr">
-              <a:buNone/>
-            </a:pPr>
-            <a:r>
-              <a:rPr lang="en-US" sz="1600" b="1" dirty="0">
-                <a:solidFill>
-                  <a:srgbClr val="FF6A4C"/>
-                </a:solidFill>
-                <a:latin typeface="Arial" pitchFamily="34" charset="0"/>
-                <a:ea typeface="Arial" pitchFamily="34" charset="-122"/>
-                <a:cs typeface="Arial" pitchFamily="34" charset="-120"/>
-              </a:rPr>
-              <a:t>Style</a:t>
-            </a:r>
-            <a:endParaRPr lang="en-US" sz="1600" dirty="0"/>
-          </a:p>
-        </p:txBody>
-      </p:sp>
-      <p:sp>
-        <p:nvSpPr>
-          <p:cNvPr id="13" name="Text 11"/>
-          <p:cNvSpPr/>
-          <p:nvPr/>
-        </p:nvSpPr>
-        <p:spPr>
-          <a:xfrm>
-            <a:off x="7040880" y="2743200"/>
-            <a:ext cx="4800600" cy="548640"/>
-          </a:xfrm>
-          <a:prstGeom prst="rect">
-            <a:avLst/>
-          </a:prstGeom>
-          <a:noFill/>
-          <a:ln/>
-        </p:spPr>
-        <p:txBody>
-          <a:bodyPr wrap="square" lIns="0" tIns="0" rIns="0" bIns="0" rtlCol="0" anchor="ctr"/>
-          <a:lstStyle/>
-          <a:p>
-            <a:pPr marL="0" indent="0" algn="l">
-              <a:buNone/>
-            </a:pPr>
-            <a:r>
-              <a:rPr lang="en-US" i="1" dirty="0">
-                <a:solidFill>
-                  <a:srgbClr val="75DFBC"/>
-                </a:solidFill>
-                <a:latin typeface="Arial" pitchFamily="34" charset="0"/>
-                <a:ea typeface="Arial" pitchFamily="34" charset="-122"/>
-                <a:cs typeface="Arial" pitchFamily="34" charset="-120"/>
-              </a:rPr>
-              <a:t>= one component, one file, one mental model</a:t>
-            </a:r>
-            <a:endParaRPr lang="en-US" dirty="0"/>
-          </a:p>
-        </p:txBody>
-      </p:sp>
-      <p:sp>
-        <p:nvSpPr>
-          <p:cNvPr id="14" name="Text 12"/>
-          <p:cNvSpPr/>
-          <p:nvPr/>
-        </p:nvSpPr>
-        <p:spPr>
-          <a:xfrm>
-            <a:off x="594360" y="3749040"/>
-            <a:ext cx="11002975" cy="731520"/>
-          </a:xfrm>
-          <a:prstGeom prst="rect">
-            <a:avLst/>
-          </a:prstGeom>
-          <a:noFill/>
-          <a:ln/>
-        </p:spPr>
-        <p:txBody>
-          <a:bodyPr wrap="square" lIns="0" tIns="0" rIns="0" bIns="0" rtlCol="0" anchor="ctr"/>
-          <a:lstStyle/>
-          <a:p>
-            <a:pPr marL="0" indent="0" algn="l">
-              <a:lnSpc>
-                <a:spcPct val="105000"/>
-              </a:lnSpc>
-              <a:buNone/>
-            </a:pPr>
-            <a:r>
-              <a:rPr lang="en-US" sz="2000" b="1" dirty="0">
-                <a:solidFill>
-                  <a:srgbClr val="FFFFFF"/>
-                </a:solidFill>
-                <a:latin typeface="Arial" pitchFamily="34" charset="0"/>
-                <a:ea typeface="Arial" pitchFamily="34" charset="-122"/>
-                <a:cs typeface="Arial" pitchFamily="34" charset="-120"/>
-              </a:rPr>
-              <a:t>Component encapsulation and utility-first both apply locality, at different layers.</a:t>
-            </a:r>
-            <a:endParaRPr lang="en-US" sz="2000" dirty="0"/>
-          </a:p>
-        </p:txBody>
-      </p:sp>
-      <p:sp>
-        <p:nvSpPr>
-          <p:cNvPr id="15" name="Shape 13"/>
-          <p:cNvSpPr/>
-          <p:nvPr/>
-        </p:nvSpPr>
-        <p:spPr>
-          <a:xfrm>
-            <a:off x="594360" y="5097780"/>
-            <a:ext cx="1234440" cy="411480"/>
-          </a:xfrm>
-          <a:prstGeom prst="roundRect">
-            <a:avLst>
-              <a:gd name="adj" fmla="val 50000"/>
-            </a:avLst>
-          </a:prstGeom>
-          <a:ln w="12700">
-            <a:solidFill>
-              <a:srgbClr val="3A3A3A"/>
-            </a:solidFill>
-            <a:prstDash val="solid"/>
-          </a:ln>
-        </p:spPr>
-        <p:txBody>
-          <a:bodyPr/>
-          <a:lstStyle/>
-          <a:p>
-            <a:endParaRPr lang="en-US" sz="2400"/>
-          </a:p>
-        </p:txBody>
-      </p:sp>
-      <p:sp>
-        <p:nvSpPr>
-          <p:cNvPr id="16" name="Text 14"/>
-          <p:cNvSpPr/>
-          <p:nvPr/>
-        </p:nvSpPr>
-        <p:spPr>
-          <a:xfrm>
-            <a:off x="594360" y="5097780"/>
-            <a:ext cx="1234440" cy="411480"/>
-          </a:xfrm>
-          <a:prstGeom prst="rect">
-            <a:avLst/>
-          </a:prstGeom>
-          <a:noFill/>
-          <a:ln/>
-        </p:spPr>
-        <p:txBody>
-          <a:bodyPr wrap="square" lIns="0" tIns="0" rIns="0" bIns="0" rtlCol="0" anchor="ctr"/>
-          <a:lstStyle/>
-          <a:p>
-            <a:pPr marL="0" indent="0" algn="ctr">
-              <a:buNone/>
-            </a:pPr>
-            <a:r>
-              <a:rPr lang="en-US" sz="1600" b="1" dirty="0">
-                <a:solidFill>
-                  <a:srgbClr val="A6A6A6"/>
-                </a:solidFill>
-                <a:latin typeface="Arial" pitchFamily="34" charset="0"/>
-                <a:ea typeface="Arial" pitchFamily="34" charset="-122"/>
-                <a:cs typeface="Arial" pitchFamily="34" charset="-120"/>
-              </a:rPr>
-              <a:t>React</a:t>
-            </a:r>
-            <a:endParaRPr lang="en-US" sz="1600" dirty="0"/>
-          </a:p>
-        </p:txBody>
-      </p:sp>
-      <p:sp>
-        <p:nvSpPr>
-          <p:cNvPr id="17" name="Shape 15"/>
-          <p:cNvSpPr/>
-          <p:nvPr/>
-        </p:nvSpPr>
-        <p:spPr>
-          <a:xfrm>
-            <a:off x="2057400" y="5097780"/>
-            <a:ext cx="996696" cy="411480"/>
-          </a:xfrm>
-          <a:prstGeom prst="roundRect">
-            <a:avLst>
-              <a:gd name="adj" fmla="val 50000"/>
-            </a:avLst>
-          </a:prstGeom>
-          <a:ln w="12700">
-            <a:solidFill>
-              <a:srgbClr val="3A3A3A"/>
-            </a:solidFill>
-            <a:prstDash val="solid"/>
-          </a:ln>
-        </p:spPr>
-        <p:txBody>
-          <a:bodyPr/>
-          <a:lstStyle/>
-          <a:p>
-            <a:endParaRPr lang="en-US" sz="2400"/>
-          </a:p>
-        </p:txBody>
-      </p:sp>
-      <p:sp>
-        <p:nvSpPr>
-          <p:cNvPr id="18" name="Text 16"/>
-          <p:cNvSpPr/>
-          <p:nvPr/>
-        </p:nvSpPr>
-        <p:spPr>
-          <a:xfrm>
-            <a:off x="2057400" y="5097780"/>
-            <a:ext cx="996696" cy="411480"/>
-          </a:xfrm>
-          <a:prstGeom prst="rect">
-            <a:avLst/>
-          </a:prstGeom>
-          <a:noFill/>
-          <a:ln/>
-        </p:spPr>
-        <p:txBody>
-          <a:bodyPr wrap="square" lIns="0" tIns="0" rIns="0" bIns="0" rtlCol="0" anchor="ctr"/>
-          <a:lstStyle/>
-          <a:p>
-            <a:pPr marL="0" indent="0" algn="ctr">
-              <a:buNone/>
-            </a:pPr>
-            <a:r>
-              <a:rPr lang="en-US" sz="1600" b="1" dirty="0">
-                <a:solidFill>
-                  <a:srgbClr val="A6A6A6"/>
-                </a:solidFill>
-                <a:latin typeface="Arial" pitchFamily="34" charset="0"/>
-                <a:ea typeface="Arial" pitchFamily="34" charset="-122"/>
-                <a:cs typeface="Arial" pitchFamily="34" charset="-120"/>
-              </a:rPr>
-              <a:t>Vue</a:t>
-            </a:r>
-            <a:endParaRPr lang="en-US" sz="1600" dirty="0"/>
-          </a:p>
-        </p:txBody>
-      </p:sp>
-      <p:sp>
-        <p:nvSpPr>
-          <p:cNvPr id="19" name="Shape 17"/>
-          <p:cNvSpPr/>
-          <p:nvPr/>
-        </p:nvSpPr>
-        <p:spPr>
-          <a:xfrm>
-            <a:off x="3282696" y="5097780"/>
-            <a:ext cx="1353312" cy="411480"/>
-          </a:xfrm>
-          <a:prstGeom prst="roundRect">
-            <a:avLst>
-              <a:gd name="adj" fmla="val 50000"/>
-            </a:avLst>
-          </a:prstGeom>
-          <a:ln w="12700">
-            <a:solidFill>
-              <a:srgbClr val="3A3A3A"/>
-            </a:solidFill>
-            <a:prstDash val="solid"/>
-          </a:ln>
-        </p:spPr>
-        <p:txBody>
-          <a:bodyPr/>
-          <a:lstStyle/>
-          <a:p>
-            <a:endParaRPr lang="en-US" sz="2400"/>
-          </a:p>
-        </p:txBody>
-      </p:sp>
-      <p:sp>
-        <p:nvSpPr>
-          <p:cNvPr id="20" name="Text 18"/>
-          <p:cNvSpPr/>
-          <p:nvPr/>
-        </p:nvSpPr>
-        <p:spPr>
-          <a:xfrm>
-            <a:off x="3282696" y="5097780"/>
-            <a:ext cx="1353312" cy="411480"/>
-          </a:xfrm>
-          <a:prstGeom prst="rect">
-            <a:avLst/>
-          </a:prstGeom>
-          <a:noFill/>
-          <a:ln/>
-        </p:spPr>
-        <p:txBody>
-          <a:bodyPr wrap="square" lIns="0" tIns="0" rIns="0" bIns="0" rtlCol="0" anchor="ctr"/>
-          <a:lstStyle/>
-          <a:p>
-            <a:pPr marL="0" indent="0" algn="ctr">
-              <a:buNone/>
-            </a:pPr>
-            <a:r>
-              <a:rPr lang="en-US" sz="1600" b="1" dirty="0">
-                <a:solidFill>
-                  <a:srgbClr val="A6A6A6"/>
-                </a:solidFill>
-                <a:latin typeface="Arial" pitchFamily="34" charset="0"/>
-                <a:ea typeface="Arial" pitchFamily="34" charset="-122"/>
-                <a:cs typeface="Arial" pitchFamily="34" charset="-120"/>
-              </a:rPr>
-              <a:t>Svelte</a:t>
-            </a:r>
-            <a:endParaRPr lang="en-US" sz="1600" dirty="0"/>
-          </a:p>
-        </p:txBody>
-      </p:sp>
-      <p:sp>
-        <p:nvSpPr>
-          <p:cNvPr id="21" name="Shape 19"/>
-          <p:cNvSpPr/>
-          <p:nvPr/>
-        </p:nvSpPr>
-        <p:spPr>
-          <a:xfrm>
-            <a:off x="4864608" y="5097780"/>
-            <a:ext cx="1234440" cy="411480"/>
-          </a:xfrm>
-          <a:prstGeom prst="roundRect">
-            <a:avLst>
-              <a:gd name="adj" fmla="val 50000"/>
-            </a:avLst>
-          </a:prstGeom>
-          <a:ln w="12700">
-            <a:solidFill>
-              <a:srgbClr val="3A3A3A"/>
-            </a:solidFill>
-            <a:prstDash val="solid"/>
-          </a:ln>
-        </p:spPr>
-        <p:txBody>
-          <a:bodyPr/>
-          <a:lstStyle/>
-          <a:p>
-            <a:endParaRPr lang="en-US" sz="2400"/>
-          </a:p>
-        </p:txBody>
-      </p:sp>
-      <p:sp>
-        <p:nvSpPr>
-          <p:cNvPr id="22" name="Text 20"/>
-          <p:cNvSpPr/>
-          <p:nvPr/>
-        </p:nvSpPr>
-        <p:spPr>
-          <a:xfrm>
-            <a:off x="4864608" y="5097780"/>
-            <a:ext cx="1234440" cy="411480"/>
-          </a:xfrm>
-          <a:prstGeom prst="rect">
-            <a:avLst/>
-          </a:prstGeom>
-          <a:noFill/>
-          <a:ln/>
-        </p:spPr>
-        <p:txBody>
-          <a:bodyPr wrap="square" lIns="0" tIns="0" rIns="0" bIns="0" rtlCol="0" anchor="ctr"/>
-          <a:lstStyle/>
-          <a:p>
-            <a:pPr marL="0" indent="0" algn="ctr">
-              <a:buNone/>
-            </a:pPr>
-            <a:r>
-              <a:rPr lang="en-US" sz="1600" b="1" dirty="0">
-                <a:solidFill>
-                  <a:srgbClr val="A6A6A6"/>
-                </a:solidFill>
-                <a:latin typeface="Arial" pitchFamily="34" charset="0"/>
-                <a:ea typeface="Arial" pitchFamily="34" charset="-122"/>
-                <a:cs typeface="Arial" pitchFamily="34" charset="-120"/>
-              </a:rPr>
-              <a:t>Solid</a:t>
-            </a:r>
-            <a:endParaRPr lang="en-US" sz="1600" dirty="0"/>
-          </a:p>
-        </p:txBody>
-      </p:sp>
-      <p:sp>
-        <p:nvSpPr>
-          <p:cNvPr id="23" name="Shape 21"/>
-          <p:cNvSpPr/>
-          <p:nvPr/>
-        </p:nvSpPr>
-        <p:spPr>
-          <a:xfrm>
-            <a:off x="6327648" y="5097780"/>
-            <a:ext cx="1472184" cy="411480"/>
-          </a:xfrm>
-          <a:prstGeom prst="roundRect">
-            <a:avLst>
-              <a:gd name="adj" fmla="val 50000"/>
-            </a:avLst>
-          </a:prstGeom>
-          <a:ln w="12700">
-            <a:solidFill>
-              <a:srgbClr val="3A3A3A"/>
-            </a:solidFill>
-            <a:prstDash val="solid"/>
-          </a:ln>
-        </p:spPr>
-        <p:txBody>
-          <a:bodyPr/>
-          <a:lstStyle/>
-          <a:p>
-            <a:endParaRPr lang="en-US" sz="2400"/>
-          </a:p>
-        </p:txBody>
-      </p:sp>
-      <p:sp>
-        <p:nvSpPr>
-          <p:cNvPr id="24" name="Text 22"/>
-          <p:cNvSpPr/>
-          <p:nvPr/>
-        </p:nvSpPr>
-        <p:spPr>
-          <a:xfrm>
-            <a:off x="6327648" y="5097780"/>
-            <a:ext cx="1472184" cy="411480"/>
-          </a:xfrm>
-          <a:prstGeom prst="rect">
-            <a:avLst/>
-          </a:prstGeom>
-          <a:noFill/>
-          <a:ln/>
-        </p:spPr>
-        <p:txBody>
-          <a:bodyPr wrap="square" lIns="0" tIns="0" rIns="0" bIns="0" rtlCol="0" anchor="ctr"/>
-          <a:lstStyle/>
-          <a:p>
-            <a:pPr marL="0" indent="0" algn="ctr">
-              <a:buNone/>
-            </a:pPr>
-            <a:r>
-              <a:rPr lang="en-US" sz="1600" b="1" dirty="0">
-                <a:solidFill>
-                  <a:srgbClr val="A6A6A6"/>
-                </a:solidFill>
-                <a:latin typeface="Arial" pitchFamily="34" charset="0"/>
-                <a:ea typeface="Arial" pitchFamily="34" charset="-122"/>
-                <a:cs typeface="Arial" pitchFamily="34" charset="-120"/>
-              </a:rPr>
-              <a:t>Angular</a:t>
-            </a:r>
-            <a:endParaRPr lang="en-US" sz="1600" dirty="0"/>
           </a:p>
         </p:txBody>
       </p:sp>
@@ -11090,6 +11097,851 @@
 
 <file path=ppt/slides/slide20.xml><?xml version="1.0" encoding="utf-8"?>
 <p:sld xmlns:a="http://schemas.openxmlformats.org/drawingml/2006/main" xmlns:r="http://schemas.openxmlformats.org/officeDocument/2006/relationships" xmlns:p="http://schemas.openxmlformats.org/presentationml/2006/main">
+  <p:cSld name="Slide 19">
+    <p:bg>
+      <p:bgPr>
+        <a:solidFill>
+          <a:srgbClr val="222121"/>
+        </a:solidFill>
+        <a:effectLst/>
+      </p:bgPr>
+    </p:bg>
+    <p:spTree>
+      <p:nvGrpSpPr>
+        <p:cNvPr id="1" name=""/>
+        <p:cNvGrpSpPr/>
+        <p:nvPr/>
+      </p:nvGrpSpPr>
+      <p:grpSpPr>
+        <a:xfrm>
+          <a:off x="0" y="0"/>
+          <a:ext cx="0" cy="0"/>
+          <a:chOff x="0" y="0"/>
+          <a:chExt cx="0" cy="0"/>
+        </a:xfrm>
+      </p:grpSpPr>
+      <p:sp>
+        <p:nvSpPr>
+          <p:cNvPr id="3" name="Text 1"/>
+          <p:cNvSpPr/>
+          <p:nvPr/>
+        </p:nvSpPr>
+        <p:spPr>
+          <a:xfrm>
+            <a:off x="594360" y="868680"/>
+            <a:ext cx="11002975" cy="1005840"/>
+          </a:xfrm>
+          <a:prstGeom prst="rect">
+            <a:avLst/>
+          </a:prstGeom>
+          <a:noFill/>
+          <a:ln/>
+        </p:spPr>
+        <p:txBody>
+          <a:bodyPr wrap="square" lIns="0" tIns="0" rIns="0" bIns="0" rtlCol="0" anchor="t"/>
+          <a:lstStyle/>
+          <a:p>
+            <a:pPr marL="0" indent="0" algn="l">
+              <a:lnSpc>
+                <a:spcPct val="102000"/>
+              </a:lnSpc>
+              <a:buNone/>
+            </a:pPr>
+            <a:r>
+              <a:rPr lang="en-US" sz="3400" b="1" dirty="0">
+                <a:solidFill>
+                  <a:srgbClr val="FFFFFF"/>
+                </a:solidFill>
+                <a:latin typeface="Arial" pitchFamily="34" charset="0"/>
+                <a:ea typeface="Arial" pitchFamily="34" charset="-122"/>
+                <a:cs typeface="Arial" pitchFamily="34" charset="-120"/>
+              </a:rPr>
+              <a:t>Components already do this</a:t>
+            </a:r>
+            <a:endParaRPr lang="en-US" sz="3400" dirty="0"/>
+          </a:p>
+        </p:txBody>
+      </p:sp>
+      <p:sp>
+        <p:nvSpPr>
+          <p:cNvPr id="4" name="Text 2"/>
+          <p:cNvSpPr/>
+          <p:nvPr/>
+        </p:nvSpPr>
+        <p:spPr>
+          <a:xfrm>
+            <a:off x="594360" y="1783080"/>
+            <a:ext cx="11002975" cy="822960"/>
+          </a:xfrm>
+          <a:prstGeom prst="rect">
+            <a:avLst/>
+          </a:prstGeom>
+          <a:noFill/>
+          <a:ln/>
+        </p:spPr>
+        <p:txBody>
+          <a:bodyPr wrap="square" lIns="0" tIns="0" rIns="0" bIns="0" rtlCol="0" anchor="ctr"/>
+          <a:lstStyle/>
+          <a:p>
+            <a:pPr marL="0" indent="0" algn="l">
+              <a:lnSpc>
+                <a:spcPct val="105000"/>
+              </a:lnSpc>
+              <a:buNone/>
+            </a:pPr>
+            <a:r>
+              <a:rPr lang="en-US" sz="1800" dirty="0">
+                <a:solidFill>
+                  <a:srgbClr val="A6A6A6"/>
+                </a:solidFill>
+                <a:latin typeface="Arial" pitchFamily="34" charset="0"/>
+                <a:ea typeface="Arial" pitchFamily="34" charset="-122"/>
+                <a:cs typeface="Arial" pitchFamily="34" charset="-120"/>
+              </a:rPr>
+              <a:t>Modern frameworks co-locate template + logic in one unit. Tailwind adds style to the same unit.</a:t>
+            </a:r>
+            <a:endParaRPr lang="en-US" sz="1800" dirty="0"/>
+          </a:p>
+        </p:txBody>
+      </p:sp>
+      <p:sp>
+        <p:nvSpPr>
+          <p:cNvPr id="5" name="Shape 3"/>
+          <p:cNvSpPr/>
+          <p:nvPr/>
+        </p:nvSpPr>
+        <p:spPr>
+          <a:xfrm>
+            <a:off x="594360" y="2743200"/>
+            <a:ext cx="1920240" cy="548640"/>
+          </a:xfrm>
+          <a:prstGeom prst="roundRect">
+            <a:avLst>
+              <a:gd name="adj" fmla="val 50000"/>
+            </a:avLst>
+          </a:prstGeom>
+          <a:solidFill>
+            <a:srgbClr val="2C2B2B"/>
+          </a:solidFill>
+          <a:ln w="12700">
+            <a:solidFill>
+              <a:srgbClr val="75DFBC"/>
+            </a:solidFill>
+            <a:prstDash val="solid"/>
+          </a:ln>
+        </p:spPr>
+        <p:txBody>
+          <a:bodyPr/>
+          <a:lstStyle/>
+          <a:p>
+            <a:endParaRPr lang="en-US"/>
+          </a:p>
+        </p:txBody>
+      </p:sp>
+      <p:sp>
+        <p:nvSpPr>
+          <p:cNvPr id="6" name="Text 4"/>
+          <p:cNvSpPr/>
+          <p:nvPr/>
+        </p:nvSpPr>
+        <p:spPr>
+          <a:xfrm>
+            <a:off x="594360" y="2743200"/>
+            <a:ext cx="1920240" cy="548640"/>
+          </a:xfrm>
+          <a:prstGeom prst="rect">
+            <a:avLst/>
+          </a:prstGeom>
+          <a:noFill/>
+          <a:ln/>
+        </p:spPr>
+        <p:txBody>
+          <a:bodyPr wrap="square" lIns="0" tIns="0" rIns="0" bIns="0" rtlCol="0" anchor="ctr"/>
+          <a:lstStyle/>
+          <a:p>
+            <a:pPr marL="0" indent="0" algn="ctr">
+              <a:buNone/>
+            </a:pPr>
+            <a:r>
+              <a:rPr lang="en-US" sz="1600" b="1" dirty="0">
+                <a:solidFill>
+                  <a:srgbClr val="75DFBC"/>
+                </a:solidFill>
+                <a:latin typeface="Arial" pitchFamily="34" charset="0"/>
+                <a:ea typeface="Arial" pitchFamily="34" charset="-122"/>
+                <a:cs typeface="Arial" pitchFamily="34" charset="-120"/>
+              </a:rPr>
+              <a:t>Template</a:t>
+            </a:r>
+            <a:endParaRPr lang="en-US" sz="1600" dirty="0"/>
+          </a:p>
+        </p:txBody>
+      </p:sp>
+      <p:sp>
+        <p:nvSpPr>
+          <p:cNvPr id="7" name="Text 5"/>
+          <p:cNvSpPr/>
+          <p:nvPr/>
+        </p:nvSpPr>
+        <p:spPr>
+          <a:xfrm>
+            <a:off x="2514600" y="2743200"/>
+            <a:ext cx="228600" cy="548640"/>
+          </a:xfrm>
+          <a:prstGeom prst="rect">
+            <a:avLst/>
+          </a:prstGeom>
+          <a:noFill/>
+          <a:ln/>
+        </p:spPr>
+        <p:txBody>
+          <a:bodyPr wrap="square" lIns="0" tIns="0" rIns="0" bIns="0" rtlCol="0" anchor="ctr"/>
+          <a:lstStyle/>
+          <a:p>
+            <a:pPr marL="0" indent="0" algn="ctr">
+              <a:buNone/>
+            </a:pPr>
+            <a:r>
+              <a:rPr lang="en-US" sz="2200" b="1" dirty="0">
+                <a:solidFill>
+                  <a:srgbClr val="FFFFFF"/>
+                </a:solidFill>
+                <a:latin typeface="Arial" pitchFamily="34" charset="0"/>
+                <a:ea typeface="Arial" pitchFamily="34" charset="-122"/>
+                <a:cs typeface="Arial" pitchFamily="34" charset="-120"/>
+              </a:rPr>
+              <a:t>+</a:t>
+            </a:r>
+            <a:endParaRPr lang="en-US" sz="2200" dirty="0"/>
+          </a:p>
+        </p:txBody>
+      </p:sp>
+      <p:sp>
+        <p:nvSpPr>
+          <p:cNvPr id="8" name="Shape 6"/>
+          <p:cNvSpPr/>
+          <p:nvPr/>
+        </p:nvSpPr>
+        <p:spPr>
+          <a:xfrm>
+            <a:off x="2743200" y="2743200"/>
+            <a:ext cx="1920240" cy="548640"/>
+          </a:xfrm>
+          <a:prstGeom prst="roundRect">
+            <a:avLst>
+              <a:gd name="adj" fmla="val 50000"/>
+            </a:avLst>
+          </a:prstGeom>
+          <a:solidFill>
+            <a:srgbClr val="2C2B2B"/>
+          </a:solidFill>
+          <a:ln w="12700">
+            <a:solidFill>
+              <a:srgbClr val="F1CF25"/>
+            </a:solidFill>
+            <a:prstDash val="solid"/>
+          </a:ln>
+        </p:spPr>
+        <p:txBody>
+          <a:bodyPr/>
+          <a:lstStyle/>
+          <a:p>
+            <a:endParaRPr lang="en-US"/>
+          </a:p>
+        </p:txBody>
+      </p:sp>
+      <p:sp>
+        <p:nvSpPr>
+          <p:cNvPr id="9" name="Text 7"/>
+          <p:cNvSpPr/>
+          <p:nvPr/>
+        </p:nvSpPr>
+        <p:spPr>
+          <a:xfrm>
+            <a:off x="2743200" y="2743200"/>
+            <a:ext cx="1920240" cy="548640"/>
+          </a:xfrm>
+          <a:prstGeom prst="rect">
+            <a:avLst/>
+          </a:prstGeom>
+          <a:noFill/>
+          <a:ln/>
+        </p:spPr>
+        <p:txBody>
+          <a:bodyPr wrap="square" lIns="0" tIns="0" rIns="0" bIns="0" rtlCol="0" anchor="ctr"/>
+          <a:lstStyle/>
+          <a:p>
+            <a:pPr marL="0" indent="0" algn="ctr">
+              <a:buNone/>
+            </a:pPr>
+            <a:r>
+              <a:rPr lang="en-US" sz="1600" b="1" dirty="0">
+                <a:solidFill>
+                  <a:srgbClr val="F1CF25"/>
+                </a:solidFill>
+                <a:latin typeface="Arial" pitchFamily="34" charset="0"/>
+                <a:ea typeface="Arial" pitchFamily="34" charset="-122"/>
+                <a:cs typeface="Arial" pitchFamily="34" charset="-120"/>
+              </a:rPr>
+              <a:t>Logic</a:t>
+            </a:r>
+            <a:endParaRPr lang="en-US" sz="1600" dirty="0"/>
+          </a:p>
+        </p:txBody>
+      </p:sp>
+      <p:sp>
+        <p:nvSpPr>
+          <p:cNvPr id="10" name="Text 8"/>
+          <p:cNvSpPr/>
+          <p:nvPr/>
+        </p:nvSpPr>
+        <p:spPr>
+          <a:xfrm>
+            <a:off x="4663440" y="2743200"/>
+            <a:ext cx="228600" cy="548640"/>
+          </a:xfrm>
+          <a:prstGeom prst="rect">
+            <a:avLst/>
+          </a:prstGeom>
+          <a:noFill/>
+          <a:ln/>
+        </p:spPr>
+        <p:txBody>
+          <a:bodyPr wrap="square" lIns="0" tIns="0" rIns="0" bIns="0" rtlCol="0" anchor="ctr"/>
+          <a:lstStyle/>
+          <a:p>
+            <a:pPr marL="0" indent="0" algn="ctr">
+              <a:buNone/>
+            </a:pPr>
+            <a:r>
+              <a:rPr lang="en-US" sz="2200" b="1" dirty="0">
+                <a:solidFill>
+                  <a:srgbClr val="FFFFFF"/>
+                </a:solidFill>
+                <a:latin typeface="Arial" pitchFamily="34" charset="0"/>
+                <a:ea typeface="Arial" pitchFamily="34" charset="-122"/>
+                <a:cs typeface="Arial" pitchFamily="34" charset="-120"/>
+              </a:rPr>
+              <a:t>+</a:t>
+            </a:r>
+            <a:endParaRPr lang="en-US" sz="2200" dirty="0"/>
+          </a:p>
+        </p:txBody>
+      </p:sp>
+      <p:sp>
+        <p:nvSpPr>
+          <p:cNvPr id="11" name="Shape 9"/>
+          <p:cNvSpPr/>
+          <p:nvPr/>
+        </p:nvSpPr>
+        <p:spPr>
+          <a:xfrm>
+            <a:off x="4892040" y="2743200"/>
+            <a:ext cx="1920240" cy="548640"/>
+          </a:xfrm>
+          <a:prstGeom prst="roundRect">
+            <a:avLst>
+              <a:gd name="adj" fmla="val 50000"/>
+            </a:avLst>
+          </a:prstGeom>
+          <a:solidFill>
+            <a:srgbClr val="2C2B2B"/>
+          </a:solidFill>
+          <a:ln w="12700">
+            <a:solidFill>
+              <a:srgbClr val="FF6A4C"/>
+            </a:solidFill>
+            <a:prstDash val="solid"/>
+          </a:ln>
+        </p:spPr>
+        <p:txBody>
+          <a:bodyPr/>
+          <a:lstStyle/>
+          <a:p>
+            <a:endParaRPr lang="en-US"/>
+          </a:p>
+        </p:txBody>
+      </p:sp>
+      <p:sp>
+        <p:nvSpPr>
+          <p:cNvPr id="12" name="Text 10"/>
+          <p:cNvSpPr/>
+          <p:nvPr/>
+        </p:nvSpPr>
+        <p:spPr>
+          <a:xfrm>
+            <a:off x="4892040" y="2743200"/>
+            <a:ext cx="1920240" cy="548640"/>
+          </a:xfrm>
+          <a:prstGeom prst="rect">
+            <a:avLst/>
+          </a:prstGeom>
+          <a:noFill/>
+          <a:ln/>
+        </p:spPr>
+        <p:txBody>
+          <a:bodyPr wrap="square" lIns="0" tIns="0" rIns="0" bIns="0" rtlCol="0" anchor="ctr"/>
+          <a:lstStyle/>
+          <a:p>
+            <a:pPr marL="0" indent="0" algn="ctr">
+              <a:buNone/>
+            </a:pPr>
+            <a:r>
+              <a:rPr lang="en-US" sz="1600" b="1" dirty="0">
+                <a:solidFill>
+                  <a:srgbClr val="FF6A4C"/>
+                </a:solidFill>
+                <a:latin typeface="Arial" pitchFamily="34" charset="0"/>
+                <a:ea typeface="Arial" pitchFamily="34" charset="-122"/>
+                <a:cs typeface="Arial" pitchFamily="34" charset="-120"/>
+              </a:rPr>
+              <a:t>Style</a:t>
+            </a:r>
+            <a:endParaRPr lang="en-US" sz="1600" dirty="0"/>
+          </a:p>
+        </p:txBody>
+      </p:sp>
+      <p:sp>
+        <p:nvSpPr>
+          <p:cNvPr id="13" name="Text 11"/>
+          <p:cNvSpPr/>
+          <p:nvPr/>
+        </p:nvSpPr>
+        <p:spPr>
+          <a:xfrm>
+            <a:off x="7040880" y="2743200"/>
+            <a:ext cx="4800600" cy="548640"/>
+          </a:xfrm>
+          <a:prstGeom prst="rect">
+            <a:avLst/>
+          </a:prstGeom>
+          <a:noFill/>
+          <a:ln/>
+        </p:spPr>
+        <p:txBody>
+          <a:bodyPr wrap="square" lIns="0" tIns="0" rIns="0" bIns="0" rtlCol="0" anchor="ctr"/>
+          <a:lstStyle/>
+          <a:p>
+            <a:pPr marL="0" indent="0" algn="l">
+              <a:buNone/>
+            </a:pPr>
+            <a:r>
+              <a:rPr lang="en-US" i="1" dirty="0">
+                <a:solidFill>
+                  <a:srgbClr val="75DFBC"/>
+                </a:solidFill>
+                <a:latin typeface="Arial" pitchFamily="34" charset="0"/>
+                <a:ea typeface="Arial" pitchFamily="34" charset="-122"/>
+                <a:cs typeface="Arial" pitchFamily="34" charset="-120"/>
+              </a:rPr>
+              <a:t>= one component, one file, one mental model</a:t>
+            </a:r>
+            <a:endParaRPr lang="en-US" dirty="0"/>
+          </a:p>
+        </p:txBody>
+      </p:sp>
+      <p:sp>
+        <p:nvSpPr>
+          <p:cNvPr id="14" name="Text 12"/>
+          <p:cNvSpPr/>
+          <p:nvPr/>
+        </p:nvSpPr>
+        <p:spPr>
+          <a:xfrm>
+            <a:off x="594360" y="3749040"/>
+            <a:ext cx="11002975" cy="731520"/>
+          </a:xfrm>
+          <a:prstGeom prst="rect">
+            <a:avLst/>
+          </a:prstGeom>
+          <a:noFill/>
+          <a:ln/>
+        </p:spPr>
+        <p:txBody>
+          <a:bodyPr wrap="square" lIns="0" tIns="0" rIns="0" bIns="0" rtlCol="0" anchor="ctr"/>
+          <a:lstStyle/>
+          <a:p>
+            <a:pPr marL="0" indent="0" algn="l">
+              <a:lnSpc>
+                <a:spcPct val="105000"/>
+              </a:lnSpc>
+              <a:buNone/>
+            </a:pPr>
+            <a:r>
+              <a:rPr lang="en-US" sz="2000" b="1" dirty="0">
+                <a:solidFill>
+                  <a:srgbClr val="FFFFFF"/>
+                </a:solidFill>
+                <a:latin typeface="Arial" pitchFamily="34" charset="0"/>
+                <a:ea typeface="Arial" pitchFamily="34" charset="-122"/>
+                <a:cs typeface="Arial" pitchFamily="34" charset="-120"/>
+              </a:rPr>
+              <a:t>Component encapsulation and utility-first both apply locality, at different layers.</a:t>
+            </a:r>
+            <a:endParaRPr lang="en-US" sz="2000" dirty="0"/>
+          </a:p>
+        </p:txBody>
+      </p:sp>
+      <p:sp>
+        <p:nvSpPr>
+          <p:cNvPr id="15" name="Shape 13"/>
+          <p:cNvSpPr/>
+          <p:nvPr/>
+        </p:nvSpPr>
+        <p:spPr>
+          <a:xfrm>
+            <a:off x="594360" y="5097780"/>
+            <a:ext cx="1234440" cy="411480"/>
+          </a:xfrm>
+          <a:prstGeom prst="roundRect">
+            <a:avLst>
+              <a:gd name="adj" fmla="val 50000"/>
+            </a:avLst>
+          </a:prstGeom>
+          <a:ln w="12700">
+            <a:solidFill>
+              <a:srgbClr val="3A3A3A"/>
+            </a:solidFill>
+            <a:prstDash val="solid"/>
+          </a:ln>
+        </p:spPr>
+        <p:txBody>
+          <a:bodyPr/>
+          <a:lstStyle/>
+          <a:p>
+            <a:endParaRPr lang="en-US" sz="2400"/>
+          </a:p>
+        </p:txBody>
+      </p:sp>
+      <p:sp>
+        <p:nvSpPr>
+          <p:cNvPr id="16" name="Text 14"/>
+          <p:cNvSpPr/>
+          <p:nvPr/>
+        </p:nvSpPr>
+        <p:spPr>
+          <a:xfrm>
+            <a:off x="594360" y="5097780"/>
+            <a:ext cx="1234440" cy="411480"/>
+          </a:xfrm>
+          <a:prstGeom prst="rect">
+            <a:avLst/>
+          </a:prstGeom>
+          <a:noFill/>
+          <a:ln/>
+        </p:spPr>
+        <p:txBody>
+          <a:bodyPr wrap="square" lIns="0" tIns="0" rIns="0" bIns="0" rtlCol="0" anchor="ctr"/>
+          <a:lstStyle/>
+          <a:p>
+            <a:pPr marL="0" indent="0" algn="ctr">
+              <a:buNone/>
+            </a:pPr>
+            <a:r>
+              <a:rPr lang="en-US" sz="1600" b="1" dirty="0">
+                <a:solidFill>
+                  <a:srgbClr val="A6A6A6"/>
+                </a:solidFill>
+                <a:latin typeface="Arial" pitchFamily="34" charset="0"/>
+                <a:ea typeface="Arial" pitchFamily="34" charset="-122"/>
+                <a:cs typeface="Arial" pitchFamily="34" charset="-120"/>
+              </a:rPr>
+              <a:t>React</a:t>
+            </a:r>
+            <a:endParaRPr lang="en-US" sz="1600" dirty="0"/>
+          </a:p>
+        </p:txBody>
+      </p:sp>
+      <p:sp>
+        <p:nvSpPr>
+          <p:cNvPr id="17" name="Shape 15"/>
+          <p:cNvSpPr/>
+          <p:nvPr/>
+        </p:nvSpPr>
+        <p:spPr>
+          <a:xfrm>
+            <a:off x="2057400" y="5097780"/>
+            <a:ext cx="996696" cy="411480"/>
+          </a:xfrm>
+          <a:prstGeom prst="roundRect">
+            <a:avLst>
+              <a:gd name="adj" fmla="val 50000"/>
+            </a:avLst>
+          </a:prstGeom>
+          <a:ln w="12700">
+            <a:solidFill>
+              <a:srgbClr val="3A3A3A"/>
+            </a:solidFill>
+            <a:prstDash val="solid"/>
+          </a:ln>
+        </p:spPr>
+        <p:txBody>
+          <a:bodyPr/>
+          <a:lstStyle/>
+          <a:p>
+            <a:endParaRPr lang="en-US" sz="2400"/>
+          </a:p>
+        </p:txBody>
+      </p:sp>
+      <p:sp>
+        <p:nvSpPr>
+          <p:cNvPr id="18" name="Text 16"/>
+          <p:cNvSpPr/>
+          <p:nvPr/>
+        </p:nvSpPr>
+        <p:spPr>
+          <a:xfrm>
+            <a:off x="2057400" y="5097780"/>
+            <a:ext cx="996696" cy="411480"/>
+          </a:xfrm>
+          <a:prstGeom prst="rect">
+            <a:avLst/>
+          </a:prstGeom>
+          <a:noFill/>
+          <a:ln/>
+        </p:spPr>
+        <p:txBody>
+          <a:bodyPr wrap="square" lIns="0" tIns="0" rIns="0" bIns="0" rtlCol="0" anchor="ctr"/>
+          <a:lstStyle/>
+          <a:p>
+            <a:pPr marL="0" indent="0" algn="ctr">
+              <a:buNone/>
+            </a:pPr>
+            <a:r>
+              <a:rPr lang="en-US" sz="1600" b="1" dirty="0">
+                <a:solidFill>
+                  <a:srgbClr val="A6A6A6"/>
+                </a:solidFill>
+                <a:latin typeface="Arial" pitchFamily="34" charset="0"/>
+                <a:ea typeface="Arial" pitchFamily="34" charset="-122"/>
+                <a:cs typeface="Arial" pitchFamily="34" charset="-120"/>
+              </a:rPr>
+              <a:t>Vue</a:t>
+            </a:r>
+            <a:endParaRPr lang="en-US" sz="1600" dirty="0"/>
+          </a:p>
+        </p:txBody>
+      </p:sp>
+      <p:sp>
+        <p:nvSpPr>
+          <p:cNvPr id="19" name="Shape 17"/>
+          <p:cNvSpPr/>
+          <p:nvPr/>
+        </p:nvSpPr>
+        <p:spPr>
+          <a:xfrm>
+            <a:off x="3282696" y="5097780"/>
+            <a:ext cx="1353312" cy="411480"/>
+          </a:xfrm>
+          <a:prstGeom prst="roundRect">
+            <a:avLst>
+              <a:gd name="adj" fmla="val 50000"/>
+            </a:avLst>
+          </a:prstGeom>
+          <a:ln w="12700">
+            <a:solidFill>
+              <a:srgbClr val="3A3A3A"/>
+            </a:solidFill>
+            <a:prstDash val="solid"/>
+          </a:ln>
+        </p:spPr>
+        <p:txBody>
+          <a:bodyPr/>
+          <a:lstStyle/>
+          <a:p>
+            <a:endParaRPr lang="en-US" sz="2400"/>
+          </a:p>
+        </p:txBody>
+      </p:sp>
+      <p:sp>
+        <p:nvSpPr>
+          <p:cNvPr id="20" name="Text 18"/>
+          <p:cNvSpPr/>
+          <p:nvPr/>
+        </p:nvSpPr>
+        <p:spPr>
+          <a:xfrm>
+            <a:off x="3282696" y="5097780"/>
+            <a:ext cx="1353312" cy="411480"/>
+          </a:xfrm>
+          <a:prstGeom prst="rect">
+            <a:avLst/>
+          </a:prstGeom>
+          <a:noFill/>
+          <a:ln/>
+        </p:spPr>
+        <p:txBody>
+          <a:bodyPr wrap="square" lIns="0" tIns="0" rIns="0" bIns="0" rtlCol="0" anchor="ctr"/>
+          <a:lstStyle/>
+          <a:p>
+            <a:pPr marL="0" indent="0" algn="ctr">
+              <a:buNone/>
+            </a:pPr>
+            <a:r>
+              <a:rPr lang="en-US" sz="1600" b="1" dirty="0">
+                <a:solidFill>
+                  <a:srgbClr val="A6A6A6"/>
+                </a:solidFill>
+                <a:latin typeface="Arial" pitchFamily="34" charset="0"/>
+                <a:ea typeface="Arial" pitchFamily="34" charset="-122"/>
+                <a:cs typeface="Arial" pitchFamily="34" charset="-120"/>
+              </a:rPr>
+              <a:t>Svelte</a:t>
+            </a:r>
+            <a:endParaRPr lang="en-US" sz="1600" dirty="0"/>
+          </a:p>
+        </p:txBody>
+      </p:sp>
+      <p:sp>
+        <p:nvSpPr>
+          <p:cNvPr id="21" name="Shape 19"/>
+          <p:cNvSpPr/>
+          <p:nvPr/>
+        </p:nvSpPr>
+        <p:spPr>
+          <a:xfrm>
+            <a:off x="4864608" y="5097780"/>
+            <a:ext cx="1234440" cy="411480"/>
+          </a:xfrm>
+          <a:prstGeom prst="roundRect">
+            <a:avLst>
+              <a:gd name="adj" fmla="val 50000"/>
+            </a:avLst>
+          </a:prstGeom>
+          <a:ln w="12700">
+            <a:solidFill>
+              <a:srgbClr val="3A3A3A"/>
+            </a:solidFill>
+            <a:prstDash val="solid"/>
+          </a:ln>
+        </p:spPr>
+        <p:txBody>
+          <a:bodyPr/>
+          <a:lstStyle/>
+          <a:p>
+            <a:endParaRPr lang="en-US" sz="2400"/>
+          </a:p>
+        </p:txBody>
+      </p:sp>
+      <p:sp>
+        <p:nvSpPr>
+          <p:cNvPr id="22" name="Text 20"/>
+          <p:cNvSpPr/>
+          <p:nvPr/>
+        </p:nvSpPr>
+        <p:spPr>
+          <a:xfrm>
+            <a:off x="4864608" y="5097780"/>
+            <a:ext cx="1234440" cy="411480"/>
+          </a:xfrm>
+          <a:prstGeom prst="rect">
+            <a:avLst/>
+          </a:prstGeom>
+          <a:noFill/>
+          <a:ln/>
+        </p:spPr>
+        <p:txBody>
+          <a:bodyPr wrap="square" lIns="0" tIns="0" rIns="0" bIns="0" rtlCol="0" anchor="ctr"/>
+          <a:lstStyle/>
+          <a:p>
+            <a:pPr marL="0" indent="0" algn="ctr">
+              <a:buNone/>
+            </a:pPr>
+            <a:r>
+              <a:rPr lang="en-US" sz="1600" b="1" dirty="0">
+                <a:solidFill>
+                  <a:srgbClr val="A6A6A6"/>
+                </a:solidFill>
+                <a:latin typeface="Arial" pitchFamily="34" charset="0"/>
+                <a:ea typeface="Arial" pitchFamily="34" charset="-122"/>
+                <a:cs typeface="Arial" pitchFamily="34" charset="-120"/>
+              </a:rPr>
+              <a:t>Solid</a:t>
+            </a:r>
+            <a:endParaRPr lang="en-US" sz="1600" dirty="0"/>
+          </a:p>
+        </p:txBody>
+      </p:sp>
+      <p:sp>
+        <p:nvSpPr>
+          <p:cNvPr id="23" name="Shape 21"/>
+          <p:cNvSpPr/>
+          <p:nvPr/>
+        </p:nvSpPr>
+        <p:spPr>
+          <a:xfrm>
+            <a:off x="6327648" y="5097780"/>
+            <a:ext cx="1472184" cy="411480"/>
+          </a:xfrm>
+          <a:prstGeom prst="roundRect">
+            <a:avLst>
+              <a:gd name="adj" fmla="val 50000"/>
+            </a:avLst>
+          </a:prstGeom>
+          <a:ln w="12700">
+            <a:solidFill>
+              <a:srgbClr val="3A3A3A"/>
+            </a:solidFill>
+            <a:prstDash val="solid"/>
+          </a:ln>
+        </p:spPr>
+        <p:txBody>
+          <a:bodyPr/>
+          <a:lstStyle/>
+          <a:p>
+            <a:endParaRPr lang="en-US" sz="2400"/>
+          </a:p>
+        </p:txBody>
+      </p:sp>
+      <p:sp>
+        <p:nvSpPr>
+          <p:cNvPr id="24" name="Text 22"/>
+          <p:cNvSpPr/>
+          <p:nvPr/>
+        </p:nvSpPr>
+        <p:spPr>
+          <a:xfrm>
+            <a:off x="6327648" y="5097780"/>
+            <a:ext cx="1472184" cy="411480"/>
+          </a:xfrm>
+          <a:prstGeom prst="rect">
+            <a:avLst/>
+          </a:prstGeom>
+          <a:noFill/>
+          <a:ln/>
+        </p:spPr>
+        <p:txBody>
+          <a:bodyPr wrap="square" lIns="0" tIns="0" rIns="0" bIns="0" rtlCol="0" anchor="ctr"/>
+          <a:lstStyle/>
+          <a:p>
+            <a:pPr marL="0" indent="0" algn="ctr">
+              <a:buNone/>
+            </a:pPr>
+            <a:r>
+              <a:rPr lang="en-US" sz="1600" b="1" dirty="0">
+                <a:solidFill>
+                  <a:srgbClr val="A6A6A6"/>
+                </a:solidFill>
+                <a:latin typeface="Arial" pitchFamily="34" charset="0"/>
+                <a:ea typeface="Arial" pitchFamily="34" charset="-122"/>
+                <a:cs typeface="Arial" pitchFamily="34" charset="-120"/>
+              </a:rPr>
+              <a:t>Angular</a:t>
+            </a:r>
+            <a:endParaRPr lang="en-US" sz="1600" dirty="0"/>
+          </a:p>
+        </p:txBody>
+      </p:sp>
+    </p:spTree>
+  </p:cSld>
+  <p:clrMapOvr>
+    <a:masterClrMapping/>
+  </p:clrMapOvr>
+</p:sld>
+</file>
+
+<file path=ppt/slides/slide21.xml><?xml version="1.0" encoding="utf-8"?>
+<p:sld xmlns:a="http://schemas.openxmlformats.org/drawingml/2006/main" xmlns:r="http://schemas.openxmlformats.org/officeDocument/2006/relationships" xmlns:p="http://schemas.openxmlformats.org/presentationml/2006/main">
   <p:cSld name="Slide 20">
     <p:bg>
       <p:bgPr>
@@ -11666,7 +12518,7 @@
 </p:sld>
 </file>
 
-<file path=ppt/slides/slide21.xml><?xml version="1.0" encoding="utf-8"?>
+<file path=ppt/slides/slide22.xml><?xml version="1.0" encoding="utf-8"?>
 <p:sld xmlns:a="http://schemas.openxmlformats.org/drawingml/2006/main" xmlns:r="http://schemas.openxmlformats.org/officeDocument/2006/relationships" xmlns:p="http://schemas.openxmlformats.org/presentationml/2006/main">
   <p:cSld name="Slide 21">
     <p:bg>
@@ -12271,7 +13123,7 @@
 </p:sld>
 </file>
 
-<file path=ppt/slides/slide22.xml><?xml version="1.0" encoding="utf-8"?>
+<file path=ppt/slides/slide23.xml><?xml version="1.0" encoding="utf-8"?>
 <p:sld xmlns:a="http://schemas.openxmlformats.org/drawingml/2006/main" xmlns:r="http://schemas.openxmlformats.org/officeDocument/2006/relationships" xmlns:p="http://schemas.openxmlformats.org/presentationml/2006/main">
   <p:cSld name="Slide 22">
     <p:bg>
@@ -12660,7 +13512,7 @@
 </p:sld>
 </file>
 
-<file path=ppt/slides/slide23.xml><?xml version="1.0" encoding="utf-8"?>
+<file path=ppt/slides/slide24.xml><?xml version="1.0" encoding="utf-8"?>
 <p:sld xmlns:a="http://schemas.openxmlformats.org/drawingml/2006/main" xmlns:r="http://schemas.openxmlformats.org/officeDocument/2006/relationships" xmlns:p="http://schemas.openxmlformats.org/presentationml/2006/main">
   <p:cSld name="Slide 23">
     <p:bg>
@@ -13049,7 +13901,7 @@
 </p:sld>
 </file>
 
-<file path=ppt/slides/slide24.xml><?xml version="1.0" encoding="utf-8"?>
+<file path=ppt/slides/slide25.xml><?xml version="1.0" encoding="utf-8"?>
 <p:sld xmlns:a="http://schemas.openxmlformats.org/drawingml/2006/main" xmlns:r="http://schemas.openxmlformats.org/officeDocument/2006/relationships" xmlns:p="http://schemas.openxmlformats.org/presentationml/2006/main">
   <p:cSld name="Slide 24">
     <p:bg>
@@ -13426,7 +14278,7 @@
 </p:sld>
 </file>
 
-<file path=ppt/slides/slide25.xml><?xml version="1.0" encoding="utf-8"?>
+<file path=ppt/slides/slide26.xml><?xml version="1.0" encoding="utf-8"?>
 <p:sld xmlns:a="http://schemas.openxmlformats.org/drawingml/2006/main" xmlns:r="http://schemas.openxmlformats.org/officeDocument/2006/relationships" xmlns:p="http://schemas.openxmlformats.org/presentationml/2006/main">
   <p:cSld name="Slide 25">
     <p:bg>
@@ -13855,7 +14707,7 @@
 </p:sld>
 </file>
 
-<file path=ppt/slides/slide26.xml><?xml version="1.0" encoding="utf-8"?>
+<file path=ppt/slides/slide27.xml><?xml version="1.0" encoding="utf-8"?>
 <p:sld xmlns:a="http://schemas.openxmlformats.org/drawingml/2006/main" xmlns:r="http://schemas.openxmlformats.org/officeDocument/2006/relationships" xmlns:p="http://schemas.openxmlformats.org/presentationml/2006/main">
   <p:cSld name="Slide 26">
     <p:bg>
@@ -14455,7 +15307,7 @@
 </p:sld>
 </file>
 
-<file path=ppt/slides/slide27.xml><?xml version="1.0" encoding="utf-8"?>
+<file path=ppt/slides/slide28.xml><?xml version="1.0" encoding="utf-8"?>
 <p:sld xmlns:a="http://schemas.openxmlformats.org/drawingml/2006/main" xmlns:r="http://schemas.openxmlformats.org/officeDocument/2006/relationships" xmlns:p="http://schemas.openxmlformats.org/presentationml/2006/main">
   <p:cSld name="Slide 27">
     <p:bg>
@@ -14959,7 +15811,7 @@
 </p:sld>
 </file>
 
-<file path=ppt/slides/slide28.xml><?xml version="1.0" encoding="utf-8"?>
+<file path=ppt/slides/slide29.xml><?xml version="1.0" encoding="utf-8"?>
 <p:sld xmlns:a="http://schemas.openxmlformats.org/drawingml/2006/main" xmlns:r="http://schemas.openxmlformats.org/officeDocument/2006/relationships" xmlns:p="http://schemas.openxmlformats.org/presentationml/2006/main">
   <p:cSld name="Slide 28">
     <p:bg>
@@ -15657,100 +16509,6 @@
         </p:txBody>
       </p:sp>
     </p:spTree>
-  </p:cSld>
-  <p:clrMapOvr>
-    <a:masterClrMapping/>
-  </p:clrMapOvr>
-</p:sld>
-</file>
-
-<file path=ppt/slides/slide29.xml><?xml version="1.0" encoding="utf-8"?>
-<p:sld xmlns:a="http://schemas.openxmlformats.org/drawingml/2006/main" xmlns:r="http://schemas.openxmlformats.org/officeDocument/2006/relationships" xmlns:p="http://schemas.openxmlformats.org/presentationml/2006/main">
-  <p:cSld>
-    <p:bg>
-      <p:bgPr>
-        <a:solidFill>
-          <a:srgbClr val="222121"/>
-        </a:solidFill>
-        <a:effectLst/>
-      </p:bgPr>
-    </p:bg>
-    <p:spTree>
-      <p:nvGrpSpPr>
-        <p:cNvPr id="1" name="">
-          <a:extLst>
-            <a:ext uri="{FF2B5EF4-FFF2-40B4-BE49-F238E27FC236}">
-              <a16:creationId xmlns:a16="http://schemas.microsoft.com/office/drawing/2014/main" id="{91F1A212-8E57-6816-E45C-C202E54FFB15}"/>
-            </a:ext>
-          </a:extLst>
-        </p:cNvPr>
-        <p:cNvGrpSpPr/>
-        <p:nvPr/>
-      </p:nvGrpSpPr>
-      <p:grpSpPr>
-        <a:xfrm>
-          <a:off x="0" y="0"/>
-          <a:ext cx="0" cy="0"/>
-          <a:chOff x="0" y="0"/>
-          <a:chExt cx="0" cy="0"/>
-        </a:xfrm>
-      </p:grpSpPr>
-      <p:sp>
-        <p:nvSpPr>
-          <p:cNvPr id="6" name="TextBox 5">
-            <a:extLst>
-              <a:ext uri="{FF2B5EF4-FFF2-40B4-BE49-F238E27FC236}">
-                <a16:creationId xmlns:a16="http://schemas.microsoft.com/office/drawing/2014/main" id="{FDFC6324-4D3C-F263-D3FB-B7304428462B}"/>
-              </a:ext>
-            </a:extLst>
-          </p:cNvPr>
-          <p:cNvSpPr txBox="1"/>
-          <p:nvPr/>
-        </p:nvSpPr>
-        <p:spPr>
-          <a:xfrm>
-            <a:off x="1119674" y="2736502"/>
-            <a:ext cx="10030408" cy="1384995"/>
-          </a:xfrm>
-          <a:prstGeom prst="rect">
-            <a:avLst/>
-          </a:prstGeom>
-          <a:noFill/>
-        </p:spPr>
-        <p:txBody>
-          <a:bodyPr wrap="square">
-            <a:spAutoFit/>
-          </a:bodyPr>
-          <a:lstStyle/>
-          <a:p>
-            <a:r>
-              <a:rPr lang="en-GB" sz="2800" dirty="0">
-                <a:solidFill>
-                  <a:schemeClr val="accent4">
-                    <a:lumMod val="20000"/>
-                    <a:lumOff val="80000"/>
-                  </a:schemeClr>
-                </a:solidFill>
-              </a:rPr>
-              <a:t>Knowledge atrophy </a:t>
-            </a:r>
-            <a:r>
-              <a:rPr lang="en-GB" sz="2800" dirty="0">
-                <a:solidFill>
-                  <a:schemeClr val="accent4"/>
-                </a:solidFill>
-              </a:rPr>
-              <a:t>is the gradual weakening of human thinking and problem-solving skills through overreliance on AI to do our mental work.</a:t>
-            </a:r>
-          </a:p>
-        </p:txBody>
-      </p:sp>
-    </p:spTree>
-    <p:extLst>
-      <p:ext uri="{BB962C8B-B14F-4D97-AF65-F5344CB8AC3E}">
-        <p14:creationId xmlns:p14="http://schemas.microsoft.com/office/powerpoint/2010/main" val="1771380820"/>
-      </p:ext>
-    </p:extLst>
   </p:cSld>
   <p:clrMapOvr>
     <a:masterClrMapping/>
@@ -15885,7 +16643,7 @@
         <p:spPr>
           <a:xfrm>
             <a:off x="594360" y="4892040"/>
-            <a:ext cx="11002975" cy="457200"/>
+            <a:ext cx="11002975" cy="780972"/>
           </a:xfrm>
           <a:prstGeom prst="rect">
             <a:avLst/>
@@ -15898,6 +16656,9 @@
           <a:lstStyle/>
           <a:p>
             <a:pPr marL="0" indent="0" algn="l">
+              <a:lnSpc>
+                <a:spcPct val="150000"/>
+              </a:lnSpc>
               <a:buNone/>
             </a:pPr>
             <a:r>
@@ -15909,9 +16670,27 @@
                 <a:ea typeface="Arial" pitchFamily="34" charset="-122"/>
                 <a:cs typeface="Arial" pitchFamily="34" charset="-120"/>
               </a:rPr>
-              <a:t>Devlin Duldulao</a:t>
-            </a:r>
-            <a:endParaRPr lang="en-US" sz="1600" dirty="0"/>
+              <a:t>@DevlinDuldulao</a:t>
+            </a:r>
+          </a:p>
+          <a:p>
+            <a:pPr marL="0" indent="0" algn="l">
+              <a:lnSpc>
+                <a:spcPct val="150000"/>
+              </a:lnSpc>
+              <a:buNone/>
+            </a:pPr>
+            <a:r>
+              <a:rPr lang="en-US" sz="1600" b="1" dirty="0">
+                <a:solidFill>
+                  <a:srgbClr val="FFFFFF"/>
+                </a:solidFill>
+                <a:latin typeface="Arial" pitchFamily="34" charset="0"/>
+                <a:ea typeface="Arial" pitchFamily="34" charset="-122"/>
+                <a:cs typeface="Arial" pitchFamily="34" charset="-120"/>
+              </a:rPr>
+              <a:t>Senior consultant at SoftwareOne Norway</a:t>
+            </a:r>
           </a:p>
         </p:txBody>
       </p:sp>
@@ -15924,6 +16703,160 @@
 </file>
 
 <file path=ppt/slides/slide30.xml><?xml version="1.0" encoding="utf-8"?>
+<p:sld xmlns:a="http://schemas.openxmlformats.org/drawingml/2006/main" xmlns:r="http://schemas.openxmlformats.org/officeDocument/2006/relationships" xmlns:p="http://schemas.openxmlformats.org/presentationml/2006/main">
+  <p:cSld>
+    <p:bg>
+      <p:bgPr>
+        <a:solidFill>
+          <a:srgbClr val="222121"/>
+        </a:solidFill>
+        <a:effectLst/>
+      </p:bgPr>
+    </p:bg>
+    <p:spTree>
+      <p:nvGrpSpPr>
+        <p:cNvPr id="1" name="">
+          <a:extLst>
+            <a:ext uri="{FF2B5EF4-FFF2-40B4-BE49-F238E27FC236}">
+              <a16:creationId xmlns:a16="http://schemas.microsoft.com/office/drawing/2014/main" id="{91F1A212-8E57-6816-E45C-C202E54FFB15}"/>
+            </a:ext>
+          </a:extLst>
+        </p:cNvPr>
+        <p:cNvGrpSpPr/>
+        <p:nvPr/>
+      </p:nvGrpSpPr>
+      <p:grpSpPr>
+        <a:xfrm>
+          <a:off x="0" y="0"/>
+          <a:ext cx="0" cy="0"/>
+          <a:chOff x="0" y="0"/>
+          <a:chExt cx="0" cy="0"/>
+        </a:xfrm>
+      </p:grpSpPr>
+      <p:sp>
+        <p:nvSpPr>
+          <p:cNvPr id="6" name="TextBox 5">
+            <a:extLst>
+              <a:ext uri="{FF2B5EF4-FFF2-40B4-BE49-F238E27FC236}">
+                <a16:creationId xmlns:a16="http://schemas.microsoft.com/office/drawing/2014/main" id="{FDFC6324-4D3C-F263-D3FB-B7304428462B}"/>
+              </a:ext>
+            </a:extLst>
+          </p:cNvPr>
+          <p:cNvSpPr txBox="1"/>
+          <p:nvPr/>
+        </p:nvSpPr>
+        <p:spPr>
+          <a:xfrm>
+            <a:off x="1119674" y="2736502"/>
+            <a:ext cx="10030408" cy="1384995"/>
+          </a:xfrm>
+          <a:prstGeom prst="rect">
+            <a:avLst/>
+          </a:prstGeom>
+          <a:noFill/>
+        </p:spPr>
+        <p:txBody>
+          <a:bodyPr wrap="square">
+            <a:spAutoFit/>
+          </a:bodyPr>
+          <a:lstStyle/>
+          <a:p>
+            <a:r>
+              <a:rPr lang="en-GB" sz="2800" dirty="0">
+                <a:solidFill>
+                  <a:schemeClr val="accent4">
+                    <a:lumMod val="20000"/>
+                    <a:lumOff val="80000"/>
+                  </a:schemeClr>
+                </a:solidFill>
+              </a:rPr>
+              <a:t>Knowledge atrophy </a:t>
+            </a:r>
+            <a:r>
+              <a:rPr lang="en-GB" sz="2800" dirty="0">
+                <a:solidFill>
+                  <a:schemeClr val="accent4"/>
+                </a:solidFill>
+              </a:rPr>
+              <a:t>is the gradual weakening of human thinking and problem-solving skills through overreliance on AI to do our mental work.</a:t>
+            </a:r>
+          </a:p>
+        </p:txBody>
+      </p:sp>
+    </p:spTree>
+    <p:extLst>
+      <p:ext uri="{BB962C8B-B14F-4D97-AF65-F5344CB8AC3E}">
+        <p14:creationId xmlns:p14="http://schemas.microsoft.com/office/powerpoint/2010/main" val="1771380820"/>
+      </p:ext>
+    </p:extLst>
+  </p:cSld>
+  <p:clrMapOvr>
+    <a:masterClrMapping/>
+  </p:clrMapOvr>
+</p:sld>
+</file>
+
+<file path=ppt/slides/slide31.xml><?xml version="1.0" encoding="utf-8"?>
+<p:sld xmlns:a="http://schemas.openxmlformats.org/drawingml/2006/main" xmlns:r="http://schemas.openxmlformats.org/officeDocument/2006/relationships" xmlns:p="http://schemas.openxmlformats.org/presentationml/2006/main">
+  <p:cSld>
+    <p:spTree>
+      <p:nvGrpSpPr>
+        <p:cNvPr id="1" name=""/>
+        <p:cNvGrpSpPr/>
+        <p:nvPr/>
+      </p:nvGrpSpPr>
+      <p:grpSpPr>
+        <a:xfrm>
+          <a:off x="0" y="0"/>
+          <a:ext cx="0" cy="0"/>
+          <a:chOff x="0" y="0"/>
+          <a:chExt cx="0" cy="0"/>
+        </a:xfrm>
+      </p:grpSpPr>
+      <p:pic>
+        <p:nvPicPr>
+          <p:cNvPr id="5" name="Picture 4">
+            <a:extLst>
+              <a:ext uri="{FF2B5EF4-FFF2-40B4-BE49-F238E27FC236}">
+                <a16:creationId xmlns:a16="http://schemas.microsoft.com/office/drawing/2014/main" id="{CAC10217-0EAC-9F13-AEFC-6AB11AA41BCD}"/>
+              </a:ext>
+            </a:extLst>
+          </p:cNvPr>
+          <p:cNvPicPr>
+            <a:picLocks noChangeAspect="1"/>
+          </p:cNvPicPr>
+          <p:nvPr/>
+        </p:nvPicPr>
+        <p:blipFill>
+          <a:blip r:embed="rId3"/>
+          <a:stretch>
+            <a:fillRect/>
+          </a:stretch>
+        </p:blipFill>
+        <p:spPr>
+          <a:xfrm>
+            <a:off x="1" y="137160"/>
+            <a:ext cx="12191650" cy="6720840"/>
+          </a:xfrm>
+          <a:prstGeom prst="rect">
+            <a:avLst/>
+          </a:prstGeom>
+        </p:spPr>
+      </p:pic>
+    </p:spTree>
+    <p:extLst>
+      <p:ext uri="{BB962C8B-B14F-4D97-AF65-F5344CB8AC3E}">
+        <p14:creationId xmlns:p14="http://schemas.microsoft.com/office/powerpoint/2010/main" val="3470241132"/>
+      </p:ext>
+    </p:extLst>
+  </p:cSld>
+  <p:clrMapOvr>
+    <a:masterClrMapping/>
+  </p:clrMapOvr>
+</p:sld>
+</file>
+
+<file path=ppt/slides/slide32.xml><?xml version="1.0" encoding="utf-8"?>
 <p:sld xmlns:a="http://schemas.openxmlformats.org/drawingml/2006/main" xmlns:r="http://schemas.openxmlformats.org/officeDocument/2006/relationships" xmlns:p="http://schemas.openxmlformats.org/presentationml/2006/main">
   <p:cSld>
     <p:bg>
@@ -16399,15 +17332,7 @@
 
 <file path=ppt/slides/slide4.xml><?xml version="1.0" encoding="utf-8"?>
 <p:sld xmlns:a="http://schemas.openxmlformats.org/drawingml/2006/main" xmlns:r="http://schemas.openxmlformats.org/officeDocument/2006/relationships" xmlns:p="http://schemas.openxmlformats.org/presentationml/2006/main">
-  <p:cSld name="Slide 4">
-    <p:bg>
-      <p:bgPr>
-        <a:solidFill>
-          <a:srgbClr val="222121"/>
-        </a:solidFill>
-        <a:effectLst/>
-      </p:bgPr>
-    </p:bg>
+  <p:cSld>
     <p:spTree>
       <p:nvGrpSpPr>
         <p:cNvPr id="1" name=""/>
@@ -16422,267 +17347,42 @@
           <a:chExt cx="0" cy="0"/>
         </a:xfrm>
       </p:grpSpPr>
-      <p:sp>
-        <p:nvSpPr>
-          <p:cNvPr id="2" name="Text 0"/>
-          <p:cNvSpPr/>
-          <p:nvPr/>
-        </p:nvSpPr>
-        <p:spPr>
-          <a:xfrm>
-            <a:off x="594360" y="502920"/>
-            <a:ext cx="11002975" cy="274320"/>
-          </a:xfrm>
-          <a:prstGeom prst="rect">
-            <a:avLst/>
-          </a:prstGeom>
-          <a:noFill/>
-          <a:ln/>
-        </p:spPr>
-        <p:txBody>
-          <a:bodyPr wrap="square" lIns="0" tIns="0" rIns="0" bIns="0" rtlCol="0" anchor="ctr"/>
-          <a:lstStyle/>
-          <a:p>
-            <a:pPr marL="0" indent="0" algn="l">
-              <a:buNone/>
-            </a:pPr>
-            <a:r>
-              <a:rPr lang="en-US" sz="1200" b="1" kern="0" spc="300" dirty="0">
-                <a:solidFill>
-                  <a:srgbClr val="75DFBC"/>
-                </a:solidFill>
-                <a:latin typeface="Arial" pitchFamily="34" charset="0"/>
-                <a:ea typeface="Arial" pitchFamily="34" charset="-122"/>
-                <a:cs typeface="Arial" pitchFamily="34" charset="-120"/>
-              </a:rPr>
-              <a:t>WHOAMI</a:t>
-            </a:r>
-            <a:endParaRPr lang="en-US" sz="1200" dirty="0"/>
-          </a:p>
-        </p:txBody>
-      </p:sp>
-      <p:sp>
-        <p:nvSpPr>
-          <p:cNvPr id="3" name="Text 1"/>
-          <p:cNvSpPr/>
-          <p:nvPr/>
-        </p:nvSpPr>
-        <p:spPr>
-          <a:xfrm>
-            <a:off x="594360" y="868680"/>
-            <a:ext cx="11002975" cy="1005840"/>
-          </a:xfrm>
-          <a:prstGeom prst="rect">
-            <a:avLst/>
-          </a:prstGeom>
-          <a:noFill/>
-          <a:ln/>
-        </p:spPr>
-        <p:txBody>
-          <a:bodyPr wrap="square" lIns="0" tIns="0" rIns="0" bIns="0" rtlCol="0" anchor="t"/>
-          <a:lstStyle/>
-          <a:p>
-            <a:pPr marL="0" indent="0" algn="l">
-              <a:lnSpc>
-                <a:spcPct val="102000"/>
-              </a:lnSpc>
-              <a:buNone/>
-            </a:pPr>
-            <a:r>
-              <a:rPr lang="en-US" sz="4000" b="1" dirty="0">
-                <a:solidFill>
-                  <a:srgbClr val="FFFFFF"/>
-                </a:solidFill>
-                <a:latin typeface="Arial" pitchFamily="34" charset="0"/>
-                <a:ea typeface="Arial" pitchFamily="34" charset="-122"/>
-                <a:cs typeface="Arial" pitchFamily="34" charset="-120"/>
-              </a:rPr>
-              <a:t>Devlin Duldulao</a:t>
-            </a:r>
-            <a:endParaRPr lang="en-US" sz="4000" dirty="0"/>
-          </a:p>
-        </p:txBody>
-      </p:sp>
-      <p:sp>
-        <p:nvSpPr>
-          <p:cNvPr id="4" name="Shape 2"/>
-          <p:cNvSpPr/>
-          <p:nvPr/>
-        </p:nvSpPr>
-        <p:spPr>
-          <a:xfrm>
-            <a:off x="594360" y="2276856"/>
-            <a:ext cx="118872" cy="118872"/>
-          </a:xfrm>
-          <a:prstGeom prst="rect">
-            <a:avLst/>
-          </a:prstGeom>
-          <a:solidFill>
-            <a:srgbClr val="75DFBC"/>
-          </a:solidFill>
-          <a:ln/>
-        </p:spPr>
-        <p:txBody>
-          <a:bodyPr/>
-          <a:lstStyle/>
-          <a:p>
-            <a:endParaRPr lang="en-US" sz="2000"/>
-          </a:p>
-        </p:txBody>
-      </p:sp>
-      <p:sp>
-        <p:nvSpPr>
-          <p:cNvPr id="5" name="Text 3"/>
-          <p:cNvSpPr/>
-          <p:nvPr/>
-        </p:nvSpPr>
-        <p:spPr>
-          <a:xfrm>
-            <a:off x="886968" y="2194560"/>
-            <a:ext cx="6656832" cy="457200"/>
-          </a:xfrm>
-          <a:prstGeom prst="rect">
-            <a:avLst/>
-          </a:prstGeom>
-          <a:noFill/>
-          <a:ln/>
-        </p:spPr>
-        <p:txBody>
-          <a:bodyPr wrap="square" lIns="0" tIns="0" rIns="0" bIns="0" rtlCol="0" anchor="t"/>
-          <a:lstStyle/>
-          <a:p>
-            <a:pPr>
-              <a:lnSpc>
-                <a:spcPct val="105000"/>
-              </a:lnSpc>
-            </a:pPr>
-            <a:r>
-              <a:rPr lang="en-US" dirty="0">
-                <a:solidFill>
-                  <a:srgbClr val="FFFFFF"/>
-                </a:solidFill>
-                <a:latin typeface="Arial" pitchFamily="34" charset="0"/>
-                <a:ea typeface="Arial" pitchFamily="34" charset="-122"/>
-                <a:cs typeface="Arial" pitchFamily="34" charset="-120"/>
-              </a:rPr>
-              <a:t>Full-stack developer from Oslo Norway</a:t>
-            </a:r>
-            <a:endParaRPr lang="en-US" dirty="0"/>
-          </a:p>
-        </p:txBody>
-      </p:sp>
-      <p:sp>
-        <p:nvSpPr>
-          <p:cNvPr id="6" name="Shape 4"/>
-          <p:cNvSpPr/>
-          <p:nvPr/>
-        </p:nvSpPr>
-        <p:spPr>
-          <a:xfrm>
-            <a:off x="594360" y="2962656"/>
-            <a:ext cx="118872" cy="118872"/>
-          </a:xfrm>
-          <a:prstGeom prst="rect">
-            <a:avLst/>
-          </a:prstGeom>
-          <a:solidFill>
-            <a:srgbClr val="75DFBC"/>
-          </a:solidFill>
-          <a:ln/>
-        </p:spPr>
-        <p:txBody>
-          <a:bodyPr/>
-          <a:lstStyle/>
-          <a:p>
-            <a:endParaRPr lang="en-US" sz="2000"/>
-          </a:p>
-        </p:txBody>
-      </p:sp>
-      <p:sp>
-        <p:nvSpPr>
-          <p:cNvPr id="7" name="Text 5"/>
-          <p:cNvSpPr/>
-          <p:nvPr/>
-        </p:nvSpPr>
-        <p:spPr>
-          <a:xfrm>
-            <a:off x="886968" y="2880360"/>
-            <a:ext cx="6656832" cy="457200"/>
-          </a:xfrm>
-          <a:prstGeom prst="rect">
-            <a:avLst/>
-          </a:prstGeom>
-          <a:noFill/>
-          <a:ln/>
-        </p:spPr>
-        <p:txBody>
-          <a:bodyPr wrap="square" lIns="0" tIns="0" rIns="0" bIns="0" rtlCol="0" anchor="t"/>
-          <a:lstStyle/>
-          <a:p>
-            <a:pPr marL="0" indent="0" algn="l">
-              <a:lnSpc>
-                <a:spcPct val="105000"/>
-              </a:lnSpc>
-              <a:buNone/>
-            </a:pPr>
-            <a:r>
-              <a:rPr lang="en-US" dirty="0">
-                <a:solidFill>
-                  <a:srgbClr val="FFFFFF"/>
-                </a:solidFill>
-                <a:latin typeface="Arial" pitchFamily="34" charset="0"/>
-                <a:ea typeface="Arial" pitchFamily="34" charset="-122"/>
-                <a:cs typeface="Arial" pitchFamily="34" charset="-120"/>
-              </a:rPr>
-              <a:t>Creator of </a:t>
-            </a:r>
-            <a:r>
-              <a:rPr lang="en-US" dirty="0" err="1">
-                <a:solidFill>
-                  <a:srgbClr val="FFFFFF"/>
-                </a:solidFill>
-                <a:latin typeface="Arial" pitchFamily="34" charset="0"/>
-                <a:ea typeface="Arial" pitchFamily="34" charset="-122"/>
-                <a:cs typeface="Arial" pitchFamily="34" charset="-120"/>
-              </a:rPr>
-              <a:t>DaloyJS</a:t>
-            </a:r>
-            <a:endParaRPr lang="en-US" dirty="0"/>
-          </a:p>
-        </p:txBody>
-      </p:sp>
-      <p:sp>
-        <p:nvSpPr>
-          <p:cNvPr id="11" name="Text 9"/>
-          <p:cNvSpPr/>
-          <p:nvPr/>
-        </p:nvSpPr>
-        <p:spPr>
-          <a:xfrm>
-            <a:off x="886968" y="4251960"/>
-            <a:ext cx="6656832" cy="457200"/>
-          </a:xfrm>
-          <a:prstGeom prst="rect">
-            <a:avLst/>
-          </a:prstGeom>
-          <a:noFill/>
-          <a:ln/>
-        </p:spPr>
-        <p:txBody>
-          <a:bodyPr wrap="square" lIns="0" tIns="0" rIns="0" bIns="0" rtlCol="0" anchor="t"/>
-          <a:lstStyle/>
-          <a:p>
-            <a:pPr marL="0" indent="0" algn="l">
-              <a:lnSpc>
-                <a:spcPct val="105000"/>
-              </a:lnSpc>
-              <a:buNone/>
-            </a:pPr>
-            <a:endParaRPr lang="en-US" sz="1700" dirty="0"/>
-          </a:p>
-        </p:txBody>
-      </p:sp>
+      <p:pic>
+        <p:nvPicPr>
+          <p:cNvPr id="5" name="Picture 4">
+            <a:extLst>
+              <a:ext uri="{FF2B5EF4-FFF2-40B4-BE49-F238E27FC236}">
+                <a16:creationId xmlns:a16="http://schemas.microsoft.com/office/drawing/2014/main" id="{5FB71C00-2A0F-52B9-7571-DF6FB0B264F7}"/>
+              </a:ext>
+            </a:extLst>
+          </p:cNvPr>
+          <p:cNvPicPr>
+            <a:picLocks noChangeAspect="1"/>
+          </p:cNvPicPr>
+          <p:nvPr/>
+        </p:nvPicPr>
+        <p:blipFill>
+          <a:blip r:embed="rId3"/>
+          <a:stretch>
+            <a:fillRect/>
+          </a:stretch>
+        </p:blipFill>
+        <p:spPr>
+          <a:xfrm>
+            <a:off x="3239" y="0"/>
+            <a:ext cx="12185522" cy="6858000"/>
+          </a:xfrm>
+          <a:prstGeom prst="rect">
+            <a:avLst/>
+          </a:prstGeom>
+        </p:spPr>
+      </p:pic>
     </p:spTree>
+    <p:extLst>
+      <p:ext uri="{BB962C8B-B14F-4D97-AF65-F5344CB8AC3E}">
+        <p14:creationId xmlns:p14="http://schemas.microsoft.com/office/powerpoint/2010/main" val="1299750436"/>
+      </p:ext>
+    </p:extLst>
   </p:cSld>
   <p:clrMapOvr>
     <a:masterClrMapping/>
@@ -16691,6 +17391,96 @@
 </file>
 
 <file path=ppt/slides/slide5.xml><?xml version="1.0" encoding="utf-8"?>
+<p:sld xmlns:a="http://schemas.openxmlformats.org/drawingml/2006/main" xmlns:r="http://schemas.openxmlformats.org/officeDocument/2006/relationships" xmlns:p="http://schemas.openxmlformats.org/presentationml/2006/main">
+  <p:cSld>
+    <p:spTree>
+      <p:nvGrpSpPr>
+        <p:cNvPr id="1" name=""/>
+        <p:cNvGrpSpPr/>
+        <p:nvPr/>
+      </p:nvGrpSpPr>
+      <p:grpSpPr>
+        <a:xfrm>
+          <a:off x="0" y="0"/>
+          <a:ext cx="0" cy="0"/>
+          <a:chOff x="0" y="0"/>
+          <a:chExt cx="0" cy="0"/>
+        </a:xfrm>
+      </p:grpSpPr>
+      <p:pic>
+        <p:nvPicPr>
+          <p:cNvPr id="3" name="Picture 2">
+            <a:extLst>
+              <a:ext uri="{FF2B5EF4-FFF2-40B4-BE49-F238E27FC236}">
+                <a16:creationId xmlns:a16="http://schemas.microsoft.com/office/drawing/2014/main" id="{9B9A376A-3636-76E5-D24F-AF8C7DF7CA35}"/>
+              </a:ext>
+            </a:extLst>
+          </p:cNvPr>
+          <p:cNvPicPr>
+            <a:picLocks noChangeAspect="1"/>
+          </p:cNvPicPr>
+          <p:nvPr/>
+        </p:nvPicPr>
+        <p:blipFill>
+          <a:blip r:embed="rId3"/>
+          <a:stretch>
+            <a:fillRect/>
+          </a:stretch>
+        </p:blipFill>
+        <p:spPr>
+          <a:xfrm>
+            <a:off x="49006" y="30186"/>
+            <a:ext cx="12093988" cy="6797629"/>
+          </a:xfrm>
+          <a:prstGeom prst="rect">
+            <a:avLst/>
+          </a:prstGeom>
+        </p:spPr>
+      </p:pic>
+      <p:pic>
+        <p:nvPicPr>
+          <p:cNvPr id="5" name="Picture 4">
+            <a:extLst>
+              <a:ext uri="{FF2B5EF4-FFF2-40B4-BE49-F238E27FC236}">
+                <a16:creationId xmlns:a16="http://schemas.microsoft.com/office/drawing/2014/main" id="{538E6DFA-D017-C2D3-DD79-3073AC4B07D2}"/>
+              </a:ext>
+            </a:extLst>
+          </p:cNvPr>
+          <p:cNvPicPr>
+            <a:picLocks noChangeAspect="1"/>
+          </p:cNvPicPr>
+          <p:nvPr/>
+        </p:nvPicPr>
+        <p:blipFill>
+          <a:blip r:embed="rId4"/>
+          <a:stretch>
+            <a:fillRect/>
+          </a:stretch>
+        </p:blipFill>
+        <p:spPr>
+          <a:xfrm>
+            <a:off x="7432902" y="4198348"/>
+            <a:ext cx="4372594" cy="2629466"/>
+          </a:xfrm>
+          <a:prstGeom prst="rect">
+            <a:avLst/>
+          </a:prstGeom>
+        </p:spPr>
+      </p:pic>
+    </p:spTree>
+    <p:extLst>
+      <p:ext uri="{BB962C8B-B14F-4D97-AF65-F5344CB8AC3E}">
+        <p14:creationId xmlns:p14="http://schemas.microsoft.com/office/powerpoint/2010/main" val="1070007935"/>
+      </p:ext>
+    </p:extLst>
+  </p:cSld>
+  <p:clrMapOvr>
+    <a:masterClrMapping/>
+  </p:clrMapOvr>
+</p:sld>
+</file>
+
+<file path=ppt/slides/slide6.xml><?xml version="1.0" encoding="utf-8"?>
 <p:sld xmlns:a="http://schemas.openxmlformats.org/drawingml/2006/main" xmlns:r="http://schemas.openxmlformats.org/officeDocument/2006/relationships" xmlns:p="http://schemas.openxmlformats.org/presentationml/2006/main">
   <p:cSld name="Slide 5">
     <p:bg>
@@ -17661,7 +18451,7 @@
 </p:sld>
 </file>
 
-<file path=ppt/slides/slide6.xml><?xml version="1.0" encoding="utf-8"?>
+<file path=ppt/slides/slide7.xml><?xml version="1.0" encoding="utf-8"?>
 <p:sld xmlns:a="http://schemas.openxmlformats.org/drawingml/2006/main" xmlns:r="http://schemas.openxmlformats.org/officeDocument/2006/relationships" xmlns:p="http://schemas.openxmlformats.org/presentationml/2006/main">
   <p:cSld name="Slide 6">
     <p:bg>
@@ -18408,7 +19198,7 @@
 </p:sld>
 </file>
 
-<file path=ppt/slides/slide7.xml><?xml version="1.0" encoding="utf-8"?>
+<file path=ppt/slides/slide8.xml><?xml version="1.0" encoding="utf-8"?>
 <p:sld xmlns:a="http://schemas.openxmlformats.org/drawingml/2006/main" xmlns:r="http://schemas.openxmlformats.org/officeDocument/2006/relationships" xmlns:p="http://schemas.openxmlformats.org/presentationml/2006/main">
   <p:cSld name="Slide 7">
     <p:bg>
@@ -18586,7 +19376,7 @@
 </p:sld>
 </file>
 
-<file path=ppt/slides/slide8.xml><?xml version="1.0" encoding="utf-8"?>
+<file path=ppt/slides/slide9.xml><?xml version="1.0" encoding="utf-8"?>
 <p:sld xmlns:a="http://schemas.openxmlformats.org/drawingml/2006/main" xmlns:r="http://schemas.openxmlformats.org/officeDocument/2006/relationships" xmlns:p="http://schemas.openxmlformats.org/presentationml/2006/main">
   <p:cSld name="Slide 8">
     <p:bg>
@@ -19342,604 +20132,6 @@
               <a:t> { … }</a:t>
             </a:r>
             <a:endParaRPr lang="en-US" sz="2000" dirty="0"/>
-          </a:p>
-        </p:txBody>
-      </p:sp>
-    </p:spTree>
-  </p:cSld>
-  <p:clrMapOvr>
-    <a:masterClrMapping/>
-  </p:clrMapOvr>
-</p:sld>
-</file>
-
-<file path=ppt/slides/slide9.xml><?xml version="1.0" encoding="utf-8"?>
-<p:sld xmlns:a="http://schemas.openxmlformats.org/drawingml/2006/main" xmlns:r="http://schemas.openxmlformats.org/officeDocument/2006/relationships" xmlns:p="http://schemas.openxmlformats.org/presentationml/2006/main">
-  <p:cSld name="Slide 9">
-    <p:bg>
-      <p:bgPr>
-        <a:solidFill>
-          <a:srgbClr val="222121"/>
-        </a:solidFill>
-        <a:effectLst/>
-      </p:bgPr>
-    </p:bg>
-    <p:spTree>
-      <p:nvGrpSpPr>
-        <p:cNvPr id="1" name=""/>
-        <p:cNvGrpSpPr/>
-        <p:nvPr/>
-      </p:nvGrpSpPr>
-      <p:grpSpPr>
-        <a:xfrm>
-          <a:off x="0" y="0"/>
-          <a:ext cx="0" cy="0"/>
-          <a:chOff x="0" y="0"/>
-          <a:chExt cx="0" cy="0"/>
-        </a:xfrm>
-      </p:grpSpPr>
-      <p:sp>
-        <p:nvSpPr>
-          <p:cNvPr id="2" name="Text 0"/>
-          <p:cNvSpPr/>
-          <p:nvPr/>
-        </p:nvSpPr>
-        <p:spPr>
-          <a:xfrm>
-            <a:off x="594360" y="502920"/>
-            <a:ext cx="11002975" cy="274320"/>
-          </a:xfrm>
-          <a:prstGeom prst="rect">
-            <a:avLst/>
-          </a:prstGeom>
-          <a:noFill/>
-          <a:ln/>
-        </p:spPr>
-        <p:txBody>
-          <a:bodyPr wrap="square" lIns="0" tIns="0" rIns="0" bIns="0" rtlCol="0" anchor="ctr"/>
-          <a:lstStyle/>
-          <a:p>
-            <a:pPr marL="0" indent="0" algn="l">
-              <a:buNone/>
-            </a:pPr>
-            <a:r>
-              <a:rPr lang="en-US" sz="1200" b="1" kern="0" spc="300" dirty="0">
-                <a:solidFill>
-                  <a:srgbClr val="FF6A4C"/>
-                </a:solidFill>
-                <a:latin typeface="Arial" pitchFamily="34" charset="0"/>
-                <a:ea typeface="Arial" pitchFamily="34" charset="-122"/>
-                <a:cs typeface="Arial" pitchFamily="34" charset="-120"/>
-              </a:rPr>
-              <a:t>FRICTION #2</a:t>
-            </a:r>
-            <a:endParaRPr lang="en-US" sz="1200" dirty="0"/>
-          </a:p>
-        </p:txBody>
-      </p:sp>
-      <p:sp>
-        <p:nvSpPr>
-          <p:cNvPr id="3" name="Text 1"/>
-          <p:cNvSpPr/>
-          <p:nvPr/>
-        </p:nvSpPr>
-        <p:spPr>
-          <a:xfrm>
-            <a:off x="594360" y="868680"/>
-            <a:ext cx="11002975" cy="1005840"/>
-          </a:xfrm>
-          <a:prstGeom prst="rect">
-            <a:avLst/>
-          </a:prstGeom>
-          <a:noFill/>
-          <a:ln/>
-        </p:spPr>
-        <p:txBody>
-          <a:bodyPr wrap="square" lIns="0" tIns="0" rIns="0" bIns="0" rtlCol="0" anchor="t"/>
-          <a:lstStyle/>
-          <a:p>
-            <a:pPr marL="0" indent="0" algn="l">
-              <a:lnSpc>
-                <a:spcPct val="102000"/>
-              </a:lnSpc>
-              <a:buNone/>
-            </a:pPr>
-            <a:r>
-              <a:rPr lang="en-US" sz="3400" b="1" dirty="0">
-                <a:solidFill>
-                  <a:srgbClr val="FFFFFF"/>
-                </a:solidFill>
-                <a:latin typeface="Arial" pitchFamily="34" charset="0"/>
-                <a:ea typeface="Arial" pitchFamily="34" charset="-122"/>
-                <a:cs typeface="Arial" pitchFamily="34" charset="-120"/>
-              </a:rPr>
-              <a:t>The cascade</a:t>
-            </a:r>
-            <a:endParaRPr lang="en-US" sz="3400" dirty="0"/>
-          </a:p>
-        </p:txBody>
-      </p:sp>
-      <p:sp>
-        <p:nvSpPr>
-          <p:cNvPr id="4" name="Text 2"/>
-          <p:cNvSpPr/>
-          <p:nvPr/>
-        </p:nvSpPr>
-        <p:spPr>
-          <a:xfrm>
-            <a:off x="594360" y="1783080"/>
-            <a:ext cx="11002975" cy="548640"/>
-          </a:xfrm>
-          <a:prstGeom prst="rect">
-            <a:avLst/>
-          </a:prstGeom>
-          <a:noFill/>
-          <a:ln/>
-        </p:spPr>
-        <p:txBody>
-          <a:bodyPr wrap="square" lIns="0" tIns="0" rIns="0" bIns="0" rtlCol="0" anchor="ctr"/>
-          <a:lstStyle/>
-          <a:p>
-            <a:pPr marL="0" indent="0" algn="l">
-              <a:buNone/>
-            </a:pPr>
-            <a:r>
-              <a:rPr lang="en-US" sz="2200" b="1" dirty="0">
-                <a:solidFill>
-                  <a:srgbClr val="FFFFFF"/>
-                </a:solidFill>
-                <a:latin typeface="Arial" pitchFamily="34" charset="0"/>
-                <a:ea typeface="Arial" pitchFamily="34" charset="-122"/>
-                <a:cs typeface="Arial" pitchFamily="34" charset="-120"/>
-              </a:rPr>
-              <a:t>The </a:t>
-            </a:r>
-            <a:r>
-              <a:rPr lang="en-US" sz="2200" b="1" dirty="0">
-                <a:solidFill>
-                  <a:srgbClr val="FF6A4C"/>
-                </a:solidFill>
-                <a:latin typeface="Arial" pitchFamily="34" charset="0"/>
-                <a:ea typeface="Arial" pitchFamily="34" charset="-122"/>
-                <a:cs typeface="Arial" pitchFamily="34" charset="-120"/>
-              </a:rPr>
-              <a:t>C</a:t>
-            </a:r>
-            <a:r>
-              <a:rPr lang="en-US" sz="2200" b="1" dirty="0">
-                <a:solidFill>
-                  <a:srgbClr val="FFFFFF"/>
-                </a:solidFill>
-                <a:latin typeface="Arial" pitchFamily="34" charset="0"/>
-                <a:ea typeface="Arial" pitchFamily="34" charset="-122"/>
-                <a:cs typeface="Arial" pitchFamily="34" charset="-120"/>
-              </a:rPr>
-              <a:t> in CSS is global and order-dependent.</a:t>
-            </a:r>
-            <a:endParaRPr lang="en-US" sz="2200" dirty="0"/>
-          </a:p>
-        </p:txBody>
-      </p:sp>
-      <p:sp>
-        <p:nvSpPr>
-          <p:cNvPr id="5" name="Shape 3"/>
-          <p:cNvSpPr/>
-          <p:nvPr/>
-        </p:nvSpPr>
-        <p:spPr>
-          <a:xfrm>
-            <a:off x="594360" y="2867714"/>
-            <a:ext cx="3200400" cy="1554480"/>
-          </a:xfrm>
-          <a:prstGeom prst="roundRect">
-            <a:avLst>
-              <a:gd name="adj" fmla="val 7059"/>
-            </a:avLst>
-          </a:prstGeom>
-          <a:solidFill>
-            <a:srgbClr val="2C2B2B"/>
-          </a:solidFill>
-          <a:ln w="12700">
-            <a:solidFill>
-              <a:srgbClr val="75DFBC"/>
-            </a:solidFill>
-            <a:prstDash val="solid"/>
-          </a:ln>
-        </p:spPr>
-        <p:txBody>
-          <a:bodyPr/>
-          <a:lstStyle/>
-          <a:p>
-            <a:endParaRPr lang="en-US" sz="2800"/>
-          </a:p>
-        </p:txBody>
-      </p:sp>
-      <p:sp>
-        <p:nvSpPr>
-          <p:cNvPr id="6" name="Text 4"/>
-          <p:cNvSpPr/>
-          <p:nvPr/>
-        </p:nvSpPr>
-        <p:spPr>
-          <a:xfrm>
-            <a:off x="822960" y="3050594"/>
-            <a:ext cx="2743200" cy="365760"/>
-          </a:xfrm>
-          <a:prstGeom prst="rect">
-            <a:avLst/>
-          </a:prstGeom>
-          <a:noFill/>
-          <a:ln/>
-        </p:spPr>
-        <p:txBody>
-          <a:bodyPr wrap="square" lIns="0" tIns="0" rIns="0" bIns="0" rtlCol="0" anchor="ctr"/>
-          <a:lstStyle/>
-          <a:p>
-            <a:pPr marL="0" indent="0" algn="l">
-              <a:buNone/>
-            </a:pPr>
-            <a:r>
-              <a:rPr lang="en-US" b="1" dirty="0">
-                <a:solidFill>
-                  <a:srgbClr val="75DFBC"/>
-                </a:solidFill>
-                <a:latin typeface="Courier New" pitchFamily="34" charset="0"/>
-                <a:ea typeface="Courier New" pitchFamily="34" charset="-122"/>
-                <a:cs typeface="Courier New" pitchFamily="34" charset="-120"/>
-              </a:rPr>
-              <a:t>reset.css</a:t>
-            </a:r>
-            <a:endParaRPr lang="en-US" dirty="0"/>
-          </a:p>
-        </p:txBody>
-      </p:sp>
-      <p:sp>
-        <p:nvSpPr>
-          <p:cNvPr id="7" name="Text 5"/>
-          <p:cNvSpPr/>
-          <p:nvPr/>
-        </p:nvSpPr>
-        <p:spPr>
-          <a:xfrm>
-            <a:off x="822960" y="3553514"/>
-            <a:ext cx="2743200" cy="731520"/>
-          </a:xfrm>
-          <a:prstGeom prst="rect">
-            <a:avLst/>
-          </a:prstGeom>
-          <a:noFill/>
-          <a:ln/>
-        </p:spPr>
-        <p:txBody>
-          <a:bodyPr wrap="square" lIns="0" tIns="0" rIns="0" bIns="0" rtlCol="0" anchor="t"/>
-          <a:lstStyle/>
-          <a:p>
-            <a:pPr marL="0" indent="0" algn="l">
-              <a:lnSpc>
-                <a:spcPct val="110000"/>
-              </a:lnSpc>
-              <a:buNone/>
-            </a:pPr>
-            <a:r>
-              <a:rPr lang="en-US" dirty="0">
-                <a:solidFill>
-                  <a:srgbClr val="A6A6A6"/>
-                </a:solidFill>
-                <a:latin typeface="Courier New" pitchFamily="34" charset="0"/>
-                <a:ea typeface="Courier New" pitchFamily="34" charset="-122"/>
-                <a:cs typeface="Courier New" pitchFamily="34" charset="-120"/>
-              </a:rPr>
-              <a:t>* { margin: 0 }</a:t>
-            </a:r>
-            <a:endParaRPr lang="en-US" dirty="0"/>
-          </a:p>
-        </p:txBody>
-      </p:sp>
-      <p:sp>
-        <p:nvSpPr>
-          <p:cNvPr id="8" name="Text 6"/>
-          <p:cNvSpPr/>
-          <p:nvPr/>
-        </p:nvSpPr>
-        <p:spPr>
-          <a:xfrm>
-            <a:off x="3813048" y="3370634"/>
-            <a:ext cx="420624" cy="457200"/>
-          </a:xfrm>
-          <a:prstGeom prst="rect">
-            <a:avLst/>
-          </a:prstGeom>
-          <a:noFill/>
-          <a:ln/>
-        </p:spPr>
-        <p:txBody>
-          <a:bodyPr wrap="square" lIns="0" tIns="0" rIns="0" bIns="0" rtlCol="0" anchor="ctr"/>
-          <a:lstStyle/>
-          <a:p>
-            <a:pPr marL="0" indent="0" algn="ctr">
-              <a:buNone/>
-            </a:pPr>
-            <a:r>
-              <a:rPr lang="en-US" sz="3600" b="1" dirty="0">
-                <a:solidFill>
-                  <a:srgbClr val="6E6E6E"/>
-                </a:solidFill>
-                <a:latin typeface="Arial" pitchFamily="34" charset="0"/>
-                <a:ea typeface="Arial" pitchFamily="34" charset="-122"/>
-                <a:cs typeface="Arial" pitchFamily="34" charset="-120"/>
-              </a:rPr>
-              <a:t>→</a:t>
-            </a:r>
-            <a:endParaRPr lang="en-US" sz="3600" dirty="0"/>
-          </a:p>
-        </p:txBody>
-      </p:sp>
-      <p:sp>
-        <p:nvSpPr>
-          <p:cNvPr id="9" name="Shape 7"/>
-          <p:cNvSpPr/>
-          <p:nvPr/>
-        </p:nvSpPr>
-        <p:spPr>
-          <a:xfrm>
-            <a:off x="4251960" y="2867714"/>
-            <a:ext cx="3200400" cy="1554480"/>
-          </a:xfrm>
-          <a:prstGeom prst="roundRect">
-            <a:avLst>
-              <a:gd name="adj" fmla="val 7059"/>
-            </a:avLst>
-          </a:prstGeom>
-          <a:solidFill>
-            <a:srgbClr val="2C2B2B"/>
-          </a:solidFill>
-          <a:ln w="12700">
-            <a:solidFill>
-              <a:srgbClr val="F1CF25"/>
-            </a:solidFill>
-            <a:prstDash val="solid"/>
-          </a:ln>
-        </p:spPr>
-        <p:txBody>
-          <a:bodyPr/>
-          <a:lstStyle/>
-          <a:p>
-            <a:endParaRPr lang="en-US" sz="2800"/>
-          </a:p>
-        </p:txBody>
-      </p:sp>
-      <p:sp>
-        <p:nvSpPr>
-          <p:cNvPr id="10" name="Text 8"/>
-          <p:cNvSpPr/>
-          <p:nvPr/>
-        </p:nvSpPr>
-        <p:spPr>
-          <a:xfrm>
-            <a:off x="4480560" y="3050594"/>
-            <a:ext cx="2743200" cy="365760"/>
-          </a:xfrm>
-          <a:prstGeom prst="rect">
-            <a:avLst/>
-          </a:prstGeom>
-          <a:noFill/>
-          <a:ln/>
-        </p:spPr>
-        <p:txBody>
-          <a:bodyPr wrap="square" lIns="0" tIns="0" rIns="0" bIns="0" rtlCol="0" anchor="ctr"/>
-          <a:lstStyle/>
-          <a:p>
-            <a:pPr marL="0" indent="0" algn="l">
-              <a:buNone/>
-            </a:pPr>
-            <a:r>
-              <a:rPr lang="en-US" b="1" dirty="0">
-                <a:solidFill>
-                  <a:srgbClr val="F1CF25"/>
-                </a:solidFill>
-                <a:latin typeface="Courier New" pitchFamily="34" charset="0"/>
-                <a:ea typeface="Courier New" pitchFamily="34" charset="-122"/>
-                <a:cs typeface="Courier New" pitchFamily="34" charset="-120"/>
-              </a:rPr>
-              <a:t>buttons.css</a:t>
-            </a:r>
-            <a:endParaRPr lang="en-US" dirty="0"/>
-          </a:p>
-        </p:txBody>
-      </p:sp>
-      <p:sp>
-        <p:nvSpPr>
-          <p:cNvPr id="11" name="Text 9"/>
-          <p:cNvSpPr/>
-          <p:nvPr/>
-        </p:nvSpPr>
-        <p:spPr>
-          <a:xfrm>
-            <a:off x="4480560" y="3553514"/>
-            <a:ext cx="2743200" cy="731520"/>
-          </a:xfrm>
-          <a:prstGeom prst="rect">
-            <a:avLst/>
-          </a:prstGeom>
-          <a:noFill/>
-          <a:ln/>
-        </p:spPr>
-        <p:txBody>
-          <a:bodyPr wrap="square" lIns="0" tIns="0" rIns="0" bIns="0" rtlCol="0" anchor="t"/>
-          <a:lstStyle/>
-          <a:p>
-            <a:pPr marL="0" indent="0" algn="l">
-              <a:lnSpc>
-                <a:spcPct val="110000"/>
-              </a:lnSpc>
-              <a:buNone/>
-            </a:pPr>
-            <a:r>
-              <a:rPr lang="en-US" dirty="0">
-                <a:solidFill>
-                  <a:srgbClr val="A6A6A6"/>
-                </a:solidFill>
-                <a:latin typeface="Courier New" pitchFamily="34" charset="0"/>
-                <a:ea typeface="Courier New" pitchFamily="34" charset="-122"/>
-                <a:cs typeface="Courier New" pitchFamily="34" charset="-120"/>
-              </a:rPr>
-              <a:t>button { padding: 8px }</a:t>
-            </a:r>
-            <a:endParaRPr lang="en-US" dirty="0"/>
-          </a:p>
-        </p:txBody>
-      </p:sp>
-      <p:sp>
-        <p:nvSpPr>
-          <p:cNvPr id="12" name="Text 10"/>
-          <p:cNvSpPr/>
-          <p:nvPr/>
-        </p:nvSpPr>
-        <p:spPr>
-          <a:xfrm>
-            <a:off x="7470648" y="3370634"/>
-            <a:ext cx="420624" cy="457200"/>
-          </a:xfrm>
-          <a:prstGeom prst="rect">
-            <a:avLst/>
-          </a:prstGeom>
-          <a:noFill/>
-          <a:ln/>
-        </p:spPr>
-        <p:txBody>
-          <a:bodyPr wrap="square" lIns="0" tIns="0" rIns="0" bIns="0" rtlCol="0" anchor="ctr"/>
-          <a:lstStyle/>
-          <a:p>
-            <a:pPr marL="0" indent="0" algn="ctr">
-              <a:buNone/>
-            </a:pPr>
-            <a:r>
-              <a:rPr lang="en-US" sz="3600" b="1" dirty="0">
-                <a:solidFill>
-                  <a:srgbClr val="6E6E6E"/>
-                </a:solidFill>
-                <a:latin typeface="Arial" pitchFamily="34" charset="0"/>
-                <a:ea typeface="Arial" pitchFamily="34" charset="-122"/>
-                <a:cs typeface="Arial" pitchFamily="34" charset="-120"/>
-              </a:rPr>
-              <a:t>→</a:t>
-            </a:r>
-            <a:endParaRPr lang="en-US" sz="3600" dirty="0"/>
-          </a:p>
-        </p:txBody>
-      </p:sp>
-      <p:sp>
-        <p:nvSpPr>
-          <p:cNvPr id="13" name="Shape 11"/>
-          <p:cNvSpPr/>
-          <p:nvPr/>
-        </p:nvSpPr>
-        <p:spPr>
-          <a:xfrm>
-            <a:off x="7909560" y="2867714"/>
-            <a:ext cx="3200400" cy="1554480"/>
-          </a:xfrm>
-          <a:prstGeom prst="roundRect">
-            <a:avLst>
-              <a:gd name="adj" fmla="val 7059"/>
-            </a:avLst>
-          </a:prstGeom>
-          <a:solidFill>
-            <a:srgbClr val="2C2B2B"/>
-          </a:solidFill>
-          <a:ln w="12700">
-            <a:solidFill>
-              <a:srgbClr val="FF6A4C"/>
-            </a:solidFill>
-            <a:prstDash val="solid"/>
-          </a:ln>
-        </p:spPr>
-        <p:txBody>
-          <a:bodyPr/>
-          <a:lstStyle/>
-          <a:p>
-            <a:endParaRPr lang="en-US" sz="2800"/>
-          </a:p>
-        </p:txBody>
-      </p:sp>
-      <p:sp>
-        <p:nvSpPr>
-          <p:cNvPr id="14" name="Text 12"/>
-          <p:cNvSpPr/>
-          <p:nvPr/>
-        </p:nvSpPr>
-        <p:spPr>
-          <a:xfrm>
-            <a:off x="8138160" y="3050594"/>
-            <a:ext cx="2743200" cy="365760"/>
-          </a:xfrm>
-          <a:prstGeom prst="rect">
-            <a:avLst/>
-          </a:prstGeom>
-          <a:noFill/>
-          <a:ln/>
-        </p:spPr>
-        <p:txBody>
-          <a:bodyPr wrap="square" lIns="0" tIns="0" rIns="0" bIns="0" rtlCol="0" anchor="ctr"/>
-          <a:lstStyle/>
-          <a:p>
-            <a:pPr marL="0" indent="0" algn="l">
-              <a:buNone/>
-            </a:pPr>
-            <a:r>
-              <a:rPr lang="en-US" b="1" dirty="0">
-                <a:solidFill>
-                  <a:srgbClr val="FF6A4C"/>
-                </a:solidFill>
-                <a:latin typeface="Courier New" pitchFamily="34" charset="0"/>
-                <a:ea typeface="Courier New" pitchFamily="34" charset="-122"/>
-                <a:cs typeface="Courier New" pitchFamily="34" charset="-120"/>
-              </a:rPr>
-              <a:t>card.css</a:t>
-            </a:r>
-            <a:endParaRPr lang="en-US" dirty="0"/>
-          </a:p>
-        </p:txBody>
-      </p:sp>
-      <p:sp>
-        <p:nvSpPr>
-          <p:cNvPr id="15" name="Text 13"/>
-          <p:cNvSpPr/>
-          <p:nvPr/>
-        </p:nvSpPr>
-        <p:spPr>
-          <a:xfrm>
-            <a:off x="8138160" y="3553514"/>
-            <a:ext cx="2743200" cy="731520"/>
-          </a:xfrm>
-          <a:prstGeom prst="rect">
-            <a:avLst/>
-          </a:prstGeom>
-          <a:noFill/>
-          <a:ln/>
-        </p:spPr>
-        <p:txBody>
-          <a:bodyPr wrap="square" lIns="0" tIns="0" rIns="0" bIns="0" rtlCol="0" anchor="t"/>
-          <a:lstStyle/>
-          <a:p>
-            <a:pPr marL="0" indent="0" algn="l">
-              <a:lnSpc>
-                <a:spcPct val="110000"/>
-              </a:lnSpc>
-              <a:buNone/>
-            </a:pPr>
-            <a:r>
-              <a:rPr lang="en-US" dirty="0">
-                <a:solidFill>
-                  <a:srgbClr val="A6A6A6"/>
-                </a:solidFill>
-                <a:latin typeface="Courier New" pitchFamily="34" charset="0"/>
-                <a:ea typeface="Courier New" pitchFamily="34" charset="-122"/>
-                <a:cs typeface="Courier New" pitchFamily="34" charset="-120"/>
-              </a:rPr>
-              <a:t>…relies on both 👆</a:t>
-            </a:r>
-            <a:endParaRPr lang="en-US" dirty="0"/>
           </a:p>
         </p:txBody>
       </p:sp>
